--- a/Docs/Deliverables/Slides/Sentinel_Presentation.pptx
+++ b/Docs/Deliverables/Slides/Sentinel_Presentation.pptx
@@ -127,7 +127,7 @@
           <a:lstStyle/>
           <a:p>
             <a:r>
-              <a:rPr sz="1400" b="1"/>
+              <a:rPr sz="1300" b="1"/>
               <a:t>GPU time per pass (ms)</a:t>
             </a:r>
           </a:p>
@@ -221,7 +221,7 @@
             <a:lstStyle/>
             <a:p>
               <a:pPr>
-                <a:defRPr sz="1200"/>
+                <a:defRPr sz="1100"/>
               </a:pPr>
             </a:p>
           </c:txPr>
@@ -252,7 +252,7 @@
           <a:lstStyle/>
           <a:p>
             <a:pPr>
-              <a:defRPr sz="1300"/>
+              <a:defRPr sz="1200"/>
             </a:pPr>
           </a:p>
         </c:txPr>
@@ -276,7 +276,7 @@
           <a:lstStyle/>
           <a:p>
             <a:pPr>
-              <a:defRPr sz="1100"/>
+              <a:defRPr sz="1000"/>
             </a:pPr>
           </a:p>
         </c:txPr>
@@ -4771,7 +4771,7 @@
         <p:spPr>
           <a:xfrm>
             <a:off x="1325880" y="1344168"/>
-            <a:ext cx="5394960" cy="457200"/>
+            <a:ext cx="5760720" cy="457200"/>
           </a:xfrm>
           <a:prstGeom prst="rect">
             <a:avLst/>
@@ -4793,7 +4793,7 @@
               </a:spcAft>
             </a:pPr>
             <a:r>
-              <a:rPr sz="2200" b="0" i="0">
+              <a:rPr sz="2100" b="0" i="0">
                 <a:solidFill>
                   <a:srgbClr val="1E293B"/>
                 </a:solidFill>
@@ -4899,7 +4899,7 @@
         <p:spPr>
           <a:xfrm>
             <a:off x="1325880" y="2057400"/>
-            <a:ext cx="5394960" cy="457200"/>
+            <a:ext cx="5760720" cy="457200"/>
           </a:xfrm>
           <a:prstGeom prst="rect">
             <a:avLst/>
@@ -4921,7 +4921,7 @@
               </a:spcAft>
             </a:pPr>
             <a:r>
-              <a:rPr sz="2200" b="0" i="0">
+              <a:rPr sz="2100" b="0" i="0">
                 <a:solidFill>
                   <a:srgbClr val="1E293B"/>
                 </a:solidFill>
@@ -5027,7 +5027,7 @@
         <p:spPr>
           <a:xfrm>
             <a:off x="1325880" y="2770632"/>
-            <a:ext cx="5394960" cy="457200"/>
+            <a:ext cx="5760720" cy="457200"/>
           </a:xfrm>
           <a:prstGeom prst="rect">
             <a:avLst/>
@@ -5049,13 +5049,13 @@
               </a:spcAft>
             </a:pPr>
             <a:r>
-              <a:rPr sz="2200" b="0" i="0">
+              <a:rPr sz="2100" b="0" i="0">
                 <a:solidFill>
                   <a:srgbClr val="1E293B"/>
                 </a:solidFill>
                 <a:latin typeface="Calibri"/>
               </a:rPr>
-              <a:t>The rendering pipeline</a:t>
+              <a:t>Transformations: creating and combining objects</a:t>
             </a:r>
           </a:p>
         </p:txBody>
@@ -5155,7 +5155,7 @@
         <p:spPr>
           <a:xfrm>
             <a:off x="1325880" y="3483864"/>
-            <a:ext cx="5394960" cy="457200"/>
+            <a:ext cx="5760720" cy="457200"/>
           </a:xfrm>
           <a:prstGeom prst="rect">
             <a:avLst/>
@@ -5177,13 +5177,13 @@
               </a:spcAft>
             </a:pPr>
             <a:r>
-              <a:rPr sz="2200" b="0" i="0">
+              <a:rPr sz="2100" b="0" i="0">
                 <a:solidFill>
                   <a:srgbClr val="1E293B"/>
                 </a:solidFill>
                 <a:latin typeface="Calibri"/>
               </a:rPr>
-              <a:t>World, physics and gameplay</a:t>
+              <a:t>Illumination models and light sources</a:t>
             </a:r>
           </a:p>
         </p:txBody>
@@ -5283,7 +5283,7 @@
         <p:spPr>
           <a:xfrm>
             <a:off x="1325880" y="4197096"/>
-            <a:ext cx="5394960" cy="457200"/>
+            <a:ext cx="5760720" cy="457200"/>
           </a:xfrm>
           <a:prstGeom prst="rect">
             <a:avLst/>
@@ -5305,13 +5305,13 @@
               </a:spcAft>
             </a:pPr>
             <a:r>
-              <a:rPr sz="2200" b="0" i="0">
+              <a:rPr sz="2100" b="0" i="0">
                 <a:solidFill>
                   <a:srgbClr val="1E293B"/>
                 </a:solidFill>
                 <a:latin typeface="Calibri"/>
               </a:rPr>
-              <a:t>Results and verification</a:t>
+              <a:t>The rendering pipeline: shadows, ambient, tone map</a:t>
             </a:r>
           </a:p>
         </p:txBody>
@@ -5411,7 +5411,7 @@
         <p:spPr>
           <a:xfrm>
             <a:off x="1325880" y="4910328"/>
-            <a:ext cx="5394960" cy="457200"/>
+            <a:ext cx="5760720" cy="457200"/>
           </a:xfrm>
           <a:prstGeom prst="rect">
             <a:avLst/>
@@ -5433,13 +5433,13 @@
               </a:spcAft>
             </a:pPr>
             <a:r>
-              <a:rPr sz="2200" b="0" i="0">
+              <a:rPr sz="2100" b="0" i="0">
                 <a:solidFill>
                   <a:srgbClr val="1E293B"/>
                 </a:solidFill>
                 <a:latin typeface="Calibri"/>
               </a:rPr>
-              <a:t>Challenge, limits and future work</a:t>
+              <a:t>Results, verification and a bug fixed</a:t>
             </a:r>
           </a:p>
         </p:txBody>
@@ -5539,7 +5539,7 @@
         <p:spPr>
           <a:xfrm>
             <a:off x="1325880" y="5623560"/>
-            <a:ext cx="5394960" cy="457200"/>
+            <a:ext cx="5760720" cy="457200"/>
           </a:xfrm>
           <a:prstGeom prst="rect">
             <a:avLst/>
@@ -5561,7 +5561,7 @@
               </a:spcAft>
             </a:pPr>
             <a:r>
-              <a:rPr sz="2200" b="0" i="0">
+              <a:rPr sz="2100" b="0" i="0">
                 <a:solidFill>
                   <a:srgbClr val="1E293B"/>
                 </a:solidFill>
@@ -5574,7 +5574,7 @@
       </p:sp>
       <p:pic>
         <p:nvPicPr>
-          <p:cNvPr id="29" name="Picture 28" descr="showroom.jpg"/>
+          <p:cNvPr id="29" name="Picture 28" descr="models.jpg"/>
           <p:cNvPicPr>
             <a:picLocks noChangeAspect="1"/>
           </p:cNvPicPr>
@@ -5588,8 +5588,8 @@
         </p:blipFill>
         <p:spPr>
           <a:xfrm>
-            <a:off x="7086600" y="1554480"/>
-            <a:ext cx="4572000" cy="2571750"/>
+            <a:off x="7315200" y="1737360"/>
+            <a:ext cx="4389120" cy="750770"/>
           </a:xfrm>
           <a:prstGeom prst="rect">
             <a:avLst/>
@@ -5609,8 +5609,8 @@
         </p:nvSpPr>
         <p:spPr>
           <a:xfrm>
-            <a:off x="7086600" y="4217670"/>
-            <a:ext cx="4572000" cy="365760"/>
+            <a:off x="7315200" y="2579570"/>
+            <a:ext cx="4389120" cy="365760"/>
           </a:xfrm>
           <a:prstGeom prst="rect">
             <a:avLst/>
@@ -5638,7 +5638,107 @@
                 </a:solidFill>
                 <a:latin typeface="Calibri"/>
               </a:rPr>
-              <a:t>Every material is a code-generated recipe.</a:t>
+              <a:t>Six illumination models, one sphere each</a:t>
+            </a:r>
+          </a:p>
+        </p:txBody>
+      </p:sp>
+      <p:pic>
+        <p:nvPicPr>
+          <p:cNvPr id="31" name="Picture 30" descr="tank.jpg"/>
+          <p:cNvPicPr>
+            <a:picLocks noChangeAspect="1"/>
+          </p:cNvPicPr>
+          <p:nvPr/>
+        </p:nvPicPr>
+        <p:blipFill>
+          <a:blip r:embed="rId5"/>
+          <a:stretch>
+            <a:fillRect/>
+          </a:stretch>
+        </p:blipFill>
+        <p:spPr>
+          <a:xfrm>
+            <a:off x="7315200" y="3082490"/>
+            <a:ext cx="2148840" cy="1208722"/>
+          </a:xfrm>
+          <a:prstGeom prst="rect">
+            <a:avLst/>
+          </a:prstGeom>
+          <a:ln w="9525">
+            <a:solidFill>
+              <a:srgbClr val="D5DEE8"/>
+            </a:solidFill>
+          </a:ln>
+        </p:spPr>
+      </p:pic>
+      <p:pic>
+        <p:nvPicPr>
+          <p:cNvPr id="32" name="Picture 31" descr="truck.jpg"/>
+          <p:cNvPicPr>
+            <a:picLocks noChangeAspect="1"/>
+          </p:cNvPicPr>
+          <p:nvPr/>
+        </p:nvPicPr>
+        <p:blipFill>
+          <a:blip r:embed="rId6"/>
+          <a:stretch>
+            <a:fillRect/>
+          </a:stretch>
+        </p:blipFill>
+        <p:spPr>
+          <a:xfrm>
+            <a:off x="9555480" y="3082490"/>
+            <a:ext cx="2148840" cy="1208722"/>
+          </a:xfrm>
+          <a:prstGeom prst="rect">
+            <a:avLst/>
+          </a:prstGeom>
+          <a:ln w="9525">
+            <a:solidFill>
+              <a:srgbClr val="D5DEE8"/>
+            </a:solidFill>
+          </a:ln>
+        </p:spPr>
+      </p:pic>
+      <p:sp>
+        <p:nvSpPr>
+          <p:cNvPr id="33" name="TextBox 32"/>
+          <p:cNvSpPr txBox="1"/>
+          <p:nvPr/>
+        </p:nvSpPr>
+        <p:spPr>
+          <a:xfrm>
+            <a:off x="7315200" y="4336933"/>
+            <a:ext cx="4389120" cy="365760"/>
+          </a:xfrm>
+          <a:prstGeom prst="rect">
+            <a:avLst/>
+          </a:prstGeom>
+          <a:noFill/>
+        </p:spPr>
+        <p:txBody>
+          <a:bodyPr wrap="square" lIns="36576" rIns="36576" tIns="18288" bIns="18288" anchor="t">
+            <a:spAutoFit/>
+          </a:bodyPr>
+          <a:lstStyle/>
+          <a:p>
+            <a:pPr algn="ctr">
+              <a:lnSpc>
+                <a:spcPct val="100000"/>
+              </a:lnSpc>
+              <a:spcAft>
+                <a:spcPts val="400"/>
+              </a:spcAft>
+            </a:pPr>
+            <a:r>
+              <a:rPr sz="1400" b="0" i="1">
+                <a:solidFill>
+                  <a:srgbClr val="64748B"/>
+                </a:solidFill>
+                <a:latin typeface="Calibri"/>
+              </a:rPr>
+              <a:t>Objects are transformed primitives</a:t>
             </a:r>
           </a:p>
         </p:txBody>
@@ -5889,8 +5989,8 @@
         </p:nvSpPr>
         <p:spPr>
           <a:xfrm>
-            <a:off x="548640" y="1097280"/>
-            <a:ext cx="5852160" cy="822960"/>
+            <a:off x="548640" y="1051560"/>
+            <a:ext cx="5943600" cy="822960"/>
           </a:xfrm>
           <a:prstGeom prst="rect">
             <a:avLst/>
@@ -5912,7 +6012,7 @@
               </a:spcAft>
             </a:pPr>
             <a:r>
-              <a:rPr sz="2100" b="1" i="0">
+              <a:rPr sz="2000" b="1" i="0">
                 <a:solidFill>
                   <a:srgbClr val="1E293B"/>
                 </a:solidFill>
@@ -5931,8 +6031,8 @@
         </p:nvSpPr>
         <p:spPr>
           <a:xfrm>
-            <a:off x="548640" y="2011680"/>
-            <a:ext cx="5852160" cy="1508760"/>
+            <a:off x="548640" y="1920240"/>
+            <a:ext cx="5943600" cy="1280160"/>
           </a:xfrm>
           <a:prstGeom prst="roundRect">
             <a:avLst>
@@ -5979,8 +6079,8 @@
         </p:nvSpPr>
         <p:spPr>
           <a:xfrm>
-            <a:off x="548640" y="2011680"/>
-            <a:ext cx="82296" cy="1508760"/>
+            <a:off x="548640" y="1920240"/>
+            <a:ext cx="82296" cy="1280160"/>
           </a:xfrm>
           <a:prstGeom prst="rect">
             <a:avLst/>
@@ -6023,8 +6123,8 @@
         </p:nvSpPr>
         <p:spPr>
           <a:xfrm>
-            <a:off x="731520" y="2084832"/>
-            <a:ext cx="5577840" cy="365760"/>
+            <a:off x="731520" y="1993392"/>
+            <a:ext cx="5669280" cy="365760"/>
           </a:xfrm>
           <a:prstGeom prst="rect">
             <a:avLst/>
@@ -6046,7 +6146,7 @@
               </a:spcAft>
             </a:pPr>
             <a:r>
-              <a:rPr sz="1900" b="1" i="0">
+              <a:rPr sz="1800" b="1" i="0">
                 <a:solidFill>
                   <a:srgbClr val="0F8F85"/>
                 </a:solidFill>
@@ -6065,8 +6165,8 @@
         </p:nvSpPr>
         <p:spPr>
           <a:xfrm>
-            <a:off x="731520" y="2468880"/>
-            <a:ext cx="5577840" cy="978407"/>
+            <a:off x="731520" y="2377440"/>
+            <a:ext cx="5669280" cy="749808"/>
           </a:xfrm>
           <a:prstGeom prst="rect">
             <a:avLst/>
@@ -6092,7 +6192,7 @@
               <a:buChar char="•"/>
             </a:pPr>
             <a:r>
-              <a:rPr sz="1800" b="0" i="0">
+              <a:rPr sz="1700" b="0" i="0">
                 <a:solidFill>
                   <a:srgbClr val="1E293B"/>
                 </a:solidFill>
@@ -6115,7 +6215,7 @@
               <a:buChar char="•"/>
             </a:pPr>
             <a:r>
-              <a:rPr sz="1800" b="0" i="0">
+              <a:rPr sz="1700" b="0" i="0">
                 <a:solidFill>
                   <a:srgbClr val="1E293B"/>
                 </a:solidFill>
@@ -6128,14 +6228,106 @@
       </p:sp>
       <p:sp>
         <p:nvSpPr>
-          <p:cNvPr id="13" name="TextBox 12"/>
+          <p:cNvPr id="13" name="Rounded Rectangle 12"/>
+          <p:cNvSpPr/>
+          <p:nvPr/>
+        </p:nvSpPr>
+        <p:spPr>
+          <a:xfrm>
+            <a:off x="548640" y="3337560"/>
+            <a:ext cx="5943600" cy="1828800"/>
+          </a:xfrm>
+          <a:prstGeom prst="roundRect">
+            <a:avLst>
+              <a:gd name="adj" fmla="val 6000"/>
+            </a:avLst>
+          </a:prstGeom>
+          <a:solidFill>
+            <a:srgbClr val="FFFFFF"/>
+          </a:solidFill>
+          <a:ln w="9525">
+            <a:solidFill>
+              <a:srgbClr val="D5DEE8"/>
+            </a:solidFill>
+          </a:ln>
+          <a:effectLst/>
+        </p:spPr>
+        <p:style>
+          <a:lnRef idx="1">
+            <a:schemeClr val="accent1"/>
+          </a:lnRef>
+          <a:fillRef idx="3">
+            <a:schemeClr val="accent1"/>
+          </a:fillRef>
+          <a:effectRef idx="2">
+            <a:schemeClr val="accent1"/>
+          </a:effectRef>
+          <a:fontRef idx="minor">
+            <a:schemeClr val="lt1"/>
+          </a:fontRef>
+        </p:style>
+        <p:txBody>
+          <a:bodyPr rtlCol="0" anchor="ctr"/>
+          <a:lstStyle/>
+          <a:p>
+            <a:pPr algn="ctr"/>
+          </a:p>
+        </p:txBody>
+      </p:sp>
+      <p:sp>
+        <p:nvSpPr>
+          <p:cNvPr id="14" name="Rectangle 13"/>
+          <p:cNvSpPr/>
+          <p:nvPr/>
+        </p:nvSpPr>
+        <p:spPr>
+          <a:xfrm>
+            <a:off x="548640" y="3337560"/>
+            <a:ext cx="82296" cy="1828800"/>
+          </a:xfrm>
+          <a:prstGeom prst="rect">
+            <a:avLst/>
+          </a:prstGeom>
+          <a:solidFill>
+            <a:srgbClr val="0F8F85"/>
+          </a:solidFill>
+          <a:ln>
+            <a:noFill/>
+          </a:ln>
+          <a:effectLst/>
+        </p:spPr>
+        <p:style>
+          <a:lnRef idx="1">
+            <a:schemeClr val="accent1"/>
+          </a:lnRef>
+          <a:fillRef idx="3">
+            <a:schemeClr val="accent1"/>
+          </a:fillRef>
+          <a:effectRef idx="2">
+            <a:schemeClr val="accent1"/>
+          </a:effectRef>
+          <a:fontRef idx="minor">
+            <a:schemeClr val="lt1"/>
+          </a:fontRef>
+        </p:style>
+        <p:txBody>
+          <a:bodyPr rtlCol="0" anchor="ctr"/>
+          <a:lstStyle/>
+          <a:p>
+            <a:pPr algn="ctr"/>
+          </a:p>
+        </p:txBody>
+      </p:sp>
+      <p:sp>
+        <p:nvSpPr>
+          <p:cNvPr id="15" name="TextBox 14"/>
           <p:cNvSpPr txBox="1"/>
           <p:nvPr/>
         </p:nvSpPr>
         <p:spPr>
           <a:xfrm>
-            <a:off x="548640" y="3657600"/>
-            <a:ext cx="5852160" cy="365760"/>
+            <a:off x="731520" y="3410712"/>
+            <a:ext cx="5669280" cy="365760"/>
           </a:xfrm>
           <a:prstGeom prst="rect">
             <a:avLst/>
@@ -6157,7 +6349,7 @@
               </a:spcAft>
             </a:pPr>
             <a:r>
-              <a:rPr sz="1900" b="1" i="0">
+              <a:rPr sz="1700" b="1" i="0">
                 <a:solidFill>
                   <a:srgbClr val="0F8F85"/>
                 </a:solidFill>
@@ -6170,14 +6362,14 @@
       </p:sp>
       <p:sp>
         <p:nvSpPr>
-          <p:cNvPr id="14" name="TextBox 13"/>
+          <p:cNvPr id="16" name="TextBox 15"/>
           <p:cNvSpPr txBox="1"/>
           <p:nvPr/>
         </p:nvSpPr>
         <p:spPr>
           <a:xfrm>
-            <a:off x="548640" y="4023360"/>
-            <a:ext cx="5852160" cy="2377440"/>
+            <a:off x="731520" y="3794760"/>
+            <a:ext cx="5669280" cy="1298448"/>
           </a:xfrm>
           <a:prstGeom prst="rect">
             <a:avLst/>
@@ -6195,7 +6387,7 @@
                 <a:spcPct val="100000"/>
               </a:lnSpc>
               <a:spcAft>
-                <a:spcPts val="500"/>
+                <a:spcPts val="300"/>
               </a:spcAft>
               <a:buClr>
                 <a:srgbClr val="007A3D"/>
@@ -6203,13 +6395,13 @@
               <a:buChar char="•"/>
             </a:pPr>
             <a:r>
-              <a:rPr sz="1700" b="0" i="0">
+              <a:rPr sz="1600" b="0" i="0">
                 <a:solidFill>
                   <a:srgbClr val="1E293B"/>
                 </a:solidFill>
                 <a:latin typeface="Calibri"/>
               </a:rPr>
-              <a:t>Layered engine with downward-only dependencies</a:t>
+              <a:t>Layered engine, downward dependencies</a:t>
             </a:r>
           </a:p>
           <a:p>
@@ -6218,7 +6410,7 @@
                 <a:spcPct val="100000"/>
               </a:lnSpc>
               <a:spcAft>
-                <a:spcPts val="500"/>
+                <a:spcPts val="300"/>
               </a:spcAft>
               <a:buClr>
                 <a:srgbClr val="007A3D"/>
@@ -6226,13 +6418,13 @@
               <a:buChar char="•"/>
             </a:pPr>
             <a:r>
-              <a:rPr sz="1700" b="0" i="0">
+              <a:rPr sz="1600" b="0" i="0">
                 <a:solidFill>
                   <a:srgbClr val="1E293B"/>
                 </a:solidFill>
                 <a:latin typeface="Calibri"/>
               </a:rPr>
-              <a:t>All meshes, textures and sounds from code and seeds</a:t>
+              <a:t>All content from code and seeds</a:t>
             </a:r>
           </a:p>
           <a:p>
@@ -6241,7 +6433,7 @@
                 <a:spcPct val="100000"/>
               </a:lnSpc>
               <a:spcAft>
-                <a:spcPts val="500"/>
+                <a:spcPts val="300"/>
               </a:spcAft>
               <a:buClr>
                 <a:srgbClr val="007A3D"/>
@@ -6249,13 +6441,13 @@
               <a:buChar char="•"/>
             </a:pPr>
             <a:r>
-              <a:rPr sz="1700" b="0" i="0">
+              <a:rPr sz="1600" b="0" i="0">
                 <a:solidFill>
                   <a:srgbClr val="1E293B"/>
                 </a:solidFill>
                 <a:latin typeface="Calibri"/>
               </a:rPr>
-              <a:t>Modern renderer: PBR, shadows, sky, post-processing</a:t>
+              <a:t>Modern renderer and a playable game</a:t>
             </a:r>
           </a:p>
           <a:p>
@@ -6264,7 +6456,7 @@
                 <a:spcPct val="100000"/>
               </a:lnSpc>
               <a:spcAft>
-                <a:spcPts val="500"/>
+                <a:spcPts val="300"/>
               </a:spcAft>
               <a:buClr>
                 <a:srgbClr val="007A3D"/>
@@ -6272,50 +6464,170 @@
               <a:buChar char="•"/>
             </a:pPr>
             <a:r>
-              <a:rPr sz="1700" b="0" i="0">
+              <a:rPr sz="1600" b="0" i="0">
                 <a:solidFill>
                   <a:srgbClr val="1E293B"/>
                 </a:solidFill>
                 <a:latin typeface="Calibri"/>
               </a:rPr>
-              <a:t>Playable game: vehicles, ladders, doors, mission</a:t>
-            </a:r>
-          </a:p>
-          <a:p>
-            <a:pPr algn="l" marL="256032" indent="-256032">
-              <a:lnSpc>
-                <a:spcPct val="100000"/>
-              </a:lnSpc>
-              <a:spcAft>
-                <a:spcPts val="500"/>
-              </a:spcAft>
-              <a:buClr>
-                <a:srgbClr val="007A3D"/>
-              </a:buClr>
-              <a:buChar char="•"/>
-            </a:pPr>
-            <a:r>
-              <a:rPr sz="1700" b="0" i="0">
+              <a:t>Verified by tests and a 16.7 ms budget</a:t>
+            </a:r>
+          </a:p>
+        </p:txBody>
+      </p:sp>
+      <p:sp>
+        <p:nvSpPr>
+          <p:cNvPr id="17" name="Rounded Rectangle 16"/>
+          <p:cNvSpPr/>
+          <p:nvPr/>
+        </p:nvSpPr>
+        <p:spPr>
+          <a:xfrm>
+            <a:off x="548640" y="5303520"/>
+            <a:ext cx="11155680" cy="868680"/>
+          </a:xfrm>
+          <a:prstGeom prst="roundRect">
+            <a:avLst>
+              <a:gd name="adj" fmla="val 6000"/>
+            </a:avLst>
+          </a:prstGeom>
+          <a:solidFill>
+            <a:srgbClr val="FFFFFF"/>
+          </a:solidFill>
+          <a:ln w="9525">
+            <a:solidFill>
+              <a:srgbClr val="D5DEE8"/>
+            </a:solidFill>
+          </a:ln>
+          <a:effectLst/>
+        </p:spPr>
+        <p:style>
+          <a:lnRef idx="1">
+            <a:schemeClr val="accent1"/>
+          </a:lnRef>
+          <a:fillRef idx="3">
+            <a:schemeClr val="accent1"/>
+          </a:fillRef>
+          <a:effectRef idx="2">
+            <a:schemeClr val="accent1"/>
+          </a:effectRef>
+          <a:fontRef idx="minor">
+            <a:schemeClr val="lt1"/>
+          </a:fontRef>
+        </p:style>
+        <p:txBody>
+          <a:bodyPr rtlCol="0" anchor="ctr"/>
+          <a:lstStyle/>
+          <a:p>
+            <a:pPr algn="ctr"/>
+          </a:p>
+        </p:txBody>
+      </p:sp>
+      <p:sp>
+        <p:nvSpPr>
+          <p:cNvPr id="18" name="Rectangle 17"/>
+          <p:cNvSpPr/>
+          <p:nvPr/>
+        </p:nvSpPr>
+        <p:spPr>
+          <a:xfrm>
+            <a:off x="548640" y="5303520"/>
+            <a:ext cx="82296" cy="868680"/>
+          </a:xfrm>
+          <a:prstGeom prst="rect">
+            <a:avLst/>
+          </a:prstGeom>
+          <a:solidFill>
+            <a:srgbClr val="F59E0B"/>
+          </a:solidFill>
+          <a:ln>
+            <a:noFill/>
+          </a:ln>
+          <a:effectLst/>
+        </p:spPr>
+        <p:style>
+          <a:lnRef idx="1">
+            <a:schemeClr val="accent1"/>
+          </a:lnRef>
+          <a:fillRef idx="3">
+            <a:schemeClr val="accent1"/>
+          </a:fillRef>
+          <a:effectRef idx="2">
+            <a:schemeClr val="accent1"/>
+          </a:effectRef>
+          <a:fontRef idx="minor">
+            <a:schemeClr val="lt1"/>
+          </a:fontRef>
+        </p:style>
+        <p:txBody>
+          <a:bodyPr rtlCol="0" anchor="ctr"/>
+          <a:lstStyle/>
+          <a:p>
+            <a:pPr algn="ctr"/>
+          </a:p>
+        </p:txBody>
+      </p:sp>
+      <p:sp>
+        <p:nvSpPr>
+          <p:cNvPr id="19" name="TextBox 18"/>
+          <p:cNvSpPr txBox="1"/>
+          <p:nvPr/>
+        </p:nvSpPr>
+        <p:spPr>
+          <a:xfrm>
+            <a:off x="777240" y="5349240"/>
+            <a:ext cx="10789920" cy="960120"/>
+          </a:xfrm>
+          <a:prstGeom prst="rect">
+            <a:avLst/>
+          </a:prstGeom>
+          <a:noFill/>
+        </p:spPr>
+        <p:txBody>
+          <a:bodyPr wrap="square" lIns="36576" rIns="36576" tIns="18288" bIns="18288" anchor="t">
+            <a:spAutoFit/>
+          </a:bodyPr>
+          <a:lstStyle/>
+          <a:p>
+            <a:pPr algn="l">
+              <a:lnSpc>
+                <a:spcPct val="100000"/>
+              </a:lnSpc>
+              <a:spcAft>
+                <a:spcPts val="400"/>
+              </a:spcAft>
+            </a:pPr>
+            <a:r>
+              <a:rPr sz="1600" b="1" i="0">
+                <a:solidFill>
+                  <a:srgbClr val="0F8F85"/>
+                </a:solidFill>
+                <a:latin typeface="Calibri"/>
+              </a:rPr>
+              <a:t>The game: </a:t>
+            </a:r>
+            <a:r>
+              <a:rPr sz="1600" b="0" i="0">
                 <a:solidFill>
                   <a:srgbClr val="1E293B"/>
                 </a:solidFill>
                 <a:latin typeface="Calibri"/>
               </a:rPr>
-              <a:t>Verified by tests and a 16.7 ms frame budget</a:t>
-            </a:r>
-          </a:p>
-        </p:txBody>
-      </p:sp>
-      <p:sp>
-        <p:nvSpPr>
-          <p:cNvPr id="15" name="Rounded Rectangle 14"/>
+              <a:t>jeep, truck, carrier, tank and a helicopter you can drive; ladders and doors; stealth enemies; a five-objective mission (hack, destroy, rescue, extract); all sounds synthesised.</a:t>
+            </a:r>
+          </a:p>
+        </p:txBody>
+      </p:sp>
+      <p:sp>
+        <p:nvSpPr>
+          <p:cNvPr id="20" name="Rounded Rectangle 19"/>
           <p:cNvSpPr/>
           <p:nvPr/>
         </p:nvSpPr>
         <p:spPr>
           <a:xfrm>
-            <a:off x="6858000" y="1234440"/>
-            <a:ext cx="4297680" cy="658368"/>
+            <a:off x="7040880" y="1097280"/>
+            <a:ext cx="4206240" cy="566928"/>
           </a:xfrm>
           <a:prstGeom prst="roundRect">
             <a:avLst>
@@ -6356,14 +6668,14 @@
       </p:sp>
       <p:sp>
         <p:nvSpPr>
-          <p:cNvPr id="16" name="TextBox 15"/>
+          <p:cNvPr id="21" name="TextBox 20"/>
           <p:cNvSpPr txBox="1"/>
           <p:nvPr/>
         </p:nvSpPr>
         <p:spPr>
           <a:xfrm>
-            <a:off x="6858000" y="1234440"/>
-            <a:ext cx="4297680" cy="658368"/>
+            <a:off x="7040880" y="1097280"/>
+            <a:ext cx="4206240" cy="566928"/>
           </a:xfrm>
           <a:prstGeom prst="rect">
             <a:avLst/>
@@ -6385,7 +6697,7 @@
               </a:spcAft>
             </a:pPr>
             <a:r>
-              <a:rPr sz="1700" b="0" i="0">
+              <a:rPr sz="1500" b="0" i="0">
                 <a:solidFill>
                   <a:srgbClr val="1E293B"/>
                 </a:solidFill>
@@ -6398,14 +6710,14 @@
       </p:sp>
       <p:sp>
         <p:nvSpPr>
-          <p:cNvPr id="17" name="Rounded Rectangle 16"/>
+          <p:cNvPr id="22" name="Rounded Rectangle 21"/>
           <p:cNvSpPr/>
           <p:nvPr/>
         </p:nvSpPr>
         <p:spPr>
           <a:xfrm>
-            <a:off x="6858000" y="2020824"/>
-            <a:ext cx="4297680" cy="658368"/>
+            <a:off x="7040880" y="1737360"/>
+            <a:ext cx="4206240" cy="566928"/>
           </a:xfrm>
           <a:prstGeom prst="roundRect">
             <a:avLst>
@@ -6446,14 +6758,14 @@
       </p:sp>
       <p:sp>
         <p:nvSpPr>
-          <p:cNvPr id="18" name="TextBox 17"/>
+          <p:cNvPr id="23" name="TextBox 22"/>
           <p:cNvSpPr txBox="1"/>
           <p:nvPr/>
         </p:nvSpPr>
         <p:spPr>
           <a:xfrm>
-            <a:off x="6858000" y="2020824"/>
-            <a:ext cx="4297680" cy="658368"/>
+            <a:off x="7040880" y="1737360"/>
+            <a:ext cx="4206240" cy="566928"/>
           </a:xfrm>
           <a:prstGeom prst="rect">
             <a:avLst/>
@@ -6475,7 +6787,7 @@
               </a:spcAft>
             </a:pPr>
             <a:r>
-              <a:rPr sz="1700" b="0" i="0">
+              <a:rPr sz="1500" b="0" i="0">
                 <a:solidFill>
                   <a:srgbClr val="1E293B"/>
                 </a:solidFill>
@@ -6488,14 +6800,14 @@
       </p:sp>
       <p:sp>
         <p:nvSpPr>
-          <p:cNvPr id="19" name="Rounded Rectangle 18"/>
+          <p:cNvPr id="24" name="Rounded Rectangle 23"/>
           <p:cNvSpPr/>
           <p:nvPr/>
         </p:nvSpPr>
         <p:spPr>
           <a:xfrm>
-            <a:off x="6858000" y="2807208"/>
-            <a:ext cx="4297680" cy="658368"/>
+            <a:off x="7040880" y="2377439"/>
+            <a:ext cx="4206240" cy="566928"/>
           </a:xfrm>
           <a:prstGeom prst="roundRect">
             <a:avLst>
@@ -6536,14 +6848,14 @@
       </p:sp>
       <p:sp>
         <p:nvSpPr>
-          <p:cNvPr id="20" name="TextBox 19"/>
+          <p:cNvPr id="25" name="TextBox 24"/>
           <p:cNvSpPr txBox="1"/>
           <p:nvPr/>
         </p:nvSpPr>
         <p:spPr>
           <a:xfrm>
-            <a:off x="6858000" y="2807208"/>
-            <a:ext cx="4297680" cy="658368"/>
+            <a:off x="7040880" y="2377439"/>
+            <a:ext cx="4206240" cy="566928"/>
           </a:xfrm>
           <a:prstGeom prst="rect">
             <a:avLst/>
@@ -6565,7 +6877,7 @@
               </a:spcAft>
             </a:pPr>
             <a:r>
-              <a:rPr sz="1700" b="0" i="0">
+              <a:rPr sz="1500" b="0" i="0">
                 <a:solidFill>
                   <a:srgbClr val="1E293B"/>
                 </a:solidFill>
@@ -6578,14 +6890,14 @@
       </p:sp>
       <p:sp>
         <p:nvSpPr>
-          <p:cNvPr id="21" name="Rounded Rectangle 20"/>
+          <p:cNvPr id="26" name="Rounded Rectangle 25"/>
           <p:cNvSpPr/>
           <p:nvPr/>
         </p:nvSpPr>
         <p:spPr>
           <a:xfrm>
-            <a:off x="6858000" y="3593591"/>
-            <a:ext cx="4297680" cy="658368"/>
+            <a:off x="7040880" y="3017520"/>
+            <a:ext cx="4206240" cy="566928"/>
           </a:xfrm>
           <a:prstGeom prst="roundRect">
             <a:avLst>
@@ -6626,14 +6938,14 @@
       </p:sp>
       <p:sp>
         <p:nvSpPr>
-          <p:cNvPr id="22" name="TextBox 21"/>
+          <p:cNvPr id="27" name="TextBox 26"/>
           <p:cNvSpPr txBox="1"/>
           <p:nvPr/>
         </p:nvSpPr>
         <p:spPr>
           <a:xfrm>
-            <a:off x="6858000" y="3593591"/>
-            <a:ext cx="4297680" cy="658368"/>
+            <a:off x="7040880" y="3017520"/>
+            <a:ext cx="4206240" cy="566928"/>
           </a:xfrm>
           <a:prstGeom prst="rect">
             <a:avLst/>
@@ -6655,7 +6967,7 @@
               </a:spcAft>
             </a:pPr>
             <a:r>
-              <a:rPr sz="1700" b="0" i="0">
+              <a:rPr sz="1500" b="0" i="0">
                 <a:solidFill>
                   <a:srgbClr val="1E293B"/>
                 </a:solidFill>
@@ -6668,14 +6980,14 @@
       </p:sp>
       <p:sp>
         <p:nvSpPr>
-          <p:cNvPr id="23" name="Rounded Rectangle 22"/>
+          <p:cNvPr id="28" name="Rounded Rectangle 27"/>
           <p:cNvSpPr/>
           <p:nvPr/>
         </p:nvSpPr>
         <p:spPr>
           <a:xfrm>
-            <a:off x="6858000" y="4379976"/>
-            <a:ext cx="4297680" cy="658368"/>
+            <a:off x="7040880" y="3657600"/>
+            <a:ext cx="4206240" cy="566928"/>
           </a:xfrm>
           <a:prstGeom prst="roundRect">
             <a:avLst>
@@ -6716,14 +7028,14 @@
       </p:sp>
       <p:sp>
         <p:nvSpPr>
-          <p:cNvPr id="24" name="TextBox 23"/>
+          <p:cNvPr id="29" name="TextBox 28"/>
           <p:cNvSpPr txBox="1"/>
           <p:nvPr/>
         </p:nvSpPr>
         <p:spPr>
           <a:xfrm>
-            <a:off x="6858000" y="4379976"/>
-            <a:ext cx="4297680" cy="658368"/>
+            <a:off x="7040880" y="3657600"/>
+            <a:ext cx="4206240" cy="566928"/>
           </a:xfrm>
           <a:prstGeom prst="rect">
             <a:avLst/>
@@ -6745,7 +7057,7 @@
               </a:spcAft>
             </a:pPr>
             <a:r>
-              <a:rPr sz="1700" b="0" i="0">
+              <a:rPr sz="1500" b="0" i="0">
                 <a:solidFill>
                   <a:srgbClr val="1E293B"/>
                 </a:solidFill>
@@ -6758,14 +7070,14 @@
       </p:sp>
       <p:sp>
         <p:nvSpPr>
-          <p:cNvPr id="25" name="Rounded Rectangle 24"/>
+          <p:cNvPr id="30" name="Rounded Rectangle 29"/>
           <p:cNvSpPr/>
           <p:nvPr/>
         </p:nvSpPr>
         <p:spPr>
           <a:xfrm>
-            <a:off x="6858000" y="5166360"/>
-            <a:ext cx="4297680" cy="658368"/>
+            <a:off x="7040880" y="4297680"/>
+            <a:ext cx="4206240" cy="566928"/>
           </a:xfrm>
           <a:prstGeom prst="roundRect">
             <a:avLst>
@@ -6806,14 +7118,14 @@
       </p:sp>
       <p:sp>
         <p:nvSpPr>
-          <p:cNvPr id="26" name="TextBox 25"/>
+          <p:cNvPr id="31" name="TextBox 30"/>
           <p:cNvSpPr txBox="1"/>
           <p:nvPr/>
         </p:nvSpPr>
         <p:spPr>
           <a:xfrm>
-            <a:off x="6858000" y="5166360"/>
-            <a:ext cx="4297680" cy="658368"/>
+            <a:off x="7040880" y="4297680"/>
+            <a:ext cx="4206240" cy="566928"/>
           </a:xfrm>
           <a:prstGeom prst="rect">
             <a:avLst/>
@@ -6835,7 +7147,7 @@
               </a:spcAft>
             </a:pPr>
             <a:r>
-              <a:rPr sz="1700" b="0" i="0">
+              <a:rPr sz="1500" b="0" i="0">
                 <a:solidFill>
                   <a:srgbClr val="1E293B"/>
                 </a:solidFill>
@@ -6848,14 +7160,14 @@
       </p:sp>
       <p:cxnSp>
         <p:nvCxnSpPr>
-          <p:cNvPr id="27" name="Connector 26"/>
+          <p:cNvPr id="32" name="Connector 31"/>
           <p:cNvCxnSpPr/>
           <p:nvPr/>
         </p:nvCxnSpPr>
         <p:spPr>
           <a:xfrm>
-            <a:off x="11475720" y="1280160"/>
-            <a:ext cx="0" cy="4526280"/>
+            <a:off x="11521440" y="1143000"/>
+            <a:ext cx="0" cy="3611880"/>
           </a:xfrm>
           <a:prstGeom prst="line">
             <a:avLst/>
@@ -6884,14 +7196,14 @@
       </p:cxnSp>
       <p:sp>
         <p:nvSpPr>
-          <p:cNvPr id="28" name="TextBox 27"/>
+          <p:cNvPr id="33" name="TextBox 32"/>
           <p:cNvSpPr txBox="1"/>
           <p:nvPr/>
         </p:nvSpPr>
         <p:spPr>
           <a:xfrm>
-            <a:off x="6858000" y="5989320"/>
-            <a:ext cx="5120640" cy="365760"/>
+            <a:off x="6858000" y="4919472"/>
+            <a:ext cx="4754880" cy="320040"/>
           </a:xfrm>
           <a:prstGeom prst="rect">
             <a:avLst/>
@@ -6913,7 +7225,7 @@
               </a:spcAft>
             </a:pPr>
             <a:r>
-              <a:rPr sz="1500" b="0" i="1">
+              <a:rPr sz="1300" b="0" i="1">
                 <a:solidFill>
                   <a:srgbClr val="64748B"/>
                 </a:solidFill>
@@ -7719,7 +8031,7 @@
                 </a:solidFill>
                 <a:latin typeface="Georgia"/>
               </a:rPr>
-              <a:t>3. The rendering pipeline</a:t>
+              <a:t>3. Transformations: creating and combining objects</a:t>
             </a:r>
           </a:p>
         </p:txBody>
@@ -7774,8 +8086,8 @@
         </p:nvSpPr>
         <p:spPr>
           <a:xfrm>
-            <a:off x="548640" y="1097280"/>
-            <a:ext cx="1417320" cy="731520"/>
+            <a:off x="548640" y="1051560"/>
+            <a:ext cx="1691640" cy="731520"/>
           </a:xfrm>
           <a:prstGeom prst="roundRect">
             <a:avLst>
@@ -7822,8 +8134,8 @@
         </p:nvSpPr>
         <p:spPr>
           <a:xfrm>
-            <a:off x="548640" y="1097280"/>
-            <a:ext cx="1417320" cy="731520"/>
+            <a:off x="548640" y="1051560"/>
+            <a:ext cx="1691640" cy="731520"/>
           </a:xfrm>
           <a:prstGeom prst="rect">
             <a:avLst/>
@@ -7851,7 +8163,7 @@
                 </a:solidFill>
                 <a:latin typeface="Calibri"/>
               </a:rPr>
-              <a:t>Sky</a:t>
+              <a:t>Primitive</a:t>
             </a:r>
           </a:p>
           <a:p>
@@ -7870,7 +8182,7 @@
                 </a:solidFill>
                 <a:latin typeface="Calibri"/>
               </a:rPr>
-              <a:t>table</a:t>
+              <a:t>mesh</a:t>
             </a:r>
           </a:p>
         </p:txBody>
@@ -7883,7 +8195,7 @@
         </p:nvCxnSpPr>
         <p:spPr>
           <a:xfrm>
-            <a:off x="1965960" y="1463040"/>
+            <a:off x="2240280" y="1417320"/>
             <a:ext cx="182880" cy="0"/>
           </a:xfrm>
           <a:prstGeom prst="line">
@@ -7919,8 +8231,8 @@
         </p:nvSpPr>
         <p:spPr>
           <a:xfrm>
-            <a:off x="2148840" y="1097280"/>
-            <a:ext cx="1417320" cy="731520"/>
+            <a:off x="2423160" y="1051560"/>
+            <a:ext cx="1691640" cy="731520"/>
           </a:xfrm>
           <a:prstGeom prst="roundRect">
             <a:avLst>
@@ -7967,8 +8279,8 @@
         </p:nvSpPr>
         <p:spPr>
           <a:xfrm>
-            <a:off x="2148840" y="1097280"/>
-            <a:ext cx="1417320" cy="731520"/>
+            <a:off x="2423160" y="1051560"/>
+            <a:ext cx="1691640" cy="731520"/>
           </a:xfrm>
           <a:prstGeom prst="rect">
             <a:avLst/>
@@ -7996,7 +8308,7 @@
                 </a:solidFill>
                 <a:latin typeface="Calibri"/>
               </a:rPr>
-              <a:t>Shadows</a:t>
+              <a:t>Deformers</a:t>
             </a:r>
           </a:p>
           <a:p>
@@ -8015,7 +8327,7 @@
                 </a:solidFill>
                 <a:latin typeface="Calibri"/>
               </a:rPr>
-              <a:t>3 cascades</a:t>
+              <a:t>(own space)</a:t>
             </a:r>
           </a:p>
         </p:txBody>
@@ -8028,7 +8340,7 @@
         </p:nvCxnSpPr>
         <p:spPr>
           <a:xfrm>
-            <a:off x="3566160" y="1463040"/>
+            <a:off x="4114800" y="1417320"/>
             <a:ext cx="182880" cy="0"/>
           </a:xfrm>
           <a:prstGeom prst="line">
@@ -8064,8 +8376,8 @@
         </p:nvSpPr>
         <p:spPr>
           <a:xfrm>
-            <a:off x="3749039" y="1097280"/>
-            <a:ext cx="1417320" cy="731520"/>
+            <a:off x="4297680" y="1051560"/>
+            <a:ext cx="1691640" cy="731520"/>
           </a:xfrm>
           <a:prstGeom prst="roundRect">
             <a:avLst>
@@ -8112,8 +8424,8 @@
         </p:nvSpPr>
         <p:spPr>
           <a:xfrm>
-            <a:off x="3749039" y="1097280"/>
-            <a:ext cx="1417320" cy="731520"/>
+            <a:off x="4297680" y="1051560"/>
+            <a:ext cx="1691640" cy="731520"/>
           </a:xfrm>
           <a:prstGeom prst="rect">
             <a:avLst/>
@@ -8141,7 +8453,7 @@
                 </a:solidFill>
                 <a:latin typeface="Calibri"/>
               </a:rPr>
-              <a:t>Geometry</a:t>
+              <a:t>M_part</a:t>
             </a:r>
           </a:p>
           <a:p>
@@ -8160,7 +8472,7 @@
                 </a:solidFill>
                 <a:latin typeface="Calibri"/>
               </a:rPr>
-              <a:t>G-buffer</a:t>
+              <a:t>scale, turn, move</a:t>
             </a:r>
           </a:p>
         </p:txBody>
@@ -8173,8 +8485,8 @@
         </p:nvCxnSpPr>
         <p:spPr>
           <a:xfrm>
-            <a:off x="5166359" y="1463040"/>
-            <a:ext cx="182881" cy="0"/>
+            <a:off x="5989320" y="1417320"/>
+            <a:ext cx="182880" cy="0"/>
           </a:xfrm>
           <a:prstGeom prst="line">
             <a:avLst/>
@@ -8209,8 +8521,8 @@
         </p:nvSpPr>
         <p:spPr>
           <a:xfrm>
-            <a:off x="5349240" y="1097280"/>
-            <a:ext cx="1417320" cy="731520"/>
+            <a:off x="6172200" y="1051560"/>
+            <a:ext cx="1691640" cy="731520"/>
           </a:xfrm>
           <a:prstGeom prst="roundRect">
             <a:avLst>
@@ -8257,8 +8569,8 @@
         </p:nvSpPr>
         <p:spPr>
           <a:xfrm>
-            <a:off x="5349240" y="1097280"/>
-            <a:ext cx="1417320" cy="731520"/>
+            <a:off x="6172200" y="1051560"/>
+            <a:ext cx="1691640" cy="731520"/>
           </a:xfrm>
           <a:prstGeom prst="rect">
             <a:avLst/>
@@ -8286,7 +8598,26 @@
                 </a:solidFill>
                 <a:latin typeface="Calibri"/>
               </a:rPr>
-              <a:t>SSAO</a:t>
+              <a:t>Merge by</a:t>
+            </a:r>
+          </a:p>
+          <a:p>
+            <a:pPr algn="ctr">
+              <a:lnSpc>
+                <a:spcPct val="100000"/>
+              </a:lnSpc>
+              <a:spcAft>
+                <a:spcPts val="0"/>
+              </a:spcAft>
+            </a:pPr>
+            <a:r>
+              <a:rPr sz="1300" b="0" i="0">
+                <a:solidFill>
+                  <a:srgbClr val="1E293B"/>
+                </a:solidFill>
+                <a:latin typeface="Calibri"/>
+              </a:rPr>
+              <a:t>material</a:t>
             </a:r>
           </a:p>
         </p:txBody>
@@ -8299,8 +8630,8 @@
         </p:nvCxnSpPr>
         <p:spPr>
           <a:xfrm>
-            <a:off x="6766559" y="1463040"/>
-            <a:ext cx="182881" cy="0"/>
+            <a:off x="7863840" y="1417320"/>
+            <a:ext cx="182880" cy="0"/>
           </a:xfrm>
           <a:prstGeom prst="line">
             <a:avLst/>
@@ -8335,8 +8666,8 @@
         </p:nvSpPr>
         <p:spPr>
           <a:xfrm>
-            <a:off x="6949440" y="1097280"/>
-            <a:ext cx="1417320" cy="731520"/>
+            <a:off x="8046720" y="1051560"/>
+            <a:ext cx="1691640" cy="731520"/>
           </a:xfrm>
           <a:prstGeom prst="roundRect">
             <a:avLst>
@@ -8383,8 +8714,8 @@
         </p:nvSpPr>
         <p:spPr>
           <a:xfrm>
-            <a:off x="6949440" y="1097280"/>
-            <a:ext cx="1417320" cy="731520"/>
+            <a:off x="8046720" y="1051560"/>
+            <a:ext cx="1691640" cy="731520"/>
           </a:xfrm>
           <a:prstGeom prst="rect">
             <a:avLst/>
@@ -8412,7 +8743,7 @@
                 </a:solidFill>
                 <a:latin typeface="Calibri"/>
               </a:rPr>
-              <a:t>Lighting,</a:t>
+              <a:t>M_world</a:t>
             </a:r>
           </a:p>
           <a:p>
@@ -8431,7 +8762,7 @@
                 </a:solidFill>
                 <a:latin typeface="Calibri"/>
               </a:rPr>
-              <a:t>reflect, fog</a:t>
+              <a:t>instances</a:t>
             </a:r>
           </a:p>
         </p:txBody>
@@ -8444,7 +8775,7 @@
         </p:nvCxnSpPr>
         <p:spPr>
           <a:xfrm>
-            <a:off x="8366760" y="1463040"/>
+            <a:off x="9738360" y="1417320"/>
             <a:ext cx="182880" cy="0"/>
           </a:xfrm>
           <a:prstGeom prst="line">
@@ -8480,8 +8811,8 @@
         </p:nvSpPr>
         <p:spPr>
           <a:xfrm>
-            <a:off x="8549640" y="1097280"/>
-            <a:ext cx="1417320" cy="731520"/>
+            <a:off x="9921240" y="1051560"/>
+            <a:ext cx="1691640" cy="731520"/>
           </a:xfrm>
           <a:prstGeom prst="roundRect">
             <a:avLst>
@@ -8528,8 +8859,8 @@
         </p:nvSpPr>
         <p:spPr>
           <a:xfrm>
-            <a:off x="8549640" y="1097280"/>
-            <a:ext cx="1417320" cy="731520"/>
+            <a:off x="9921240" y="1051560"/>
+            <a:ext cx="1691640" cy="731520"/>
           </a:xfrm>
           <a:prstGeom prst="rect">
             <a:avLst/>
@@ -8557,7 +8888,7 @@
                 </a:solidFill>
                 <a:latin typeface="Calibri"/>
               </a:rPr>
-              <a:t>Smoke,</a:t>
+              <a:t>V then P</a:t>
             </a:r>
           </a:p>
           <a:p>
@@ -8576,217 +8907,21 @@
                 </a:solidFill>
                 <a:latin typeface="Calibri"/>
               </a:rPr>
-              <a:t>fire</a:t>
-            </a:r>
-          </a:p>
-        </p:txBody>
-      </p:sp>
-      <p:cxnSp>
-        <p:nvCxnSpPr>
-          <p:cNvPr id="25" name="Connector 24"/>
-          <p:cNvCxnSpPr/>
-          <p:nvPr/>
-        </p:nvCxnSpPr>
-        <p:spPr>
-          <a:xfrm>
-            <a:off x="9966960" y="1463040"/>
-            <a:ext cx="182880" cy="0"/>
-          </a:xfrm>
-          <a:prstGeom prst="line">
-            <a:avLst/>
-          </a:prstGeom>
-          <a:ln w="19050">
-            <a:solidFill>
-              <a:srgbClr val="0F8F85"/>
-            </a:solidFill>
-            <a:tailEnd type="triangle"/>
-          </a:ln>
-        </p:spPr>
-        <p:style>
-          <a:lnRef idx="2">
-            <a:schemeClr val="accent1"/>
-          </a:lnRef>
-          <a:fillRef idx="0">
-            <a:schemeClr val="accent1"/>
-          </a:fillRef>
-          <a:effectRef idx="1">
-            <a:schemeClr val="accent1"/>
-          </a:effectRef>
-          <a:fontRef idx="minor">
-            <a:schemeClr val="tx1"/>
-          </a:fontRef>
-        </p:style>
-      </p:cxnSp>
-      <p:sp>
-        <p:nvSpPr>
-          <p:cNvPr id="26" name="Rounded Rectangle 25"/>
+              <a:t>to screen</a:t>
+            </a:r>
+          </a:p>
+        </p:txBody>
+      </p:sp>
+      <p:sp>
+        <p:nvSpPr>
+          <p:cNvPr id="25" name="Rounded Rectangle 24"/>
           <p:cNvSpPr/>
           <p:nvPr/>
         </p:nvSpPr>
         <p:spPr>
           <a:xfrm>
-            <a:off x="10149840" y="1097280"/>
-            <a:ext cx="1417320" cy="731520"/>
-          </a:xfrm>
-          <a:prstGeom prst="roundRect">
-            <a:avLst>
-              <a:gd name="adj" fmla="val 6000"/>
-            </a:avLst>
-          </a:prstGeom>
-          <a:solidFill>
-            <a:srgbClr val="FFFFFF"/>
-          </a:solidFill>
-          <a:ln w="9525">
-            <a:solidFill>
-              <a:srgbClr val="0F8F85"/>
-            </a:solidFill>
-          </a:ln>
-          <a:effectLst/>
-        </p:spPr>
-        <p:style>
-          <a:lnRef idx="1">
-            <a:schemeClr val="accent1"/>
-          </a:lnRef>
-          <a:fillRef idx="3">
-            <a:schemeClr val="accent1"/>
-          </a:fillRef>
-          <a:effectRef idx="2">
-            <a:schemeClr val="accent1"/>
-          </a:effectRef>
-          <a:fontRef idx="minor">
-            <a:schemeClr val="lt1"/>
-          </a:fontRef>
-        </p:style>
-        <p:txBody>
-          <a:bodyPr rtlCol="0" anchor="ctr"/>
-          <a:lstStyle/>
-          <a:p>
-            <a:pPr algn="ctr"/>
-          </a:p>
-        </p:txBody>
-      </p:sp>
-      <p:sp>
-        <p:nvSpPr>
-          <p:cNvPr id="27" name="TextBox 26"/>
-          <p:cNvSpPr txBox="1"/>
-          <p:nvPr/>
-        </p:nvSpPr>
-        <p:spPr>
-          <a:xfrm>
-            <a:off x="10149840" y="1097280"/>
-            <a:ext cx="1417320" cy="731520"/>
-          </a:xfrm>
-          <a:prstGeom prst="rect">
-            <a:avLst/>
-          </a:prstGeom>
-          <a:noFill/>
-        </p:spPr>
-        <p:txBody>
-          <a:bodyPr wrap="square" lIns="36576" rIns="36576" tIns="18288" bIns="18288" anchor="ctr">
-            <a:spAutoFit/>
-          </a:bodyPr>
-          <a:lstStyle/>
-          <a:p>
-            <a:pPr algn="ctr">
-              <a:lnSpc>
-                <a:spcPct val="100000"/>
-              </a:lnSpc>
-              <a:spcAft>
-                <a:spcPts val="0"/>
-              </a:spcAft>
-            </a:pPr>
-            <a:r>
-              <a:rPr sz="1300" b="0" i="0">
-                <a:solidFill>
-                  <a:srgbClr val="1E293B"/>
-                </a:solidFill>
-                <a:latin typeface="Calibri"/>
-              </a:rPr>
-              <a:t>Bloom, ACES,</a:t>
-            </a:r>
-          </a:p>
-          <a:p>
-            <a:pPr algn="ctr">
-              <a:lnSpc>
-                <a:spcPct val="100000"/>
-              </a:lnSpc>
-              <a:spcAft>
-                <a:spcPts val="0"/>
-              </a:spcAft>
-            </a:pPr>
-            <a:r>
-              <a:rPr sz="1300" b="0" i="0">
-                <a:solidFill>
-                  <a:srgbClr val="1E293B"/>
-                </a:solidFill>
-                <a:latin typeface="Calibri"/>
-              </a:rPr>
-              <a:t>FXAA</a:t>
-            </a:r>
-          </a:p>
-        </p:txBody>
-      </p:sp>
-      <p:sp>
-        <p:nvSpPr>
-          <p:cNvPr id="28" name="TextBox 27"/>
-          <p:cNvSpPr txBox="1"/>
-          <p:nvPr/>
-        </p:nvSpPr>
-        <p:spPr>
-          <a:xfrm>
             <a:off x="548640" y="2011680"/>
-            <a:ext cx="6309360" cy="822960"/>
-          </a:xfrm>
-          <a:prstGeom prst="rect">
-            <a:avLst/>
-          </a:prstGeom>
-          <a:noFill/>
-        </p:spPr>
-        <p:txBody>
-          <a:bodyPr wrap="square" lIns="36576" rIns="36576" tIns="18288" bIns="18288" anchor="t">
-            <a:spAutoFit/>
-          </a:bodyPr>
-          <a:lstStyle/>
-          <a:p>
-            <a:pPr algn="l">
-              <a:lnSpc>
-                <a:spcPct val="100000"/>
-              </a:lnSpc>
-              <a:spcAft>
-                <a:spcPts val="400"/>
-              </a:spcAft>
-            </a:pPr>
-            <a:r>
-              <a:rPr sz="1700" b="1" i="0">
-                <a:solidFill>
-                  <a:srgbClr val="1E293B"/>
-                </a:solidFill>
-                <a:latin typeface="Calibri"/>
-              </a:rPr>
-              <a:t>Deferred shading: </a:t>
-            </a:r>
-            <a:r>
-              <a:rPr sz="1700" b="0" i="0">
-                <a:solidFill>
-                  <a:srgbClr val="1E293B"/>
-                </a:solidFill>
-                <a:latin typeface="Calibri"/>
-              </a:rPr>
-              <a:t>store each pixel's colour, normal, shininess and depth first, then light it once; many lights stay cheap.</a:t>
-            </a:r>
-          </a:p>
-        </p:txBody>
-      </p:sp>
-      <p:sp>
-        <p:nvSpPr>
-          <p:cNvPr id="29" name="Rounded Rectangle 28"/>
-          <p:cNvSpPr/>
-          <p:nvPr/>
-        </p:nvSpPr>
-        <p:spPr>
-          <a:xfrm>
-            <a:off x="548640" y="2926080"/>
-            <a:ext cx="6309360" cy="3383280"/>
+            <a:ext cx="5760720" cy="1965960"/>
           </a:xfrm>
           <a:prstGeom prst="roundRect">
             <a:avLst>
@@ -8827,14 +8962,14 @@
       </p:sp>
       <p:sp>
         <p:nvSpPr>
-          <p:cNvPr id="30" name="TextBox 29"/>
+          <p:cNvPr id="26" name="TextBox 25"/>
           <p:cNvSpPr txBox="1"/>
           <p:nvPr/>
         </p:nvSpPr>
         <p:spPr>
           <a:xfrm>
-            <a:off x="685800" y="2971800"/>
-            <a:ext cx="5943600" cy="320040"/>
+            <a:off x="685800" y="2048256"/>
+            <a:ext cx="5486400" cy="320040"/>
           </a:xfrm>
           <a:prstGeom prst="rect">
             <a:avLst/>
@@ -8862,14 +8997,14 @@
                 </a:solidFill>
                 <a:latin typeface="Calibri"/>
               </a:rPr>
-              <a:t>Cook–Torrance reflection</a:t>
+              <a:t>One part: scale, then turn, then move</a:t>
             </a:r>
           </a:p>
         </p:txBody>
       </p:sp>
       <p:pic>
         <p:nvPicPr>
-          <p:cNvPr id="31" name="Picture 30" descr="ct.png"/>
+          <p:cNvPr id="27" name="Picture 26" descr="mpart.png"/>
           <p:cNvPicPr>
             <a:picLocks noChangeAspect="1"/>
           </p:cNvPicPr>
@@ -8883,17 +9018,168 @@
         </p:blipFill>
         <p:spPr>
           <a:xfrm>
-            <a:off x="731520" y="3337560"/>
-            <a:ext cx="5943600" cy="668753"/>
+            <a:off x="731520" y="2423160"/>
+            <a:ext cx="5303520" cy="442486"/>
           </a:xfrm>
           <a:prstGeom prst="rect">
             <a:avLst/>
           </a:prstGeom>
         </p:spPr>
       </p:pic>
+      <p:sp>
+        <p:nvSpPr>
+          <p:cNvPr id="28" name="TextBox 27"/>
+          <p:cNvSpPr txBox="1"/>
+          <p:nvPr/>
+        </p:nvSpPr>
+        <p:spPr>
+          <a:xfrm>
+            <a:off x="685800" y="2880360"/>
+            <a:ext cx="5486400" cy="1097280"/>
+          </a:xfrm>
+          <a:prstGeom prst="rect">
+            <a:avLst/>
+          </a:prstGeom>
+          <a:noFill/>
+        </p:spPr>
+        <p:txBody>
+          <a:bodyPr wrap="square" lIns="36576" rIns="36576" tIns="18288" bIns="18288" anchor="t">
+            <a:spAutoFit/>
+          </a:bodyPr>
+          <a:lstStyle/>
+          <a:p>
+            <a:pPr algn="l">
+              <a:lnSpc>
+                <a:spcPct val="100000"/>
+              </a:lnSpc>
+              <a:spcAft>
+                <a:spcPts val="300"/>
+              </a:spcAft>
+            </a:pPr>
+            <a:r>
+              <a:rPr sz="1400" b="0" i="0">
+                <a:solidFill>
+                  <a:srgbClr val="1E293B"/>
+                </a:solidFill>
+                <a:latin typeface="Calibri"/>
+              </a:rPr>
+              <a:t>Matrices act right to left, so the brick is stretched, turned about its own centre, and carried last.</a:t>
+            </a:r>
+          </a:p>
+          <a:p>
+            <a:pPr algn="l">
+              <a:lnSpc>
+                <a:spcPct val="100000"/>
+              </a:lnSpc>
+              <a:spcAft>
+                <a:spcPts val="300"/>
+              </a:spcAft>
+            </a:pPr>
+            <a:r>
+              <a:rPr sz="1400" b="0" i="0">
+                <a:solidFill>
+                  <a:srgbClr val="1E293B"/>
+                </a:solidFill>
+                <a:latin typeface="Calibri"/>
+              </a:rPr>
+              <a:t>Example: (1,0,0) → S(2,1,1) → R_y 90° → T(5,0,0) = (5, 0, −2)</a:t>
+            </a:r>
+          </a:p>
+        </p:txBody>
+      </p:sp>
+      <p:sp>
+        <p:nvSpPr>
+          <p:cNvPr id="29" name="Rounded Rectangle 28"/>
+          <p:cNvSpPr/>
+          <p:nvPr/>
+        </p:nvSpPr>
+        <p:spPr>
+          <a:xfrm>
+            <a:off x="548640" y="4114800"/>
+            <a:ext cx="5760720" cy="2240280"/>
+          </a:xfrm>
+          <a:prstGeom prst="roundRect">
+            <a:avLst>
+              <a:gd name="adj" fmla="val 6000"/>
+            </a:avLst>
+          </a:prstGeom>
+          <a:solidFill>
+            <a:srgbClr val="FFFFFF"/>
+          </a:solidFill>
+          <a:ln w="9525">
+            <a:solidFill>
+              <a:srgbClr val="D5DEE8"/>
+            </a:solidFill>
+          </a:ln>
+          <a:effectLst/>
+        </p:spPr>
+        <p:style>
+          <a:lnRef idx="1">
+            <a:schemeClr val="accent1"/>
+          </a:lnRef>
+          <a:fillRef idx="3">
+            <a:schemeClr val="accent1"/>
+          </a:fillRef>
+          <a:effectRef idx="2">
+            <a:schemeClr val="accent1"/>
+          </a:effectRef>
+          <a:fontRef idx="minor">
+            <a:schemeClr val="lt1"/>
+          </a:fontRef>
+        </p:style>
+        <p:txBody>
+          <a:bodyPr rtlCol="0" anchor="ctr"/>
+          <a:lstStyle/>
+          <a:p>
+            <a:pPr algn="ctr"/>
+          </a:p>
+        </p:txBody>
+      </p:sp>
+      <p:sp>
+        <p:nvSpPr>
+          <p:cNvPr id="30" name="TextBox 29"/>
+          <p:cNvSpPr txBox="1"/>
+          <p:nvPr/>
+        </p:nvSpPr>
+        <p:spPr>
+          <a:xfrm>
+            <a:off x="685800" y="4151376"/>
+            <a:ext cx="5486400" cy="320040"/>
+          </a:xfrm>
+          <a:prstGeom prst="rect">
+            <a:avLst/>
+          </a:prstGeom>
+          <a:noFill/>
+        </p:spPr>
+        <p:txBody>
+          <a:bodyPr wrap="square" lIns="36576" rIns="36576" tIns="18288" bIns="18288" anchor="t">
+            <a:spAutoFit/>
+          </a:bodyPr>
+          <a:lstStyle/>
+          <a:p>
+            <a:pPr algn="l">
+              <a:lnSpc>
+                <a:spcPct val="100000"/>
+              </a:lnSpc>
+              <a:spcAft>
+                <a:spcPts val="400"/>
+              </a:spcAft>
+            </a:pPr>
+            <a:r>
+              <a:rPr sz="1400" b="1" i="0">
+                <a:solidFill>
+                  <a:srgbClr val="0F8F85"/>
+                </a:solidFill>
+                <a:latin typeface="Calibri"/>
+              </a:rPr>
+              <a:t>Normals use the inverse transpose</a:t>
+            </a:r>
+          </a:p>
+        </p:txBody>
+      </p:sp>
       <p:pic>
         <p:nvPicPr>
-          <p:cNvPr id="32" name="Picture 31" descr="fresnel.png"/>
+          <p:cNvPr id="31" name="Picture 30" descr="nmat.png"/>
           <p:cNvPicPr>
             <a:picLocks noChangeAspect="1"/>
           </p:cNvPicPr>
@@ -8907,8 +9193,8 @@
         </p:blipFill>
         <p:spPr>
           <a:xfrm>
-            <a:off x="822960" y="4251960"/>
-            <a:ext cx="2926080" cy="329019"/>
+            <a:off x="822960" y="4526280"/>
+            <a:ext cx="1963826" cy="777240"/>
           </a:xfrm>
           <a:prstGeom prst="rect">
             <a:avLst/>
@@ -8917,14 +9203,14 @@
       </p:pic>
       <p:sp>
         <p:nvSpPr>
-          <p:cNvPr id="33" name="TextBox 32"/>
+          <p:cNvPr id="32" name="TextBox 31"/>
           <p:cNvSpPr txBox="1"/>
           <p:nvPr/>
         </p:nvSpPr>
         <p:spPr>
           <a:xfrm>
-            <a:off x="685800" y="4709160"/>
-            <a:ext cx="5943600" cy="320040"/>
+            <a:off x="2834640" y="4526280"/>
+            <a:ext cx="3383280" cy="1005840"/>
           </a:xfrm>
           <a:prstGeom prst="rect">
             <a:avLst/>
@@ -8942,24 +9228,66 @@
                 <a:spcPct val="100000"/>
               </a:lnSpc>
               <a:spcAft>
+                <a:spcPts val="200"/>
+              </a:spcAft>
+            </a:pPr>
+            <a:r>
+              <a:rPr sz="1400" b="0" i="0">
+                <a:solidFill>
+                  <a:srgbClr val="1E293B"/>
+                </a:solidFill>
+                <a:latin typeface="Calibri"/>
+              </a:rPr>
+              <a:t>Keeps normals perpendicular after a stretch</a:t>
+            </a:r>
+          </a:p>
+        </p:txBody>
+      </p:sp>
+      <p:sp>
+        <p:nvSpPr>
+          <p:cNvPr id="33" name="TextBox 32"/>
+          <p:cNvSpPr txBox="1"/>
+          <p:nvPr/>
+        </p:nvSpPr>
+        <p:spPr>
+          <a:xfrm>
+            <a:off x="685800" y="5440680"/>
+            <a:ext cx="5486400" cy="868680"/>
+          </a:xfrm>
+          <a:prstGeom prst="rect">
+            <a:avLst/>
+          </a:prstGeom>
+          <a:noFill/>
+        </p:spPr>
+        <p:txBody>
+          <a:bodyPr wrap="square" lIns="36576" rIns="36576" tIns="18288" bIns="18288" anchor="t">
+            <a:spAutoFit/>
+          </a:bodyPr>
+          <a:lstStyle/>
+          <a:p>
+            <a:pPr algn="l">
+              <a:lnSpc>
+                <a:spcPct val="100000"/>
+              </a:lnSpc>
+              <a:spcAft>
                 <a:spcPts val="400"/>
               </a:spcAft>
             </a:pPr>
             <a:r>
-              <a:rPr sz="1400" b="1" i="0">
-                <a:solidFill>
-                  <a:srgbClr val="0F8F85"/>
-                </a:solidFill>
-                <a:latin typeface="Calibri"/>
-              </a:rPr>
-              <a:t>Fog and tone map</a:t>
+              <a:rPr sz="1300" b="0" i="0">
+                <a:solidFill>
+                  <a:srgbClr val="64748B"/>
+                </a:solidFill>
+                <a:latin typeface="Calibri"/>
+              </a:rPr>
+              <a:t>S = diag(2,1,1), n = (1,1,0)/√2: correct (0.447, 0.894, 0), naive (0.894, 0.447, 0) is wrong; det &lt; 0 flips winding</a:t>
             </a:r>
           </a:p>
         </p:txBody>
       </p:sp>
       <p:pic>
         <p:nvPicPr>
-          <p:cNvPr id="34" name="Picture 33" descr="fog.png"/>
+          <p:cNvPr id="34" name="Picture 33" descr="tank.jpg"/>
           <p:cNvPicPr>
             <a:picLocks noChangeAspect="1"/>
           </p:cNvPicPr>
@@ -8973,17 +9301,22 @@
         </p:blipFill>
         <p:spPr>
           <a:xfrm>
-            <a:off x="822960" y="5074920"/>
-            <a:ext cx="2834640" cy="265084"/>
-          </a:xfrm>
-          <a:prstGeom prst="rect">
-            <a:avLst/>
-          </a:prstGeom>
+            <a:off x="6583680" y="2011680"/>
+            <a:ext cx="2468880" cy="1388745"/>
+          </a:xfrm>
+          <a:prstGeom prst="rect">
+            <a:avLst/>
+          </a:prstGeom>
+          <a:ln w="9525">
+            <a:solidFill>
+              <a:srgbClr val="D5DEE8"/>
+            </a:solidFill>
+          </a:ln>
         </p:spPr>
       </p:pic>
       <p:pic>
         <p:nvPicPr>
-          <p:cNvPr id="35" name="Picture 34" descr="aces.png"/>
+          <p:cNvPr id="35" name="Picture 34" descr="truck.jpg"/>
           <p:cNvPicPr>
             <a:picLocks noChangeAspect="1"/>
           </p:cNvPicPr>
@@ -8997,17 +9330,154 @@
         </p:blipFill>
         <p:spPr>
           <a:xfrm>
-            <a:off x="3931920" y="4983480"/>
-            <a:ext cx="2743200" cy="558209"/>
-          </a:xfrm>
-          <a:prstGeom prst="rect">
-            <a:avLst/>
-          </a:prstGeom>
+            <a:off x="9235440" y="2011680"/>
+            <a:ext cx="2468880" cy="1388745"/>
+          </a:xfrm>
+          <a:prstGeom prst="rect">
+            <a:avLst/>
+          </a:prstGeom>
+          <a:ln w="9525">
+            <a:solidFill>
+              <a:srgbClr val="D5DEE8"/>
+            </a:solidFill>
+          </a:ln>
         </p:spPr>
       </p:pic>
+      <p:sp>
+        <p:nvSpPr>
+          <p:cNvPr id="36" name="TextBox 35"/>
+          <p:cNvSpPr txBox="1"/>
+          <p:nvPr/>
+        </p:nvSpPr>
+        <p:spPr>
+          <a:xfrm>
+            <a:off x="6583680" y="3437001"/>
+            <a:ext cx="5120640" cy="320040"/>
+          </a:xfrm>
+          <a:prstGeom prst="rect">
+            <a:avLst/>
+          </a:prstGeom>
+          <a:noFill/>
+        </p:spPr>
+        <p:txBody>
+          <a:bodyPr wrap="square" lIns="36576" rIns="36576" tIns="18288" bIns="18288" anchor="t">
+            <a:spAutoFit/>
+          </a:bodyPr>
+          <a:lstStyle/>
+          <a:p>
+            <a:pPr algn="ctr">
+              <a:lnSpc>
+                <a:spcPct val="100000"/>
+              </a:lnSpc>
+              <a:spcAft>
+                <a:spcPts val="400"/>
+              </a:spcAft>
+            </a:pPr>
+            <a:r>
+              <a:rPr sz="1300" b="0" i="1">
+                <a:solidFill>
+                  <a:srgbClr val="64748B"/>
+                </a:solidFill>
+                <a:latin typeface="Calibri"/>
+              </a:rPr>
+              <a:t>Tank (hull, turret, gun) and truck: transformed primitives</a:t>
+            </a:r>
+          </a:p>
+        </p:txBody>
+      </p:sp>
+      <p:sp>
+        <p:nvSpPr>
+          <p:cNvPr id="37" name="Rounded Rectangle 36"/>
+          <p:cNvSpPr/>
+          <p:nvPr/>
+        </p:nvSpPr>
+        <p:spPr>
+          <a:xfrm>
+            <a:off x="6583680" y="3429000"/>
+            <a:ext cx="5120640" cy="2926080"/>
+          </a:xfrm>
+          <a:prstGeom prst="roundRect">
+            <a:avLst>
+              <a:gd name="adj" fmla="val 6000"/>
+            </a:avLst>
+          </a:prstGeom>
+          <a:solidFill>
+            <a:srgbClr val="FFFFFF"/>
+          </a:solidFill>
+          <a:ln w="9525">
+            <a:solidFill>
+              <a:srgbClr val="D5DEE8"/>
+            </a:solidFill>
+          </a:ln>
+          <a:effectLst/>
+        </p:spPr>
+        <p:style>
+          <a:lnRef idx="1">
+            <a:schemeClr val="accent1"/>
+          </a:lnRef>
+          <a:fillRef idx="3">
+            <a:schemeClr val="accent1"/>
+          </a:fillRef>
+          <a:effectRef idx="2">
+            <a:schemeClr val="accent1"/>
+          </a:effectRef>
+          <a:fontRef idx="minor">
+            <a:schemeClr val="lt1"/>
+          </a:fontRef>
+        </p:style>
+        <p:txBody>
+          <a:bodyPr rtlCol="0" anchor="ctr"/>
+          <a:lstStyle/>
+          <a:p>
+            <a:pPr algn="ctr"/>
+          </a:p>
+        </p:txBody>
+      </p:sp>
+      <p:sp>
+        <p:nvSpPr>
+          <p:cNvPr id="38" name="TextBox 37"/>
+          <p:cNvSpPr txBox="1"/>
+          <p:nvPr/>
+        </p:nvSpPr>
+        <p:spPr>
+          <a:xfrm>
+            <a:off x="6720840" y="3465576"/>
+            <a:ext cx="4846320" cy="320040"/>
+          </a:xfrm>
+          <a:prstGeom prst="rect">
+            <a:avLst/>
+          </a:prstGeom>
+          <a:noFill/>
+        </p:spPr>
+        <p:txBody>
+          <a:bodyPr wrap="square" lIns="36576" rIns="36576" tIns="18288" bIns="18288" anchor="t">
+            <a:spAutoFit/>
+          </a:bodyPr>
+          <a:lstStyle/>
+          <a:p>
+            <a:pPr algn="l">
+              <a:lnSpc>
+                <a:spcPct val="100000"/>
+              </a:lnSpc>
+              <a:spcAft>
+                <a:spcPts val="400"/>
+              </a:spcAft>
+            </a:pPr>
+            <a:r>
+              <a:rPr sz="1400" b="1" i="0">
+                <a:solidFill>
+                  <a:srgbClr val="0F8F85"/>
+                </a:solidFill>
+                <a:latin typeface="Calibri"/>
+              </a:rPr>
+              <a:t>Hierarchy: products down the chain</a:t>
+            </a:r>
+          </a:p>
+        </p:txBody>
+      </p:sp>
       <p:pic>
         <p:nvPicPr>
-          <p:cNvPr id="36" name="Picture 35" descr="dusk.jpg"/>
+          <p:cNvPr id="39" name="Picture 38" descr="mgun.png"/>
           <p:cNvPicPr>
             <a:picLocks noChangeAspect="1"/>
           </p:cNvPicPr>
@@ -9021,29 +9491,24 @@
         </p:blipFill>
         <p:spPr>
           <a:xfrm>
-            <a:off x="7178040" y="2057400"/>
-            <a:ext cx="4572000" cy="2571750"/>
-          </a:xfrm>
-          <a:prstGeom prst="rect">
-            <a:avLst/>
-          </a:prstGeom>
-          <a:ln w="9525">
-            <a:solidFill>
-              <a:srgbClr val="D5DEE8"/>
-            </a:solidFill>
-          </a:ln>
+            <a:off x="6766560" y="3840480"/>
+            <a:ext cx="4754880" cy="355980"/>
+          </a:xfrm>
+          <a:prstGeom prst="rect">
+            <a:avLst/>
+          </a:prstGeom>
         </p:spPr>
       </p:pic>
       <p:sp>
         <p:nvSpPr>
-          <p:cNvPr id="37" name="TextBox 36"/>
+          <p:cNvPr id="40" name="TextBox 39"/>
           <p:cNvSpPr txBox="1"/>
           <p:nvPr/>
         </p:nvSpPr>
         <p:spPr>
           <a:xfrm>
-            <a:off x="7178040" y="4702302"/>
-            <a:ext cx="4572000" cy="365760"/>
+            <a:off x="6720840" y="4297680"/>
+            <a:ext cx="4846320" cy="822960"/>
           </a:xfrm>
           <a:prstGeom prst="rect">
             <a:avLst/>
@@ -9056,36 +9521,36 @@
           </a:bodyPr>
           <a:lstStyle/>
           <a:p>
-            <a:pPr algn="ctr">
-              <a:lnSpc>
-                <a:spcPct val="100000"/>
-              </a:lnSpc>
-              <a:spcAft>
-                <a:spcPts val="400"/>
-              </a:spcAft>
-            </a:pPr>
-            <a:r>
-              <a:rPr sz="1400" b="0" i="1">
-                <a:solidFill>
-                  <a:srgbClr val="64748B"/>
-                </a:solidFill>
-                <a:latin typeface="Calibri"/>
-              </a:rPr>
-              <a:t>Dusk: sun, sky, haze, shadows</a:t>
-            </a:r>
-          </a:p>
-        </p:txBody>
-      </p:sp>
-      <p:sp>
-        <p:nvSpPr>
-          <p:cNvPr id="38" name="TextBox 37"/>
+            <a:pPr algn="l">
+              <a:lnSpc>
+                <a:spcPct val="100000"/>
+              </a:lnSpc>
+              <a:spcAft>
+                <a:spcPts val="200"/>
+              </a:spcAft>
+            </a:pPr>
+            <a:r>
+              <a:rPr sz="1400" b="0" i="0">
+                <a:solidFill>
+                  <a:srgbClr val="1E293B"/>
+                </a:solidFill>
+                <a:latin typeface="Calibri"/>
+              </a:rPr>
+              <a:t>The turret and gun inherit the hull matrix: turning the hull carries them along.</a:t>
+            </a:r>
+          </a:p>
+        </p:txBody>
+      </p:sp>
+      <p:sp>
+        <p:nvSpPr>
+          <p:cNvPr id="41" name="TextBox 40"/>
           <p:cNvSpPr txBox="1"/>
           <p:nvPr/>
         </p:nvSpPr>
         <p:spPr>
           <a:xfrm>
-            <a:off x="7178040" y="5177790"/>
-            <a:ext cx="4572000" cy="1097280"/>
+            <a:off x="6720840" y="5074920"/>
+            <a:ext cx="4846320" cy="320040"/>
           </a:xfrm>
           <a:prstGeom prst="rect">
             <a:avLst/>
@@ -9107,13 +9572,79 @@
               </a:spcAft>
             </a:pPr>
             <a:r>
-              <a:rPr sz="1500" b="0" i="0">
-                <a:solidFill>
-                  <a:srgbClr val="1E293B"/>
-                </a:solidFill>
-                <a:latin typeface="Calibri"/>
-              </a:rPr>
-              <a:t>Sun, moon, lamps, cascaded shadows, SSAO, screen-space reflections, bloom and FXAA</a:t>
+              <a:rPr sz="1400" b="1" i="0">
+                <a:solidFill>
+                  <a:srgbClr val="0F8F85"/>
+                </a:solidFill>
+                <a:latin typeface="Calibri"/>
+              </a:rPr>
+              <a:t>World to screen</a:t>
+            </a:r>
+          </a:p>
+        </p:txBody>
+      </p:sp>
+      <p:pic>
+        <p:nvPicPr>
+          <p:cNvPr id="42" name="Picture 41" descr="clip.png"/>
+          <p:cNvPicPr>
+            <a:picLocks noChangeAspect="1"/>
+          </p:cNvPicPr>
+          <p:nvPr/>
+        </p:nvPicPr>
+        <p:blipFill>
+          <a:blip r:embed="rId9"/>
+          <a:stretch>
+            <a:fillRect/>
+          </a:stretch>
+        </p:blipFill>
+        <p:spPr>
+          <a:xfrm>
+            <a:off x="6766560" y="5440680"/>
+            <a:ext cx="4023360" cy="473752"/>
+          </a:xfrm>
+          <a:prstGeom prst="rect">
+            <a:avLst/>
+          </a:prstGeom>
+        </p:spPr>
+      </p:pic>
+      <p:sp>
+        <p:nvSpPr>
+          <p:cNvPr id="43" name="TextBox 42"/>
+          <p:cNvSpPr txBox="1"/>
+          <p:nvPr/>
+        </p:nvSpPr>
+        <p:spPr>
+          <a:xfrm>
+            <a:off x="6720840" y="5897880"/>
+            <a:ext cx="4846320" cy="411480"/>
+          </a:xfrm>
+          <a:prstGeom prst="rect">
+            <a:avLst/>
+          </a:prstGeom>
+          <a:noFill/>
+        </p:spPr>
+        <p:txBody>
+          <a:bodyPr wrap="square" lIns="36576" rIns="36576" tIns="18288" bIns="18288" anchor="t">
+            <a:spAutoFit/>
+          </a:bodyPr>
+          <a:lstStyle/>
+          <a:p>
+            <a:pPr algn="l">
+              <a:lnSpc>
+                <a:spcPct val="100000"/>
+              </a:lnSpc>
+              <a:spcAft>
+                <a:spcPts val="400"/>
+              </a:spcAft>
+            </a:pPr>
+            <a:r>
+              <a:rPr sz="1300" b="0" i="0">
+                <a:solidFill>
+                  <a:srgbClr val="64748B"/>
+                </a:solidFill>
+                <a:latin typeface="Calibri"/>
+              </a:rPr>
+              <a:t>view V (look-at), projection P divides by depth</a:t>
             </a:r>
           </a:p>
         </p:txBody>
@@ -9309,7 +9840,7 @@
                 </a:solidFill>
                 <a:latin typeface="Georgia"/>
               </a:rPr>
-              <a:t>4. World, physics and gameplay</a:t>
+              <a:t>4. Illumination models and light sources</a:t>
             </a:r>
           </a:p>
         </p:txBody>
@@ -9356,16 +9887,40 @@
           </a:p>
         </p:txBody>
       </p:sp>
-      <p:sp>
-        <p:nvSpPr>
-          <p:cNvPr id="8" name="TextBox 7"/>
+      <p:pic>
+        <p:nvPicPr>
+          <p:cNvPr id="8" name="Picture 7" descr="sum.png"/>
+          <p:cNvPicPr>
+            <a:picLocks noChangeAspect="1"/>
+          </p:cNvPicPr>
+          <p:nvPr/>
+        </p:nvPicPr>
+        <p:blipFill>
+          <a:blip r:embed="rId4"/>
+          <a:stretch>
+            <a:fillRect/>
+          </a:stretch>
+        </p:blipFill>
+        <p:spPr>
+          <a:xfrm>
+            <a:off x="548640" y="1024128"/>
+            <a:ext cx="7589520" cy="769872"/>
+          </a:xfrm>
+          <a:prstGeom prst="rect">
+            <a:avLst/>
+          </a:prstGeom>
+        </p:spPr>
+      </p:pic>
+      <p:sp>
+        <p:nvSpPr>
+          <p:cNvPr id="9" name="TextBox 8"/>
           <p:cNvSpPr txBox="1"/>
           <p:nvPr/>
         </p:nvSpPr>
         <p:spPr>
           <a:xfrm>
-            <a:off x="548640" y="1097280"/>
-            <a:ext cx="6035040" cy="3749039"/>
+            <a:off x="8275320" y="1005840"/>
+            <a:ext cx="3474720" cy="502920"/>
           </a:xfrm>
           <a:prstGeom prst="rect">
             <a:avLst/>
@@ -9378,209 +9933,36 @@
           </a:bodyPr>
           <a:lstStyle/>
           <a:p>
-            <a:pPr algn="l" marL="256032" indent="-256032">
-              <a:lnSpc>
-                <a:spcPct val="100000"/>
-              </a:lnSpc>
-              <a:spcAft>
-                <a:spcPts val="700"/>
-              </a:spcAft>
-              <a:buClr>
-                <a:srgbClr val="007A3D"/>
-              </a:buClr>
-              <a:buChar char="•"/>
-            </a:pPr>
-            <a:r>
-              <a:rPr sz="1900" b="1" i="0">
-                <a:solidFill>
-                  <a:srgbClr val="1E293B"/>
-                </a:solidFill>
-                <a:latin typeface="Calibri"/>
-              </a:rPr>
-              <a:t>Sky: </a:t>
-            </a:r>
-            <a:r>
-              <a:rPr sz="1900" b="0" i="0">
-                <a:solidFill>
-                  <a:srgbClr val="1E293B"/>
-                </a:solidFill>
-                <a:latin typeface="Calibri"/>
-              </a:rPr>
-              <a:t>sun height from astronomy, scattering sky, wind-driven clouds</a:t>
-            </a:r>
-          </a:p>
-          <a:p>
-            <a:pPr algn="l" marL="256032" indent="-256032">
-              <a:lnSpc>
-                <a:spcPct val="100000"/>
-              </a:lnSpc>
-              <a:spcAft>
-                <a:spcPts val="700"/>
-              </a:spcAft>
-              <a:buClr>
-                <a:srgbClr val="007A3D"/>
-              </a:buClr>
-              <a:buChar char="•"/>
-            </a:pPr>
-            <a:r>
-              <a:rPr sz="1900" b="1" i="0">
-                <a:solidFill>
-                  <a:srgbClr val="1E293B"/>
-                </a:solidFill>
-                <a:latin typeface="Calibri"/>
-              </a:rPr>
-              <a:t>Terrain: </a:t>
-            </a:r>
-            <a:r>
-              <a:rPr sz="1900" b="0" i="0">
-                <a:solidFill>
-                  <a:srgbClr val="1E293B"/>
-                </a:solidFill>
-                <a:latin typeface="Calibri"/>
-              </a:rPr>
-              <a:t>warped ridged noise, streamed in 64 m chunks</a:t>
-            </a:r>
-          </a:p>
-          <a:p>
-            <a:pPr algn="l" marL="256032" indent="-256032">
-              <a:lnSpc>
-                <a:spcPct val="100000"/>
-              </a:lnSpc>
-              <a:spcAft>
-                <a:spcPts val="700"/>
-              </a:spcAft>
-              <a:buClr>
-                <a:srgbClr val="007A3D"/>
-              </a:buClr>
-              <a:buChar char="•"/>
-            </a:pPr>
-            <a:r>
-              <a:rPr sz="1900" b="1" i="0">
-                <a:solidFill>
-                  <a:srgbClr val="1E293B"/>
-                </a:solidFill>
-                <a:latin typeface="Calibri"/>
-              </a:rPr>
-              <a:t>Trees: </a:t>
-            </a:r>
-            <a:r>
-              <a:rPr sz="1900" b="0" i="0">
-                <a:solidFill>
-                  <a:srgbClr val="1E293B"/>
-                </a:solidFill>
-                <a:latin typeface="Calibri"/>
-              </a:rPr>
-              <a:t>4 species, swaying in the wind</a:t>
-            </a:r>
-          </a:p>
-          <a:p>
-            <a:pPr algn="l" marL="256032" indent="-256032">
-              <a:lnSpc>
-                <a:spcPct val="100000"/>
-              </a:lnSpc>
-              <a:spcAft>
-                <a:spcPts val="700"/>
-              </a:spcAft>
-              <a:buClr>
-                <a:srgbClr val="007A3D"/>
-              </a:buClr>
-              <a:buChar char="•"/>
-            </a:pPr>
-            <a:r>
-              <a:rPr sz="1900" b="1" i="0">
-                <a:solidFill>
-                  <a:srgbClr val="1E293B"/>
-                </a:solidFill>
-                <a:latin typeface="Calibri"/>
-              </a:rPr>
-              <a:t>Vehicles: </a:t>
-            </a:r>
-            <a:r>
-              <a:rPr sz="1900" b="0" i="0">
-                <a:solidFill>
-                  <a:srgbClr val="1E293B"/>
-                </a:solidFill>
-                <a:latin typeface="Calibri"/>
-              </a:rPr>
-              <a:t>jeep, truck, carrier, tank, helicopter</a:t>
-            </a:r>
-          </a:p>
-          <a:p>
-            <a:pPr algn="l" marL="256032" indent="-256032">
-              <a:lnSpc>
-                <a:spcPct val="100000"/>
-              </a:lnSpc>
-              <a:spcAft>
-                <a:spcPts val="700"/>
-              </a:spcAft>
-              <a:buClr>
-                <a:srgbClr val="007A3D"/>
-              </a:buClr>
-              <a:buChar char="•"/>
-            </a:pPr>
-            <a:r>
-              <a:rPr sz="1900" b="1" i="0">
-                <a:solidFill>
-                  <a:srgbClr val="1E293B"/>
-                </a:solidFill>
-                <a:latin typeface="Calibri"/>
-              </a:rPr>
-              <a:t>Ladders: </a:t>
-            </a:r>
-            <a:r>
-              <a:rPr sz="1900" b="0" i="0">
-                <a:solidFill>
-                  <a:srgbClr val="1E293B"/>
-                </a:solidFill>
-                <a:latin typeface="Calibri"/>
-              </a:rPr>
-              <a:t>4-state grip machine, hands on rungs</a:t>
-            </a:r>
-          </a:p>
-          <a:p>
-            <a:pPr algn="l" marL="256032" indent="-256032">
-              <a:lnSpc>
-                <a:spcPct val="100000"/>
-              </a:lnSpc>
-              <a:spcAft>
-                <a:spcPts val="700"/>
-              </a:spcAft>
-              <a:buClr>
-                <a:srgbClr val="007A3D"/>
-              </a:buClr>
-              <a:buChar char="•"/>
-            </a:pPr>
-            <a:r>
-              <a:rPr sz="1900" b="1" i="0">
-                <a:solidFill>
-                  <a:srgbClr val="1E293B"/>
-                </a:solidFill>
-                <a:latin typeface="Calibri"/>
-              </a:rPr>
-              <a:t>Mission: </a:t>
-            </a:r>
-            <a:r>
-              <a:rPr sz="1900" b="0" i="0">
-                <a:solidFill>
-                  <a:srgbClr val="1E293B"/>
-                </a:solidFill>
-                <a:latin typeface="Calibri"/>
-              </a:rPr>
-              <a:t>hack, destroy, rescue, extract; stealth AI; synthesised sound</a:t>
-            </a:r>
-          </a:p>
-        </p:txBody>
-      </p:sp>
-      <p:sp>
-        <p:nvSpPr>
-          <p:cNvPr id="9" name="Rounded Rectangle 8"/>
+            <a:pPr algn="l">
+              <a:lnSpc>
+                <a:spcPct val="100000"/>
+              </a:lnSpc>
+              <a:spcAft>
+                <a:spcPts val="400"/>
+              </a:spcAft>
+            </a:pPr>
+            <a:r>
+              <a:rPr sz="1200" b="0" i="1">
+                <a:solidFill>
+                  <a:srgbClr val="64748B"/>
+                </a:solidFill>
+                <a:latin typeface="Calibri"/>
+              </a:rPr>
+              <a:t>f = illumination model, att = falloff, sh = shadow</a:t>
+            </a:r>
+          </a:p>
+        </p:txBody>
+      </p:sp>
+      <p:sp>
+        <p:nvSpPr>
+          <p:cNvPr id="10" name="Rounded Rectangle 9"/>
           <p:cNvSpPr/>
           <p:nvPr/>
         </p:nvSpPr>
         <p:spPr>
           <a:xfrm>
-            <a:off x="548640" y="4892040"/>
-            <a:ext cx="6035040" cy="1417320"/>
+            <a:off x="548640" y="1645920"/>
+            <a:ext cx="5760720" cy="4709160"/>
           </a:xfrm>
           <a:prstGeom prst="roundRect">
             <a:avLst>
@@ -9619,33 +10001,51 @@
           </a:p>
         </p:txBody>
       </p:sp>
+      <p:sp>
+        <p:nvSpPr>
+          <p:cNvPr id="11" name="TextBox 10"/>
+          <p:cNvSpPr txBox="1"/>
+          <p:nvPr/>
+        </p:nvSpPr>
+        <p:spPr>
+          <a:xfrm>
+            <a:off x="685800" y="1773936"/>
+            <a:ext cx="1691640" cy="457200"/>
+          </a:xfrm>
+          <a:prstGeom prst="rect">
+            <a:avLst/>
+          </a:prstGeom>
+          <a:noFill/>
+        </p:spPr>
+        <p:txBody>
+          <a:bodyPr wrap="square" lIns="36576" rIns="36576" tIns="18288" bIns="18288" anchor="ctr">
+            <a:spAutoFit/>
+          </a:bodyPr>
+          <a:lstStyle/>
+          <a:p>
+            <a:pPr algn="l">
+              <a:lnSpc>
+                <a:spcPct val="100000"/>
+              </a:lnSpc>
+              <a:spcAft>
+                <a:spcPts val="400"/>
+              </a:spcAft>
+            </a:pPr>
+            <a:r>
+              <a:rPr sz="1400" b="1" i="0">
+                <a:solidFill>
+                  <a:srgbClr val="0F8F85"/>
+                </a:solidFill>
+                <a:latin typeface="Calibri"/>
+              </a:rPr>
+              <a:t>Lambert</a:t>
+            </a:r>
+          </a:p>
+        </p:txBody>
+      </p:sp>
       <p:pic>
         <p:nvPicPr>
-          <p:cNvPr id="10" name="Picture 9" descr="cloud.png"/>
-          <p:cNvPicPr>
-            <a:picLocks noChangeAspect="1"/>
-          </p:cNvPicPr>
-          <p:nvPr/>
-        </p:nvPicPr>
-        <p:blipFill>
-          <a:blip r:embed="rId4"/>
-          <a:stretch>
-            <a:fillRect/>
-          </a:stretch>
-        </p:blipFill>
-        <p:spPr>
-          <a:xfrm>
-            <a:off x="777240" y="5074920"/>
-            <a:ext cx="2651760" cy="698608"/>
-          </a:xfrm>
-          <a:prstGeom prst="rect">
-            <a:avLst/>
-          </a:prstGeom>
-        </p:spPr>
-      </p:pic>
-      <p:pic>
-        <p:nvPicPr>
-          <p:cNvPr id="11" name="Picture 10" descr="bicycle.png"/>
+          <p:cNvPr id="12" name="Picture 11" descr="lambert.png"/>
           <p:cNvPicPr>
             <a:picLocks noChangeAspect="1"/>
           </p:cNvPicPr>
@@ -9659,8 +10059,8 @@
         </p:blipFill>
         <p:spPr>
           <a:xfrm>
-            <a:off x="4480560" y="5074920"/>
-            <a:ext cx="1442923" cy="685800"/>
+            <a:off x="2468880" y="1755648"/>
+            <a:ext cx="687787" cy="457199"/>
           </a:xfrm>
           <a:prstGeom prst="rect">
             <a:avLst/>
@@ -9669,14 +10069,14 @@
       </p:pic>
       <p:sp>
         <p:nvSpPr>
-          <p:cNvPr id="12" name="TextBox 11"/>
+          <p:cNvPr id="13" name="TextBox 12"/>
           <p:cNvSpPr txBox="1"/>
           <p:nvPr/>
         </p:nvSpPr>
         <p:spPr>
           <a:xfrm>
-            <a:off x="685800" y="5852160"/>
-            <a:ext cx="2926080" cy="365760"/>
+            <a:off x="685800" y="2505456"/>
+            <a:ext cx="1691640" cy="457200"/>
           </a:xfrm>
           <a:prstGeom prst="rect">
             <a:avLst/>
@@ -9684,7 +10084,7 @@
           <a:noFill/>
         </p:spPr>
         <p:txBody>
-          <a:bodyPr wrap="square" lIns="36576" rIns="36576" tIns="18288" bIns="18288" anchor="t">
+          <a:bodyPr wrap="square" lIns="36576" rIns="36576" tIns="18288" bIns="18288" anchor="ctr">
             <a:spAutoFit/>
           </a:bodyPr>
           <a:lstStyle/>
@@ -9698,62 +10098,20 @@
               </a:spcAft>
             </a:pPr>
             <a:r>
-              <a:rPr sz="1200" b="0" i="1">
-                <a:solidFill>
-                  <a:srgbClr val="64748B"/>
-                </a:solidFill>
-                <a:latin typeface="Calibri"/>
-              </a:rPr>
-              <a:t>cloud plane and wind</a:t>
-            </a:r>
-          </a:p>
-        </p:txBody>
-      </p:sp>
-      <p:sp>
-        <p:nvSpPr>
-          <p:cNvPr id="13" name="TextBox 12"/>
-          <p:cNvSpPr txBox="1"/>
-          <p:nvPr/>
-        </p:nvSpPr>
-        <p:spPr>
-          <a:xfrm>
-            <a:off x="4023360" y="5852160"/>
-            <a:ext cx="2468880" cy="365760"/>
-          </a:xfrm>
-          <a:prstGeom prst="rect">
-            <a:avLst/>
-          </a:prstGeom>
-          <a:noFill/>
-        </p:spPr>
-        <p:txBody>
-          <a:bodyPr wrap="square" lIns="36576" rIns="36576" tIns="18288" bIns="18288" anchor="t">
-            <a:spAutoFit/>
-          </a:bodyPr>
-          <a:lstStyle/>
-          <a:p>
-            <a:pPr algn="l">
-              <a:lnSpc>
-                <a:spcPct val="100000"/>
-              </a:lnSpc>
-              <a:spcAft>
-                <a:spcPts val="400"/>
-              </a:spcAft>
-            </a:pPr>
-            <a:r>
-              <a:rPr sz="1200" b="0" i="1">
-                <a:solidFill>
-                  <a:srgbClr val="64748B"/>
-                </a:solidFill>
-                <a:latin typeface="Calibri"/>
-              </a:rPr>
-              <a:t>bicycle steering</a:t>
+              <a:rPr sz="1400" b="1" i="0">
+                <a:solidFill>
+                  <a:srgbClr val="0F8F85"/>
+                </a:solidFill>
+                <a:latin typeface="Calibri"/>
+              </a:rPr>
+              <a:t>Phong</a:t>
             </a:r>
           </a:p>
         </p:txBody>
       </p:sp>
       <p:pic>
         <p:nvPicPr>
-          <p:cNvPr id="14" name="Picture 13" descr="gate_day.jpg"/>
+          <p:cNvPr id="14" name="Picture 13" descr="phong.png"/>
           <p:cNvPicPr>
             <a:picLocks noChangeAspect="1"/>
           </p:cNvPicPr>
@@ -9767,22 +10125,59 @@
         </p:blipFill>
         <p:spPr>
           <a:xfrm>
-            <a:off x="6949440" y="1097280"/>
-            <a:ext cx="4754880" cy="2674620"/>
-          </a:xfrm>
-          <a:prstGeom prst="rect">
-            <a:avLst/>
-          </a:prstGeom>
-          <a:ln w="9525">
-            <a:solidFill>
-              <a:srgbClr val="D5DEE8"/>
-            </a:solidFill>
-          </a:ln>
+            <a:off x="2468880" y="2487168"/>
+            <a:ext cx="2821172" cy="457200"/>
+          </a:xfrm>
+          <a:prstGeom prst="rect">
+            <a:avLst/>
+          </a:prstGeom>
         </p:spPr>
       </p:pic>
+      <p:sp>
+        <p:nvSpPr>
+          <p:cNvPr id="15" name="TextBox 14"/>
+          <p:cNvSpPr txBox="1"/>
+          <p:nvPr/>
+        </p:nvSpPr>
+        <p:spPr>
+          <a:xfrm>
+            <a:off x="685800" y="3236976"/>
+            <a:ext cx="1691640" cy="457200"/>
+          </a:xfrm>
+          <a:prstGeom prst="rect">
+            <a:avLst/>
+          </a:prstGeom>
+          <a:noFill/>
+        </p:spPr>
+        <p:txBody>
+          <a:bodyPr wrap="square" lIns="36576" rIns="36576" tIns="18288" bIns="18288" anchor="ctr">
+            <a:spAutoFit/>
+          </a:bodyPr>
+          <a:lstStyle/>
+          <a:p>
+            <a:pPr algn="l">
+              <a:lnSpc>
+                <a:spcPct val="100000"/>
+              </a:lnSpc>
+              <a:spcAft>
+                <a:spcPts val="400"/>
+              </a:spcAft>
+            </a:pPr>
+            <a:r>
+              <a:rPr sz="1400" b="1" i="0">
+                <a:solidFill>
+                  <a:srgbClr val="0F8F85"/>
+                </a:solidFill>
+                <a:latin typeface="Calibri"/>
+              </a:rPr>
+              <a:t>Blinn–Phong</a:t>
+            </a:r>
+          </a:p>
+        </p:txBody>
+      </p:sp>
       <p:pic>
         <p:nvPicPr>
-          <p:cNvPr id="15" name="Picture 14" descr="ladder.jpg"/>
+          <p:cNvPr id="16" name="Picture 15" descr="blinn.png"/>
           <p:cNvPicPr>
             <a:picLocks noChangeAspect="1"/>
           </p:cNvPicPr>
@@ -9796,22 +10191,59 @@
         </p:blipFill>
         <p:spPr>
           <a:xfrm>
-            <a:off x="6949440" y="3909060"/>
-            <a:ext cx="2304288" cy="1296162"/>
-          </a:xfrm>
-          <a:prstGeom prst="rect">
-            <a:avLst/>
-          </a:prstGeom>
-          <a:ln w="9525">
-            <a:solidFill>
-              <a:srgbClr val="D5DEE8"/>
-            </a:solidFill>
-          </a:ln>
+            <a:off x="2468880" y="3218688"/>
+            <a:ext cx="2856613" cy="457200"/>
+          </a:xfrm>
+          <a:prstGeom prst="rect">
+            <a:avLst/>
+          </a:prstGeom>
         </p:spPr>
       </p:pic>
+      <p:sp>
+        <p:nvSpPr>
+          <p:cNvPr id="17" name="TextBox 16"/>
+          <p:cNvSpPr txBox="1"/>
+          <p:nvPr/>
+        </p:nvSpPr>
+        <p:spPr>
+          <a:xfrm>
+            <a:off x="685800" y="3968496"/>
+            <a:ext cx="1691640" cy="457200"/>
+          </a:xfrm>
+          <a:prstGeom prst="rect">
+            <a:avLst/>
+          </a:prstGeom>
+          <a:noFill/>
+        </p:spPr>
+        <p:txBody>
+          <a:bodyPr wrap="square" lIns="36576" rIns="36576" tIns="18288" bIns="18288" anchor="ctr">
+            <a:spAutoFit/>
+          </a:bodyPr>
+          <a:lstStyle/>
+          <a:p>
+            <a:pPr algn="l">
+              <a:lnSpc>
+                <a:spcPct val="100000"/>
+              </a:lnSpc>
+              <a:spcAft>
+                <a:spcPts val="400"/>
+              </a:spcAft>
+            </a:pPr>
+            <a:r>
+              <a:rPr sz="1400" b="1" i="0">
+                <a:solidFill>
+                  <a:srgbClr val="0F8F85"/>
+                </a:solidFill>
+                <a:latin typeface="Calibri"/>
+              </a:rPr>
+              <a:t>Oren–Nayar</a:t>
+            </a:r>
+          </a:p>
+        </p:txBody>
+      </p:sp>
       <p:pic>
         <p:nvPicPr>
-          <p:cNvPr id="16" name="Picture 15" descr="trees.jpg"/>
+          <p:cNvPr id="18" name="Picture 17" descr="oren.png"/>
           <p:cNvPicPr>
             <a:picLocks noChangeAspect="1"/>
           </p:cNvPicPr>
@@ -9825,8 +10257,164 @@
         </p:blipFill>
         <p:spPr>
           <a:xfrm>
-            <a:off x="9400032" y="3909060"/>
-            <a:ext cx="2304288" cy="1296162"/>
+            <a:off x="2468880" y="3950207"/>
+            <a:ext cx="3737113" cy="457200"/>
+          </a:xfrm>
+          <a:prstGeom prst="rect">
+            <a:avLst/>
+          </a:prstGeom>
+        </p:spPr>
+      </p:pic>
+      <p:sp>
+        <p:nvSpPr>
+          <p:cNvPr id="19" name="TextBox 18"/>
+          <p:cNvSpPr txBox="1"/>
+          <p:nvPr/>
+        </p:nvSpPr>
+        <p:spPr>
+          <a:xfrm>
+            <a:off x="685800" y="4700016"/>
+            <a:ext cx="1691640" cy="457200"/>
+          </a:xfrm>
+          <a:prstGeom prst="rect">
+            <a:avLst/>
+          </a:prstGeom>
+          <a:noFill/>
+        </p:spPr>
+        <p:txBody>
+          <a:bodyPr wrap="square" lIns="36576" rIns="36576" tIns="18288" bIns="18288" anchor="ctr">
+            <a:spAutoFit/>
+          </a:bodyPr>
+          <a:lstStyle/>
+          <a:p>
+            <a:pPr algn="l">
+              <a:lnSpc>
+                <a:spcPct val="100000"/>
+              </a:lnSpc>
+              <a:spcAft>
+                <a:spcPts val="400"/>
+              </a:spcAft>
+            </a:pPr>
+            <a:r>
+              <a:rPr sz="1400" b="1" i="0">
+                <a:solidFill>
+                  <a:srgbClr val="0F8F85"/>
+                </a:solidFill>
+                <a:latin typeface="Calibri"/>
+              </a:rPr>
+              <a:t>Cook–Torrance</a:t>
+            </a:r>
+          </a:p>
+        </p:txBody>
+      </p:sp>
+      <p:pic>
+        <p:nvPicPr>
+          <p:cNvPr id="20" name="Picture 19" descr="ct2.png"/>
+          <p:cNvPicPr>
+            <a:picLocks noChangeAspect="1"/>
+          </p:cNvPicPr>
+          <p:nvPr/>
+        </p:nvPicPr>
+        <p:blipFill>
+          <a:blip r:embed="rId9"/>
+          <a:stretch>
+            <a:fillRect/>
+          </a:stretch>
+        </p:blipFill>
+        <p:spPr>
+          <a:xfrm>
+            <a:off x="2468880" y="4681727"/>
+            <a:ext cx="2658139" cy="457199"/>
+          </a:xfrm>
+          <a:prstGeom prst="rect">
+            <a:avLst/>
+          </a:prstGeom>
+        </p:spPr>
+      </p:pic>
+      <p:sp>
+        <p:nvSpPr>
+          <p:cNvPr id="21" name="TextBox 20"/>
+          <p:cNvSpPr txBox="1"/>
+          <p:nvPr/>
+        </p:nvSpPr>
+        <p:spPr>
+          <a:xfrm>
+            <a:off x="685800" y="5431536"/>
+            <a:ext cx="1691640" cy="457200"/>
+          </a:xfrm>
+          <a:prstGeom prst="rect">
+            <a:avLst/>
+          </a:prstGeom>
+          <a:noFill/>
+        </p:spPr>
+        <p:txBody>
+          <a:bodyPr wrap="square" lIns="36576" rIns="36576" tIns="18288" bIns="18288" anchor="ctr">
+            <a:spAutoFit/>
+          </a:bodyPr>
+          <a:lstStyle/>
+          <a:p>
+            <a:pPr algn="l">
+              <a:lnSpc>
+                <a:spcPct val="100000"/>
+              </a:lnSpc>
+              <a:spcAft>
+                <a:spcPts val="400"/>
+              </a:spcAft>
+            </a:pPr>
+            <a:r>
+              <a:rPr sz="1400" b="1" i="0">
+                <a:solidFill>
+                  <a:srgbClr val="0F8F85"/>
+                </a:solidFill>
+                <a:latin typeface="Calibri"/>
+              </a:rPr>
+              <a:t>Subsurface</a:t>
+            </a:r>
+          </a:p>
+        </p:txBody>
+      </p:sp>
+      <p:pic>
+        <p:nvPicPr>
+          <p:cNvPr id="22" name="Picture 21" descr="sss.png"/>
+          <p:cNvPicPr>
+            <a:picLocks noChangeAspect="1"/>
+          </p:cNvPicPr>
+          <p:nvPr/>
+        </p:nvPicPr>
+        <p:blipFill>
+          <a:blip r:embed="rId10"/>
+          <a:stretch>
+            <a:fillRect/>
+          </a:stretch>
+        </p:blipFill>
+        <p:spPr>
+          <a:xfrm>
+            <a:off x="2468880" y="5413247"/>
+            <a:ext cx="2122714" cy="457200"/>
+          </a:xfrm>
+          <a:prstGeom prst="rect">
+            <a:avLst/>
+          </a:prstGeom>
+        </p:spPr>
+      </p:pic>
+      <p:pic>
+        <p:nvPicPr>
+          <p:cNvPr id="23" name="Picture 22" descr="models.jpg"/>
+          <p:cNvPicPr>
+            <a:picLocks noChangeAspect="1"/>
+          </p:cNvPicPr>
+          <p:nvPr/>
+        </p:nvPicPr>
+        <p:blipFill>
+          <a:blip r:embed="rId11"/>
+          <a:stretch>
+            <a:fillRect/>
+          </a:stretch>
+        </p:blipFill>
+        <p:spPr>
+          <a:xfrm>
+            <a:off x="6583680" y="1645920"/>
+            <a:ext cx="5120640" cy="875898"/>
           </a:xfrm>
           <a:prstGeom prst="rect">
             <a:avLst/>
@@ -9840,14 +10428,14 @@
       </p:pic>
       <p:sp>
         <p:nvSpPr>
-          <p:cNvPr id="17" name="TextBox 16"/>
+          <p:cNvPr id="24" name="TextBox 23"/>
           <p:cNvSpPr txBox="1"/>
           <p:nvPr/>
         </p:nvSpPr>
         <p:spPr>
           <a:xfrm>
-            <a:off x="6949440" y="5250942"/>
-            <a:ext cx="4754880" cy="365760"/>
+            <a:off x="6583680" y="2549250"/>
+            <a:ext cx="5120640" cy="320040"/>
           </a:xfrm>
           <a:prstGeom prst="rect">
             <a:avLst/>
@@ -9869,17 +10457,270 @@
               </a:spcAft>
             </a:pPr>
             <a:r>
-              <a:rPr sz="1300" b="0" i="1">
+              <a:rPr sz="1100" b="0" i="1">
                 <a:solidFill>
                   <a:srgbClr val="64748B"/>
                 </a:solidFill>
                 <a:latin typeface="Calibri"/>
               </a:rPr>
-              <a:t>Day sky, ladder climb, and tree species</a:t>
-            </a:r>
-          </a:p>
-        </p:txBody>
-      </p:sp>
+              <a:t>Lambert · Phong · Blinn–Phong · Oren–Nayar · Cook–Torrance · Subsurface</a:t>
+            </a:r>
+          </a:p>
+        </p:txBody>
+      </p:sp>
+      <p:sp>
+        <p:nvSpPr>
+          <p:cNvPr id="25" name="Rounded Rectangle 24"/>
+          <p:cNvSpPr/>
+          <p:nvPr/>
+        </p:nvSpPr>
+        <p:spPr>
+          <a:xfrm>
+            <a:off x="6583680" y="2933298"/>
+            <a:ext cx="5120640" cy="3421781"/>
+          </a:xfrm>
+          <a:prstGeom prst="roundRect">
+            <a:avLst>
+              <a:gd name="adj" fmla="val 6000"/>
+            </a:avLst>
+          </a:prstGeom>
+          <a:solidFill>
+            <a:srgbClr val="FFFFFF"/>
+          </a:solidFill>
+          <a:ln w="9525">
+            <a:solidFill>
+              <a:srgbClr val="D5DEE8"/>
+            </a:solidFill>
+          </a:ln>
+          <a:effectLst/>
+        </p:spPr>
+        <p:style>
+          <a:lnRef idx="1">
+            <a:schemeClr val="accent1"/>
+          </a:lnRef>
+          <a:fillRef idx="3">
+            <a:schemeClr val="accent1"/>
+          </a:fillRef>
+          <a:effectRef idx="2">
+            <a:schemeClr val="accent1"/>
+          </a:effectRef>
+          <a:fontRef idx="minor">
+            <a:schemeClr val="lt1"/>
+          </a:fontRef>
+        </p:style>
+        <p:txBody>
+          <a:bodyPr rtlCol="0" anchor="ctr"/>
+          <a:lstStyle/>
+          <a:p>
+            <a:pPr algn="ctr"/>
+          </a:p>
+        </p:txBody>
+      </p:sp>
+      <p:sp>
+        <p:nvSpPr>
+          <p:cNvPr id="26" name="TextBox 25"/>
+          <p:cNvSpPr txBox="1"/>
+          <p:nvPr/>
+        </p:nvSpPr>
+        <p:spPr>
+          <a:xfrm>
+            <a:off x="6720840" y="2969874"/>
+            <a:ext cx="4846320" cy="320040"/>
+          </a:xfrm>
+          <a:prstGeom prst="rect">
+            <a:avLst/>
+          </a:prstGeom>
+          <a:noFill/>
+        </p:spPr>
+        <p:txBody>
+          <a:bodyPr wrap="square" lIns="36576" rIns="36576" tIns="18288" bIns="18288" anchor="t">
+            <a:spAutoFit/>
+          </a:bodyPr>
+          <a:lstStyle/>
+          <a:p>
+            <a:pPr algn="l">
+              <a:lnSpc>
+                <a:spcPct val="100000"/>
+              </a:lnSpc>
+              <a:spcAft>
+                <a:spcPts val="400"/>
+              </a:spcAft>
+            </a:pPr>
+            <a:r>
+              <a:rPr sz="1400" b="1" i="0">
+                <a:solidFill>
+                  <a:srgbClr val="0F8F85"/>
+                </a:solidFill>
+                <a:latin typeface="Calibri"/>
+              </a:rPr>
+              <a:t>Light sources</a:t>
+            </a:r>
+          </a:p>
+        </p:txBody>
+      </p:sp>
+      <p:sp>
+        <p:nvSpPr>
+          <p:cNvPr id="27" name="TextBox 26"/>
+          <p:cNvSpPr txBox="1"/>
+          <p:nvPr/>
+        </p:nvSpPr>
+        <p:spPr>
+          <a:xfrm>
+            <a:off x="6720840" y="3317346"/>
+            <a:ext cx="4846320" cy="1417320"/>
+          </a:xfrm>
+          <a:prstGeom prst="rect">
+            <a:avLst/>
+          </a:prstGeom>
+          <a:noFill/>
+        </p:spPr>
+        <p:txBody>
+          <a:bodyPr wrap="square" lIns="36576" rIns="36576" tIns="18288" bIns="18288" anchor="t">
+            <a:spAutoFit/>
+          </a:bodyPr>
+          <a:lstStyle/>
+          <a:p>
+            <a:pPr algn="l" marL="256032" indent="-256032">
+              <a:lnSpc>
+                <a:spcPct val="100000"/>
+              </a:lnSpc>
+              <a:spcAft>
+                <a:spcPts val="200"/>
+              </a:spcAft>
+              <a:buClr>
+                <a:srgbClr val="007A3D"/>
+              </a:buClr>
+              <a:buChar char="•"/>
+            </a:pPr>
+            <a:r>
+              <a:rPr sz="1400" b="0" i="0">
+                <a:solidFill>
+                  <a:srgbClr val="1E293B"/>
+                </a:solidFill>
+                <a:latin typeface="Calibri"/>
+              </a:rPr>
+              <a:t>Directional: sun, moon (no falloff)</a:t>
+            </a:r>
+          </a:p>
+          <a:p>
+            <a:pPr algn="l" marL="256032" indent="-256032">
+              <a:lnSpc>
+                <a:spcPct val="100000"/>
+              </a:lnSpc>
+              <a:spcAft>
+                <a:spcPts val="200"/>
+              </a:spcAft>
+              <a:buClr>
+                <a:srgbClr val="007A3D"/>
+              </a:buClr>
+              <a:buChar char="•"/>
+            </a:pPr>
+            <a:r>
+              <a:rPr sz="1400" b="0" i="0">
+                <a:solidFill>
+                  <a:srgbClr val="1E293B"/>
+                </a:solidFill>
+                <a:latin typeface="Calibri"/>
+              </a:rPr>
+              <a:t>Point: lamps, flashes</a:t>
+            </a:r>
+          </a:p>
+          <a:p>
+            <a:pPr algn="l" marL="256032" indent="-256032">
+              <a:lnSpc>
+                <a:spcPct val="100000"/>
+              </a:lnSpc>
+              <a:spcAft>
+                <a:spcPts val="200"/>
+              </a:spcAft>
+              <a:buClr>
+                <a:srgbClr val="007A3D"/>
+              </a:buClr>
+              <a:buChar char="•"/>
+            </a:pPr>
+            <a:r>
+              <a:rPr sz="1400" b="0" i="0">
+                <a:solidFill>
+                  <a:srgbClr val="1E293B"/>
+                </a:solidFill>
+                <a:latin typeface="Calibri"/>
+              </a:rPr>
+              <a:t>Spot: floodlights; cone factor</a:t>
+            </a:r>
+          </a:p>
+          <a:p>
+            <a:pPr algn="l" marL="256032" indent="-256032">
+              <a:lnSpc>
+                <a:spcPct val="100000"/>
+              </a:lnSpc>
+              <a:spcAft>
+                <a:spcPts val="200"/>
+              </a:spcAft>
+              <a:buClr>
+                <a:srgbClr val="007A3D"/>
+              </a:buClr>
+              <a:buChar char="•"/>
+            </a:pPr>
+            <a:r>
+              <a:rPr sz="1400" b="0" i="0">
+                <a:solidFill>
+                  <a:srgbClr val="1E293B"/>
+                </a:solidFill>
+                <a:latin typeface="Calibri"/>
+              </a:rPr>
+              <a:t>Area: 4×4 point samples</a:t>
+            </a:r>
+          </a:p>
+        </p:txBody>
+      </p:sp>
+      <p:pic>
+        <p:nvPicPr>
+          <p:cNvPr id="28" name="Picture 27" descr="att.png"/>
+          <p:cNvPicPr>
+            <a:picLocks noChangeAspect="1"/>
+          </p:cNvPicPr>
+          <p:nvPr/>
+        </p:nvPicPr>
+        <p:blipFill>
+          <a:blip r:embed="rId12"/>
+          <a:stretch>
+            <a:fillRect/>
+          </a:stretch>
+        </p:blipFill>
+        <p:spPr>
+          <a:xfrm>
+            <a:off x="6766560" y="5394960"/>
+            <a:ext cx="2743200" cy="545077"/>
+          </a:xfrm>
+          <a:prstGeom prst="rect">
+            <a:avLst/>
+          </a:prstGeom>
+        </p:spPr>
+      </p:pic>
+      <p:pic>
+        <p:nvPicPr>
+          <p:cNvPr id="29" name="Picture 28" descr="spot.png"/>
+          <p:cNvPicPr>
+            <a:picLocks noChangeAspect="1"/>
+          </p:cNvPicPr>
+          <p:nvPr/>
+        </p:nvPicPr>
+        <p:blipFill>
+          <a:blip r:embed="rId13"/>
+          <a:stretch>
+            <a:fillRect/>
+          </a:stretch>
+        </p:blipFill>
+        <p:spPr>
+          <a:xfrm>
+            <a:off x="9601200" y="5440680"/>
+            <a:ext cx="2011680" cy="364784"/>
+          </a:xfrm>
+          <a:prstGeom prst="rect">
+            <a:avLst/>
+          </a:prstGeom>
+        </p:spPr>
+      </p:pic>
     </p:spTree>
   </p:cSld>
   <p:clrMapOvr>
@@ -10071,7 +10912,7 @@
                 </a:solidFill>
                 <a:latin typeface="Georgia"/>
               </a:rPr>
-              <a:t>5. Results and verification</a:t>
+              <a:t>5. The rendering pipeline: shadows, ambient, tone map</a:t>
             </a:r>
           </a:p>
         </p:txBody>
@@ -10118,24 +10959,54 @@
           </a:p>
         </p:txBody>
       </p:sp>
-      <p:graphicFrame>
-        <p:nvGraphicFramePr>
-          <p:cNvPr id="8" name="Chart 7"/>
-          <p:cNvGraphicFramePr>
-            <a:graphicFrameLocks noGrp="1"/>
-          </p:cNvGraphicFramePr>
-          <p:nvPr/>
-        </p:nvGraphicFramePr>
-        <p:xfrm>
-          <a:off x="548640" y="1051560"/>
-          <a:ext cx="5852160" cy="2926080"/>
-        </p:xfrm>
-        <a:graphic>
-          <a:graphicData uri="http://schemas.openxmlformats.org/drawingml/2006/chart">
-            <c:chart xmlns:c="http://schemas.openxmlformats.org/drawingml/2006/chart" r:id="rId4"/>
-          </a:graphicData>
-        </a:graphic>
-      </p:graphicFrame>
+      <p:sp>
+        <p:nvSpPr>
+          <p:cNvPr id="8" name="Rounded Rectangle 7"/>
+          <p:cNvSpPr/>
+          <p:nvPr/>
+        </p:nvSpPr>
+        <p:spPr>
+          <a:xfrm>
+            <a:off x="548640" y="1097280"/>
+            <a:ext cx="1417320" cy="731520"/>
+          </a:xfrm>
+          <a:prstGeom prst="roundRect">
+            <a:avLst>
+              <a:gd name="adj" fmla="val 6000"/>
+            </a:avLst>
+          </a:prstGeom>
+          <a:solidFill>
+            <a:srgbClr val="FFFFFF"/>
+          </a:solidFill>
+          <a:ln w="9525">
+            <a:solidFill>
+              <a:srgbClr val="0F8F85"/>
+            </a:solidFill>
+          </a:ln>
+          <a:effectLst/>
+        </p:spPr>
+        <p:style>
+          <a:lnRef idx="1">
+            <a:schemeClr val="accent1"/>
+          </a:lnRef>
+          <a:fillRef idx="3">
+            <a:schemeClr val="accent1"/>
+          </a:fillRef>
+          <a:effectRef idx="2">
+            <a:schemeClr val="accent1"/>
+          </a:effectRef>
+          <a:fontRef idx="minor">
+            <a:schemeClr val="lt1"/>
+          </a:fontRef>
+        </p:style>
+        <p:txBody>
+          <a:bodyPr rtlCol="0" anchor="ctr"/>
+          <a:lstStyle/>
+          <a:p>
+            <a:pPr algn="ctr"/>
+          </a:p>
+        </p:txBody>
+      </p:sp>
       <p:sp>
         <p:nvSpPr>
           <p:cNvPr id="9" name="TextBox 8"/>
@@ -10144,8 +11015,920 @@
         </p:nvSpPr>
         <p:spPr>
           <a:xfrm>
-            <a:off x="548640" y="4023360"/>
-            <a:ext cx="5852160" cy="411480"/>
+            <a:off x="548640" y="1097280"/>
+            <a:ext cx="1417320" cy="731520"/>
+          </a:xfrm>
+          <a:prstGeom prst="rect">
+            <a:avLst/>
+          </a:prstGeom>
+          <a:noFill/>
+        </p:spPr>
+        <p:txBody>
+          <a:bodyPr wrap="square" lIns="36576" rIns="36576" tIns="18288" bIns="18288" anchor="ctr">
+            <a:spAutoFit/>
+          </a:bodyPr>
+          <a:lstStyle/>
+          <a:p>
+            <a:pPr algn="ctr">
+              <a:lnSpc>
+                <a:spcPct val="100000"/>
+              </a:lnSpc>
+              <a:spcAft>
+                <a:spcPts val="0"/>
+              </a:spcAft>
+            </a:pPr>
+            <a:r>
+              <a:rPr sz="1300" b="0" i="0">
+                <a:solidFill>
+                  <a:srgbClr val="1E293B"/>
+                </a:solidFill>
+                <a:latin typeface="Calibri"/>
+              </a:rPr>
+              <a:t>Sky</a:t>
+            </a:r>
+          </a:p>
+          <a:p>
+            <a:pPr algn="ctr">
+              <a:lnSpc>
+                <a:spcPct val="100000"/>
+              </a:lnSpc>
+              <a:spcAft>
+                <a:spcPts val="0"/>
+              </a:spcAft>
+            </a:pPr>
+            <a:r>
+              <a:rPr sz="1300" b="0" i="0">
+                <a:solidFill>
+                  <a:srgbClr val="1E293B"/>
+                </a:solidFill>
+                <a:latin typeface="Calibri"/>
+              </a:rPr>
+              <a:t>table</a:t>
+            </a:r>
+          </a:p>
+        </p:txBody>
+      </p:sp>
+      <p:cxnSp>
+        <p:nvCxnSpPr>
+          <p:cNvPr id="10" name="Connector 9"/>
+          <p:cNvCxnSpPr/>
+          <p:nvPr/>
+        </p:nvCxnSpPr>
+        <p:spPr>
+          <a:xfrm>
+            <a:off x="1965960" y="1463040"/>
+            <a:ext cx="182880" cy="0"/>
+          </a:xfrm>
+          <a:prstGeom prst="line">
+            <a:avLst/>
+          </a:prstGeom>
+          <a:ln w="19050">
+            <a:solidFill>
+              <a:srgbClr val="0F8F85"/>
+            </a:solidFill>
+            <a:tailEnd type="triangle"/>
+          </a:ln>
+        </p:spPr>
+        <p:style>
+          <a:lnRef idx="2">
+            <a:schemeClr val="accent1"/>
+          </a:lnRef>
+          <a:fillRef idx="0">
+            <a:schemeClr val="accent1"/>
+          </a:fillRef>
+          <a:effectRef idx="1">
+            <a:schemeClr val="accent1"/>
+          </a:effectRef>
+          <a:fontRef idx="minor">
+            <a:schemeClr val="tx1"/>
+          </a:fontRef>
+        </p:style>
+      </p:cxnSp>
+      <p:sp>
+        <p:nvSpPr>
+          <p:cNvPr id="11" name="Rounded Rectangle 10"/>
+          <p:cNvSpPr/>
+          <p:nvPr/>
+        </p:nvSpPr>
+        <p:spPr>
+          <a:xfrm>
+            <a:off x="2148840" y="1097280"/>
+            <a:ext cx="1417320" cy="731520"/>
+          </a:xfrm>
+          <a:prstGeom prst="roundRect">
+            <a:avLst>
+              <a:gd name="adj" fmla="val 6000"/>
+            </a:avLst>
+          </a:prstGeom>
+          <a:solidFill>
+            <a:srgbClr val="FFFFFF"/>
+          </a:solidFill>
+          <a:ln w="9525">
+            <a:solidFill>
+              <a:srgbClr val="0F8F85"/>
+            </a:solidFill>
+          </a:ln>
+          <a:effectLst/>
+        </p:spPr>
+        <p:style>
+          <a:lnRef idx="1">
+            <a:schemeClr val="accent1"/>
+          </a:lnRef>
+          <a:fillRef idx="3">
+            <a:schemeClr val="accent1"/>
+          </a:fillRef>
+          <a:effectRef idx="2">
+            <a:schemeClr val="accent1"/>
+          </a:effectRef>
+          <a:fontRef idx="minor">
+            <a:schemeClr val="lt1"/>
+          </a:fontRef>
+        </p:style>
+        <p:txBody>
+          <a:bodyPr rtlCol="0" anchor="ctr"/>
+          <a:lstStyle/>
+          <a:p>
+            <a:pPr algn="ctr"/>
+          </a:p>
+        </p:txBody>
+      </p:sp>
+      <p:sp>
+        <p:nvSpPr>
+          <p:cNvPr id="12" name="TextBox 11"/>
+          <p:cNvSpPr txBox="1"/>
+          <p:nvPr/>
+        </p:nvSpPr>
+        <p:spPr>
+          <a:xfrm>
+            <a:off x="2148840" y="1097280"/>
+            <a:ext cx="1417320" cy="731520"/>
+          </a:xfrm>
+          <a:prstGeom prst="rect">
+            <a:avLst/>
+          </a:prstGeom>
+          <a:noFill/>
+        </p:spPr>
+        <p:txBody>
+          <a:bodyPr wrap="square" lIns="36576" rIns="36576" tIns="18288" bIns="18288" anchor="ctr">
+            <a:spAutoFit/>
+          </a:bodyPr>
+          <a:lstStyle/>
+          <a:p>
+            <a:pPr algn="ctr">
+              <a:lnSpc>
+                <a:spcPct val="100000"/>
+              </a:lnSpc>
+              <a:spcAft>
+                <a:spcPts val="0"/>
+              </a:spcAft>
+            </a:pPr>
+            <a:r>
+              <a:rPr sz="1300" b="0" i="0">
+                <a:solidFill>
+                  <a:srgbClr val="1E293B"/>
+                </a:solidFill>
+                <a:latin typeface="Calibri"/>
+              </a:rPr>
+              <a:t>Shadows</a:t>
+            </a:r>
+          </a:p>
+          <a:p>
+            <a:pPr algn="ctr">
+              <a:lnSpc>
+                <a:spcPct val="100000"/>
+              </a:lnSpc>
+              <a:spcAft>
+                <a:spcPts val="0"/>
+              </a:spcAft>
+            </a:pPr>
+            <a:r>
+              <a:rPr sz="1300" b="0" i="0">
+                <a:solidFill>
+                  <a:srgbClr val="1E293B"/>
+                </a:solidFill>
+                <a:latin typeface="Calibri"/>
+              </a:rPr>
+              <a:t>3 cascades</a:t>
+            </a:r>
+          </a:p>
+        </p:txBody>
+      </p:sp>
+      <p:cxnSp>
+        <p:nvCxnSpPr>
+          <p:cNvPr id="13" name="Connector 12"/>
+          <p:cNvCxnSpPr/>
+          <p:nvPr/>
+        </p:nvCxnSpPr>
+        <p:spPr>
+          <a:xfrm>
+            <a:off x="3566160" y="1463040"/>
+            <a:ext cx="182880" cy="0"/>
+          </a:xfrm>
+          <a:prstGeom prst="line">
+            <a:avLst/>
+          </a:prstGeom>
+          <a:ln w="19050">
+            <a:solidFill>
+              <a:srgbClr val="0F8F85"/>
+            </a:solidFill>
+            <a:tailEnd type="triangle"/>
+          </a:ln>
+        </p:spPr>
+        <p:style>
+          <a:lnRef idx="2">
+            <a:schemeClr val="accent1"/>
+          </a:lnRef>
+          <a:fillRef idx="0">
+            <a:schemeClr val="accent1"/>
+          </a:fillRef>
+          <a:effectRef idx="1">
+            <a:schemeClr val="accent1"/>
+          </a:effectRef>
+          <a:fontRef idx="minor">
+            <a:schemeClr val="tx1"/>
+          </a:fontRef>
+        </p:style>
+      </p:cxnSp>
+      <p:sp>
+        <p:nvSpPr>
+          <p:cNvPr id="14" name="Rounded Rectangle 13"/>
+          <p:cNvSpPr/>
+          <p:nvPr/>
+        </p:nvSpPr>
+        <p:spPr>
+          <a:xfrm>
+            <a:off x="3749039" y="1097280"/>
+            <a:ext cx="1417320" cy="731520"/>
+          </a:xfrm>
+          <a:prstGeom prst="roundRect">
+            <a:avLst>
+              <a:gd name="adj" fmla="val 6000"/>
+            </a:avLst>
+          </a:prstGeom>
+          <a:solidFill>
+            <a:srgbClr val="FFFFFF"/>
+          </a:solidFill>
+          <a:ln w="9525">
+            <a:solidFill>
+              <a:srgbClr val="0F8F85"/>
+            </a:solidFill>
+          </a:ln>
+          <a:effectLst/>
+        </p:spPr>
+        <p:style>
+          <a:lnRef idx="1">
+            <a:schemeClr val="accent1"/>
+          </a:lnRef>
+          <a:fillRef idx="3">
+            <a:schemeClr val="accent1"/>
+          </a:fillRef>
+          <a:effectRef idx="2">
+            <a:schemeClr val="accent1"/>
+          </a:effectRef>
+          <a:fontRef idx="minor">
+            <a:schemeClr val="lt1"/>
+          </a:fontRef>
+        </p:style>
+        <p:txBody>
+          <a:bodyPr rtlCol="0" anchor="ctr"/>
+          <a:lstStyle/>
+          <a:p>
+            <a:pPr algn="ctr"/>
+          </a:p>
+        </p:txBody>
+      </p:sp>
+      <p:sp>
+        <p:nvSpPr>
+          <p:cNvPr id="15" name="TextBox 14"/>
+          <p:cNvSpPr txBox="1"/>
+          <p:nvPr/>
+        </p:nvSpPr>
+        <p:spPr>
+          <a:xfrm>
+            <a:off x="3749039" y="1097280"/>
+            <a:ext cx="1417320" cy="731520"/>
+          </a:xfrm>
+          <a:prstGeom prst="rect">
+            <a:avLst/>
+          </a:prstGeom>
+          <a:noFill/>
+        </p:spPr>
+        <p:txBody>
+          <a:bodyPr wrap="square" lIns="36576" rIns="36576" tIns="18288" bIns="18288" anchor="ctr">
+            <a:spAutoFit/>
+          </a:bodyPr>
+          <a:lstStyle/>
+          <a:p>
+            <a:pPr algn="ctr">
+              <a:lnSpc>
+                <a:spcPct val="100000"/>
+              </a:lnSpc>
+              <a:spcAft>
+                <a:spcPts val="0"/>
+              </a:spcAft>
+            </a:pPr>
+            <a:r>
+              <a:rPr sz="1300" b="0" i="0">
+                <a:solidFill>
+                  <a:srgbClr val="1E293B"/>
+                </a:solidFill>
+                <a:latin typeface="Calibri"/>
+              </a:rPr>
+              <a:t>Geometry</a:t>
+            </a:r>
+          </a:p>
+          <a:p>
+            <a:pPr algn="ctr">
+              <a:lnSpc>
+                <a:spcPct val="100000"/>
+              </a:lnSpc>
+              <a:spcAft>
+                <a:spcPts val="0"/>
+              </a:spcAft>
+            </a:pPr>
+            <a:r>
+              <a:rPr sz="1300" b="0" i="0">
+                <a:solidFill>
+                  <a:srgbClr val="1E293B"/>
+                </a:solidFill>
+                <a:latin typeface="Calibri"/>
+              </a:rPr>
+              <a:t>G-buffer</a:t>
+            </a:r>
+          </a:p>
+        </p:txBody>
+      </p:sp>
+      <p:cxnSp>
+        <p:nvCxnSpPr>
+          <p:cNvPr id="16" name="Connector 15"/>
+          <p:cNvCxnSpPr/>
+          <p:nvPr/>
+        </p:nvCxnSpPr>
+        <p:spPr>
+          <a:xfrm>
+            <a:off x="5166359" y="1463040"/>
+            <a:ext cx="182881" cy="0"/>
+          </a:xfrm>
+          <a:prstGeom prst="line">
+            <a:avLst/>
+          </a:prstGeom>
+          <a:ln w="19050">
+            <a:solidFill>
+              <a:srgbClr val="0F8F85"/>
+            </a:solidFill>
+            <a:tailEnd type="triangle"/>
+          </a:ln>
+        </p:spPr>
+        <p:style>
+          <a:lnRef idx="2">
+            <a:schemeClr val="accent1"/>
+          </a:lnRef>
+          <a:fillRef idx="0">
+            <a:schemeClr val="accent1"/>
+          </a:fillRef>
+          <a:effectRef idx="1">
+            <a:schemeClr val="accent1"/>
+          </a:effectRef>
+          <a:fontRef idx="minor">
+            <a:schemeClr val="tx1"/>
+          </a:fontRef>
+        </p:style>
+      </p:cxnSp>
+      <p:sp>
+        <p:nvSpPr>
+          <p:cNvPr id="17" name="Rounded Rectangle 16"/>
+          <p:cNvSpPr/>
+          <p:nvPr/>
+        </p:nvSpPr>
+        <p:spPr>
+          <a:xfrm>
+            <a:off x="5349240" y="1097280"/>
+            <a:ext cx="1417320" cy="731520"/>
+          </a:xfrm>
+          <a:prstGeom prst="roundRect">
+            <a:avLst>
+              <a:gd name="adj" fmla="val 6000"/>
+            </a:avLst>
+          </a:prstGeom>
+          <a:solidFill>
+            <a:srgbClr val="FFFFFF"/>
+          </a:solidFill>
+          <a:ln w="9525">
+            <a:solidFill>
+              <a:srgbClr val="0F8F85"/>
+            </a:solidFill>
+          </a:ln>
+          <a:effectLst/>
+        </p:spPr>
+        <p:style>
+          <a:lnRef idx="1">
+            <a:schemeClr val="accent1"/>
+          </a:lnRef>
+          <a:fillRef idx="3">
+            <a:schemeClr val="accent1"/>
+          </a:fillRef>
+          <a:effectRef idx="2">
+            <a:schemeClr val="accent1"/>
+          </a:effectRef>
+          <a:fontRef idx="minor">
+            <a:schemeClr val="lt1"/>
+          </a:fontRef>
+        </p:style>
+        <p:txBody>
+          <a:bodyPr rtlCol="0" anchor="ctr"/>
+          <a:lstStyle/>
+          <a:p>
+            <a:pPr algn="ctr"/>
+          </a:p>
+        </p:txBody>
+      </p:sp>
+      <p:sp>
+        <p:nvSpPr>
+          <p:cNvPr id="18" name="TextBox 17"/>
+          <p:cNvSpPr txBox="1"/>
+          <p:nvPr/>
+        </p:nvSpPr>
+        <p:spPr>
+          <a:xfrm>
+            <a:off x="5349240" y="1097280"/>
+            <a:ext cx="1417320" cy="731520"/>
+          </a:xfrm>
+          <a:prstGeom prst="rect">
+            <a:avLst/>
+          </a:prstGeom>
+          <a:noFill/>
+        </p:spPr>
+        <p:txBody>
+          <a:bodyPr wrap="square" lIns="36576" rIns="36576" tIns="18288" bIns="18288" anchor="ctr">
+            <a:spAutoFit/>
+          </a:bodyPr>
+          <a:lstStyle/>
+          <a:p>
+            <a:pPr algn="ctr">
+              <a:lnSpc>
+                <a:spcPct val="100000"/>
+              </a:lnSpc>
+              <a:spcAft>
+                <a:spcPts val="0"/>
+              </a:spcAft>
+            </a:pPr>
+            <a:r>
+              <a:rPr sz="1300" b="0" i="0">
+                <a:solidFill>
+                  <a:srgbClr val="1E293B"/>
+                </a:solidFill>
+                <a:latin typeface="Calibri"/>
+              </a:rPr>
+              <a:t>SSAO</a:t>
+            </a:r>
+          </a:p>
+        </p:txBody>
+      </p:sp>
+      <p:cxnSp>
+        <p:nvCxnSpPr>
+          <p:cNvPr id="19" name="Connector 18"/>
+          <p:cNvCxnSpPr/>
+          <p:nvPr/>
+        </p:nvCxnSpPr>
+        <p:spPr>
+          <a:xfrm>
+            <a:off x="6766559" y="1463040"/>
+            <a:ext cx="182881" cy="0"/>
+          </a:xfrm>
+          <a:prstGeom prst="line">
+            <a:avLst/>
+          </a:prstGeom>
+          <a:ln w="19050">
+            <a:solidFill>
+              <a:srgbClr val="0F8F85"/>
+            </a:solidFill>
+            <a:tailEnd type="triangle"/>
+          </a:ln>
+        </p:spPr>
+        <p:style>
+          <a:lnRef idx="2">
+            <a:schemeClr val="accent1"/>
+          </a:lnRef>
+          <a:fillRef idx="0">
+            <a:schemeClr val="accent1"/>
+          </a:fillRef>
+          <a:effectRef idx="1">
+            <a:schemeClr val="accent1"/>
+          </a:effectRef>
+          <a:fontRef idx="minor">
+            <a:schemeClr val="tx1"/>
+          </a:fontRef>
+        </p:style>
+      </p:cxnSp>
+      <p:sp>
+        <p:nvSpPr>
+          <p:cNvPr id="20" name="Rounded Rectangle 19"/>
+          <p:cNvSpPr/>
+          <p:nvPr/>
+        </p:nvSpPr>
+        <p:spPr>
+          <a:xfrm>
+            <a:off x="6949440" y="1097280"/>
+            <a:ext cx="1417320" cy="731520"/>
+          </a:xfrm>
+          <a:prstGeom prst="roundRect">
+            <a:avLst>
+              <a:gd name="adj" fmla="val 6000"/>
+            </a:avLst>
+          </a:prstGeom>
+          <a:solidFill>
+            <a:srgbClr val="FFFFFF"/>
+          </a:solidFill>
+          <a:ln w="9525">
+            <a:solidFill>
+              <a:srgbClr val="0F8F85"/>
+            </a:solidFill>
+          </a:ln>
+          <a:effectLst/>
+        </p:spPr>
+        <p:style>
+          <a:lnRef idx="1">
+            <a:schemeClr val="accent1"/>
+          </a:lnRef>
+          <a:fillRef idx="3">
+            <a:schemeClr val="accent1"/>
+          </a:fillRef>
+          <a:effectRef idx="2">
+            <a:schemeClr val="accent1"/>
+          </a:effectRef>
+          <a:fontRef idx="minor">
+            <a:schemeClr val="lt1"/>
+          </a:fontRef>
+        </p:style>
+        <p:txBody>
+          <a:bodyPr rtlCol="0" anchor="ctr"/>
+          <a:lstStyle/>
+          <a:p>
+            <a:pPr algn="ctr"/>
+          </a:p>
+        </p:txBody>
+      </p:sp>
+      <p:sp>
+        <p:nvSpPr>
+          <p:cNvPr id="21" name="TextBox 20"/>
+          <p:cNvSpPr txBox="1"/>
+          <p:nvPr/>
+        </p:nvSpPr>
+        <p:spPr>
+          <a:xfrm>
+            <a:off x="6949440" y="1097280"/>
+            <a:ext cx="1417320" cy="731520"/>
+          </a:xfrm>
+          <a:prstGeom prst="rect">
+            <a:avLst/>
+          </a:prstGeom>
+          <a:noFill/>
+        </p:spPr>
+        <p:txBody>
+          <a:bodyPr wrap="square" lIns="36576" rIns="36576" tIns="18288" bIns="18288" anchor="ctr">
+            <a:spAutoFit/>
+          </a:bodyPr>
+          <a:lstStyle/>
+          <a:p>
+            <a:pPr algn="ctr">
+              <a:lnSpc>
+                <a:spcPct val="100000"/>
+              </a:lnSpc>
+              <a:spcAft>
+                <a:spcPts val="0"/>
+              </a:spcAft>
+            </a:pPr>
+            <a:r>
+              <a:rPr sz="1300" b="0" i="0">
+                <a:solidFill>
+                  <a:srgbClr val="1E293B"/>
+                </a:solidFill>
+                <a:latin typeface="Calibri"/>
+              </a:rPr>
+              <a:t>Lighting,</a:t>
+            </a:r>
+          </a:p>
+          <a:p>
+            <a:pPr algn="ctr">
+              <a:lnSpc>
+                <a:spcPct val="100000"/>
+              </a:lnSpc>
+              <a:spcAft>
+                <a:spcPts val="0"/>
+              </a:spcAft>
+            </a:pPr>
+            <a:r>
+              <a:rPr sz="1300" b="0" i="0">
+                <a:solidFill>
+                  <a:srgbClr val="1E293B"/>
+                </a:solidFill>
+                <a:latin typeface="Calibri"/>
+              </a:rPr>
+              <a:t>reflect, fog</a:t>
+            </a:r>
+          </a:p>
+        </p:txBody>
+      </p:sp>
+      <p:cxnSp>
+        <p:nvCxnSpPr>
+          <p:cNvPr id="22" name="Connector 21"/>
+          <p:cNvCxnSpPr/>
+          <p:nvPr/>
+        </p:nvCxnSpPr>
+        <p:spPr>
+          <a:xfrm>
+            <a:off x="8366760" y="1463040"/>
+            <a:ext cx="182880" cy="0"/>
+          </a:xfrm>
+          <a:prstGeom prst="line">
+            <a:avLst/>
+          </a:prstGeom>
+          <a:ln w="19050">
+            <a:solidFill>
+              <a:srgbClr val="0F8F85"/>
+            </a:solidFill>
+            <a:tailEnd type="triangle"/>
+          </a:ln>
+        </p:spPr>
+        <p:style>
+          <a:lnRef idx="2">
+            <a:schemeClr val="accent1"/>
+          </a:lnRef>
+          <a:fillRef idx="0">
+            <a:schemeClr val="accent1"/>
+          </a:fillRef>
+          <a:effectRef idx="1">
+            <a:schemeClr val="accent1"/>
+          </a:effectRef>
+          <a:fontRef idx="minor">
+            <a:schemeClr val="tx1"/>
+          </a:fontRef>
+        </p:style>
+      </p:cxnSp>
+      <p:sp>
+        <p:nvSpPr>
+          <p:cNvPr id="23" name="Rounded Rectangle 22"/>
+          <p:cNvSpPr/>
+          <p:nvPr/>
+        </p:nvSpPr>
+        <p:spPr>
+          <a:xfrm>
+            <a:off x="8549640" y="1097280"/>
+            <a:ext cx="1417320" cy="731520"/>
+          </a:xfrm>
+          <a:prstGeom prst="roundRect">
+            <a:avLst>
+              <a:gd name="adj" fmla="val 6000"/>
+            </a:avLst>
+          </a:prstGeom>
+          <a:solidFill>
+            <a:srgbClr val="FFFFFF"/>
+          </a:solidFill>
+          <a:ln w="9525">
+            <a:solidFill>
+              <a:srgbClr val="0F8F85"/>
+            </a:solidFill>
+          </a:ln>
+          <a:effectLst/>
+        </p:spPr>
+        <p:style>
+          <a:lnRef idx="1">
+            <a:schemeClr val="accent1"/>
+          </a:lnRef>
+          <a:fillRef idx="3">
+            <a:schemeClr val="accent1"/>
+          </a:fillRef>
+          <a:effectRef idx="2">
+            <a:schemeClr val="accent1"/>
+          </a:effectRef>
+          <a:fontRef idx="minor">
+            <a:schemeClr val="lt1"/>
+          </a:fontRef>
+        </p:style>
+        <p:txBody>
+          <a:bodyPr rtlCol="0" anchor="ctr"/>
+          <a:lstStyle/>
+          <a:p>
+            <a:pPr algn="ctr"/>
+          </a:p>
+        </p:txBody>
+      </p:sp>
+      <p:sp>
+        <p:nvSpPr>
+          <p:cNvPr id="24" name="TextBox 23"/>
+          <p:cNvSpPr txBox="1"/>
+          <p:nvPr/>
+        </p:nvSpPr>
+        <p:spPr>
+          <a:xfrm>
+            <a:off x="8549640" y="1097280"/>
+            <a:ext cx="1417320" cy="731520"/>
+          </a:xfrm>
+          <a:prstGeom prst="rect">
+            <a:avLst/>
+          </a:prstGeom>
+          <a:noFill/>
+        </p:spPr>
+        <p:txBody>
+          <a:bodyPr wrap="square" lIns="36576" rIns="36576" tIns="18288" bIns="18288" anchor="ctr">
+            <a:spAutoFit/>
+          </a:bodyPr>
+          <a:lstStyle/>
+          <a:p>
+            <a:pPr algn="ctr">
+              <a:lnSpc>
+                <a:spcPct val="100000"/>
+              </a:lnSpc>
+              <a:spcAft>
+                <a:spcPts val="0"/>
+              </a:spcAft>
+            </a:pPr>
+            <a:r>
+              <a:rPr sz="1300" b="0" i="0">
+                <a:solidFill>
+                  <a:srgbClr val="1E293B"/>
+                </a:solidFill>
+                <a:latin typeface="Calibri"/>
+              </a:rPr>
+              <a:t>Smoke,</a:t>
+            </a:r>
+          </a:p>
+          <a:p>
+            <a:pPr algn="ctr">
+              <a:lnSpc>
+                <a:spcPct val="100000"/>
+              </a:lnSpc>
+              <a:spcAft>
+                <a:spcPts val="0"/>
+              </a:spcAft>
+            </a:pPr>
+            <a:r>
+              <a:rPr sz="1300" b="0" i="0">
+                <a:solidFill>
+                  <a:srgbClr val="1E293B"/>
+                </a:solidFill>
+                <a:latin typeface="Calibri"/>
+              </a:rPr>
+              <a:t>fire</a:t>
+            </a:r>
+          </a:p>
+        </p:txBody>
+      </p:sp>
+      <p:cxnSp>
+        <p:nvCxnSpPr>
+          <p:cNvPr id="25" name="Connector 24"/>
+          <p:cNvCxnSpPr/>
+          <p:nvPr/>
+        </p:nvCxnSpPr>
+        <p:spPr>
+          <a:xfrm>
+            <a:off x="9966960" y="1463040"/>
+            <a:ext cx="182880" cy="0"/>
+          </a:xfrm>
+          <a:prstGeom prst="line">
+            <a:avLst/>
+          </a:prstGeom>
+          <a:ln w="19050">
+            <a:solidFill>
+              <a:srgbClr val="0F8F85"/>
+            </a:solidFill>
+            <a:tailEnd type="triangle"/>
+          </a:ln>
+        </p:spPr>
+        <p:style>
+          <a:lnRef idx="2">
+            <a:schemeClr val="accent1"/>
+          </a:lnRef>
+          <a:fillRef idx="0">
+            <a:schemeClr val="accent1"/>
+          </a:fillRef>
+          <a:effectRef idx="1">
+            <a:schemeClr val="accent1"/>
+          </a:effectRef>
+          <a:fontRef idx="minor">
+            <a:schemeClr val="tx1"/>
+          </a:fontRef>
+        </p:style>
+      </p:cxnSp>
+      <p:sp>
+        <p:nvSpPr>
+          <p:cNvPr id="26" name="Rounded Rectangle 25"/>
+          <p:cNvSpPr/>
+          <p:nvPr/>
+        </p:nvSpPr>
+        <p:spPr>
+          <a:xfrm>
+            <a:off x="10149840" y="1097280"/>
+            <a:ext cx="1417320" cy="731520"/>
+          </a:xfrm>
+          <a:prstGeom prst="roundRect">
+            <a:avLst>
+              <a:gd name="adj" fmla="val 6000"/>
+            </a:avLst>
+          </a:prstGeom>
+          <a:solidFill>
+            <a:srgbClr val="FFFFFF"/>
+          </a:solidFill>
+          <a:ln w="9525">
+            <a:solidFill>
+              <a:srgbClr val="0F8F85"/>
+            </a:solidFill>
+          </a:ln>
+          <a:effectLst/>
+        </p:spPr>
+        <p:style>
+          <a:lnRef idx="1">
+            <a:schemeClr val="accent1"/>
+          </a:lnRef>
+          <a:fillRef idx="3">
+            <a:schemeClr val="accent1"/>
+          </a:fillRef>
+          <a:effectRef idx="2">
+            <a:schemeClr val="accent1"/>
+          </a:effectRef>
+          <a:fontRef idx="minor">
+            <a:schemeClr val="lt1"/>
+          </a:fontRef>
+        </p:style>
+        <p:txBody>
+          <a:bodyPr rtlCol="0" anchor="ctr"/>
+          <a:lstStyle/>
+          <a:p>
+            <a:pPr algn="ctr"/>
+          </a:p>
+        </p:txBody>
+      </p:sp>
+      <p:sp>
+        <p:nvSpPr>
+          <p:cNvPr id="27" name="TextBox 26"/>
+          <p:cNvSpPr txBox="1"/>
+          <p:nvPr/>
+        </p:nvSpPr>
+        <p:spPr>
+          <a:xfrm>
+            <a:off x="10149840" y="1097280"/>
+            <a:ext cx="1417320" cy="731520"/>
+          </a:xfrm>
+          <a:prstGeom prst="rect">
+            <a:avLst/>
+          </a:prstGeom>
+          <a:noFill/>
+        </p:spPr>
+        <p:txBody>
+          <a:bodyPr wrap="square" lIns="36576" rIns="36576" tIns="18288" bIns="18288" anchor="ctr">
+            <a:spAutoFit/>
+          </a:bodyPr>
+          <a:lstStyle/>
+          <a:p>
+            <a:pPr algn="ctr">
+              <a:lnSpc>
+                <a:spcPct val="100000"/>
+              </a:lnSpc>
+              <a:spcAft>
+                <a:spcPts val="0"/>
+              </a:spcAft>
+            </a:pPr>
+            <a:r>
+              <a:rPr sz="1300" b="0" i="0">
+                <a:solidFill>
+                  <a:srgbClr val="1E293B"/>
+                </a:solidFill>
+                <a:latin typeface="Calibri"/>
+              </a:rPr>
+              <a:t>Bloom, ACES,</a:t>
+            </a:r>
+          </a:p>
+          <a:p>
+            <a:pPr algn="ctr">
+              <a:lnSpc>
+                <a:spcPct val="100000"/>
+              </a:lnSpc>
+              <a:spcAft>
+                <a:spcPts val="0"/>
+              </a:spcAft>
+            </a:pPr>
+            <a:r>
+              <a:rPr sz="1300" b="0" i="0">
+                <a:solidFill>
+                  <a:srgbClr val="1E293B"/>
+                </a:solidFill>
+                <a:latin typeface="Calibri"/>
+              </a:rPr>
+              <a:t>FXAA</a:t>
+            </a:r>
+          </a:p>
+        </p:txBody>
+      </p:sp>
+      <p:sp>
+        <p:nvSpPr>
+          <p:cNvPr id="28" name="TextBox 27"/>
+          <p:cNvSpPr txBox="1"/>
+          <p:nvPr/>
+        </p:nvSpPr>
+        <p:spPr>
+          <a:xfrm>
+            <a:off x="548640" y="2011680"/>
+            <a:ext cx="6309360" cy="868680"/>
           </a:xfrm>
           <a:prstGeom prst="rect">
             <a:avLst/>
@@ -10167,343 +11950,227 @@
               </a:spcAft>
             </a:pPr>
             <a:r>
-              <a:rPr sz="2000" b="1" i="0">
+              <a:rPr sz="1600" b="1" i="0">
+                <a:solidFill>
+                  <a:srgbClr val="1E293B"/>
+                </a:solidFill>
+                <a:latin typeface="Calibri"/>
+              </a:rPr>
+              <a:t>Deferred shading: </a:t>
+            </a:r>
+            <a:r>
+              <a:rPr sz="1600" b="0" i="0">
+                <a:solidFill>
+                  <a:srgbClr val="1E293B"/>
+                </a:solidFill>
+                <a:latin typeface="Calibri"/>
+              </a:rPr>
+              <a:t>store colour, normal, shininess and depth first, then light each pixel once.</a:t>
+            </a:r>
+          </a:p>
+        </p:txBody>
+      </p:sp>
+      <p:sp>
+        <p:nvSpPr>
+          <p:cNvPr id="29" name="Rounded Rectangle 28"/>
+          <p:cNvSpPr/>
+          <p:nvPr/>
+        </p:nvSpPr>
+        <p:spPr>
+          <a:xfrm>
+            <a:off x="548640" y="2926080"/>
+            <a:ext cx="6309360" cy="3429000"/>
+          </a:xfrm>
+          <a:prstGeom prst="roundRect">
+            <a:avLst>
+              <a:gd name="adj" fmla="val 6000"/>
+            </a:avLst>
+          </a:prstGeom>
+          <a:solidFill>
+            <a:srgbClr val="FFFFFF"/>
+          </a:solidFill>
+          <a:ln w="9525">
+            <a:solidFill>
+              <a:srgbClr val="D5DEE8"/>
+            </a:solidFill>
+          </a:ln>
+          <a:effectLst/>
+        </p:spPr>
+        <p:style>
+          <a:lnRef idx="1">
+            <a:schemeClr val="accent1"/>
+          </a:lnRef>
+          <a:fillRef idx="3">
+            <a:schemeClr val="accent1"/>
+          </a:fillRef>
+          <a:effectRef idx="2">
+            <a:schemeClr val="accent1"/>
+          </a:effectRef>
+          <a:fontRef idx="minor">
+            <a:schemeClr val="lt1"/>
+          </a:fontRef>
+        </p:style>
+        <p:txBody>
+          <a:bodyPr rtlCol="0" anchor="ctr"/>
+          <a:lstStyle/>
+          <a:p>
+            <a:pPr algn="ctr"/>
+          </a:p>
+        </p:txBody>
+      </p:sp>
+      <p:sp>
+        <p:nvSpPr>
+          <p:cNvPr id="30" name="TextBox 29"/>
+          <p:cNvSpPr txBox="1"/>
+          <p:nvPr/>
+        </p:nvSpPr>
+        <p:spPr>
+          <a:xfrm>
+            <a:off x="685800" y="2971800"/>
+            <a:ext cx="5943600" cy="320040"/>
+          </a:xfrm>
+          <a:prstGeom prst="rect">
+            <a:avLst/>
+          </a:prstGeom>
+          <a:noFill/>
+        </p:spPr>
+        <p:txBody>
+          <a:bodyPr wrap="square" lIns="36576" rIns="36576" tIns="18288" bIns="18288" anchor="t">
+            <a:spAutoFit/>
+          </a:bodyPr>
+          <a:lstStyle/>
+          <a:p>
+            <a:pPr algn="l">
+              <a:lnSpc>
+                <a:spcPct val="100000"/>
+              </a:lnSpc>
+              <a:spcAft>
+                <a:spcPts val="400"/>
+              </a:spcAft>
+            </a:pPr>
+            <a:r>
+              <a:rPr sz="1400" b="1" i="0">
                 <a:solidFill>
                   <a:srgbClr val="0F8F85"/>
                 </a:solidFill>
                 <a:latin typeface="Calibri"/>
               </a:rPr>
-              <a:t>10.9 ms</a:t>
-            </a:r>
-            <a:r>
-              <a:rPr sz="2000" b="0" i="0">
-                <a:solidFill>
-                  <a:srgbClr val="1E293B"/>
-                </a:solidFill>
-                <a:latin typeface="Calibri"/>
-              </a:rPr>
-              <a:t> of the 16.7 ms budget at 1080p</a:t>
-            </a:r>
-          </a:p>
-        </p:txBody>
-      </p:sp>
-      <p:graphicFrame>
-        <p:nvGraphicFramePr>
-          <p:cNvPr id="10" name="Table 9"/>
-          <p:cNvGraphicFramePr>
-            <a:graphicFrameLocks noGrp="1"/>
-          </p:cNvGraphicFramePr>
-          <p:nvPr/>
-        </p:nvGraphicFramePr>
-        <p:xfrm>
-          <a:off x="548640" y="4526280"/>
-          <a:ext cx="5852160" cy="1783080"/>
-        </p:xfrm>
-        <a:graphic>
-          <a:graphicData uri="http://schemas.openxmlformats.org/drawingml/2006/table">
-            <a:tbl>
-              <a:tblPr firstRow="1" bandRow="1">
-                <a:tableStyleId>{5C22544A-7EE6-4342-B048-85BDC9FD1C3A}</a:tableStyleId>
-              </a:tblPr>
-              <a:tblGrid>
-                <a:gridCol w="4297680"/>
-                <a:gridCol w="1554480"/>
-              </a:tblGrid>
-              <a:tr h="297180">
-                <a:tc>
-                  <a:txBody>
-                    <a:bodyPr/>
-                    <a:lstStyle/>
-                    <a:p>
-                      <a:pPr algn="l"/>
-                      <a:r>
-                        <a:rPr sz="1400" b="1">
-                          <a:solidFill>
-                            <a:srgbClr val="FFFFFF"/>
-                          </a:solidFill>
-                          <a:latin typeface="Calibri"/>
-                        </a:rPr>
-                        <a:t>Verification</a:t>
-                      </a:r>
-                    </a:p>
-                  </a:txBody>
-                  <a:tcPr marT="18288" marB="18288">
-                    <a:solidFill>
-                      <a:srgbClr val="0F8F85"/>
-                    </a:solidFill>
-                  </a:tcPr>
-                </a:tc>
-                <a:tc>
-                  <a:txBody>
-                    <a:bodyPr/>
-                    <a:lstStyle/>
-                    <a:p>
-                      <a:pPr algn="r"/>
-                      <a:r>
-                        <a:rPr sz="1400" b="1">
-                          <a:solidFill>
-                            <a:srgbClr val="FFFFFF"/>
-                          </a:solidFill>
-                          <a:latin typeface="Calibri"/>
-                        </a:rPr>
-                        <a:t>Count</a:t>
-                      </a:r>
-                    </a:p>
-                  </a:txBody>
-                  <a:tcPr marT="18288" marB="18288">
-                    <a:solidFill>
-                      <a:srgbClr val="0F8F85"/>
-                    </a:solidFill>
-                  </a:tcPr>
-                </a:tc>
-              </a:tr>
-              <a:tr h="297180">
-                <a:tc>
-                  <a:txBody>
-                    <a:bodyPr/>
-                    <a:lstStyle/>
-                    <a:p>
-                      <a:pPr algn="l"/>
-                      <a:r>
-                        <a:rPr sz="1400" b="0">
-                          <a:solidFill>
-                            <a:srgbClr val="1E293B"/>
-                          </a:solidFill>
-                          <a:latin typeface="Calibri"/>
-                        </a:rPr>
-                        <a:t>Unit tests (13 packages)</a:t>
-                      </a:r>
-                    </a:p>
-                  </a:txBody>
-                  <a:tcPr marT="18288" marB="18288">
-                    <a:solidFill>
-                      <a:srgbClr val="FFFFFF"/>
-                    </a:solidFill>
-                  </a:tcPr>
-                </a:tc>
-                <a:tc>
-                  <a:txBody>
-                    <a:bodyPr/>
-                    <a:lstStyle/>
-                    <a:p>
-                      <a:pPr algn="r"/>
-                      <a:r>
-                        <a:rPr sz="1400" b="0">
-                          <a:solidFill>
-                            <a:srgbClr val="1E293B"/>
-                          </a:solidFill>
-                          <a:latin typeface="Calibri"/>
-                        </a:rPr>
-                        <a:t>281</a:t>
-                      </a:r>
-                    </a:p>
-                  </a:txBody>
-                  <a:tcPr marT="18288" marB="18288">
-                    <a:solidFill>
-                      <a:srgbClr val="FFFFFF"/>
-                    </a:solidFill>
-                  </a:tcPr>
-                </a:tc>
-              </a:tr>
-              <a:tr h="297180">
-                <a:tc>
-                  <a:txBody>
-                    <a:bodyPr/>
-                    <a:lstStyle/>
-                    <a:p>
-                      <a:pPr algn="l"/>
-                      <a:r>
-                        <a:rPr sz="1400" b="0">
-                          <a:solidFill>
-                            <a:srgbClr val="1E293B"/>
-                          </a:solidFill>
-                          <a:latin typeface="Calibri"/>
-                        </a:rPr>
-                        <a:t>TextureCheck (exact tiling)</a:t>
-                      </a:r>
-                    </a:p>
-                  </a:txBody>
-                  <a:tcPr marT="18288" marB="18288">
-                    <a:solidFill>
-                      <a:srgbClr val="E6F4F2"/>
-                    </a:solidFill>
-                  </a:tcPr>
-                </a:tc>
-                <a:tc>
-                  <a:txBody>
-                    <a:bodyPr/>
-                    <a:lstStyle/>
-                    <a:p>
-                      <a:pPr algn="r"/>
-                      <a:r>
-                        <a:rPr sz="1400" b="0">
-                          <a:solidFill>
-                            <a:srgbClr val="1E293B"/>
-                          </a:solidFill>
-                          <a:latin typeface="Calibri"/>
-                        </a:rPr>
-                        <a:t>8,318</a:t>
-                      </a:r>
-                    </a:p>
-                  </a:txBody>
-                  <a:tcPr marT="18288" marB="18288">
-                    <a:solidFill>
-                      <a:srgbClr val="E6F4F2"/>
-                    </a:solidFill>
-                  </a:tcPr>
-                </a:tc>
-              </a:tr>
-              <a:tr h="297180">
-                <a:tc>
-                  <a:txBody>
-                    <a:bodyPr/>
-                    <a:lstStyle/>
-                    <a:p>
-                      <a:pPr algn="l"/>
-                      <a:r>
-                        <a:rPr sz="1400" b="0">
-                          <a:solidFill>
-                            <a:srgbClr val="1E293B"/>
-                          </a:solidFill>
-                          <a:latin typeface="Calibri"/>
-                        </a:rPr>
-                        <a:t>RenderCheck</a:t>
-                      </a:r>
-                    </a:p>
-                  </a:txBody>
-                  <a:tcPr marT="18288" marB="18288">
-                    <a:solidFill>
-                      <a:srgbClr val="FFFFFF"/>
-                    </a:solidFill>
-                  </a:tcPr>
-                </a:tc>
-                <a:tc>
-                  <a:txBody>
-                    <a:bodyPr/>
-                    <a:lstStyle/>
-                    <a:p>
-                      <a:pPr algn="r"/>
-                      <a:r>
-                        <a:rPr sz="1400" b="0">
-                          <a:solidFill>
-                            <a:srgbClr val="1E293B"/>
-                          </a:solidFill>
-                          <a:latin typeface="Calibri"/>
-                        </a:rPr>
-                        <a:t>318,567</a:t>
-                      </a:r>
-                    </a:p>
-                  </a:txBody>
-                  <a:tcPr marT="18288" marB="18288">
-                    <a:solidFill>
-                      <a:srgbClr val="FFFFFF"/>
-                    </a:solidFill>
-                  </a:tcPr>
-                </a:tc>
-              </a:tr>
-              <a:tr h="297180">
-                <a:tc>
-                  <a:txBody>
-                    <a:bodyPr/>
-                    <a:lstStyle/>
-                    <a:p>
-                      <a:pPr algn="l"/>
-                      <a:r>
-                        <a:rPr sz="1400" b="0">
-                          <a:solidFill>
-                            <a:srgbClr val="1E293B"/>
-                          </a:solidFill>
-                          <a:latin typeface="Calibri"/>
-                        </a:rPr>
-                        <a:t>GpuCheck</a:t>
-                      </a:r>
-                    </a:p>
-                  </a:txBody>
-                  <a:tcPr marT="18288" marB="18288">
-                    <a:solidFill>
-                      <a:srgbClr val="E6F4F2"/>
-                    </a:solidFill>
-                  </a:tcPr>
-                </a:tc>
-                <a:tc>
-                  <a:txBody>
-                    <a:bodyPr/>
-                    <a:lstStyle/>
-                    <a:p>
-                      <a:pPr algn="r"/>
-                      <a:r>
-                        <a:rPr sz="1400" b="0">
-                          <a:solidFill>
-                            <a:srgbClr val="1E293B"/>
-                          </a:solidFill>
-                          <a:latin typeface="Calibri"/>
-                        </a:rPr>
-                        <a:t>30</a:t>
-                      </a:r>
-                    </a:p>
-                  </a:txBody>
-                  <a:tcPr marT="18288" marB="18288">
-                    <a:solidFill>
-                      <a:srgbClr val="E6F4F2"/>
-                    </a:solidFill>
-                  </a:tcPr>
-                </a:tc>
-              </a:tr>
-              <a:tr h="297180">
-                <a:tc>
-                  <a:txBody>
-                    <a:bodyPr/>
-                    <a:lstStyle/>
-                    <a:p>
-                      <a:pPr algn="l"/>
-                      <a:r>
-                        <a:rPr sz="1400" b="0">
-                          <a:solidFill>
-                            <a:srgbClr val="1E293B"/>
-                          </a:solidFill>
-                          <a:latin typeface="Calibri"/>
-                        </a:rPr>
-                        <a:t>Playthroughs, 5/5 objectives</a:t>
-                      </a:r>
-                    </a:p>
-                  </a:txBody>
-                  <a:tcPr marT="18288" marB="18288">
-                    <a:solidFill>
-                      <a:srgbClr val="FFFFFF"/>
-                    </a:solidFill>
-                  </a:tcPr>
-                </a:tc>
-                <a:tc>
-                  <a:txBody>
-                    <a:bodyPr/>
-                    <a:lstStyle/>
-                    <a:p>
-                      <a:pPr algn="r"/>
-                      <a:r>
-                        <a:rPr sz="1400" b="0">
-                          <a:solidFill>
-                            <a:srgbClr val="1E293B"/>
-                          </a:solidFill>
-                          <a:latin typeface="Calibri"/>
-                        </a:rPr>
-                        <a:t>2</a:t>
-                      </a:r>
-                    </a:p>
-                  </a:txBody>
-                  <a:tcPr marT="18288" marB="18288">
-                    <a:solidFill>
-                      <a:srgbClr val="FFFFFF"/>
-                    </a:solidFill>
-                  </a:tcPr>
-                </a:tc>
-              </a:tr>
-            </a:tbl>
-          </a:graphicData>
-        </a:graphic>
-      </p:graphicFrame>
+              <a:t>Cascaded shadow maps (λ = 0.75, N = 3, n = 0.1, r = 100 m)</a:t>
+            </a:r>
+          </a:p>
+        </p:txBody>
+      </p:sp>
       <p:pic>
         <p:nvPicPr>
-          <p:cNvPr id="11" name="Picture 10" descr="hq.jpg"/>
+          <p:cNvPr id="31" name="Picture 30" descr="csm.png"/>
+          <p:cNvPicPr>
+            <a:picLocks noChangeAspect="1"/>
+          </p:cNvPicPr>
+          <p:nvPr/>
+        </p:nvPicPr>
+        <p:blipFill>
+          <a:blip r:embed="rId4"/>
+          <a:stretch>
+            <a:fillRect/>
+          </a:stretch>
+        </p:blipFill>
+        <p:spPr>
+          <a:xfrm>
+            <a:off x="822960" y="3383280"/>
+            <a:ext cx="5120640" cy="710891"/>
+          </a:xfrm>
+          <a:prstGeom prst="rect">
+            <a:avLst/>
+          </a:prstGeom>
+        </p:spPr>
+      </p:pic>
+      <p:sp>
+        <p:nvSpPr>
+          <p:cNvPr id="32" name="TextBox 31"/>
+          <p:cNvSpPr txBox="1"/>
+          <p:nvPr/>
+        </p:nvSpPr>
+        <p:spPr>
+          <a:xfrm>
+            <a:off x="685800" y="4114800"/>
+            <a:ext cx="5943600" cy="640080"/>
+          </a:xfrm>
+          <a:prstGeom prst="rect">
+            <a:avLst/>
+          </a:prstGeom>
+          <a:noFill/>
+        </p:spPr>
+        <p:txBody>
+          <a:bodyPr wrap="square" lIns="36576" rIns="36576" tIns="18288" bIns="18288" anchor="t">
+            <a:spAutoFit/>
+          </a:bodyPr>
+          <a:lstStyle/>
+          <a:p>
+            <a:pPr algn="l">
+              <a:lnSpc>
+                <a:spcPct val="100000"/>
+              </a:lnSpc>
+              <a:spcAft>
+                <a:spcPts val="200"/>
+              </a:spcAft>
+            </a:pPr>
+            <a:r>
+              <a:rPr sz="1400" b="0" i="0">
+                <a:solidFill>
+                  <a:srgbClr val="1E293B"/>
+                </a:solidFill>
+                <a:latin typeface="Calibri"/>
+              </a:rPr>
+              <a:t>Cuts at 9.1, 24.2, 100 m; normal-offset lookup, 8 rotated PCF taps</a:t>
+            </a:r>
+          </a:p>
+        </p:txBody>
+      </p:sp>
+      <p:sp>
+        <p:nvSpPr>
+          <p:cNvPr id="33" name="TextBox 32"/>
+          <p:cNvSpPr txBox="1"/>
+          <p:nvPr/>
+        </p:nvSpPr>
+        <p:spPr>
+          <a:xfrm>
+            <a:off x="685800" y="4663440"/>
+            <a:ext cx="5943600" cy="320040"/>
+          </a:xfrm>
+          <a:prstGeom prst="rect">
+            <a:avLst/>
+          </a:prstGeom>
+          <a:noFill/>
+        </p:spPr>
+        <p:txBody>
+          <a:bodyPr wrap="square" lIns="36576" rIns="36576" tIns="18288" bIns="18288" anchor="t">
+            <a:spAutoFit/>
+          </a:bodyPr>
+          <a:lstStyle/>
+          <a:p>
+            <a:pPr algn="l">
+              <a:lnSpc>
+                <a:spcPct val="100000"/>
+              </a:lnSpc>
+              <a:spcAft>
+                <a:spcPts val="400"/>
+              </a:spcAft>
+            </a:pPr>
+            <a:r>
+              <a:rPr sz="1400" b="1" i="0">
+                <a:solidFill>
+                  <a:srgbClr val="0F8F85"/>
+                </a:solidFill>
+                <a:latin typeface="Calibri"/>
+              </a:rPr>
+              <a:t>Fog and tone map</a:t>
+            </a:r>
+          </a:p>
+        </p:txBody>
+      </p:sp>
+      <p:pic>
+        <p:nvPicPr>
+          <p:cNvPr id="34" name="Picture 33" descr="fog.png"/>
           <p:cNvPicPr>
             <a:picLocks noChangeAspect="1"/>
           </p:cNvPicPr>
@@ -10517,22 +12184,17 @@
         </p:blipFill>
         <p:spPr>
           <a:xfrm>
-            <a:off x="7223760" y="1097280"/>
-            <a:ext cx="4297680" cy="2417445"/>
-          </a:xfrm>
-          <a:prstGeom prst="rect">
-            <a:avLst/>
-          </a:prstGeom>
-          <a:ln w="9525">
-            <a:solidFill>
-              <a:srgbClr val="D5DEE8"/>
-            </a:solidFill>
-          </a:ln>
+            <a:off x="822960" y="5074920"/>
+            <a:ext cx="2834640" cy="265084"/>
+          </a:xfrm>
+          <a:prstGeom prst="rect">
+            <a:avLst/>
+          </a:prstGeom>
         </p:spPr>
       </p:pic>
       <p:pic>
         <p:nvPicPr>
-          <p:cNvPr id="12" name="Picture 11" descr="map.jpg"/>
+          <p:cNvPr id="35" name="Picture 34" descr="aces.png"/>
           <p:cNvPicPr>
             <a:picLocks noChangeAspect="1"/>
           </p:cNvPicPr>
@@ -10546,8 +12208,74 @@
         </p:blipFill>
         <p:spPr>
           <a:xfrm>
-            <a:off x="7223760" y="3651885"/>
-            <a:ext cx="4297680" cy="2417445"/>
+            <a:off x="3931920" y="4983480"/>
+            <a:ext cx="2743200" cy="558209"/>
+          </a:xfrm>
+          <a:prstGeom prst="rect">
+            <a:avLst/>
+          </a:prstGeom>
+        </p:spPr>
+      </p:pic>
+      <p:sp>
+        <p:nvSpPr>
+          <p:cNvPr id="36" name="TextBox 35"/>
+          <p:cNvSpPr txBox="1"/>
+          <p:nvPr/>
+        </p:nvSpPr>
+        <p:spPr>
+          <a:xfrm>
+            <a:off x="685800" y="5806440"/>
+            <a:ext cx="6035040" cy="502920"/>
+          </a:xfrm>
+          <a:prstGeom prst="rect">
+            <a:avLst/>
+          </a:prstGeom>
+          <a:noFill/>
+        </p:spPr>
+        <p:txBody>
+          <a:bodyPr wrap="square" lIns="36576" rIns="36576" tIns="18288" bIns="18288" anchor="t">
+            <a:spAutoFit/>
+          </a:bodyPr>
+          <a:lstStyle/>
+          <a:p>
+            <a:pPr algn="l">
+              <a:lnSpc>
+                <a:spcPct val="100000"/>
+              </a:lnSpc>
+              <a:spcAft>
+                <a:spcPts val="400"/>
+              </a:spcAft>
+            </a:pPr>
+            <a:r>
+              <a:rPr sz="1300" b="0" i="0">
+                <a:solidFill>
+                  <a:srgbClr val="64748B"/>
+                </a:solidFill>
+                <a:latin typeface="Calibri"/>
+              </a:rPr>
+              <a:t>Ambient = sky diffuse + split-sum specular, times SSAO</a:t>
+            </a:r>
+          </a:p>
+        </p:txBody>
+      </p:sp>
+      <p:pic>
+        <p:nvPicPr>
+          <p:cNvPr id="37" name="Picture 36" descr="dusk.jpg"/>
+          <p:cNvPicPr>
+            <a:picLocks noChangeAspect="1"/>
+          </p:cNvPicPr>
+          <p:nvPr/>
+        </p:nvPicPr>
+        <p:blipFill>
+          <a:blip r:embed="rId7"/>
+          <a:stretch>
+            <a:fillRect/>
+          </a:stretch>
+        </p:blipFill>
+        <p:spPr>
+          <a:xfrm>
+            <a:off x="7178040" y="2057400"/>
+            <a:ext cx="4572000" cy="2571750"/>
           </a:xfrm>
           <a:prstGeom prst="rect">
             <a:avLst/>
@@ -10561,14 +12289,14 @@
       </p:pic>
       <p:sp>
         <p:nvSpPr>
-          <p:cNvPr id="13" name="TextBox 12"/>
+          <p:cNvPr id="38" name="TextBox 37"/>
           <p:cNvSpPr txBox="1"/>
           <p:nvPr/>
         </p:nvSpPr>
         <p:spPr>
           <a:xfrm>
-            <a:off x="7223760" y="6115050"/>
-            <a:ext cx="4297680" cy="320040"/>
+            <a:off x="7178040" y="4702302"/>
+            <a:ext cx="4572000" cy="365760"/>
           </a:xfrm>
           <a:prstGeom prst="rect">
             <a:avLst/>
@@ -10590,13 +12318,55 @@
               </a:spcAft>
             </a:pPr>
             <a:r>
-              <a:rPr sz="1300" b="0" i="1">
+              <a:rPr sz="1400" b="0" i="1">
                 <a:solidFill>
                   <a:srgbClr val="64748B"/>
                 </a:solidFill>
                 <a:latin typeface="Calibri"/>
               </a:rPr>
-              <a:t>Headquarters, and the tactical map with objectives</a:t>
+              <a:t>Dusk: sun, sky, haze, shadows</a:t>
+            </a:r>
+          </a:p>
+        </p:txBody>
+      </p:sp>
+      <p:sp>
+        <p:nvSpPr>
+          <p:cNvPr id="39" name="TextBox 38"/>
+          <p:cNvSpPr txBox="1"/>
+          <p:nvPr/>
+        </p:nvSpPr>
+        <p:spPr>
+          <a:xfrm>
+            <a:off x="7178040" y="5177790"/>
+            <a:ext cx="4572000" cy="1097280"/>
+          </a:xfrm>
+          <a:prstGeom prst="rect">
+            <a:avLst/>
+          </a:prstGeom>
+          <a:noFill/>
+        </p:spPr>
+        <p:txBody>
+          <a:bodyPr wrap="square" lIns="36576" rIns="36576" tIns="18288" bIns="18288" anchor="t">
+            <a:spAutoFit/>
+          </a:bodyPr>
+          <a:lstStyle/>
+          <a:p>
+            <a:pPr algn="l">
+              <a:lnSpc>
+                <a:spcPct val="100000"/>
+              </a:lnSpc>
+              <a:spcAft>
+                <a:spcPts val="400"/>
+              </a:spcAft>
+            </a:pPr>
+            <a:r>
+              <a:rPr sz="1500" b="0" i="0">
+                <a:solidFill>
+                  <a:srgbClr val="1E293B"/>
+                </a:solidFill>
+                <a:latin typeface="Calibri"/>
+              </a:rPr>
+              <a:t>Sun, moon, lamps, cascaded shadows, SSAO, screen-space reflections, bloom and FXAA</a:t>
             </a:r>
           </a:p>
         </p:txBody>
@@ -10792,7 +12562,7 @@
                 </a:solidFill>
                 <a:latin typeface="Georgia"/>
               </a:rPr>
-              <a:t>6. Challenge solved, limits and future work</a:t>
+              <a:t>6. Results, verification and a bug fixed</a:t>
             </a:r>
           </a:p>
         </p:txBody>
@@ -10839,16 +12609,34 @@
           </a:p>
         </p:txBody>
       </p:sp>
-      <p:sp>
-        <p:nvSpPr>
-          <p:cNvPr id="8" name="TextBox 7"/>
+      <p:graphicFrame>
+        <p:nvGraphicFramePr>
+          <p:cNvPr id="8" name="Chart 7"/>
+          <p:cNvGraphicFramePr>
+            <a:graphicFrameLocks noGrp="1"/>
+          </p:cNvGraphicFramePr>
+          <p:nvPr/>
+        </p:nvGraphicFramePr>
+        <p:xfrm>
+          <a:off x="548640" y="1051560"/>
+          <a:ext cx="5669280" cy="2514600"/>
+        </p:xfrm>
+        <a:graphic>
+          <a:graphicData uri="http://schemas.openxmlformats.org/drawingml/2006/chart">
+            <c:chart xmlns:c="http://schemas.openxmlformats.org/drawingml/2006/chart" r:id="rId4"/>
+          </a:graphicData>
+        </a:graphic>
+      </p:graphicFrame>
+      <p:sp>
+        <p:nvSpPr>
+          <p:cNvPr id="9" name="TextBox 8"/>
           <p:cNvSpPr txBox="1"/>
           <p:nvPr/>
         </p:nvSpPr>
         <p:spPr>
           <a:xfrm>
-            <a:off x="548640" y="1051560"/>
-            <a:ext cx="11064240" cy="914400"/>
+            <a:off x="548640" y="3611880"/>
+            <a:ext cx="5669280" cy="411480"/>
           </a:xfrm>
           <a:prstGeom prst="rect">
             <a:avLst/>
@@ -10870,65 +12658,350 @@
               </a:spcAft>
             </a:pPr>
             <a:r>
-              <a:rPr sz="1800" b="1" i="0">
+              <a:rPr sz="1900" b="1" i="0">
                 <a:solidFill>
                   <a:srgbClr val="0F8F85"/>
                 </a:solidFill>
                 <a:latin typeface="Calibri"/>
               </a:rPr>
-              <a:t>Bug: a bright vertical line at night. </a:t>
-            </a:r>
-            <a:r>
-              <a:rPr sz="1800" b="0" i="0">
+              <a:t>10.9 ms</a:t>
+            </a:r>
+            <a:r>
+              <a:rPr sz="1900" b="0" i="0">
                 <a:solidFill>
                   <a:srgbClr val="1E293B"/>
                 </a:solidFill>
                 <a:latin typeface="Calibri"/>
               </a:rPr>
-              <a:t>The fog colour sampled the whole sky, so one horizon star painted a streak on every surface in its column. Fix: fog uses the smooth atmosphere only.</a:t>
-            </a:r>
-          </a:p>
-        </p:txBody>
-      </p:sp>
-      <p:pic>
-        <p:nvPicPr>
-          <p:cNvPr id="9" name="Picture 8" descr="gate_night_bug.jpg"/>
-          <p:cNvPicPr>
-            <a:picLocks noChangeAspect="1"/>
-          </p:cNvPicPr>
-          <p:nvPr/>
-        </p:nvPicPr>
-        <p:blipFill>
-          <a:blip r:embed="rId4"/>
-          <a:stretch>
-            <a:fillRect/>
-          </a:stretch>
-        </p:blipFill>
-        <p:spPr>
-          <a:xfrm>
-            <a:off x="548640" y="2103120"/>
-            <a:ext cx="3200400" cy="1800225"/>
-          </a:xfrm>
-          <a:prstGeom prst="rect">
-            <a:avLst/>
-          </a:prstGeom>
-          <a:ln w="9525">
-            <a:solidFill>
-              <a:srgbClr val="D5DEE8"/>
-            </a:solidFill>
-          </a:ln>
-        </p:spPr>
-      </p:pic>
-      <p:sp>
-        <p:nvSpPr>
-          <p:cNvPr id="10" name="TextBox 9"/>
+              <a:t> of the 16.7 ms budget at 1080p</a:t>
+            </a:r>
+          </a:p>
+        </p:txBody>
+      </p:sp>
+      <p:graphicFrame>
+        <p:nvGraphicFramePr>
+          <p:cNvPr id="10" name="Table 9"/>
+          <p:cNvGraphicFramePr>
+            <a:graphicFrameLocks noGrp="1"/>
+          </p:cNvGraphicFramePr>
+          <p:nvPr/>
+        </p:nvGraphicFramePr>
+        <p:xfrm>
+          <a:off x="548640" y="4114800"/>
+          <a:ext cx="5669280" cy="2194560"/>
+        </p:xfrm>
+        <a:graphic>
+          <a:graphicData uri="http://schemas.openxmlformats.org/drawingml/2006/table">
+            <a:tbl>
+              <a:tblPr firstRow="1" bandRow="1">
+                <a:tableStyleId>{5C22544A-7EE6-4342-B048-85BDC9FD1C3A}</a:tableStyleId>
+              </a:tblPr>
+              <a:tblGrid>
+                <a:gridCol w="4206240"/>
+                <a:gridCol w="1463040"/>
+              </a:tblGrid>
+              <a:tr h="365760">
+                <a:tc>
+                  <a:txBody>
+                    <a:bodyPr/>
+                    <a:lstStyle/>
+                    <a:p>
+                      <a:pPr algn="l"/>
+                      <a:r>
+                        <a:rPr sz="1400" b="1">
+                          <a:solidFill>
+                            <a:srgbClr val="FFFFFF"/>
+                          </a:solidFill>
+                          <a:latin typeface="Calibri"/>
+                        </a:rPr>
+                        <a:t>Verification</a:t>
+                      </a:r>
+                    </a:p>
+                  </a:txBody>
+                  <a:tcPr marT="27432" marB="27432">
+                    <a:solidFill>
+                      <a:srgbClr val="0F8F85"/>
+                    </a:solidFill>
+                  </a:tcPr>
+                </a:tc>
+                <a:tc>
+                  <a:txBody>
+                    <a:bodyPr/>
+                    <a:lstStyle/>
+                    <a:p>
+                      <a:pPr algn="r"/>
+                      <a:r>
+                        <a:rPr sz="1400" b="1">
+                          <a:solidFill>
+                            <a:srgbClr val="FFFFFF"/>
+                          </a:solidFill>
+                          <a:latin typeface="Calibri"/>
+                        </a:rPr>
+                        <a:t>Count</a:t>
+                      </a:r>
+                    </a:p>
+                  </a:txBody>
+                  <a:tcPr marT="27432" marB="27432">
+                    <a:solidFill>
+                      <a:srgbClr val="0F8F85"/>
+                    </a:solidFill>
+                  </a:tcPr>
+                </a:tc>
+              </a:tr>
+              <a:tr h="365760">
+                <a:tc>
+                  <a:txBody>
+                    <a:bodyPr/>
+                    <a:lstStyle/>
+                    <a:p>
+                      <a:pPr algn="l"/>
+                      <a:r>
+                        <a:rPr sz="1400" b="0">
+                          <a:solidFill>
+                            <a:srgbClr val="1E293B"/>
+                          </a:solidFill>
+                          <a:latin typeface="Calibri"/>
+                        </a:rPr>
+                        <a:t>Unit tests (13 packages)</a:t>
+                      </a:r>
+                    </a:p>
+                  </a:txBody>
+                  <a:tcPr marT="27432" marB="27432">
+                    <a:solidFill>
+                      <a:srgbClr val="FFFFFF"/>
+                    </a:solidFill>
+                  </a:tcPr>
+                </a:tc>
+                <a:tc>
+                  <a:txBody>
+                    <a:bodyPr/>
+                    <a:lstStyle/>
+                    <a:p>
+                      <a:pPr algn="r"/>
+                      <a:r>
+                        <a:rPr sz="1400" b="0">
+                          <a:solidFill>
+                            <a:srgbClr val="1E293B"/>
+                          </a:solidFill>
+                          <a:latin typeface="Calibri"/>
+                        </a:rPr>
+                        <a:t>281</a:t>
+                      </a:r>
+                    </a:p>
+                  </a:txBody>
+                  <a:tcPr marT="27432" marB="27432">
+                    <a:solidFill>
+                      <a:srgbClr val="FFFFFF"/>
+                    </a:solidFill>
+                  </a:tcPr>
+                </a:tc>
+              </a:tr>
+              <a:tr h="365760">
+                <a:tc>
+                  <a:txBody>
+                    <a:bodyPr/>
+                    <a:lstStyle/>
+                    <a:p>
+                      <a:pPr algn="l"/>
+                      <a:r>
+                        <a:rPr sz="1400" b="0">
+                          <a:solidFill>
+                            <a:srgbClr val="1E293B"/>
+                          </a:solidFill>
+                          <a:latin typeface="Calibri"/>
+                        </a:rPr>
+                        <a:t>TextureCheck (exact tiling)</a:t>
+                      </a:r>
+                    </a:p>
+                  </a:txBody>
+                  <a:tcPr marT="27432" marB="27432">
+                    <a:solidFill>
+                      <a:srgbClr val="E6F4F2"/>
+                    </a:solidFill>
+                  </a:tcPr>
+                </a:tc>
+                <a:tc>
+                  <a:txBody>
+                    <a:bodyPr/>
+                    <a:lstStyle/>
+                    <a:p>
+                      <a:pPr algn="r"/>
+                      <a:r>
+                        <a:rPr sz="1400" b="0">
+                          <a:solidFill>
+                            <a:srgbClr val="1E293B"/>
+                          </a:solidFill>
+                          <a:latin typeface="Calibri"/>
+                        </a:rPr>
+                        <a:t>8,318</a:t>
+                      </a:r>
+                    </a:p>
+                  </a:txBody>
+                  <a:tcPr marT="27432" marB="27432">
+                    <a:solidFill>
+                      <a:srgbClr val="E6F4F2"/>
+                    </a:solidFill>
+                  </a:tcPr>
+                </a:tc>
+              </a:tr>
+              <a:tr h="365760">
+                <a:tc>
+                  <a:txBody>
+                    <a:bodyPr/>
+                    <a:lstStyle/>
+                    <a:p>
+                      <a:pPr algn="l"/>
+                      <a:r>
+                        <a:rPr sz="1400" b="0">
+                          <a:solidFill>
+                            <a:srgbClr val="1E293B"/>
+                          </a:solidFill>
+                          <a:latin typeface="Calibri"/>
+                        </a:rPr>
+                        <a:t>RenderCheck (lighting probes)</a:t>
+                      </a:r>
+                    </a:p>
+                  </a:txBody>
+                  <a:tcPr marT="27432" marB="27432">
+                    <a:solidFill>
+                      <a:srgbClr val="FFFFFF"/>
+                    </a:solidFill>
+                  </a:tcPr>
+                </a:tc>
+                <a:tc>
+                  <a:txBody>
+                    <a:bodyPr/>
+                    <a:lstStyle/>
+                    <a:p>
+                      <a:pPr algn="r"/>
+                      <a:r>
+                        <a:rPr sz="1400" b="0">
+                          <a:solidFill>
+                            <a:srgbClr val="1E293B"/>
+                          </a:solidFill>
+                          <a:latin typeface="Calibri"/>
+                        </a:rPr>
+                        <a:t>318,567</a:t>
+                      </a:r>
+                    </a:p>
+                  </a:txBody>
+                  <a:tcPr marT="27432" marB="27432">
+                    <a:solidFill>
+                      <a:srgbClr val="FFFFFF"/>
+                    </a:solidFill>
+                  </a:tcPr>
+                </a:tc>
+              </a:tr>
+              <a:tr h="365760">
+                <a:tc>
+                  <a:txBody>
+                    <a:bodyPr/>
+                    <a:lstStyle/>
+                    <a:p>
+                      <a:pPr algn="l"/>
+                      <a:r>
+                        <a:rPr sz="1400" b="0">
+                          <a:solidFill>
+                            <a:srgbClr val="1E293B"/>
+                          </a:solidFill>
+                          <a:latin typeface="Calibri"/>
+                        </a:rPr>
+                        <a:t>GpuCheck</a:t>
+                      </a:r>
+                    </a:p>
+                  </a:txBody>
+                  <a:tcPr marT="27432" marB="27432">
+                    <a:solidFill>
+                      <a:srgbClr val="E6F4F2"/>
+                    </a:solidFill>
+                  </a:tcPr>
+                </a:tc>
+                <a:tc>
+                  <a:txBody>
+                    <a:bodyPr/>
+                    <a:lstStyle/>
+                    <a:p>
+                      <a:pPr algn="r"/>
+                      <a:r>
+                        <a:rPr sz="1400" b="0">
+                          <a:solidFill>
+                            <a:srgbClr val="1E293B"/>
+                          </a:solidFill>
+                          <a:latin typeface="Calibri"/>
+                        </a:rPr>
+                        <a:t>30</a:t>
+                      </a:r>
+                    </a:p>
+                  </a:txBody>
+                  <a:tcPr marT="27432" marB="27432">
+                    <a:solidFill>
+                      <a:srgbClr val="E6F4F2"/>
+                    </a:solidFill>
+                  </a:tcPr>
+                </a:tc>
+              </a:tr>
+              <a:tr h="365760">
+                <a:tc>
+                  <a:txBody>
+                    <a:bodyPr/>
+                    <a:lstStyle/>
+                    <a:p>
+                      <a:pPr algn="l"/>
+                      <a:r>
+                        <a:rPr sz="1400" b="0">
+                          <a:solidFill>
+                            <a:srgbClr val="1E293B"/>
+                          </a:solidFill>
+                          <a:latin typeface="Calibri"/>
+                        </a:rPr>
+                        <a:t>Playthroughs, 5/5 objectives</a:t>
+                      </a:r>
+                    </a:p>
+                  </a:txBody>
+                  <a:tcPr marT="27432" marB="27432">
+                    <a:solidFill>
+                      <a:srgbClr val="FFFFFF"/>
+                    </a:solidFill>
+                  </a:tcPr>
+                </a:tc>
+                <a:tc>
+                  <a:txBody>
+                    <a:bodyPr/>
+                    <a:lstStyle/>
+                    <a:p>
+                      <a:pPr algn="r"/>
+                      <a:r>
+                        <a:rPr sz="1400" b="0">
+                          <a:solidFill>
+                            <a:srgbClr val="1E293B"/>
+                          </a:solidFill>
+                          <a:latin typeface="Calibri"/>
+                        </a:rPr>
+                        <a:t>2</a:t>
+                      </a:r>
+                    </a:p>
+                  </a:txBody>
+                  <a:tcPr marT="27432" marB="27432">
+                    <a:solidFill>
+                      <a:srgbClr val="FFFFFF"/>
+                    </a:solidFill>
+                  </a:tcPr>
+                </a:tc>
+              </a:tr>
+            </a:tbl>
+          </a:graphicData>
+        </a:graphic>
+      </p:graphicFrame>
+      <p:sp>
+        <p:nvSpPr>
+          <p:cNvPr id="11" name="TextBox 10"/>
           <p:cNvSpPr txBox="1"/>
           <p:nvPr/>
         </p:nvSpPr>
         <p:spPr>
           <a:xfrm>
-            <a:off x="548640" y="3930777"/>
-            <a:ext cx="3200400" cy="320040"/>
+            <a:off x="6492240" y="1051560"/>
+            <a:ext cx="5212080" cy="960120"/>
           </a:xfrm>
           <a:prstGeom prst="rect">
             <a:avLst/>
@@ -10941,7 +13014,7 @@
           </a:bodyPr>
           <a:lstStyle/>
           <a:p>
-            <a:pPr algn="ctr">
+            <a:pPr algn="l">
               <a:lnSpc>
                 <a:spcPct val="100000"/>
               </a:lnSpc>
@@ -10950,20 +13023,29 @@
               </a:spcAft>
             </a:pPr>
             <a:r>
-              <a:rPr sz="1300" b="0" i="1">
-                <a:solidFill>
-                  <a:srgbClr val="64748B"/>
-                </a:solidFill>
-                <a:latin typeface="Calibri"/>
-              </a:rPr>
-              <a:t>Before (streak left of centre)</a:t>
+              <a:rPr sz="1500" b="1" i="0">
+                <a:solidFill>
+                  <a:srgbClr val="0F8F85"/>
+                </a:solidFill>
+                <a:latin typeface="Calibri"/>
+              </a:rPr>
+              <a:t>Bug: a vertical line at night. </a:t>
+            </a:r>
+            <a:r>
+              <a:rPr sz="1500" b="0" i="0">
+                <a:solidFill>
+                  <a:srgbClr val="1E293B"/>
+                </a:solidFill>
+                <a:latin typeface="Calibri"/>
+              </a:rPr>
+              <a:t>Fog sampled the whole sky, so one horizon star streaked a column. Fix: fog uses the smooth atmosphere only.</a:t>
             </a:r>
           </a:p>
         </p:txBody>
       </p:sp>
       <p:pic>
         <p:nvPicPr>
-          <p:cNvPr id="11" name="Picture 10" descr="gate_night.jpg"/>
+          <p:cNvPr id="12" name="Picture 11" descr="gate_night_bug.jpg"/>
           <p:cNvPicPr>
             <a:picLocks noChangeAspect="1"/>
           </p:cNvPicPr>
@@ -10977,8 +13059,8 @@
         </p:blipFill>
         <p:spPr>
           <a:xfrm>
-            <a:off x="548640" y="4360545"/>
-            <a:ext cx="3200400" cy="1800225"/>
+            <a:off x="6492240" y="2103120"/>
+            <a:ext cx="2542032" cy="1429893"/>
           </a:xfrm>
           <a:prstGeom prst="rect">
             <a:avLst/>
@@ -10990,16 +13072,45 @@
           </a:ln>
         </p:spPr>
       </p:pic>
-      <p:sp>
-        <p:nvSpPr>
-          <p:cNvPr id="12" name="TextBox 11"/>
+      <p:pic>
+        <p:nvPicPr>
+          <p:cNvPr id="13" name="Picture 12" descr="gate_night.jpg"/>
+          <p:cNvPicPr>
+            <a:picLocks noChangeAspect="1"/>
+          </p:cNvPicPr>
+          <p:nvPr/>
+        </p:nvPicPr>
+        <p:blipFill>
+          <a:blip r:embed="rId6"/>
+          <a:stretch>
+            <a:fillRect/>
+          </a:stretch>
+        </p:blipFill>
+        <p:spPr>
+          <a:xfrm>
+            <a:off x="9162288" y="2103120"/>
+            <a:ext cx="2542032" cy="1429893"/>
+          </a:xfrm>
+          <a:prstGeom prst="rect">
+            <a:avLst/>
+          </a:prstGeom>
+          <a:ln w="9525">
+            <a:solidFill>
+              <a:srgbClr val="D5DEE8"/>
+            </a:solidFill>
+          </a:ln>
+        </p:spPr>
+      </p:pic>
+      <p:sp>
+        <p:nvSpPr>
+          <p:cNvPr id="14" name="TextBox 13"/>
           <p:cNvSpPr txBox="1"/>
           <p:nvPr/>
         </p:nvSpPr>
         <p:spPr>
           <a:xfrm>
-            <a:off x="548640" y="6188202"/>
-            <a:ext cx="3200400" cy="320040"/>
+            <a:off x="6492240" y="3551300"/>
+            <a:ext cx="2542032" cy="274320"/>
           </a:xfrm>
           <a:prstGeom prst="rect">
             <a:avLst/>
@@ -11021,12 +13132,54 @@
               </a:spcAft>
             </a:pPr>
             <a:r>
-              <a:rPr sz="1300" b="0" i="1">
+              <a:rPr sz="1200" b="0" i="1">
                 <a:solidFill>
                   <a:srgbClr val="64748B"/>
                 </a:solidFill>
                 <a:latin typeface="Calibri"/>
               </a:rPr>
+              <a:t>Before</a:t>
+            </a:r>
+          </a:p>
+        </p:txBody>
+      </p:sp>
+      <p:sp>
+        <p:nvSpPr>
+          <p:cNvPr id="15" name="TextBox 14"/>
+          <p:cNvSpPr txBox="1"/>
+          <p:nvPr/>
+        </p:nvSpPr>
+        <p:spPr>
+          <a:xfrm>
+            <a:off x="9162288" y="3551300"/>
+            <a:ext cx="2542032" cy="274320"/>
+          </a:xfrm>
+          <a:prstGeom prst="rect">
+            <a:avLst/>
+          </a:prstGeom>
+          <a:noFill/>
+        </p:spPr>
+        <p:txBody>
+          <a:bodyPr wrap="square" lIns="36576" rIns="36576" tIns="18288" bIns="18288" anchor="t">
+            <a:spAutoFit/>
+          </a:bodyPr>
+          <a:lstStyle/>
+          <a:p>
+            <a:pPr algn="ctr">
+              <a:lnSpc>
+                <a:spcPct val="100000"/>
+              </a:lnSpc>
+              <a:spcAft>
+                <a:spcPts val="400"/>
+              </a:spcAft>
+            </a:pPr>
+            <a:r>
+              <a:rPr sz="1200" b="0" i="1">
+                <a:solidFill>
+                  <a:srgbClr val="64748B"/>
+                </a:solidFill>
+                <a:latin typeface="Calibri"/>
+              </a:rPr>
               <a:t>After</a:t>
             </a:r>
           </a:p>
@@ -11034,14 +13187,14 @@
       </p:sp>
       <p:sp>
         <p:nvSpPr>
-          <p:cNvPr id="13" name="Rounded Rectangle 12"/>
+          <p:cNvPr id="16" name="Rounded Rectangle 15"/>
           <p:cNvSpPr/>
           <p:nvPr/>
         </p:nvSpPr>
         <p:spPr>
           <a:xfrm>
-            <a:off x="4434840" y="2103120"/>
-            <a:ext cx="7223760" cy="1188720"/>
+            <a:off x="6492240" y="4114800"/>
+            <a:ext cx="5212080" cy="2194560"/>
           </a:xfrm>
           <a:prstGeom prst="roundRect">
             <a:avLst>
@@ -11082,14 +13235,14 @@
       </p:sp>
       <p:sp>
         <p:nvSpPr>
-          <p:cNvPr id="14" name="Rectangle 13"/>
+          <p:cNvPr id="17" name="Rectangle 16"/>
           <p:cNvSpPr/>
           <p:nvPr/>
         </p:nvSpPr>
         <p:spPr>
           <a:xfrm>
-            <a:off x="4434840" y="2103120"/>
-            <a:ext cx="82296" cy="1188720"/>
+            <a:off x="6492240" y="4114800"/>
+            <a:ext cx="82296" cy="2194560"/>
           </a:xfrm>
           <a:prstGeom prst="rect">
             <a:avLst/>
@@ -11126,14 +13279,14 @@
       </p:sp>
       <p:sp>
         <p:nvSpPr>
-          <p:cNvPr id="15" name="TextBox 14"/>
+          <p:cNvPr id="18" name="TextBox 17"/>
           <p:cNvSpPr txBox="1"/>
           <p:nvPr/>
         </p:nvSpPr>
         <p:spPr>
           <a:xfrm>
-            <a:off x="4617720" y="2176272"/>
-            <a:ext cx="6949440" cy="365760"/>
+            <a:off x="6675120" y="4187952"/>
+            <a:ext cx="4937760" cy="365760"/>
           </a:xfrm>
           <a:prstGeom prst="rect">
             <a:avLst/>
@@ -11155,27 +13308,27 @@
               </a:spcAft>
             </a:pPr>
             <a:r>
-              <a:rPr sz="1700" b="1" i="0">
+              <a:rPr sz="1500" b="1" i="0">
                 <a:solidFill>
                   <a:srgbClr val="0F8F85"/>
                 </a:solidFill>
                 <a:latin typeface="Calibri"/>
               </a:rPr>
-              <a:t>Limitations</a:t>
-            </a:r>
-          </a:p>
-        </p:txBody>
-      </p:sp>
-      <p:sp>
-        <p:nvSpPr>
-          <p:cNvPr id="16" name="TextBox 15"/>
+              <a:t>Limits and future work</a:t>
+            </a:r>
+          </a:p>
+        </p:txBody>
+      </p:sp>
+      <p:sp>
+        <p:nvSpPr>
+          <p:cNvPr id="19" name="TextBox 18"/>
           <p:cNvSpPr txBox="1"/>
           <p:nvPr/>
         </p:nvSpPr>
         <p:spPr>
           <a:xfrm>
-            <a:off x="4617720" y="2560320"/>
-            <a:ext cx="6949440" cy="658368"/>
+            <a:off x="6675120" y="4572000"/>
+            <a:ext cx="4937760" cy="1664207"/>
           </a:xfrm>
           <a:prstGeom prst="rect">
             <a:avLst/>
@@ -11201,172 +13354,15 @@
               <a:buChar char="•"/>
             </a:pPr>
             <a:r>
-              <a:rPr sz="1600" b="0" i="0">
+              <a:rPr sz="1400" b="0" i="0">
                 <a:solidFill>
                   <a:srgbClr val="1E293B"/>
                 </a:solidFill>
                 <a:latin typeface="Calibri"/>
               </a:rPr>
-              <a:t>Blocky primitive models; no true global illumination; lumpy foliage; tuned by scripts and screenshots</a:t>
-            </a:r>
-          </a:p>
-        </p:txBody>
-      </p:sp>
-      <p:sp>
-        <p:nvSpPr>
-          <p:cNvPr id="17" name="Rounded Rectangle 16"/>
-          <p:cNvSpPr/>
-          <p:nvPr/>
-        </p:nvSpPr>
-        <p:spPr>
-          <a:xfrm>
-            <a:off x="4434840" y="3429000"/>
-            <a:ext cx="7223760" cy="1188720"/>
-          </a:xfrm>
-          <a:prstGeom prst="roundRect">
-            <a:avLst>
-              <a:gd name="adj" fmla="val 6000"/>
-            </a:avLst>
-          </a:prstGeom>
-          <a:solidFill>
-            <a:srgbClr val="FFFFFF"/>
-          </a:solidFill>
-          <a:ln w="9525">
-            <a:solidFill>
-              <a:srgbClr val="D5DEE8"/>
-            </a:solidFill>
-          </a:ln>
-          <a:effectLst/>
-        </p:spPr>
-        <p:style>
-          <a:lnRef idx="1">
-            <a:schemeClr val="accent1"/>
-          </a:lnRef>
-          <a:fillRef idx="3">
-            <a:schemeClr val="accent1"/>
-          </a:fillRef>
-          <a:effectRef idx="2">
-            <a:schemeClr val="accent1"/>
-          </a:effectRef>
-          <a:fontRef idx="minor">
-            <a:schemeClr val="lt1"/>
-          </a:fontRef>
-        </p:style>
-        <p:txBody>
-          <a:bodyPr rtlCol="0" anchor="ctr"/>
-          <a:lstStyle/>
-          <a:p>
-            <a:pPr algn="ctr"/>
-          </a:p>
-        </p:txBody>
-      </p:sp>
-      <p:sp>
-        <p:nvSpPr>
-          <p:cNvPr id="18" name="Rectangle 17"/>
-          <p:cNvSpPr/>
-          <p:nvPr/>
-        </p:nvSpPr>
-        <p:spPr>
-          <a:xfrm>
-            <a:off x="4434840" y="3429000"/>
-            <a:ext cx="82296" cy="1188720"/>
-          </a:xfrm>
-          <a:prstGeom prst="rect">
-            <a:avLst/>
-          </a:prstGeom>
-          <a:solidFill>
-            <a:srgbClr val="0F8F85"/>
-          </a:solidFill>
-          <a:ln>
-            <a:noFill/>
-          </a:ln>
-          <a:effectLst/>
-        </p:spPr>
-        <p:style>
-          <a:lnRef idx="1">
-            <a:schemeClr val="accent1"/>
-          </a:lnRef>
-          <a:fillRef idx="3">
-            <a:schemeClr val="accent1"/>
-          </a:fillRef>
-          <a:effectRef idx="2">
-            <a:schemeClr val="accent1"/>
-          </a:effectRef>
-          <a:fontRef idx="minor">
-            <a:schemeClr val="lt1"/>
-          </a:fontRef>
-        </p:style>
-        <p:txBody>
-          <a:bodyPr rtlCol="0" anchor="ctr"/>
-          <a:lstStyle/>
-          <a:p>
-            <a:pPr algn="ctr"/>
-          </a:p>
-        </p:txBody>
-      </p:sp>
-      <p:sp>
-        <p:nvSpPr>
-          <p:cNvPr id="19" name="TextBox 18"/>
-          <p:cNvSpPr txBox="1"/>
-          <p:nvPr/>
-        </p:nvSpPr>
-        <p:spPr>
-          <a:xfrm>
-            <a:off x="4617720" y="3502152"/>
-            <a:ext cx="6949440" cy="365760"/>
-          </a:xfrm>
-          <a:prstGeom prst="rect">
-            <a:avLst/>
-          </a:prstGeom>
-          <a:noFill/>
-        </p:spPr>
-        <p:txBody>
-          <a:bodyPr wrap="square" lIns="36576" rIns="36576" tIns="18288" bIns="18288" anchor="t">
-            <a:spAutoFit/>
-          </a:bodyPr>
-          <a:lstStyle/>
-          <a:p>
-            <a:pPr algn="l">
-              <a:lnSpc>
-                <a:spcPct val="100000"/>
-              </a:lnSpc>
-              <a:spcAft>
-                <a:spcPts val="400"/>
-              </a:spcAft>
-            </a:pPr>
-            <a:r>
-              <a:rPr sz="1700" b="1" i="0">
-                <a:solidFill>
-                  <a:srgbClr val="0F8F85"/>
-                </a:solidFill>
-                <a:latin typeface="Calibri"/>
-              </a:rPr>
-              <a:t>Future work</a:t>
-            </a:r>
-          </a:p>
-        </p:txBody>
-      </p:sp>
-      <p:sp>
-        <p:nvSpPr>
-          <p:cNvPr id="20" name="TextBox 19"/>
-          <p:cNvSpPr txBox="1"/>
-          <p:nvPr/>
-        </p:nvSpPr>
-        <p:spPr>
-          <a:xfrm>
-            <a:off x="4617720" y="3886200"/>
-            <a:ext cx="6949440" cy="658368"/>
-          </a:xfrm>
-          <a:prstGeom prst="rect">
-            <a:avLst/>
-          </a:prstGeom>
-          <a:noFill/>
-        </p:spPr>
-        <p:txBody>
-          <a:bodyPr wrap="square" lIns="36576" rIns="36576" tIns="18288" bIns="18288" anchor="t">
-            <a:spAutoFit/>
-          </a:bodyPr>
-          <a:lstStyle/>
+              <a:t>Blocky primitive models; no true global illumination; lumpy foliage</a:t>
+            </a:r>
+          </a:p>
           <a:p>
             <a:pPr algn="l" marL="256032" indent="-256032">
               <a:lnSpc>
@@ -11381,172 +13377,15 @@
               <a:buChar char="•"/>
             </a:pPr>
             <a:r>
-              <a:rPr sz="1600" b="0" i="0">
+              <a:rPr sz="1400" b="0" i="0">
                 <a:solidFill>
                   <a:srgbClr val="1E293B"/>
                 </a:solidFill>
                 <a:latin typeface="Calibri"/>
               </a:rPr>
-              <a:t>Leaf cards, screen-space GI, point-light shadows, multiplayer, a compute-shader port</a:t>
-            </a:r>
-          </a:p>
-        </p:txBody>
-      </p:sp>
-      <p:sp>
-        <p:nvSpPr>
-          <p:cNvPr id="21" name="Rounded Rectangle 20"/>
-          <p:cNvSpPr/>
-          <p:nvPr/>
-        </p:nvSpPr>
-        <p:spPr>
-          <a:xfrm>
-            <a:off x="4434840" y="4754880"/>
-            <a:ext cx="7223760" cy="1188720"/>
-          </a:xfrm>
-          <a:prstGeom prst="roundRect">
-            <a:avLst>
-              <a:gd name="adj" fmla="val 6000"/>
-            </a:avLst>
-          </a:prstGeom>
-          <a:solidFill>
-            <a:srgbClr val="FFFFFF"/>
-          </a:solidFill>
-          <a:ln w="9525">
-            <a:solidFill>
-              <a:srgbClr val="D5DEE8"/>
-            </a:solidFill>
-          </a:ln>
-          <a:effectLst/>
-        </p:spPr>
-        <p:style>
-          <a:lnRef idx="1">
-            <a:schemeClr val="accent1"/>
-          </a:lnRef>
-          <a:fillRef idx="3">
-            <a:schemeClr val="accent1"/>
-          </a:fillRef>
-          <a:effectRef idx="2">
-            <a:schemeClr val="accent1"/>
-          </a:effectRef>
-          <a:fontRef idx="minor">
-            <a:schemeClr val="lt1"/>
-          </a:fontRef>
-        </p:style>
-        <p:txBody>
-          <a:bodyPr rtlCol="0" anchor="ctr"/>
-          <a:lstStyle/>
-          <a:p>
-            <a:pPr algn="ctr"/>
-          </a:p>
-        </p:txBody>
-      </p:sp>
-      <p:sp>
-        <p:nvSpPr>
-          <p:cNvPr id="22" name="Rectangle 21"/>
-          <p:cNvSpPr/>
-          <p:nvPr/>
-        </p:nvSpPr>
-        <p:spPr>
-          <a:xfrm>
-            <a:off x="4434840" y="4754880"/>
-            <a:ext cx="82296" cy="1188720"/>
-          </a:xfrm>
-          <a:prstGeom prst="rect">
-            <a:avLst/>
-          </a:prstGeom>
-          <a:solidFill>
-            <a:srgbClr val="0F8F85"/>
-          </a:solidFill>
-          <a:ln>
-            <a:noFill/>
-          </a:ln>
-          <a:effectLst/>
-        </p:spPr>
-        <p:style>
-          <a:lnRef idx="1">
-            <a:schemeClr val="accent1"/>
-          </a:lnRef>
-          <a:fillRef idx="3">
-            <a:schemeClr val="accent1"/>
-          </a:fillRef>
-          <a:effectRef idx="2">
-            <a:schemeClr val="accent1"/>
-          </a:effectRef>
-          <a:fontRef idx="minor">
-            <a:schemeClr val="lt1"/>
-          </a:fontRef>
-        </p:style>
-        <p:txBody>
-          <a:bodyPr rtlCol="0" anchor="ctr"/>
-          <a:lstStyle/>
-          <a:p>
-            <a:pPr algn="ctr"/>
-          </a:p>
-        </p:txBody>
-      </p:sp>
-      <p:sp>
-        <p:nvSpPr>
-          <p:cNvPr id="23" name="TextBox 22"/>
-          <p:cNvSpPr txBox="1"/>
-          <p:nvPr/>
-        </p:nvSpPr>
-        <p:spPr>
-          <a:xfrm>
-            <a:off x="4617720" y="4828032"/>
-            <a:ext cx="6949440" cy="365760"/>
-          </a:xfrm>
-          <a:prstGeom prst="rect">
-            <a:avLst/>
-          </a:prstGeom>
-          <a:noFill/>
-        </p:spPr>
-        <p:txBody>
-          <a:bodyPr wrap="square" lIns="36576" rIns="36576" tIns="18288" bIns="18288" anchor="t">
-            <a:spAutoFit/>
-          </a:bodyPr>
-          <a:lstStyle/>
-          <a:p>
-            <a:pPr algn="l">
-              <a:lnSpc>
-                <a:spcPct val="100000"/>
-              </a:lnSpc>
-              <a:spcAft>
-                <a:spcPts val="400"/>
-              </a:spcAft>
-            </a:pPr>
-            <a:r>
-              <a:rPr sz="1700" b="1" i="0">
-                <a:solidFill>
-                  <a:srgbClr val="0F8F85"/>
-                </a:solidFill>
-                <a:latin typeface="Calibri"/>
-              </a:rPr>
-              <a:t>Take-away</a:t>
-            </a:r>
-          </a:p>
-        </p:txBody>
-      </p:sp>
-      <p:sp>
-        <p:nvSpPr>
-          <p:cNvPr id="24" name="TextBox 23"/>
-          <p:cNvSpPr txBox="1"/>
-          <p:nvPr/>
-        </p:nvSpPr>
-        <p:spPr>
-          <a:xfrm>
-            <a:off x="4617720" y="5212080"/>
-            <a:ext cx="6949440" cy="658368"/>
-          </a:xfrm>
-          <a:prstGeom prst="rect">
-            <a:avLst/>
-          </a:prstGeom>
-          <a:noFill/>
-        </p:spPr>
-        <p:txBody>
-          <a:bodyPr wrap="square" lIns="36576" rIns="36576" tIns="18288" bIns="18288" anchor="t">
-            <a:spAutoFit/>
-          </a:bodyPr>
-          <a:lstStyle/>
+              <a:t>Leaf cards, screen-space GI, point-light shadows, multiplayer, compute port</a:t>
+            </a:r>
+          </a:p>
           <a:p>
             <a:pPr algn="l" marL="256032" indent="-256032">
               <a:lnSpc>
@@ -11561,13 +13400,13 @@
               <a:buChar char="•"/>
             </a:pPr>
             <a:r>
-              <a:rPr sz="1600" b="0" i="0">
+              <a:rPr sz="1400" b="0" i="0">
                 <a:solidFill>
                   <a:srgbClr val="1E293B"/>
                 </a:solidFill>
                 <a:latin typeface="Calibri"/>
               </a:rPr>
-              <a:t>Most "art" is a few simple ideas, applied consistently and tested</a:t>
+              <a:t>Take-away: most "art" is a few simple ideas, applied consistently and tested</a:t>
             </a:r>
           </a:p>
         </p:txBody>

--- a/Docs/Deliverables/Slides/Sentinel_Presentation.pptx
+++ b/Docs/Deliverables/Slides/Sentinel_Presentation.pptx
@@ -8087,7 +8087,7 @@
         <p:spPr>
           <a:xfrm>
             <a:off x="548640" y="1051560"/>
-            <a:ext cx="1691640" cy="731520"/>
+            <a:ext cx="1691640" cy="777240"/>
           </a:xfrm>
           <a:prstGeom prst="roundRect">
             <a:avLst>
@@ -8135,7 +8135,7 @@
         <p:spPr>
           <a:xfrm>
             <a:off x="548640" y="1051560"/>
-            <a:ext cx="1691640" cy="731520"/>
+            <a:ext cx="1691640" cy="777240"/>
           </a:xfrm>
           <a:prstGeom prst="rect">
             <a:avLst/>
@@ -8157,7 +8157,7 @@
               </a:spcAft>
             </a:pPr>
             <a:r>
-              <a:rPr sz="1300" b="0" i="0">
+              <a:rPr sz="1500" b="0" i="0">
                 <a:solidFill>
                   <a:srgbClr val="1E293B"/>
                 </a:solidFill>
@@ -8176,7 +8176,7 @@
               </a:spcAft>
             </a:pPr>
             <a:r>
-              <a:rPr sz="1300" b="0" i="0">
+              <a:rPr sz="1500" b="0" i="0">
                 <a:solidFill>
                   <a:srgbClr val="1E293B"/>
                 </a:solidFill>
@@ -8195,7 +8195,7 @@
         </p:nvCxnSpPr>
         <p:spPr>
           <a:xfrm>
-            <a:off x="2240280" y="1417320"/>
+            <a:off x="2240280" y="1435608"/>
             <a:ext cx="182880" cy="0"/>
           </a:xfrm>
           <a:prstGeom prst="line">
@@ -8232,7 +8232,7 @@
         <p:spPr>
           <a:xfrm>
             <a:off x="2423160" y="1051560"/>
-            <a:ext cx="1691640" cy="731520"/>
+            <a:ext cx="1691640" cy="777240"/>
           </a:xfrm>
           <a:prstGeom prst="roundRect">
             <a:avLst>
@@ -8280,7 +8280,7 @@
         <p:spPr>
           <a:xfrm>
             <a:off x="2423160" y="1051560"/>
-            <a:ext cx="1691640" cy="731520"/>
+            <a:ext cx="1691640" cy="777240"/>
           </a:xfrm>
           <a:prstGeom prst="rect">
             <a:avLst/>
@@ -8302,7 +8302,7 @@
               </a:spcAft>
             </a:pPr>
             <a:r>
-              <a:rPr sz="1300" b="0" i="0">
+              <a:rPr sz="1500" b="0" i="0">
                 <a:solidFill>
                   <a:srgbClr val="1E293B"/>
                 </a:solidFill>
@@ -8321,7 +8321,7 @@
               </a:spcAft>
             </a:pPr>
             <a:r>
-              <a:rPr sz="1300" b="0" i="0">
+              <a:rPr sz="1500" b="0" i="0">
                 <a:solidFill>
                   <a:srgbClr val="1E293B"/>
                 </a:solidFill>
@@ -8340,7 +8340,7 @@
         </p:nvCxnSpPr>
         <p:spPr>
           <a:xfrm>
-            <a:off x="4114800" y="1417320"/>
+            <a:off x="4114800" y="1435608"/>
             <a:ext cx="182880" cy="0"/>
           </a:xfrm>
           <a:prstGeom prst="line">
@@ -8377,7 +8377,7 @@
         <p:spPr>
           <a:xfrm>
             <a:off x="4297680" y="1051560"/>
-            <a:ext cx="1691640" cy="731520"/>
+            <a:ext cx="1691640" cy="777240"/>
           </a:xfrm>
           <a:prstGeom prst="roundRect">
             <a:avLst>
@@ -8425,7 +8425,7 @@
         <p:spPr>
           <a:xfrm>
             <a:off x="4297680" y="1051560"/>
-            <a:ext cx="1691640" cy="731520"/>
+            <a:ext cx="1691640" cy="777240"/>
           </a:xfrm>
           <a:prstGeom prst="rect">
             <a:avLst/>
@@ -8447,7 +8447,7 @@
               </a:spcAft>
             </a:pPr>
             <a:r>
-              <a:rPr sz="1300" b="0" i="0">
+              <a:rPr sz="1500" b="0" i="0">
                 <a:solidFill>
                   <a:srgbClr val="1E293B"/>
                 </a:solidFill>
@@ -8466,7 +8466,7 @@
               </a:spcAft>
             </a:pPr>
             <a:r>
-              <a:rPr sz="1300" b="0" i="0">
+              <a:rPr sz="1500" b="0" i="0">
                 <a:solidFill>
                   <a:srgbClr val="1E293B"/>
                 </a:solidFill>
@@ -8485,7 +8485,7 @@
         </p:nvCxnSpPr>
         <p:spPr>
           <a:xfrm>
-            <a:off x="5989320" y="1417320"/>
+            <a:off x="5989320" y="1435608"/>
             <a:ext cx="182880" cy="0"/>
           </a:xfrm>
           <a:prstGeom prst="line">
@@ -8522,7 +8522,7 @@
         <p:spPr>
           <a:xfrm>
             <a:off x="6172200" y="1051560"/>
-            <a:ext cx="1691640" cy="731520"/>
+            <a:ext cx="1691640" cy="777240"/>
           </a:xfrm>
           <a:prstGeom prst="roundRect">
             <a:avLst>
@@ -8570,7 +8570,7 @@
         <p:spPr>
           <a:xfrm>
             <a:off x="6172200" y="1051560"/>
-            <a:ext cx="1691640" cy="731520"/>
+            <a:ext cx="1691640" cy="777240"/>
           </a:xfrm>
           <a:prstGeom prst="rect">
             <a:avLst/>
@@ -8592,7 +8592,7 @@
               </a:spcAft>
             </a:pPr>
             <a:r>
-              <a:rPr sz="1300" b="0" i="0">
+              <a:rPr sz="1500" b="0" i="0">
                 <a:solidFill>
                   <a:srgbClr val="1E293B"/>
                 </a:solidFill>
@@ -8611,7 +8611,7 @@
               </a:spcAft>
             </a:pPr>
             <a:r>
-              <a:rPr sz="1300" b="0" i="0">
+              <a:rPr sz="1500" b="0" i="0">
                 <a:solidFill>
                   <a:srgbClr val="1E293B"/>
                 </a:solidFill>
@@ -8630,7 +8630,7 @@
         </p:nvCxnSpPr>
         <p:spPr>
           <a:xfrm>
-            <a:off x="7863840" y="1417320"/>
+            <a:off x="7863840" y="1435608"/>
             <a:ext cx="182880" cy="0"/>
           </a:xfrm>
           <a:prstGeom prst="line">
@@ -8667,7 +8667,7 @@
         <p:spPr>
           <a:xfrm>
             <a:off x="8046720" y="1051560"/>
-            <a:ext cx="1691640" cy="731520"/>
+            <a:ext cx="1691640" cy="777240"/>
           </a:xfrm>
           <a:prstGeom prst="roundRect">
             <a:avLst>
@@ -8715,7 +8715,7 @@
         <p:spPr>
           <a:xfrm>
             <a:off x="8046720" y="1051560"/>
-            <a:ext cx="1691640" cy="731520"/>
+            <a:ext cx="1691640" cy="777240"/>
           </a:xfrm>
           <a:prstGeom prst="rect">
             <a:avLst/>
@@ -8737,7 +8737,7 @@
               </a:spcAft>
             </a:pPr>
             <a:r>
-              <a:rPr sz="1300" b="0" i="0">
+              <a:rPr sz="1500" b="0" i="0">
                 <a:solidFill>
                   <a:srgbClr val="1E293B"/>
                 </a:solidFill>
@@ -8756,7 +8756,7 @@
               </a:spcAft>
             </a:pPr>
             <a:r>
-              <a:rPr sz="1300" b="0" i="0">
+              <a:rPr sz="1500" b="0" i="0">
                 <a:solidFill>
                   <a:srgbClr val="1E293B"/>
                 </a:solidFill>
@@ -8775,7 +8775,7 @@
         </p:nvCxnSpPr>
         <p:spPr>
           <a:xfrm>
-            <a:off x="9738360" y="1417320"/>
+            <a:off x="9738360" y="1435608"/>
             <a:ext cx="182880" cy="0"/>
           </a:xfrm>
           <a:prstGeom prst="line">
@@ -8812,7 +8812,7 @@
         <p:spPr>
           <a:xfrm>
             <a:off x="9921240" y="1051560"/>
-            <a:ext cx="1691640" cy="731520"/>
+            <a:ext cx="1691640" cy="777240"/>
           </a:xfrm>
           <a:prstGeom prst="roundRect">
             <a:avLst>
@@ -8860,7 +8860,7 @@
         <p:spPr>
           <a:xfrm>
             <a:off x="9921240" y="1051560"/>
-            <a:ext cx="1691640" cy="731520"/>
+            <a:ext cx="1691640" cy="777240"/>
           </a:xfrm>
           <a:prstGeom prst="rect">
             <a:avLst/>
@@ -8882,7 +8882,7 @@
               </a:spcAft>
             </a:pPr>
             <a:r>
-              <a:rPr sz="1300" b="0" i="0">
+              <a:rPr sz="1500" b="0" i="0">
                 <a:solidFill>
                   <a:srgbClr val="1E293B"/>
                 </a:solidFill>
@@ -8901,7 +8901,7 @@
               </a:spcAft>
             </a:pPr>
             <a:r>
-              <a:rPr sz="1300" b="0" i="0">
+              <a:rPr sz="1500" b="0" i="0">
                 <a:solidFill>
                   <a:srgbClr val="1E293B"/>
                 </a:solidFill>
@@ -8920,8 +8920,8 @@
         </p:nvSpPr>
         <p:spPr>
           <a:xfrm>
-            <a:off x="548640" y="2011680"/>
-            <a:ext cx="5760720" cy="1965960"/>
+            <a:off x="548640" y="2057400"/>
+            <a:ext cx="5669280" cy="2240280"/>
           </a:xfrm>
           <a:prstGeom prst="roundRect">
             <a:avLst>
@@ -8968,8 +8968,8 @@
         </p:nvSpPr>
         <p:spPr>
           <a:xfrm>
-            <a:off x="685800" y="2048256"/>
-            <a:ext cx="5486400" cy="320040"/>
+            <a:off x="685800" y="2103120"/>
+            <a:ext cx="5394960" cy="365760"/>
           </a:xfrm>
           <a:prstGeom prst="rect">
             <a:avLst/>
@@ -8991,7 +8991,7 @@
               </a:spcAft>
             </a:pPr>
             <a:r>
-              <a:rPr sz="1400" b="1" i="0">
+              <a:rPr sz="1700" b="1" i="0">
                 <a:solidFill>
                   <a:srgbClr val="0F8F85"/>
                 </a:solidFill>
@@ -9018,7 +9018,7 @@
         </p:blipFill>
         <p:spPr>
           <a:xfrm>
-            <a:off x="731520" y="2423160"/>
+            <a:off x="731520" y="2542032"/>
             <a:ext cx="5303520" cy="442486"/>
           </a:xfrm>
           <a:prstGeom prst="rect">
@@ -9034,8 +9034,8 @@
         </p:nvSpPr>
         <p:spPr>
           <a:xfrm>
-            <a:off x="685800" y="2880360"/>
-            <a:ext cx="5486400" cy="1097280"/>
+            <a:off x="685800" y="3017520"/>
+            <a:ext cx="5394960" cy="1280160"/>
           </a:xfrm>
           <a:prstGeom prst="rect">
             <a:avLst/>
@@ -9053,17 +9053,17 @@
                 <a:spcPct val="100000"/>
               </a:lnSpc>
               <a:spcAft>
-                <a:spcPts val="300"/>
-              </a:spcAft>
-            </a:pPr>
-            <a:r>
-              <a:rPr sz="1400" b="0" i="0">
+                <a:spcPts val="400"/>
+              </a:spcAft>
+            </a:pPr>
+            <a:r>
+              <a:rPr sz="1600" b="0" i="0">
                 <a:solidFill>
                   <a:srgbClr val="1E293B"/>
                 </a:solidFill>
                 <a:latin typeface="Calibri"/>
               </a:rPr>
-              <a:t>Matrices act right to left, so the brick is stretched, turned about its own centre, and carried last.</a:t>
+              <a:t>Matrices act right to left: the brick is stretched, turned about its own centre, and moved last.</a:t>
             </a:r>
           </a:p>
           <a:p>
@@ -9072,17 +9072,17 @@
                 <a:spcPct val="100000"/>
               </a:lnSpc>
               <a:spcAft>
-                <a:spcPts val="300"/>
-              </a:spcAft>
-            </a:pPr>
-            <a:r>
-              <a:rPr sz="1400" b="0" i="0">
+                <a:spcPts val="400"/>
+              </a:spcAft>
+            </a:pPr>
+            <a:r>
+              <a:rPr sz="1600" b="0" i="0">
                 <a:solidFill>
                   <a:srgbClr val="1E293B"/>
                 </a:solidFill>
                 <a:latin typeface="Calibri"/>
               </a:rPr>
-              <a:t>Example: (1,0,0) → S(2,1,1) → R_y 90° → T(5,0,0) = (5, 0, −2)</a:t>
+              <a:t>(1,0,0) → S(2,1,1) → R_y 90° → T(5,0,0) = (5, 0, −2)</a:t>
             </a:r>
           </a:p>
         </p:txBody>
@@ -9095,8 +9095,8 @@
         </p:nvSpPr>
         <p:spPr>
           <a:xfrm>
-            <a:off x="548640" y="4114800"/>
-            <a:ext cx="5760720" cy="2240280"/>
+            <a:off x="548640" y="4434840"/>
+            <a:ext cx="5669280" cy="1920240"/>
           </a:xfrm>
           <a:prstGeom prst="roundRect">
             <a:avLst>
@@ -9143,8 +9143,8 @@
         </p:nvSpPr>
         <p:spPr>
           <a:xfrm>
-            <a:off x="685800" y="4151376"/>
-            <a:ext cx="5486400" cy="320040"/>
+            <a:off x="685800" y="4480560"/>
+            <a:ext cx="5394960" cy="365760"/>
           </a:xfrm>
           <a:prstGeom prst="rect">
             <a:avLst/>
@@ -9166,7 +9166,7 @@
               </a:spcAft>
             </a:pPr>
             <a:r>
-              <a:rPr sz="1400" b="1" i="0">
+              <a:rPr sz="1700" b="1" i="0">
                 <a:solidFill>
                   <a:srgbClr val="0F8F85"/>
                 </a:solidFill>
@@ -9193,8 +9193,8 @@
         </p:blipFill>
         <p:spPr>
           <a:xfrm>
-            <a:off x="822960" y="4526280"/>
-            <a:ext cx="1963826" cy="777240"/>
+            <a:off x="777240" y="4892040"/>
+            <a:ext cx="2079345" cy="822960"/>
           </a:xfrm>
           <a:prstGeom prst="rect">
             <a:avLst/>
@@ -9209,8 +9209,8 @@
         </p:nvSpPr>
         <p:spPr>
           <a:xfrm>
-            <a:off x="2834640" y="4526280"/>
-            <a:ext cx="3383280" cy="1005840"/>
+            <a:off x="2926080" y="4937760"/>
+            <a:ext cx="3200400" cy="822960"/>
           </a:xfrm>
           <a:prstGeom prst="rect">
             <a:avLst/>
@@ -9232,13 +9232,13 @@
               </a:spcAft>
             </a:pPr>
             <a:r>
-              <a:rPr sz="1400" b="0" i="0">
+              <a:rPr sz="1600" b="0" i="0">
                 <a:solidFill>
                   <a:srgbClr val="1E293B"/>
                 </a:solidFill>
                 <a:latin typeface="Calibri"/>
               </a:rPr>
-              <a:t>Keeps normals perpendicular after a stretch</a:t>
+              <a:t>stays perpendicular after a stretch</a:t>
             </a:r>
           </a:p>
         </p:txBody>
@@ -9251,8 +9251,8 @@
         </p:nvSpPr>
         <p:spPr>
           <a:xfrm>
-            <a:off x="685800" y="5440680"/>
-            <a:ext cx="5486400" cy="868680"/>
+            <a:off x="685800" y="5760720"/>
+            <a:ext cx="5394960" cy="548640"/>
           </a:xfrm>
           <a:prstGeom prst="rect">
             <a:avLst/>
@@ -9274,127 +9274,27 @@
               </a:spcAft>
             </a:pPr>
             <a:r>
-              <a:rPr sz="1300" b="0" i="0">
+              <a:rPr sz="1500" b="0" i="0">
                 <a:solidFill>
                   <a:srgbClr val="64748B"/>
                 </a:solidFill>
                 <a:latin typeface="Calibri"/>
               </a:rPr>
-              <a:t>S = diag(2,1,1), n = (1,1,0)/√2: correct (0.447, 0.894, 0), naive (0.894, 0.447, 0) is wrong; det &lt; 0 flips winding</a:t>
-            </a:r>
-          </a:p>
-        </p:txBody>
-      </p:sp>
-      <p:pic>
-        <p:nvPicPr>
-          <p:cNvPr id="34" name="Picture 33" descr="tank.jpg"/>
-          <p:cNvPicPr>
-            <a:picLocks noChangeAspect="1"/>
-          </p:cNvPicPr>
-          <p:nvPr/>
-        </p:nvPicPr>
-        <p:blipFill>
-          <a:blip r:embed="rId6"/>
-          <a:stretch>
-            <a:fillRect/>
-          </a:stretch>
-        </p:blipFill>
-        <p:spPr>
-          <a:xfrm>
-            <a:off x="6583680" y="2011680"/>
-            <a:ext cx="2468880" cy="1388745"/>
-          </a:xfrm>
-          <a:prstGeom prst="rect">
-            <a:avLst/>
-          </a:prstGeom>
-          <a:ln w="9525">
-            <a:solidFill>
-              <a:srgbClr val="D5DEE8"/>
-            </a:solidFill>
-          </a:ln>
-        </p:spPr>
-      </p:pic>
-      <p:pic>
-        <p:nvPicPr>
-          <p:cNvPr id="35" name="Picture 34" descr="truck.jpg"/>
-          <p:cNvPicPr>
-            <a:picLocks noChangeAspect="1"/>
-          </p:cNvPicPr>
-          <p:nvPr/>
-        </p:nvPicPr>
-        <p:blipFill>
-          <a:blip r:embed="rId7"/>
-          <a:stretch>
-            <a:fillRect/>
-          </a:stretch>
-        </p:blipFill>
-        <p:spPr>
-          <a:xfrm>
-            <a:off x="9235440" y="2011680"/>
-            <a:ext cx="2468880" cy="1388745"/>
-          </a:xfrm>
-          <a:prstGeom prst="rect">
-            <a:avLst/>
-          </a:prstGeom>
-          <a:ln w="9525">
-            <a:solidFill>
-              <a:srgbClr val="D5DEE8"/>
-            </a:solidFill>
-          </a:ln>
-        </p:spPr>
-      </p:pic>
-      <p:sp>
-        <p:nvSpPr>
-          <p:cNvPr id="36" name="TextBox 35"/>
-          <p:cNvSpPr txBox="1"/>
-          <p:nvPr/>
-        </p:nvSpPr>
-        <p:spPr>
-          <a:xfrm>
-            <a:off x="6583680" y="3437001"/>
-            <a:ext cx="5120640" cy="320040"/>
-          </a:xfrm>
-          <a:prstGeom prst="rect">
-            <a:avLst/>
-          </a:prstGeom>
-          <a:noFill/>
-        </p:spPr>
-        <p:txBody>
-          <a:bodyPr wrap="square" lIns="36576" rIns="36576" tIns="18288" bIns="18288" anchor="t">
-            <a:spAutoFit/>
-          </a:bodyPr>
-          <a:lstStyle/>
-          <a:p>
-            <a:pPr algn="ctr">
-              <a:lnSpc>
-                <a:spcPct val="100000"/>
-              </a:lnSpc>
-              <a:spcAft>
-                <a:spcPts val="400"/>
-              </a:spcAft>
-            </a:pPr>
-            <a:r>
-              <a:rPr sz="1300" b="0" i="1">
-                <a:solidFill>
-                  <a:srgbClr val="64748B"/>
-                </a:solidFill>
-                <a:latin typeface="Calibri"/>
-              </a:rPr>
-              <a:t>Tank (hull, turret, gun) and truck: transformed primitives</a:t>
-            </a:r>
-          </a:p>
-        </p:txBody>
-      </p:sp>
-      <p:sp>
-        <p:nvSpPr>
-          <p:cNvPr id="37" name="Rounded Rectangle 36"/>
+              <a:t>S = diag(2,1,1): correct (0.447, 0.894, 0); naive (0.894, 0.447, 0) is wrong</a:t>
+            </a:r>
+          </a:p>
+        </p:txBody>
+      </p:sp>
+      <p:sp>
+        <p:nvSpPr>
+          <p:cNvPr id="34" name="Rounded Rectangle 33"/>
           <p:cNvSpPr/>
           <p:nvPr/>
         </p:nvSpPr>
         <p:spPr>
           <a:xfrm>
-            <a:off x="6583680" y="3429000"/>
-            <a:ext cx="5120640" cy="2926080"/>
+            <a:off x="6492240" y="2057400"/>
+            <a:ext cx="5212080" cy="1600200"/>
           </a:xfrm>
           <a:prstGeom prst="roundRect">
             <a:avLst>
@@ -9435,14 +9335,14 @@
       </p:sp>
       <p:sp>
         <p:nvSpPr>
-          <p:cNvPr id="38" name="TextBox 37"/>
+          <p:cNvPr id="35" name="TextBox 34"/>
           <p:cNvSpPr txBox="1"/>
           <p:nvPr/>
         </p:nvSpPr>
         <p:spPr>
           <a:xfrm>
-            <a:off x="6720840" y="3465576"/>
-            <a:ext cx="4846320" cy="320040"/>
+            <a:off x="6629400" y="2103120"/>
+            <a:ext cx="4937760" cy="365760"/>
           </a:xfrm>
           <a:prstGeom prst="rect">
             <a:avLst/>
@@ -9464,7 +9364,121 @@
               </a:spcAft>
             </a:pPr>
             <a:r>
-              <a:rPr sz="1400" b="1" i="0">
+              <a:rPr sz="1700" b="1" i="0">
+                <a:solidFill>
+                  <a:srgbClr val="0F8F85"/>
+                </a:solidFill>
+                <a:latin typeface="Calibri"/>
+              </a:rPr>
+              <a:t>Rotation about y</a:t>
+            </a:r>
+          </a:p>
+        </p:txBody>
+      </p:sp>
+      <p:pic>
+        <p:nvPicPr>
+          <p:cNvPr id="36" name="Picture 35" descr="ry.png"/>
+          <p:cNvPicPr>
+            <a:picLocks noChangeAspect="1"/>
+          </p:cNvPicPr>
+          <p:nvPr/>
+        </p:nvPicPr>
+        <p:blipFill>
+          <a:blip r:embed="rId6"/>
+          <a:stretch>
+            <a:fillRect/>
+          </a:stretch>
+        </p:blipFill>
+        <p:spPr>
+          <a:xfrm>
+            <a:off x="6949440" y="2514600"/>
+            <a:ext cx="3375251" cy="1051560"/>
+          </a:xfrm>
+          <a:prstGeom prst="rect">
+            <a:avLst/>
+          </a:prstGeom>
+        </p:spPr>
+      </p:pic>
+      <p:sp>
+        <p:nvSpPr>
+          <p:cNvPr id="37" name="Rounded Rectangle 36"/>
+          <p:cNvSpPr/>
+          <p:nvPr/>
+        </p:nvSpPr>
+        <p:spPr>
+          <a:xfrm>
+            <a:off x="6492240" y="3794760"/>
+            <a:ext cx="5212080" cy="1325880"/>
+          </a:xfrm>
+          <a:prstGeom prst="roundRect">
+            <a:avLst>
+              <a:gd name="adj" fmla="val 6000"/>
+            </a:avLst>
+          </a:prstGeom>
+          <a:solidFill>
+            <a:srgbClr val="FFFFFF"/>
+          </a:solidFill>
+          <a:ln w="9525">
+            <a:solidFill>
+              <a:srgbClr val="D5DEE8"/>
+            </a:solidFill>
+          </a:ln>
+          <a:effectLst/>
+        </p:spPr>
+        <p:style>
+          <a:lnRef idx="1">
+            <a:schemeClr val="accent1"/>
+          </a:lnRef>
+          <a:fillRef idx="3">
+            <a:schemeClr val="accent1"/>
+          </a:fillRef>
+          <a:effectRef idx="2">
+            <a:schemeClr val="accent1"/>
+          </a:effectRef>
+          <a:fontRef idx="minor">
+            <a:schemeClr val="lt1"/>
+          </a:fontRef>
+        </p:style>
+        <p:txBody>
+          <a:bodyPr rtlCol="0" anchor="ctr"/>
+          <a:lstStyle/>
+          <a:p>
+            <a:pPr algn="ctr"/>
+          </a:p>
+        </p:txBody>
+      </p:sp>
+      <p:sp>
+        <p:nvSpPr>
+          <p:cNvPr id="38" name="TextBox 37"/>
+          <p:cNvSpPr txBox="1"/>
+          <p:nvPr/>
+        </p:nvSpPr>
+        <p:spPr>
+          <a:xfrm>
+            <a:off x="6629400" y="3840480"/>
+            <a:ext cx="4937760" cy="365760"/>
+          </a:xfrm>
+          <a:prstGeom prst="rect">
+            <a:avLst/>
+          </a:prstGeom>
+          <a:noFill/>
+        </p:spPr>
+        <p:txBody>
+          <a:bodyPr wrap="square" lIns="36576" rIns="36576" tIns="18288" bIns="18288" anchor="t">
+            <a:spAutoFit/>
+          </a:bodyPr>
+          <a:lstStyle/>
+          <a:p>
+            <a:pPr algn="l">
+              <a:lnSpc>
+                <a:spcPct val="100000"/>
+              </a:lnSpc>
+              <a:spcAft>
+                <a:spcPts val="400"/>
+              </a:spcAft>
+            </a:pPr>
+            <a:r>
+              <a:rPr sz="1700" b="1" i="0">
                 <a:solidFill>
                   <a:srgbClr val="0F8F85"/>
                 </a:solidFill>
@@ -9478,6 +9492,162 @@
       <p:pic>
         <p:nvPicPr>
           <p:cNvPr id="39" name="Picture 38" descr="mgun.png"/>
+          <p:cNvPicPr>
+            <a:picLocks noChangeAspect="1"/>
+          </p:cNvPicPr>
+          <p:nvPr/>
+        </p:nvPicPr>
+        <p:blipFill>
+          <a:blip r:embed="rId7"/>
+          <a:stretch>
+            <a:fillRect/>
+          </a:stretch>
+        </p:blipFill>
+        <p:spPr>
+          <a:xfrm>
+            <a:off x="6629400" y="4297680"/>
+            <a:ext cx="4937760" cy="369671"/>
+          </a:xfrm>
+          <a:prstGeom prst="rect">
+            <a:avLst/>
+          </a:prstGeom>
+        </p:spPr>
+      </p:pic>
+      <p:sp>
+        <p:nvSpPr>
+          <p:cNvPr id="40" name="TextBox 39"/>
+          <p:cNvSpPr txBox="1"/>
+          <p:nvPr/>
+        </p:nvSpPr>
+        <p:spPr>
+          <a:xfrm>
+            <a:off x="6629400" y="4663440"/>
+            <a:ext cx="4937760" cy="457200"/>
+          </a:xfrm>
+          <a:prstGeom prst="rect">
+            <a:avLst/>
+          </a:prstGeom>
+          <a:noFill/>
+        </p:spPr>
+        <p:txBody>
+          <a:bodyPr wrap="square" lIns="36576" rIns="36576" tIns="18288" bIns="18288" anchor="t">
+            <a:spAutoFit/>
+          </a:bodyPr>
+          <a:lstStyle/>
+          <a:p>
+            <a:pPr algn="l">
+              <a:lnSpc>
+                <a:spcPct val="100000"/>
+              </a:lnSpc>
+              <a:spcAft>
+                <a:spcPts val="400"/>
+              </a:spcAft>
+            </a:pPr>
+            <a:r>
+              <a:rPr sz="1500" b="0" i="0">
+                <a:solidFill>
+                  <a:srgbClr val="64748B"/>
+                </a:solidFill>
+                <a:latin typeface="Calibri"/>
+              </a:rPr>
+              <a:t>Turning the hull carries turret and gun</a:t>
+            </a:r>
+          </a:p>
+        </p:txBody>
+      </p:sp>
+      <p:sp>
+        <p:nvSpPr>
+          <p:cNvPr id="41" name="Rounded Rectangle 40"/>
+          <p:cNvSpPr/>
+          <p:nvPr/>
+        </p:nvSpPr>
+        <p:spPr>
+          <a:xfrm>
+            <a:off x="6492240" y="5257800"/>
+            <a:ext cx="5212080" cy="1097280"/>
+          </a:xfrm>
+          <a:prstGeom prst="roundRect">
+            <a:avLst>
+              <a:gd name="adj" fmla="val 6000"/>
+            </a:avLst>
+          </a:prstGeom>
+          <a:solidFill>
+            <a:srgbClr val="FFFFFF"/>
+          </a:solidFill>
+          <a:ln w="9525">
+            <a:solidFill>
+              <a:srgbClr val="D5DEE8"/>
+            </a:solidFill>
+          </a:ln>
+          <a:effectLst/>
+        </p:spPr>
+        <p:style>
+          <a:lnRef idx="1">
+            <a:schemeClr val="accent1"/>
+          </a:lnRef>
+          <a:fillRef idx="3">
+            <a:schemeClr val="accent1"/>
+          </a:fillRef>
+          <a:effectRef idx="2">
+            <a:schemeClr val="accent1"/>
+          </a:effectRef>
+          <a:fontRef idx="minor">
+            <a:schemeClr val="lt1"/>
+          </a:fontRef>
+        </p:style>
+        <p:txBody>
+          <a:bodyPr rtlCol="0" anchor="ctr"/>
+          <a:lstStyle/>
+          <a:p>
+            <a:pPr algn="ctr"/>
+          </a:p>
+        </p:txBody>
+      </p:sp>
+      <p:sp>
+        <p:nvSpPr>
+          <p:cNvPr id="42" name="TextBox 41"/>
+          <p:cNvSpPr txBox="1"/>
+          <p:nvPr/>
+        </p:nvSpPr>
+        <p:spPr>
+          <a:xfrm>
+            <a:off x="6629400" y="5303520"/>
+            <a:ext cx="4937760" cy="365760"/>
+          </a:xfrm>
+          <a:prstGeom prst="rect">
+            <a:avLst/>
+          </a:prstGeom>
+          <a:noFill/>
+        </p:spPr>
+        <p:txBody>
+          <a:bodyPr wrap="square" lIns="36576" rIns="36576" tIns="18288" bIns="18288" anchor="t">
+            <a:spAutoFit/>
+          </a:bodyPr>
+          <a:lstStyle/>
+          <a:p>
+            <a:pPr algn="l">
+              <a:lnSpc>
+                <a:spcPct val="100000"/>
+              </a:lnSpc>
+              <a:spcAft>
+                <a:spcPts val="400"/>
+              </a:spcAft>
+            </a:pPr>
+            <a:r>
+              <a:rPr sz="1700" b="1" i="0">
+                <a:solidFill>
+                  <a:srgbClr val="0F8F85"/>
+                </a:solidFill>
+                <a:latin typeface="Calibri"/>
+              </a:rPr>
+              <a:t>World to screen</a:t>
+            </a:r>
+          </a:p>
+        </p:txBody>
+      </p:sp>
+      <p:pic>
+        <p:nvPicPr>
+          <p:cNvPr id="43" name="Picture 42" descr="clip.png"/>
           <p:cNvPicPr>
             <a:picLocks noChangeAspect="1"/>
           </p:cNvPicPr>
@@ -9491,164 +9661,14 @@
         </p:blipFill>
         <p:spPr>
           <a:xfrm>
-            <a:off x="6766560" y="3840480"/>
-            <a:ext cx="4754880" cy="355980"/>
+            <a:off x="6675120" y="5760720"/>
+            <a:ext cx="4206240" cy="495286"/>
           </a:xfrm>
           <a:prstGeom prst="rect">
             <a:avLst/>
           </a:prstGeom>
         </p:spPr>
       </p:pic>
-      <p:sp>
-        <p:nvSpPr>
-          <p:cNvPr id="40" name="TextBox 39"/>
-          <p:cNvSpPr txBox="1"/>
-          <p:nvPr/>
-        </p:nvSpPr>
-        <p:spPr>
-          <a:xfrm>
-            <a:off x="6720840" y="4297680"/>
-            <a:ext cx="4846320" cy="822960"/>
-          </a:xfrm>
-          <a:prstGeom prst="rect">
-            <a:avLst/>
-          </a:prstGeom>
-          <a:noFill/>
-        </p:spPr>
-        <p:txBody>
-          <a:bodyPr wrap="square" lIns="36576" rIns="36576" tIns="18288" bIns="18288" anchor="t">
-            <a:spAutoFit/>
-          </a:bodyPr>
-          <a:lstStyle/>
-          <a:p>
-            <a:pPr algn="l">
-              <a:lnSpc>
-                <a:spcPct val="100000"/>
-              </a:lnSpc>
-              <a:spcAft>
-                <a:spcPts val="200"/>
-              </a:spcAft>
-            </a:pPr>
-            <a:r>
-              <a:rPr sz="1400" b="0" i="0">
-                <a:solidFill>
-                  <a:srgbClr val="1E293B"/>
-                </a:solidFill>
-                <a:latin typeface="Calibri"/>
-              </a:rPr>
-              <a:t>The turret and gun inherit the hull matrix: turning the hull carries them along.</a:t>
-            </a:r>
-          </a:p>
-        </p:txBody>
-      </p:sp>
-      <p:sp>
-        <p:nvSpPr>
-          <p:cNvPr id="41" name="TextBox 40"/>
-          <p:cNvSpPr txBox="1"/>
-          <p:nvPr/>
-        </p:nvSpPr>
-        <p:spPr>
-          <a:xfrm>
-            <a:off x="6720840" y="5074920"/>
-            <a:ext cx="4846320" cy="320040"/>
-          </a:xfrm>
-          <a:prstGeom prst="rect">
-            <a:avLst/>
-          </a:prstGeom>
-          <a:noFill/>
-        </p:spPr>
-        <p:txBody>
-          <a:bodyPr wrap="square" lIns="36576" rIns="36576" tIns="18288" bIns="18288" anchor="t">
-            <a:spAutoFit/>
-          </a:bodyPr>
-          <a:lstStyle/>
-          <a:p>
-            <a:pPr algn="l">
-              <a:lnSpc>
-                <a:spcPct val="100000"/>
-              </a:lnSpc>
-              <a:spcAft>
-                <a:spcPts val="400"/>
-              </a:spcAft>
-            </a:pPr>
-            <a:r>
-              <a:rPr sz="1400" b="1" i="0">
-                <a:solidFill>
-                  <a:srgbClr val="0F8F85"/>
-                </a:solidFill>
-                <a:latin typeface="Calibri"/>
-              </a:rPr>
-              <a:t>World to screen</a:t>
-            </a:r>
-          </a:p>
-        </p:txBody>
-      </p:sp>
-      <p:pic>
-        <p:nvPicPr>
-          <p:cNvPr id="42" name="Picture 41" descr="clip.png"/>
-          <p:cNvPicPr>
-            <a:picLocks noChangeAspect="1"/>
-          </p:cNvPicPr>
-          <p:nvPr/>
-        </p:nvPicPr>
-        <p:blipFill>
-          <a:blip r:embed="rId9"/>
-          <a:stretch>
-            <a:fillRect/>
-          </a:stretch>
-        </p:blipFill>
-        <p:spPr>
-          <a:xfrm>
-            <a:off x="6766560" y="5440680"/>
-            <a:ext cx="4023360" cy="473752"/>
-          </a:xfrm>
-          <a:prstGeom prst="rect">
-            <a:avLst/>
-          </a:prstGeom>
-        </p:spPr>
-      </p:pic>
-      <p:sp>
-        <p:nvSpPr>
-          <p:cNvPr id="43" name="TextBox 42"/>
-          <p:cNvSpPr txBox="1"/>
-          <p:nvPr/>
-        </p:nvSpPr>
-        <p:spPr>
-          <a:xfrm>
-            <a:off x="6720840" y="5897880"/>
-            <a:ext cx="4846320" cy="411480"/>
-          </a:xfrm>
-          <a:prstGeom prst="rect">
-            <a:avLst/>
-          </a:prstGeom>
-          <a:noFill/>
-        </p:spPr>
-        <p:txBody>
-          <a:bodyPr wrap="square" lIns="36576" rIns="36576" tIns="18288" bIns="18288" anchor="t">
-            <a:spAutoFit/>
-          </a:bodyPr>
-          <a:lstStyle/>
-          <a:p>
-            <a:pPr algn="l">
-              <a:lnSpc>
-                <a:spcPct val="100000"/>
-              </a:lnSpc>
-              <a:spcAft>
-                <a:spcPts val="400"/>
-              </a:spcAft>
-            </a:pPr>
-            <a:r>
-              <a:rPr sz="1300" b="0" i="0">
-                <a:solidFill>
-                  <a:srgbClr val="64748B"/>
-                </a:solidFill>
-                <a:latin typeface="Calibri"/>
-              </a:rPr>
-              <a:t>view V (look-at), projection P divides by depth</a:t>
-            </a:r>
-          </a:p>
-        </p:txBody>
-      </p:sp>
     </p:spTree>
   </p:cSld>
   <p:clrMapOvr>
@@ -9903,8 +9923,8 @@
         </p:blipFill>
         <p:spPr>
           <a:xfrm>
-            <a:off x="548640" y="1024128"/>
-            <a:ext cx="7589520" cy="769872"/>
+            <a:off x="548640" y="1051560"/>
+            <a:ext cx="8412480" cy="853352"/>
           </a:xfrm>
           <a:prstGeom prst="rect">
             <a:avLst/>
@@ -9919,8 +9939,8 @@
         </p:nvSpPr>
         <p:spPr>
           <a:xfrm>
-            <a:off x="8275320" y="1005840"/>
-            <a:ext cx="3474720" cy="502920"/>
+            <a:off x="9418320" y="1024128"/>
+            <a:ext cx="2377440" cy="731520"/>
           </a:xfrm>
           <a:prstGeom prst="rect">
             <a:avLst/>
@@ -9942,13 +9962,13 @@
               </a:spcAft>
             </a:pPr>
             <a:r>
-              <a:rPr sz="1200" b="0" i="1">
+              <a:rPr sz="1300" b="0" i="1">
                 <a:solidFill>
                   <a:srgbClr val="64748B"/>
                 </a:solidFill>
                 <a:latin typeface="Calibri"/>
               </a:rPr>
-              <a:t>f = illumination model, att = falloff, sh = shadow</a:t>
+              <a:t>f = model, att = falloff, sh = shadow</a:t>
             </a:r>
           </a:p>
         </p:txBody>
@@ -9961,8 +9981,8 @@
         </p:nvSpPr>
         <p:spPr>
           <a:xfrm>
-            <a:off x="548640" y="1645920"/>
-            <a:ext cx="5760720" cy="4709160"/>
+            <a:off x="548640" y="1783080"/>
+            <a:ext cx="6400800" cy="4572000"/>
           </a:xfrm>
           <a:prstGeom prst="roundRect">
             <a:avLst>
@@ -10009,8 +10029,8 @@
         </p:nvSpPr>
         <p:spPr>
           <a:xfrm>
-            <a:off x="685800" y="1773936"/>
-            <a:ext cx="1691640" cy="457200"/>
+            <a:off x="685800" y="1929384"/>
+            <a:ext cx="1920240" cy="502920"/>
           </a:xfrm>
           <a:prstGeom prst="rect">
             <a:avLst/>
@@ -10032,7 +10052,7 @@
               </a:spcAft>
             </a:pPr>
             <a:r>
-              <a:rPr sz="1400" b="1" i="0">
+              <a:rPr sz="1600" b="1" i="0">
                 <a:solidFill>
                   <a:srgbClr val="0F8F85"/>
                 </a:solidFill>
@@ -10059,8 +10079,8 @@
         </p:blipFill>
         <p:spPr>
           <a:xfrm>
-            <a:off x="2468880" y="1755648"/>
-            <a:ext cx="687787" cy="457199"/>
+            <a:off x="2651760" y="1892807"/>
+            <a:ext cx="852856" cy="566928"/>
           </a:xfrm>
           <a:prstGeom prst="rect">
             <a:avLst/>
@@ -10075,8 +10095,8 @@
         </p:nvSpPr>
         <p:spPr>
           <a:xfrm>
-            <a:off x="685800" y="2505456"/>
-            <a:ext cx="1691640" cy="457200"/>
+            <a:off x="685800" y="2670048"/>
+            <a:ext cx="1920240" cy="502920"/>
           </a:xfrm>
           <a:prstGeom prst="rect">
             <a:avLst/>
@@ -10098,7 +10118,7 @@
               </a:spcAft>
             </a:pPr>
             <a:r>
-              <a:rPr sz="1400" b="1" i="0">
+              <a:rPr sz="1600" b="1" i="0">
                 <a:solidFill>
                   <a:srgbClr val="0F8F85"/>
                 </a:solidFill>
@@ -10125,8 +10145,8 @@
         </p:blipFill>
         <p:spPr>
           <a:xfrm>
-            <a:off x="2468880" y="2487168"/>
-            <a:ext cx="2821172" cy="457200"/>
+            <a:off x="2651760" y="2633472"/>
+            <a:ext cx="3272559" cy="530352"/>
           </a:xfrm>
           <a:prstGeom prst="rect">
             <a:avLst/>
@@ -10141,8 +10161,8 @@
         </p:nvSpPr>
         <p:spPr>
           <a:xfrm>
-            <a:off x="685800" y="3236976"/>
-            <a:ext cx="1691640" cy="457200"/>
+            <a:off x="685800" y="3410712"/>
+            <a:ext cx="1920240" cy="502920"/>
           </a:xfrm>
           <a:prstGeom prst="rect">
             <a:avLst/>
@@ -10164,7 +10184,7 @@
               </a:spcAft>
             </a:pPr>
             <a:r>
-              <a:rPr sz="1400" b="1" i="0">
+              <a:rPr sz="1600" b="1" i="0">
                 <a:solidFill>
                   <a:srgbClr val="0F8F85"/>
                 </a:solidFill>
@@ -10191,8 +10211,8 @@
         </p:blipFill>
         <p:spPr>
           <a:xfrm>
-            <a:off x="2468880" y="3218688"/>
-            <a:ext cx="2856613" cy="457200"/>
+            <a:off x="2651760" y="3374136"/>
+            <a:ext cx="3313672" cy="530352"/>
           </a:xfrm>
           <a:prstGeom prst="rect">
             <a:avLst/>
@@ -10207,8 +10227,8 @@
         </p:nvSpPr>
         <p:spPr>
           <a:xfrm>
-            <a:off x="685800" y="3968496"/>
-            <a:ext cx="1691640" cy="457200"/>
+            <a:off x="685800" y="4151376"/>
+            <a:ext cx="1920240" cy="502920"/>
           </a:xfrm>
           <a:prstGeom prst="rect">
             <a:avLst/>
@@ -10230,7 +10250,7 @@
               </a:spcAft>
             </a:pPr>
             <a:r>
-              <a:rPr sz="1400" b="1" i="0">
+              <a:rPr sz="1600" b="1" i="0">
                 <a:solidFill>
                   <a:srgbClr val="0F8F85"/>
                 </a:solidFill>
@@ -10257,8 +10277,8 @@
         </p:blipFill>
         <p:spPr>
           <a:xfrm>
-            <a:off x="2468880" y="3950207"/>
-            <a:ext cx="3737113" cy="457200"/>
+            <a:off x="2651760" y="4114800"/>
+            <a:ext cx="4206240" cy="514593"/>
           </a:xfrm>
           <a:prstGeom prst="rect">
             <a:avLst/>
@@ -10273,8 +10293,8 @@
         </p:nvSpPr>
         <p:spPr>
           <a:xfrm>
-            <a:off x="685800" y="4700016"/>
-            <a:ext cx="1691640" cy="457200"/>
+            <a:off x="685800" y="4892040"/>
+            <a:ext cx="1920240" cy="502920"/>
           </a:xfrm>
           <a:prstGeom prst="rect">
             <a:avLst/>
@@ -10296,7 +10316,7 @@
               </a:spcAft>
             </a:pPr>
             <a:r>
-              <a:rPr sz="1400" b="1" i="0">
+              <a:rPr sz="1600" b="1" i="0">
                 <a:solidFill>
                   <a:srgbClr val="0F8F85"/>
                 </a:solidFill>
@@ -10323,8 +10343,8 @@
         </p:blipFill>
         <p:spPr>
           <a:xfrm>
-            <a:off x="2468880" y="4681727"/>
-            <a:ext cx="2658139" cy="457199"/>
+            <a:off x="2651760" y="4855464"/>
+            <a:ext cx="3296093" cy="566928"/>
           </a:xfrm>
           <a:prstGeom prst="rect">
             <a:avLst/>
@@ -10339,8 +10359,8 @@
         </p:nvSpPr>
         <p:spPr>
           <a:xfrm>
-            <a:off x="685800" y="5431536"/>
-            <a:ext cx="1691640" cy="457200"/>
+            <a:off x="685800" y="5632704"/>
+            <a:ext cx="1920240" cy="502920"/>
           </a:xfrm>
           <a:prstGeom prst="rect">
             <a:avLst/>
@@ -10362,7 +10382,7 @@
               </a:spcAft>
             </a:pPr>
             <a:r>
-              <a:rPr sz="1400" b="1" i="0">
+              <a:rPr sz="1600" b="1" i="0">
                 <a:solidFill>
                   <a:srgbClr val="0F8F85"/>
                 </a:solidFill>
@@ -10389,8 +10409,8 @@
         </p:blipFill>
         <p:spPr>
           <a:xfrm>
-            <a:off x="2468880" y="5413247"/>
-            <a:ext cx="2122714" cy="457200"/>
+            <a:off x="2651760" y="5596128"/>
+            <a:ext cx="2632165" cy="566928"/>
           </a:xfrm>
           <a:prstGeom prst="rect">
             <a:avLst/>
@@ -10413,8 +10433,8 @@
         </p:blipFill>
         <p:spPr>
           <a:xfrm>
-            <a:off x="6583680" y="1645920"/>
-            <a:ext cx="5120640" cy="875898"/>
+            <a:off x="7223760" y="1783080"/>
+            <a:ext cx="4480560" cy="766411"/>
           </a:xfrm>
           <a:prstGeom prst="rect">
             <a:avLst/>
@@ -10434,8 +10454,8 @@
         </p:nvSpPr>
         <p:spPr>
           <a:xfrm>
-            <a:off x="6583680" y="2549250"/>
-            <a:ext cx="5120640" cy="320040"/>
+            <a:off x="7223760" y="2567779"/>
+            <a:ext cx="4480560" cy="274320"/>
           </a:xfrm>
           <a:prstGeom prst="rect">
             <a:avLst/>
@@ -10457,13 +10477,13 @@
               </a:spcAft>
             </a:pPr>
             <a:r>
-              <a:rPr sz="1100" b="0" i="1">
+              <a:rPr sz="1200" b="0" i="1">
                 <a:solidFill>
                   <a:srgbClr val="64748B"/>
                 </a:solidFill>
                 <a:latin typeface="Calibri"/>
               </a:rPr>
-              <a:t>Lambert · Phong · Blinn–Phong · Oren–Nayar · Cook–Torrance · Subsurface</a:t>
+              <a:t>Six models, one sphere each</a:t>
             </a:r>
           </a:p>
         </p:txBody>
@@ -10476,8 +10496,8 @@
         </p:nvSpPr>
         <p:spPr>
           <a:xfrm>
-            <a:off x="6583680" y="2933298"/>
-            <a:ext cx="5120640" cy="3421781"/>
+            <a:off x="7223760" y="2915251"/>
+            <a:ext cx="4480560" cy="3439828"/>
           </a:xfrm>
           <a:prstGeom prst="roundRect">
             <a:avLst>
@@ -10524,8 +10544,8 @@
         </p:nvSpPr>
         <p:spPr>
           <a:xfrm>
-            <a:off x="6720840" y="2969874"/>
-            <a:ext cx="4846320" cy="320040"/>
+            <a:off x="7360920" y="2951827"/>
+            <a:ext cx="4206240" cy="365760"/>
           </a:xfrm>
           <a:prstGeom prst="rect">
             <a:avLst/>
@@ -10547,7 +10567,7 @@
               </a:spcAft>
             </a:pPr>
             <a:r>
-              <a:rPr sz="1400" b="1" i="0">
+              <a:rPr sz="1700" b="1" i="0">
                 <a:solidFill>
                   <a:srgbClr val="0F8F85"/>
                 </a:solidFill>
@@ -10566,8 +10586,8 @@
         </p:nvSpPr>
         <p:spPr>
           <a:xfrm>
-            <a:off x="6720840" y="3317346"/>
-            <a:ext cx="4846320" cy="1417320"/>
+            <a:off x="7360920" y="3372451"/>
+            <a:ext cx="4206240" cy="1554480"/>
           </a:xfrm>
           <a:prstGeom prst="rect">
             <a:avLst/>
@@ -10585,7 +10605,7 @@
                 <a:spcPct val="100000"/>
               </a:lnSpc>
               <a:spcAft>
-                <a:spcPts val="200"/>
+                <a:spcPts val="300"/>
               </a:spcAft>
               <a:buClr>
                 <a:srgbClr val="007A3D"/>
@@ -10593,13 +10613,13 @@
               <a:buChar char="•"/>
             </a:pPr>
             <a:r>
-              <a:rPr sz="1400" b="0" i="0">
+              <a:rPr sz="1600" b="0" i="0">
                 <a:solidFill>
                   <a:srgbClr val="1E293B"/>
                 </a:solidFill>
                 <a:latin typeface="Calibri"/>
               </a:rPr>
-              <a:t>Directional: sun, moon (no falloff)</a:t>
+              <a:t>Directional: sun, moon</a:t>
             </a:r>
           </a:p>
           <a:p>
@@ -10608,7 +10628,7 @@
                 <a:spcPct val="100000"/>
               </a:lnSpc>
               <a:spcAft>
-                <a:spcPts val="200"/>
+                <a:spcPts val="300"/>
               </a:spcAft>
               <a:buClr>
                 <a:srgbClr val="007A3D"/>
@@ -10616,7 +10636,7 @@
               <a:buChar char="•"/>
             </a:pPr>
             <a:r>
-              <a:rPr sz="1400" b="0" i="0">
+              <a:rPr sz="1600" b="0" i="0">
                 <a:solidFill>
                   <a:srgbClr val="1E293B"/>
                 </a:solidFill>
@@ -10631,7 +10651,7 @@
                 <a:spcPct val="100000"/>
               </a:lnSpc>
               <a:spcAft>
-                <a:spcPts val="200"/>
+                <a:spcPts val="300"/>
               </a:spcAft>
               <a:buClr>
                 <a:srgbClr val="007A3D"/>
@@ -10639,13 +10659,13 @@
               <a:buChar char="•"/>
             </a:pPr>
             <a:r>
-              <a:rPr sz="1400" b="0" i="0">
+              <a:rPr sz="1600" b="0" i="0">
                 <a:solidFill>
                   <a:srgbClr val="1E293B"/>
                 </a:solidFill>
                 <a:latin typeface="Calibri"/>
               </a:rPr>
-              <a:t>Spot: floodlights; cone factor</a:t>
+              <a:t>Spot: floodlights (cone)</a:t>
             </a:r>
           </a:p>
           <a:p>
@@ -10654,7 +10674,7 @@
                 <a:spcPct val="100000"/>
               </a:lnSpc>
               <a:spcAft>
-                <a:spcPts val="200"/>
+                <a:spcPts val="300"/>
               </a:spcAft>
               <a:buClr>
                 <a:srgbClr val="007A3D"/>
@@ -10662,7 +10682,7 @@
               <a:buChar char="•"/>
             </a:pPr>
             <a:r>
-              <a:rPr sz="1400" b="0" i="0">
+              <a:rPr sz="1600" b="0" i="0">
                 <a:solidFill>
                   <a:srgbClr val="1E293B"/>
                 </a:solidFill>
@@ -10689,32 +10709,8 @@
         </p:blipFill>
         <p:spPr>
           <a:xfrm>
-            <a:off x="6766560" y="5394960"/>
-            <a:ext cx="2743200" cy="545077"/>
-          </a:xfrm>
-          <a:prstGeom prst="rect">
-            <a:avLst/>
-          </a:prstGeom>
-        </p:spPr>
-      </p:pic>
-      <p:pic>
-        <p:nvPicPr>
-          <p:cNvPr id="29" name="Picture 28" descr="spot.png"/>
-          <p:cNvPicPr>
-            <a:picLocks noChangeAspect="1"/>
-          </p:cNvPicPr>
-          <p:nvPr/>
-        </p:nvPicPr>
-        <p:blipFill>
-          <a:blip r:embed="rId13"/>
-          <a:stretch>
-            <a:fillRect/>
-          </a:stretch>
-        </p:blipFill>
-        <p:spPr>
-          <a:xfrm>
-            <a:off x="9601200" y="5440680"/>
-            <a:ext cx="2011680" cy="364784"/>
+            <a:off x="7360920" y="5257800"/>
+            <a:ext cx="3108960" cy="617754"/>
           </a:xfrm>
           <a:prstGeom prst="rect">
             <a:avLst/>
@@ -12027,7 +12023,7 @@
         <p:spPr>
           <a:xfrm>
             <a:off x="685800" y="2971800"/>
-            <a:ext cx="5943600" cy="320040"/>
+            <a:ext cx="5943600" cy="365760"/>
           </a:xfrm>
           <a:prstGeom prst="rect">
             <a:avLst/>
@@ -12049,7 +12045,7 @@
               </a:spcAft>
             </a:pPr>
             <a:r>
-              <a:rPr sz="1400" b="1" i="0">
+              <a:rPr sz="1600" b="1" i="0">
                 <a:solidFill>
                   <a:srgbClr val="0F8F85"/>
                 </a:solidFill>
@@ -12092,7 +12088,7 @@
         </p:nvSpPr>
         <p:spPr>
           <a:xfrm>
-            <a:off x="685800" y="4114800"/>
+            <a:off x="685800" y="4160520"/>
             <a:ext cx="5943600" cy="640080"/>
           </a:xfrm>
           <a:prstGeom prst="rect">
@@ -12115,7 +12111,7 @@
               </a:spcAft>
             </a:pPr>
             <a:r>
-              <a:rPr sz="1400" b="0" i="0">
+              <a:rPr sz="1500" b="0" i="0">
                 <a:solidFill>
                   <a:srgbClr val="1E293B"/>
                 </a:solidFill>
@@ -12134,8 +12130,8 @@
         </p:nvSpPr>
         <p:spPr>
           <a:xfrm>
-            <a:off x="685800" y="4663440"/>
-            <a:ext cx="5943600" cy="320040"/>
+            <a:off x="685800" y="4709160"/>
+            <a:ext cx="5943600" cy="365760"/>
           </a:xfrm>
           <a:prstGeom prst="rect">
             <a:avLst/>
@@ -12157,7 +12153,7 @@
               </a:spcAft>
             </a:pPr>
             <a:r>
-              <a:rPr sz="1400" b="1" i="0">
+              <a:rPr sz="1600" b="1" i="0">
                 <a:solidFill>
                   <a:srgbClr val="0F8F85"/>
                 </a:solidFill>
@@ -12224,8 +12220,8 @@
         </p:nvSpPr>
         <p:spPr>
           <a:xfrm>
-            <a:off x="685800" y="5806440"/>
-            <a:ext cx="6035040" cy="502920"/>
+            <a:off x="685800" y="5760720"/>
+            <a:ext cx="6035040" cy="548640"/>
           </a:xfrm>
           <a:prstGeom prst="rect">
             <a:avLst/>
@@ -12247,7 +12243,7 @@
               </a:spcAft>
             </a:pPr>
             <a:r>
-              <a:rPr sz="1300" b="0" i="0">
+              <a:rPr sz="1500" b="0" i="0">
                 <a:solidFill>
                   <a:srgbClr val="64748B"/>
                 </a:solidFill>
@@ -12360,7 +12356,7 @@
               </a:spcAft>
             </a:pPr>
             <a:r>
-              <a:rPr sz="1500" b="0" i="0">
+              <a:rPr sz="1600" b="0" i="0">
                 <a:solidFill>
                   <a:srgbClr val="1E293B"/>
                 </a:solidFill>

--- a/Docs/Deliverables/Slides/Sentinel_Presentation.pptx
+++ b/Docs/Deliverables/Slides/Sentinel_Presentation.pptx
@@ -127,7 +127,11 @@
           <a:lstStyle/>
           <a:p>
             <a:r>
-              <a:rPr sz="1300" b="1"/>
+              <a:rPr sz="1300" b="1">
+                <a:solidFill>
+                  <a:srgbClr val="1E293B"/>
+                </a:solidFill>
+              </a:rPr>
               <a:t>GPU time per pass (ms)</a:t>
             </a:r>
           </a:p>
@@ -233,7 +237,7 @@
           <c:showBubbleSize val="0"/>
           <c:showLeaderLines val="1"/>
         </c:dLbls>
-        <c:gapWidth val="45"/>
+        <c:gapWidth val="50"/>
         <c:axId val="-2068027336"/>
         <c:axId val="-2113994440"/>
       </c:barChart>
@@ -3842,7 +3846,7 @@
         <p:spPr>
           <a:xfrm>
             <a:off x="731520" y="118872"/>
-            <a:ext cx="10058400" cy="640080"/>
+            <a:ext cx="10515600" cy="640080"/>
           </a:xfrm>
           <a:prstGeom prst="rect">
             <a:avLst/>
@@ -3883,8 +3887,8 @@
         </p:nvSpPr>
         <p:spPr>
           <a:xfrm>
-            <a:off x="10789920" y="6473952"/>
-            <a:ext cx="1188720" cy="274320"/>
+            <a:off x="548640" y="6492240"/>
+            <a:ext cx="5486400" cy="274320"/>
           </a:xfrm>
           <a:prstGeom prst="rect">
             <a:avLst/>
@@ -3897,7 +3901,7 @@
           </a:bodyPr>
           <a:lstStyle/>
           <a:p>
-            <a:pPr algn="r">
+            <a:pPr algn="l">
               <a:lnSpc>
                 <a:spcPct val="100000"/>
               </a:lnSpc>
@@ -3906,13 +3910,13 @@
               </a:spcAft>
             </a:pPr>
             <a:r>
-              <a:rPr sz="1100" b="0" i="0">
+              <a:rPr sz="1000" b="0" i="0">
                 <a:solidFill>
                   <a:srgbClr val="64748B"/>
                 </a:solidFill>
                 <a:latin typeface="Calibri"/>
               </a:rPr>
-              <a:t>10 / 10</a:t>
+              <a:t>Sentinel  ·  CSE 4102  ·  KUET</a:t>
             </a:r>
           </a:p>
         </p:txBody>
@@ -3925,8 +3929,8 @@
         </p:nvSpPr>
         <p:spPr>
           <a:xfrm>
-            <a:off x="548640" y="1051560"/>
-            <a:ext cx="5486400" cy="4572000"/>
+            <a:off x="10789920" y="6492240"/>
+            <a:ext cx="1188720" cy="274320"/>
           </a:xfrm>
           <a:prstGeom prst="rect">
             <a:avLst/>
@@ -3939,155 +3943,22 @@
           </a:bodyPr>
           <a:lstStyle/>
           <a:p>
-            <a:pPr algn="l">
-              <a:lnSpc>
-                <a:spcPct val="100000"/>
-              </a:lnSpc>
-              <a:spcAft>
-                <a:spcPts val="600"/>
-              </a:spcAft>
-            </a:pPr>
-            <a:r>
-              <a:rPr sz="1600" b="0" i="0">
-                <a:solidFill>
-                  <a:srgbClr val="1E293B"/>
-                </a:solidFill>
-                <a:latin typeface="Calibri"/>
-              </a:rPr>
-              <a:t>[1] K. Perlin, "Improving noise," ACM TOG, 21(3), 2002.</a:t>
-            </a:r>
-          </a:p>
-          <a:p>
-            <a:pPr algn="l">
-              <a:lnSpc>
-                <a:spcPct val="100000"/>
-              </a:lnSpc>
-              <a:spcAft>
-                <a:spcPts val="600"/>
-              </a:spcAft>
-            </a:pPr>
-            <a:r>
-              <a:rPr sz="1600" b="0" i="0">
-                <a:solidFill>
-                  <a:srgbClr val="1E293B"/>
-                </a:solidFill>
-                <a:latin typeface="Calibri"/>
-              </a:rPr>
-              <a:t>[2] S. Worley, "A cellular texture basis function," SIGGRAPH, 1996.</a:t>
-            </a:r>
-          </a:p>
-          <a:p>
-            <a:pPr algn="l">
-              <a:lnSpc>
-                <a:spcPct val="100000"/>
-              </a:lnSpc>
-              <a:spcAft>
-                <a:spcPts val="600"/>
-              </a:spcAft>
-            </a:pPr>
-            <a:r>
-              <a:rPr sz="1600" b="0" i="0">
-                <a:solidFill>
-                  <a:srgbClr val="1E293B"/>
-                </a:solidFill>
-                <a:latin typeface="Calibri"/>
-              </a:rPr>
-              <a:t>[3] R. Cook, K. Torrance, "A reflectance model for computer graphics," ACM TOG, 1(1), 1982.</a:t>
-            </a:r>
-          </a:p>
-          <a:p>
-            <a:pPr algn="l">
-              <a:lnSpc>
-                <a:spcPct val="100000"/>
-              </a:lnSpc>
-              <a:spcAft>
-                <a:spcPts val="600"/>
-              </a:spcAft>
-            </a:pPr>
-            <a:r>
-              <a:rPr sz="1600" b="0" i="0">
-                <a:solidFill>
-                  <a:srgbClr val="1E293B"/>
-                </a:solidFill>
-                <a:latin typeface="Calibri"/>
-              </a:rPr>
-              <a:t>[4] B. Walter et al., "Microfacet models for refraction through rough surfaces," EGSR, 2007.</a:t>
-            </a:r>
-          </a:p>
-          <a:p>
-            <a:pPr algn="l">
-              <a:lnSpc>
-                <a:spcPct val="100000"/>
-              </a:lnSpc>
-              <a:spcAft>
-                <a:spcPts val="600"/>
-              </a:spcAft>
-            </a:pPr>
-            <a:r>
-              <a:rPr sz="1600" b="0" i="0">
-                <a:solidFill>
-                  <a:srgbClr val="1E293B"/>
-                </a:solidFill>
-                <a:latin typeface="Calibri"/>
-              </a:rPr>
-              <a:t>[5] B. Karis, "Real shading in Unreal Engine 4," SIGGRAPH Course, 2013.</a:t>
-            </a:r>
-          </a:p>
-          <a:p>
-            <a:pPr algn="l">
-              <a:lnSpc>
-                <a:spcPct val="100000"/>
-              </a:lnSpc>
-              <a:spcAft>
-                <a:spcPts val="600"/>
-              </a:spcAft>
-            </a:pPr>
-            <a:r>
-              <a:rPr sz="1600" b="0" i="0">
-                <a:solidFill>
-                  <a:srgbClr val="1E293B"/>
-                </a:solidFill>
-                <a:latin typeface="Calibri"/>
-              </a:rPr>
-              <a:t>[6] S. Hillaire, "A scalable and production ready sky and atmosphere rendering technique," CGF, 39(4), 2020.</a:t>
-            </a:r>
-          </a:p>
-          <a:p>
-            <a:pPr algn="l">
-              <a:lnSpc>
-                <a:spcPct val="100000"/>
-              </a:lnSpc>
-              <a:spcAft>
-                <a:spcPts val="600"/>
-              </a:spcAft>
-            </a:pPr>
-            <a:r>
-              <a:rPr sz="1600" b="0" i="0">
-                <a:solidFill>
-                  <a:srgbClr val="1E293B"/>
-                </a:solidFill>
-                <a:latin typeface="Calibri"/>
-              </a:rPr>
-              <a:t>[7] R. Dimitrov, "Cascaded shadow maps," NVIDIA, 2007.</a:t>
-            </a:r>
-          </a:p>
-          <a:p>
-            <a:pPr algn="l">
-              <a:lnSpc>
-                <a:spcPct val="100000"/>
-              </a:lnSpc>
-              <a:spcAft>
-                <a:spcPts val="600"/>
-              </a:spcAft>
-            </a:pPr>
-            <a:r>
-              <a:rPr sz="1600" b="0" i="0">
-                <a:solidFill>
-                  <a:srgbClr val="1E293B"/>
-                </a:solidFill>
-                <a:latin typeface="Calibri"/>
-              </a:rPr>
-              <a:t>[8] M. Oren, S. Nayar, "Generalization of Lambert's reflectance model," SIGGRAPH, 1994.</a:t>
+            <a:pPr algn="r">
+              <a:lnSpc>
+                <a:spcPct val="100000"/>
+              </a:lnSpc>
+              <a:spcAft>
+                <a:spcPts val="400"/>
+              </a:spcAft>
+            </a:pPr>
+            <a:r>
+              <a:rPr sz="1100" b="0" i="0">
+                <a:solidFill>
+                  <a:srgbClr val="64748B"/>
+                </a:solidFill>
+                <a:latin typeface="Calibri"/>
+              </a:rPr>
+              <a:t>10 / 10</a:t>
             </a:r>
           </a:p>
         </p:txBody>
@@ -4100,7 +3971,7 @@
         </p:nvSpPr>
         <p:spPr>
           <a:xfrm>
-            <a:off x="6263640" y="1051560"/>
+            <a:off x="548640" y="1051560"/>
             <a:ext cx="5486400" cy="4572000"/>
           </a:xfrm>
           <a:prstGeom prst="rect">
@@ -4129,6 +4000,181 @@
                 </a:solidFill>
                 <a:latin typeface="Calibri"/>
               </a:rPr>
+              <a:t>[1] K. Perlin, "Improving noise," ACM TOG, 21(3), 2002.</a:t>
+            </a:r>
+          </a:p>
+          <a:p>
+            <a:pPr algn="l">
+              <a:lnSpc>
+                <a:spcPct val="100000"/>
+              </a:lnSpc>
+              <a:spcAft>
+                <a:spcPts val="600"/>
+              </a:spcAft>
+            </a:pPr>
+            <a:r>
+              <a:rPr sz="1600" b="0" i="0">
+                <a:solidFill>
+                  <a:srgbClr val="1E293B"/>
+                </a:solidFill>
+                <a:latin typeface="Calibri"/>
+              </a:rPr>
+              <a:t>[2] S. Worley, "A cellular texture basis function," SIGGRAPH, 1996.</a:t>
+            </a:r>
+          </a:p>
+          <a:p>
+            <a:pPr algn="l">
+              <a:lnSpc>
+                <a:spcPct val="100000"/>
+              </a:lnSpc>
+              <a:spcAft>
+                <a:spcPts val="600"/>
+              </a:spcAft>
+            </a:pPr>
+            <a:r>
+              <a:rPr sz="1600" b="0" i="0">
+                <a:solidFill>
+                  <a:srgbClr val="1E293B"/>
+                </a:solidFill>
+                <a:latin typeface="Calibri"/>
+              </a:rPr>
+              <a:t>[3] R. Cook, K. Torrance, "A reflectance model for computer graphics," ACM TOG, 1(1), 1982.</a:t>
+            </a:r>
+          </a:p>
+          <a:p>
+            <a:pPr algn="l">
+              <a:lnSpc>
+                <a:spcPct val="100000"/>
+              </a:lnSpc>
+              <a:spcAft>
+                <a:spcPts val="600"/>
+              </a:spcAft>
+            </a:pPr>
+            <a:r>
+              <a:rPr sz="1600" b="0" i="0">
+                <a:solidFill>
+                  <a:srgbClr val="1E293B"/>
+                </a:solidFill>
+                <a:latin typeface="Calibri"/>
+              </a:rPr>
+              <a:t>[4] B. Walter et al., "Microfacet models for refraction through rough surfaces," EGSR, 2007.</a:t>
+            </a:r>
+          </a:p>
+          <a:p>
+            <a:pPr algn="l">
+              <a:lnSpc>
+                <a:spcPct val="100000"/>
+              </a:lnSpc>
+              <a:spcAft>
+                <a:spcPts val="600"/>
+              </a:spcAft>
+            </a:pPr>
+            <a:r>
+              <a:rPr sz="1600" b="0" i="0">
+                <a:solidFill>
+                  <a:srgbClr val="1E293B"/>
+                </a:solidFill>
+                <a:latin typeface="Calibri"/>
+              </a:rPr>
+              <a:t>[5] B. Karis, "Real shading in Unreal Engine 4," SIGGRAPH Course, 2013.</a:t>
+            </a:r>
+          </a:p>
+          <a:p>
+            <a:pPr algn="l">
+              <a:lnSpc>
+                <a:spcPct val="100000"/>
+              </a:lnSpc>
+              <a:spcAft>
+                <a:spcPts val="600"/>
+              </a:spcAft>
+            </a:pPr>
+            <a:r>
+              <a:rPr sz="1600" b="0" i="0">
+                <a:solidFill>
+                  <a:srgbClr val="1E293B"/>
+                </a:solidFill>
+                <a:latin typeface="Calibri"/>
+              </a:rPr>
+              <a:t>[6] S. Hillaire, "A scalable and production ready sky and atmosphere rendering technique," CGF, 39(4), 2020.</a:t>
+            </a:r>
+          </a:p>
+          <a:p>
+            <a:pPr algn="l">
+              <a:lnSpc>
+                <a:spcPct val="100000"/>
+              </a:lnSpc>
+              <a:spcAft>
+                <a:spcPts val="600"/>
+              </a:spcAft>
+            </a:pPr>
+            <a:r>
+              <a:rPr sz="1600" b="0" i="0">
+                <a:solidFill>
+                  <a:srgbClr val="1E293B"/>
+                </a:solidFill>
+                <a:latin typeface="Calibri"/>
+              </a:rPr>
+              <a:t>[7] R. Dimitrov, "Cascaded shadow maps," NVIDIA, 2007.</a:t>
+            </a:r>
+          </a:p>
+          <a:p>
+            <a:pPr algn="l">
+              <a:lnSpc>
+                <a:spcPct val="100000"/>
+              </a:lnSpc>
+              <a:spcAft>
+                <a:spcPts val="600"/>
+              </a:spcAft>
+            </a:pPr>
+            <a:r>
+              <a:rPr sz="1600" b="0" i="0">
+                <a:solidFill>
+                  <a:srgbClr val="1E293B"/>
+                </a:solidFill>
+                <a:latin typeface="Calibri"/>
+              </a:rPr>
+              <a:t>[8] M. Oren, S. Nayar, "Generalization of Lambert's reflectance model," SIGGRAPH, 1994.</a:t>
+            </a:r>
+          </a:p>
+        </p:txBody>
+      </p:sp>
+      <p:sp>
+        <p:nvSpPr>
+          <p:cNvPr id="10" name="TextBox 9"/>
+          <p:cNvSpPr txBox="1"/>
+          <p:nvPr/>
+        </p:nvSpPr>
+        <p:spPr>
+          <a:xfrm>
+            <a:off x="6263640" y="1051560"/>
+            <a:ext cx="5486400" cy="4572000"/>
+          </a:xfrm>
+          <a:prstGeom prst="rect">
+            <a:avLst/>
+          </a:prstGeom>
+          <a:noFill/>
+        </p:spPr>
+        <p:txBody>
+          <a:bodyPr wrap="square" lIns="36576" rIns="36576" tIns="18288" bIns="18288" anchor="t">
+            <a:spAutoFit/>
+          </a:bodyPr>
+          <a:lstStyle/>
+          <a:p>
+            <a:pPr algn="l">
+              <a:lnSpc>
+                <a:spcPct val="100000"/>
+              </a:lnSpc>
+              <a:spcAft>
+                <a:spcPts val="600"/>
+              </a:spcAft>
+            </a:pPr>
+            <a:r>
+              <a:rPr sz="1600" b="0" i="0">
+                <a:solidFill>
+                  <a:srgbClr val="1E293B"/>
+                </a:solidFill>
+                <a:latin typeface="Calibri"/>
+              </a:rPr>
               <a:t>[9] K. Narkowicz, "ACES filmic tone mapping curve," 2016.</a:t>
             </a:r>
           </a:p>
@@ -4269,7 +4315,7 @@
       </p:sp>
       <p:pic>
         <p:nvPicPr>
-          <p:cNvPr id="10" name="Picture 9" descr="band.jpg"/>
+          <p:cNvPr id="11" name="Picture 10" descr="band.jpg"/>
           <p:cNvPicPr>
             <a:picLocks noChangeAspect="1"/>
           </p:cNvPicPr>
@@ -4293,7 +4339,7 @@
       </p:pic>
       <p:sp>
         <p:nvSpPr>
-          <p:cNvPr id="11" name="Rectangle 10"/>
+          <p:cNvPr id="12" name="Rectangle 11"/>
           <p:cNvSpPr/>
           <p:nvPr/>
         </p:nvSpPr>
@@ -4337,7 +4383,7 @@
       </p:sp>
       <p:sp>
         <p:nvSpPr>
-          <p:cNvPr id="12" name="TextBox 11"/>
+          <p:cNvPr id="13" name="TextBox 12"/>
           <p:cNvSpPr txBox="1"/>
           <p:nvPr/>
         </p:nvSpPr>
@@ -4379,7 +4425,7 @@
       </p:sp>
       <p:sp>
         <p:nvSpPr>
-          <p:cNvPr id="13" name="TextBox 12"/>
+          <p:cNvPr id="14" name="TextBox 13"/>
           <p:cNvSpPr txBox="1"/>
           <p:nvPr/>
         </p:nvSpPr>
@@ -4601,7 +4647,7 @@
         <p:spPr>
           <a:xfrm>
             <a:off x="731520" y="118872"/>
-            <a:ext cx="10058400" cy="640080"/>
+            <a:ext cx="10515600" cy="640080"/>
           </a:xfrm>
           <a:prstGeom prst="rect">
             <a:avLst/>
@@ -4642,8 +4688,8 @@
         </p:nvSpPr>
         <p:spPr>
           <a:xfrm>
-            <a:off x="10789920" y="6473952"/>
-            <a:ext cx="1188720" cy="274320"/>
+            <a:off x="548640" y="6492240"/>
+            <a:ext cx="5486400" cy="274320"/>
           </a:xfrm>
           <a:prstGeom prst="rect">
             <a:avLst/>
@@ -4656,6 +4702,48 @@
           </a:bodyPr>
           <a:lstStyle/>
           <a:p>
+            <a:pPr algn="l">
+              <a:lnSpc>
+                <a:spcPct val="100000"/>
+              </a:lnSpc>
+              <a:spcAft>
+                <a:spcPts val="400"/>
+              </a:spcAft>
+            </a:pPr>
+            <a:r>
+              <a:rPr sz="1000" b="0" i="0">
+                <a:solidFill>
+                  <a:srgbClr val="64748B"/>
+                </a:solidFill>
+                <a:latin typeface="Calibri"/>
+              </a:rPr>
+              <a:t>Sentinel  ·  CSE 4102  ·  KUET</a:t>
+            </a:r>
+          </a:p>
+        </p:txBody>
+      </p:sp>
+      <p:sp>
+        <p:nvSpPr>
+          <p:cNvPr id="8" name="TextBox 7"/>
+          <p:cNvSpPr txBox="1"/>
+          <p:nvPr/>
+        </p:nvSpPr>
+        <p:spPr>
+          <a:xfrm>
+            <a:off x="10789920" y="6492240"/>
+            <a:ext cx="1188720" cy="274320"/>
+          </a:xfrm>
+          <a:prstGeom prst="rect">
+            <a:avLst/>
+          </a:prstGeom>
+          <a:noFill/>
+        </p:spPr>
+        <p:txBody>
+          <a:bodyPr wrap="square" lIns="36576" rIns="36576" tIns="18288" bIns="18288" anchor="t">
+            <a:spAutoFit/>
+          </a:bodyPr>
+          <a:lstStyle/>
+          <a:p>
             <a:pPr algn="r">
               <a:lnSpc>
                 <a:spcPct val="100000"/>
@@ -4678,14 +4766,14 @@
       </p:sp>
       <p:sp>
         <p:nvSpPr>
-          <p:cNvPr id="8" name="Oval 7"/>
+          <p:cNvPr id="9" name="Oval 8"/>
           <p:cNvSpPr/>
           <p:nvPr/>
         </p:nvSpPr>
         <p:spPr>
           <a:xfrm>
-            <a:off x="640080" y="1344168"/>
-            <a:ext cx="457200" cy="457200"/>
+            <a:off x="640080" y="1280160"/>
+            <a:ext cx="475488" cy="475488"/>
           </a:xfrm>
           <a:prstGeom prst="ellipse">
             <a:avLst/>
@@ -4696,7 +4784,13 @@
           <a:ln>
             <a:noFill/>
           </a:ln>
-          <a:effectLst/>
+          <a:effectLst>
+            <a:outerShdw blurRad="114300" dist="25400" dir="5400000" algn="t" rotWithShape="0">
+              <a:srgbClr val="0B1220">
+                <a:alpha val="16000"/>
+              </a:srgbClr>
+            </a:outerShdw>
+          </a:effectLst>
         </p:spPr>
         <p:style>
           <a:lnRef idx="1">
@@ -4722,14 +4816,14 @@
       </p:sp>
       <p:sp>
         <p:nvSpPr>
-          <p:cNvPr id="9" name="TextBox 8"/>
+          <p:cNvPr id="10" name="TextBox 9"/>
           <p:cNvSpPr txBox="1"/>
           <p:nvPr/>
         </p:nvSpPr>
         <p:spPr>
           <a:xfrm>
-            <a:off x="640080" y="1344168"/>
-            <a:ext cx="457200" cy="457200"/>
+            <a:off x="640080" y="1280160"/>
+            <a:ext cx="475488" cy="475488"/>
           </a:xfrm>
           <a:prstGeom prst="rect">
             <a:avLst/>
@@ -4764,14 +4858,14 @@
       </p:sp>
       <p:sp>
         <p:nvSpPr>
-          <p:cNvPr id="10" name="TextBox 9"/>
+          <p:cNvPr id="11" name="TextBox 10"/>
           <p:cNvSpPr txBox="1"/>
           <p:nvPr/>
         </p:nvSpPr>
         <p:spPr>
           <a:xfrm>
-            <a:off x="1325880" y="1344168"/>
-            <a:ext cx="5760720" cy="457200"/>
+            <a:off x="1325880" y="1280160"/>
+            <a:ext cx="5852160" cy="475488"/>
           </a:xfrm>
           <a:prstGeom prst="rect">
             <a:avLst/>
@@ -4806,14 +4900,14 @@
       </p:sp>
       <p:sp>
         <p:nvSpPr>
-          <p:cNvPr id="11" name="Oval 10"/>
+          <p:cNvPr id="12" name="Oval 11"/>
           <p:cNvSpPr/>
           <p:nvPr/>
         </p:nvSpPr>
         <p:spPr>
           <a:xfrm>
-            <a:off x="640080" y="2057400"/>
-            <a:ext cx="457200" cy="457200"/>
+            <a:off x="640080" y="2002536"/>
+            <a:ext cx="475488" cy="475488"/>
           </a:xfrm>
           <a:prstGeom prst="ellipse">
             <a:avLst/>
@@ -4824,7 +4918,13 @@
           <a:ln>
             <a:noFill/>
           </a:ln>
-          <a:effectLst/>
+          <a:effectLst>
+            <a:outerShdw blurRad="114300" dist="25400" dir="5400000" algn="t" rotWithShape="0">
+              <a:srgbClr val="0B1220">
+                <a:alpha val="16000"/>
+              </a:srgbClr>
+            </a:outerShdw>
+          </a:effectLst>
         </p:spPr>
         <p:style>
           <a:lnRef idx="1">
@@ -4850,14 +4950,14 @@
       </p:sp>
       <p:sp>
         <p:nvSpPr>
-          <p:cNvPr id="12" name="TextBox 11"/>
+          <p:cNvPr id="13" name="TextBox 12"/>
           <p:cNvSpPr txBox="1"/>
           <p:nvPr/>
         </p:nvSpPr>
         <p:spPr>
           <a:xfrm>
-            <a:off x="640080" y="2057400"/>
-            <a:ext cx="457200" cy="457200"/>
+            <a:off x="640080" y="2002536"/>
+            <a:ext cx="475488" cy="475488"/>
           </a:xfrm>
           <a:prstGeom prst="rect">
             <a:avLst/>
@@ -4892,14 +4992,14 @@
       </p:sp>
       <p:sp>
         <p:nvSpPr>
-          <p:cNvPr id="13" name="TextBox 12"/>
+          <p:cNvPr id="14" name="TextBox 13"/>
           <p:cNvSpPr txBox="1"/>
           <p:nvPr/>
         </p:nvSpPr>
         <p:spPr>
           <a:xfrm>
-            <a:off x="1325880" y="2057400"/>
-            <a:ext cx="5760720" cy="457200"/>
+            <a:off x="1325880" y="2002536"/>
+            <a:ext cx="5852160" cy="475488"/>
           </a:xfrm>
           <a:prstGeom prst="rect">
             <a:avLst/>
@@ -4934,14 +5034,14 @@
       </p:sp>
       <p:sp>
         <p:nvSpPr>
-          <p:cNvPr id="14" name="Oval 13"/>
+          <p:cNvPr id="15" name="Oval 14"/>
           <p:cNvSpPr/>
           <p:nvPr/>
         </p:nvSpPr>
         <p:spPr>
           <a:xfrm>
-            <a:off x="640080" y="2770632"/>
-            <a:ext cx="457200" cy="457200"/>
+            <a:off x="640080" y="2724912"/>
+            <a:ext cx="475488" cy="475488"/>
           </a:xfrm>
           <a:prstGeom prst="ellipse">
             <a:avLst/>
@@ -4952,7 +5052,13 @@
           <a:ln>
             <a:noFill/>
           </a:ln>
-          <a:effectLst/>
+          <a:effectLst>
+            <a:outerShdw blurRad="114300" dist="25400" dir="5400000" algn="t" rotWithShape="0">
+              <a:srgbClr val="0B1220">
+                <a:alpha val="16000"/>
+              </a:srgbClr>
+            </a:outerShdw>
+          </a:effectLst>
         </p:spPr>
         <p:style>
           <a:lnRef idx="1">
@@ -4978,14 +5084,14 @@
       </p:sp>
       <p:sp>
         <p:nvSpPr>
-          <p:cNvPr id="15" name="TextBox 14"/>
+          <p:cNvPr id="16" name="TextBox 15"/>
           <p:cNvSpPr txBox="1"/>
           <p:nvPr/>
         </p:nvSpPr>
         <p:spPr>
           <a:xfrm>
-            <a:off x="640080" y="2770632"/>
-            <a:ext cx="457200" cy="457200"/>
+            <a:off x="640080" y="2724912"/>
+            <a:ext cx="475488" cy="475488"/>
           </a:xfrm>
           <a:prstGeom prst="rect">
             <a:avLst/>
@@ -5020,14 +5126,14 @@
       </p:sp>
       <p:sp>
         <p:nvSpPr>
-          <p:cNvPr id="16" name="TextBox 15"/>
+          <p:cNvPr id="17" name="TextBox 16"/>
           <p:cNvSpPr txBox="1"/>
           <p:nvPr/>
         </p:nvSpPr>
         <p:spPr>
           <a:xfrm>
-            <a:off x="1325880" y="2770632"/>
-            <a:ext cx="5760720" cy="457200"/>
+            <a:off x="1325880" y="2724912"/>
+            <a:ext cx="5852160" cy="475488"/>
           </a:xfrm>
           <a:prstGeom prst="rect">
             <a:avLst/>
@@ -5062,14 +5168,14 @@
       </p:sp>
       <p:sp>
         <p:nvSpPr>
-          <p:cNvPr id="17" name="Oval 16"/>
+          <p:cNvPr id="18" name="Oval 17"/>
           <p:cNvSpPr/>
           <p:nvPr/>
         </p:nvSpPr>
         <p:spPr>
           <a:xfrm>
-            <a:off x="640080" y="3483864"/>
-            <a:ext cx="457200" cy="457200"/>
+            <a:off x="640080" y="3447288"/>
+            <a:ext cx="475488" cy="475488"/>
           </a:xfrm>
           <a:prstGeom prst="ellipse">
             <a:avLst/>
@@ -5080,7 +5186,13 @@
           <a:ln>
             <a:noFill/>
           </a:ln>
-          <a:effectLst/>
+          <a:effectLst>
+            <a:outerShdw blurRad="114300" dist="25400" dir="5400000" algn="t" rotWithShape="0">
+              <a:srgbClr val="0B1220">
+                <a:alpha val="16000"/>
+              </a:srgbClr>
+            </a:outerShdw>
+          </a:effectLst>
         </p:spPr>
         <p:style>
           <a:lnRef idx="1">
@@ -5106,14 +5218,14 @@
       </p:sp>
       <p:sp>
         <p:nvSpPr>
-          <p:cNvPr id="18" name="TextBox 17"/>
+          <p:cNvPr id="19" name="TextBox 18"/>
           <p:cNvSpPr txBox="1"/>
           <p:nvPr/>
         </p:nvSpPr>
         <p:spPr>
           <a:xfrm>
-            <a:off x="640080" y="3483864"/>
-            <a:ext cx="457200" cy="457200"/>
+            <a:off x="640080" y="3447288"/>
+            <a:ext cx="475488" cy="475488"/>
           </a:xfrm>
           <a:prstGeom prst="rect">
             <a:avLst/>
@@ -5148,14 +5260,14 @@
       </p:sp>
       <p:sp>
         <p:nvSpPr>
-          <p:cNvPr id="19" name="TextBox 18"/>
+          <p:cNvPr id="20" name="TextBox 19"/>
           <p:cNvSpPr txBox="1"/>
           <p:nvPr/>
         </p:nvSpPr>
         <p:spPr>
           <a:xfrm>
-            <a:off x="1325880" y="3483864"/>
-            <a:ext cx="5760720" cy="457200"/>
+            <a:off x="1325880" y="3447288"/>
+            <a:ext cx="5852160" cy="475488"/>
           </a:xfrm>
           <a:prstGeom prst="rect">
             <a:avLst/>
@@ -5190,14 +5302,14 @@
       </p:sp>
       <p:sp>
         <p:nvSpPr>
-          <p:cNvPr id="20" name="Oval 19"/>
+          <p:cNvPr id="21" name="Oval 20"/>
           <p:cNvSpPr/>
           <p:nvPr/>
         </p:nvSpPr>
         <p:spPr>
           <a:xfrm>
-            <a:off x="640080" y="4197096"/>
-            <a:ext cx="457200" cy="457200"/>
+            <a:off x="640080" y="4169664"/>
+            <a:ext cx="475488" cy="475488"/>
           </a:xfrm>
           <a:prstGeom prst="ellipse">
             <a:avLst/>
@@ -5208,7 +5320,13 @@
           <a:ln>
             <a:noFill/>
           </a:ln>
-          <a:effectLst/>
+          <a:effectLst>
+            <a:outerShdw blurRad="114300" dist="25400" dir="5400000" algn="t" rotWithShape="0">
+              <a:srgbClr val="0B1220">
+                <a:alpha val="16000"/>
+              </a:srgbClr>
+            </a:outerShdw>
+          </a:effectLst>
         </p:spPr>
         <p:style>
           <a:lnRef idx="1">
@@ -5234,14 +5352,14 @@
       </p:sp>
       <p:sp>
         <p:nvSpPr>
-          <p:cNvPr id="21" name="TextBox 20"/>
+          <p:cNvPr id="22" name="TextBox 21"/>
           <p:cNvSpPr txBox="1"/>
           <p:nvPr/>
         </p:nvSpPr>
         <p:spPr>
           <a:xfrm>
-            <a:off x="640080" y="4197096"/>
-            <a:ext cx="457200" cy="457200"/>
+            <a:off x="640080" y="4169664"/>
+            <a:ext cx="475488" cy="475488"/>
           </a:xfrm>
           <a:prstGeom prst="rect">
             <a:avLst/>
@@ -5276,14 +5394,14 @@
       </p:sp>
       <p:sp>
         <p:nvSpPr>
-          <p:cNvPr id="22" name="TextBox 21"/>
+          <p:cNvPr id="23" name="TextBox 22"/>
           <p:cNvSpPr txBox="1"/>
           <p:nvPr/>
         </p:nvSpPr>
         <p:spPr>
           <a:xfrm>
-            <a:off x="1325880" y="4197096"/>
-            <a:ext cx="5760720" cy="457200"/>
+            <a:off x="1325880" y="4169664"/>
+            <a:ext cx="5852160" cy="475488"/>
           </a:xfrm>
           <a:prstGeom prst="rect">
             <a:avLst/>
@@ -5318,14 +5436,14 @@
       </p:sp>
       <p:sp>
         <p:nvSpPr>
-          <p:cNvPr id="23" name="Oval 22"/>
+          <p:cNvPr id="24" name="Oval 23"/>
           <p:cNvSpPr/>
           <p:nvPr/>
         </p:nvSpPr>
         <p:spPr>
           <a:xfrm>
-            <a:off x="640080" y="4910328"/>
-            <a:ext cx="457200" cy="457200"/>
+            <a:off x="640080" y="4892040"/>
+            <a:ext cx="475488" cy="475488"/>
           </a:xfrm>
           <a:prstGeom prst="ellipse">
             <a:avLst/>
@@ -5336,7 +5454,13 @@
           <a:ln>
             <a:noFill/>
           </a:ln>
-          <a:effectLst/>
+          <a:effectLst>
+            <a:outerShdw blurRad="114300" dist="25400" dir="5400000" algn="t" rotWithShape="0">
+              <a:srgbClr val="0B1220">
+                <a:alpha val="16000"/>
+              </a:srgbClr>
+            </a:outerShdw>
+          </a:effectLst>
         </p:spPr>
         <p:style>
           <a:lnRef idx="1">
@@ -5362,14 +5486,14 @@
       </p:sp>
       <p:sp>
         <p:nvSpPr>
-          <p:cNvPr id="24" name="TextBox 23"/>
+          <p:cNvPr id="25" name="TextBox 24"/>
           <p:cNvSpPr txBox="1"/>
           <p:nvPr/>
         </p:nvSpPr>
         <p:spPr>
           <a:xfrm>
-            <a:off x="640080" y="4910328"/>
-            <a:ext cx="457200" cy="457200"/>
+            <a:off x="640080" y="4892040"/>
+            <a:ext cx="475488" cy="475488"/>
           </a:xfrm>
           <a:prstGeom prst="rect">
             <a:avLst/>
@@ -5404,14 +5528,14 @@
       </p:sp>
       <p:sp>
         <p:nvSpPr>
-          <p:cNvPr id="25" name="TextBox 24"/>
+          <p:cNvPr id="26" name="TextBox 25"/>
           <p:cNvSpPr txBox="1"/>
           <p:nvPr/>
         </p:nvSpPr>
         <p:spPr>
           <a:xfrm>
-            <a:off x="1325880" y="4910328"/>
-            <a:ext cx="5760720" cy="457200"/>
+            <a:off x="1325880" y="4892040"/>
+            <a:ext cx="5852160" cy="475488"/>
           </a:xfrm>
           <a:prstGeom prst="rect">
             <a:avLst/>
@@ -5446,14 +5570,14 @@
       </p:sp>
       <p:sp>
         <p:nvSpPr>
-          <p:cNvPr id="26" name="Oval 25"/>
+          <p:cNvPr id="27" name="Oval 26"/>
           <p:cNvSpPr/>
           <p:nvPr/>
         </p:nvSpPr>
         <p:spPr>
           <a:xfrm>
-            <a:off x="640080" y="5623560"/>
-            <a:ext cx="457200" cy="457200"/>
+            <a:off x="640080" y="5614416"/>
+            <a:ext cx="475488" cy="475488"/>
           </a:xfrm>
           <a:prstGeom prst="ellipse">
             <a:avLst/>
@@ -5464,7 +5588,13 @@
           <a:ln>
             <a:noFill/>
           </a:ln>
-          <a:effectLst/>
+          <a:effectLst>
+            <a:outerShdw blurRad="114300" dist="25400" dir="5400000" algn="t" rotWithShape="0">
+              <a:srgbClr val="0B1220">
+                <a:alpha val="16000"/>
+              </a:srgbClr>
+            </a:outerShdw>
+          </a:effectLst>
         </p:spPr>
         <p:style>
           <a:lnRef idx="1">
@@ -5490,14 +5620,14 @@
       </p:sp>
       <p:sp>
         <p:nvSpPr>
-          <p:cNvPr id="27" name="TextBox 26"/>
+          <p:cNvPr id="28" name="TextBox 27"/>
           <p:cNvSpPr txBox="1"/>
           <p:nvPr/>
         </p:nvSpPr>
         <p:spPr>
           <a:xfrm>
-            <a:off x="640080" y="5623560"/>
-            <a:ext cx="457200" cy="457200"/>
+            <a:off x="640080" y="5614416"/>
+            <a:ext cx="475488" cy="475488"/>
           </a:xfrm>
           <a:prstGeom prst="rect">
             <a:avLst/>
@@ -5532,14 +5662,14 @@
       </p:sp>
       <p:sp>
         <p:nvSpPr>
-          <p:cNvPr id="28" name="TextBox 27"/>
+          <p:cNvPr id="29" name="TextBox 28"/>
           <p:cNvSpPr txBox="1"/>
           <p:nvPr/>
         </p:nvSpPr>
         <p:spPr>
           <a:xfrm>
-            <a:off x="1325880" y="5623560"/>
-            <a:ext cx="5760720" cy="457200"/>
+            <a:off x="1325880" y="5614416"/>
+            <a:ext cx="5852160" cy="475488"/>
           </a:xfrm>
           <a:prstGeom prst="rect">
             <a:avLst/>
@@ -5574,7 +5704,7 @@
       </p:sp>
       <p:pic>
         <p:nvPicPr>
-          <p:cNvPr id="29" name="Picture 28" descr="models.jpg"/>
+          <p:cNvPr id="30" name="Picture 29" descr="models.jpg"/>
           <p:cNvPicPr>
             <a:picLocks noChangeAspect="1"/>
           </p:cNvPicPr>
@@ -5588,29 +5718,36 @@
         </p:blipFill>
         <p:spPr>
           <a:xfrm>
-            <a:off x="7315200" y="1737360"/>
+            <a:off x="7315200" y="1600200"/>
             <a:ext cx="4389120" cy="750770"/>
           </a:xfrm>
           <a:prstGeom prst="rect">
             <a:avLst/>
           </a:prstGeom>
-          <a:ln w="9525">
+          <a:ln w="28575">
             <a:solidFill>
-              <a:srgbClr val="D5DEE8"/>
+              <a:srgbClr val="FFFFFF"/>
             </a:solidFill>
           </a:ln>
+          <a:effectLst>
+            <a:outerShdw blurRad="127000" dist="38100" dir="5400000" algn="t" rotWithShape="0">
+              <a:srgbClr val="0B1220">
+                <a:alpha val="24000"/>
+              </a:srgbClr>
+            </a:outerShdw>
+          </a:effectLst>
         </p:spPr>
       </p:pic>
       <p:sp>
         <p:nvSpPr>
-          <p:cNvPr id="30" name="TextBox 29"/>
+          <p:cNvPr id="31" name="TextBox 30"/>
           <p:cNvSpPr txBox="1"/>
           <p:nvPr/>
         </p:nvSpPr>
         <p:spPr>
           <a:xfrm>
-            <a:off x="7315200" y="2579570"/>
-            <a:ext cx="4389120" cy="365760"/>
+            <a:off x="7315200" y="2424122"/>
+            <a:ext cx="4389120" cy="274320"/>
           </a:xfrm>
           <a:prstGeom prst="rect">
             <a:avLst/>
@@ -5632,7 +5769,7 @@
               </a:spcAft>
             </a:pPr>
             <a:r>
-              <a:rPr sz="1400" b="0" i="1">
+              <a:rPr sz="1200" b="0" i="1">
                 <a:solidFill>
                   <a:srgbClr val="64748B"/>
                 </a:solidFill>
@@ -5645,7 +5782,7 @@
       </p:sp>
       <p:pic>
         <p:nvPicPr>
-          <p:cNvPr id="31" name="Picture 30" descr="tank.jpg"/>
+          <p:cNvPr id="32" name="Picture 31" descr="tank.jpg"/>
           <p:cNvPicPr>
             <a:picLocks noChangeAspect="1"/>
           </p:cNvPicPr>
@@ -5659,22 +5796,29 @@
         </p:blipFill>
         <p:spPr>
           <a:xfrm>
-            <a:off x="7315200" y="3082490"/>
-            <a:ext cx="2148840" cy="1208722"/>
-          </a:xfrm>
-          <a:prstGeom prst="rect">
-            <a:avLst/>
-          </a:prstGeom>
-          <a:ln w="9525">
+            <a:off x="7315200" y="2853890"/>
+            <a:ext cx="2103120" cy="1183005"/>
+          </a:xfrm>
+          <a:prstGeom prst="rect">
+            <a:avLst/>
+          </a:prstGeom>
+          <a:ln w="28575">
             <a:solidFill>
-              <a:srgbClr val="D5DEE8"/>
+              <a:srgbClr val="FFFFFF"/>
             </a:solidFill>
           </a:ln>
+          <a:effectLst>
+            <a:outerShdw blurRad="127000" dist="38100" dir="5400000" algn="t" rotWithShape="0">
+              <a:srgbClr val="0B1220">
+                <a:alpha val="24000"/>
+              </a:srgbClr>
+            </a:outerShdw>
+          </a:effectLst>
         </p:spPr>
       </p:pic>
       <p:pic>
         <p:nvPicPr>
-          <p:cNvPr id="32" name="Picture 31" descr="truck.jpg"/>
+          <p:cNvPr id="33" name="Picture 32" descr="truck.jpg"/>
           <p:cNvPicPr>
             <a:picLocks noChangeAspect="1"/>
           </p:cNvPicPr>
@@ -5688,29 +5832,36 @@
         </p:blipFill>
         <p:spPr>
           <a:xfrm>
-            <a:off x="9555480" y="3082490"/>
-            <a:ext cx="2148840" cy="1208722"/>
-          </a:xfrm>
-          <a:prstGeom prst="rect">
-            <a:avLst/>
-          </a:prstGeom>
-          <a:ln w="9525">
+            <a:off x="9601200" y="2853890"/>
+            <a:ext cx="2103120" cy="1183005"/>
+          </a:xfrm>
+          <a:prstGeom prst="rect">
+            <a:avLst/>
+          </a:prstGeom>
+          <a:ln w="28575">
             <a:solidFill>
-              <a:srgbClr val="D5DEE8"/>
+              <a:srgbClr val="FFFFFF"/>
             </a:solidFill>
           </a:ln>
+          <a:effectLst>
+            <a:outerShdw blurRad="127000" dist="38100" dir="5400000" algn="t" rotWithShape="0">
+              <a:srgbClr val="0B1220">
+                <a:alpha val="24000"/>
+              </a:srgbClr>
+            </a:outerShdw>
+          </a:effectLst>
         </p:spPr>
       </p:pic>
       <p:sp>
         <p:nvSpPr>
-          <p:cNvPr id="33" name="TextBox 32"/>
+          <p:cNvPr id="34" name="TextBox 33"/>
           <p:cNvSpPr txBox="1"/>
           <p:nvPr/>
         </p:nvSpPr>
         <p:spPr>
           <a:xfrm>
-            <a:off x="7315200" y="4336933"/>
-            <a:ext cx="4389120" cy="365760"/>
+            <a:off x="7315200" y="4110047"/>
+            <a:ext cx="4389120" cy="274320"/>
           </a:xfrm>
           <a:prstGeom prst="rect">
             <a:avLst/>
@@ -5732,7 +5883,7 @@
               </a:spcAft>
             </a:pPr>
             <a:r>
-              <a:rPr sz="1400" b="0" i="1">
+              <a:rPr sz="1200" b="0" i="1">
                 <a:solidFill>
                   <a:srgbClr val="64748B"/>
                 </a:solidFill>
@@ -5906,7 +6057,7 @@
         <p:spPr>
           <a:xfrm>
             <a:off x="731520" y="118872"/>
-            <a:ext cx="10058400" cy="640080"/>
+            <a:ext cx="10515600" cy="640080"/>
           </a:xfrm>
           <a:prstGeom prst="rect">
             <a:avLst/>
@@ -5947,8 +6098,8 @@
         </p:nvSpPr>
         <p:spPr>
           <a:xfrm>
-            <a:off x="10789920" y="6473952"/>
-            <a:ext cx="1188720" cy="274320"/>
+            <a:off x="548640" y="6492240"/>
+            <a:ext cx="5486400" cy="274320"/>
           </a:xfrm>
           <a:prstGeom prst="rect">
             <a:avLst/>
@@ -5961,7 +6112,7 @@
           </a:bodyPr>
           <a:lstStyle/>
           <a:p>
-            <a:pPr algn="r">
+            <a:pPr algn="l">
               <a:lnSpc>
                 <a:spcPct val="100000"/>
               </a:lnSpc>
@@ -5970,13 +6121,13 @@
               </a:spcAft>
             </a:pPr>
             <a:r>
-              <a:rPr sz="1100" b="0" i="0">
+              <a:rPr sz="1000" b="0" i="0">
                 <a:solidFill>
                   <a:srgbClr val="64748B"/>
                 </a:solidFill>
                 <a:latin typeface="Calibri"/>
               </a:rPr>
-              <a:t>3 / 10</a:t>
+              <a:t>Sentinel  ·  CSE 4102  ·  KUET</a:t>
             </a:r>
           </a:p>
         </p:txBody>
@@ -5989,8 +6140,8 @@
         </p:nvSpPr>
         <p:spPr>
           <a:xfrm>
-            <a:off x="548640" y="1051560"/>
-            <a:ext cx="5943600" cy="822960"/>
+            <a:off x="10789920" y="6492240"/>
+            <a:ext cx="1188720" cy="274320"/>
           </a:xfrm>
           <a:prstGeom prst="rect">
             <a:avLst/>
@@ -6003,6 +6154,48 @@
           </a:bodyPr>
           <a:lstStyle/>
           <a:p>
+            <a:pPr algn="r">
+              <a:lnSpc>
+                <a:spcPct val="100000"/>
+              </a:lnSpc>
+              <a:spcAft>
+                <a:spcPts val="400"/>
+              </a:spcAft>
+            </a:pPr>
+            <a:r>
+              <a:rPr sz="1100" b="0" i="0">
+                <a:solidFill>
+                  <a:srgbClr val="64748B"/>
+                </a:solidFill>
+                <a:latin typeface="Calibri"/>
+              </a:rPr>
+              <a:t>3 / 10</a:t>
+            </a:r>
+          </a:p>
+        </p:txBody>
+      </p:sp>
+      <p:sp>
+        <p:nvSpPr>
+          <p:cNvPr id="9" name="TextBox 8"/>
+          <p:cNvSpPr txBox="1"/>
+          <p:nvPr/>
+        </p:nvSpPr>
+        <p:spPr>
+          <a:xfrm>
+            <a:off x="548640" y="1051560"/>
+            <a:ext cx="6035040" cy="868680"/>
+          </a:xfrm>
+          <a:prstGeom prst="rect">
+            <a:avLst/>
+          </a:prstGeom>
+          <a:noFill/>
+        </p:spPr>
+        <p:txBody>
+          <a:bodyPr wrap="square" lIns="36576" rIns="36576" tIns="18288" bIns="18288" anchor="t">
+            <a:spAutoFit/>
+          </a:bodyPr>
+          <a:lstStyle/>
+          <a:p>
             <a:pPr algn="l">
               <a:lnSpc>
                 <a:spcPct val="100000"/>
@@ -6012,7 +6205,7 @@
               </a:spcAft>
             </a:pPr>
             <a:r>
-              <a:rPr sz="2000" b="1" i="0">
+              <a:rPr sz="2100" b="1" i="0">
                 <a:solidFill>
                   <a:srgbClr val="1E293B"/>
                 </a:solidFill>
@@ -6025,18 +6218,18 @@
       </p:sp>
       <p:sp>
         <p:nvSpPr>
-          <p:cNvPr id="9" name="Rounded Rectangle 8"/>
+          <p:cNvPr id="10" name="Rounded Rectangle 9"/>
           <p:cNvSpPr/>
           <p:nvPr/>
         </p:nvSpPr>
         <p:spPr>
           <a:xfrm>
-            <a:off x="548640" y="1920240"/>
-            <a:ext cx="5943600" cy="1280160"/>
+            <a:off x="548640" y="1965960"/>
+            <a:ext cx="6035040" cy="1234440"/>
           </a:xfrm>
           <a:prstGeom prst="roundRect">
             <a:avLst>
-              <a:gd name="adj" fmla="val 6000"/>
+              <a:gd name="adj" fmla="val 4000"/>
             </a:avLst>
           </a:prstGeom>
           <a:solidFill>
@@ -6044,10 +6237,16 @@
           </a:solidFill>
           <a:ln w="9525">
             <a:solidFill>
-              <a:srgbClr val="D5DEE8"/>
+              <a:srgbClr val="DDE5EE"/>
             </a:solidFill>
           </a:ln>
-          <a:effectLst/>
+          <a:effectLst>
+            <a:outerShdw blurRad="114300" dist="25400" dir="5400000" algn="t" rotWithShape="0">
+              <a:srgbClr val="0B1220">
+                <a:alpha val="16000"/>
+              </a:srgbClr>
+            </a:outerShdw>
+          </a:effectLst>
         </p:spPr>
         <p:style>
           <a:lnRef idx="1">
@@ -6073,14 +6272,14 @@
       </p:sp>
       <p:sp>
         <p:nvSpPr>
-          <p:cNvPr id="10" name="Rectangle 9"/>
+          <p:cNvPr id="11" name="Rectangle 10"/>
           <p:cNvSpPr/>
           <p:nvPr/>
         </p:nvSpPr>
         <p:spPr>
           <a:xfrm>
-            <a:off x="548640" y="1920240"/>
-            <a:ext cx="82296" cy="1280160"/>
+            <a:off x="548640" y="2075688"/>
+            <a:ext cx="64008" cy="1014984"/>
           </a:xfrm>
           <a:prstGeom prst="rect">
             <a:avLst/>
@@ -6117,14 +6316,14 @@
       </p:sp>
       <p:sp>
         <p:nvSpPr>
-          <p:cNvPr id="11" name="TextBox 10"/>
+          <p:cNvPr id="12" name="TextBox 11"/>
           <p:cNvSpPr txBox="1"/>
           <p:nvPr/>
         </p:nvSpPr>
         <p:spPr>
           <a:xfrm>
-            <a:off x="731520" y="1993392"/>
-            <a:ext cx="5669280" cy="365760"/>
+            <a:off x="777240" y="2057400"/>
+            <a:ext cx="5669279" cy="347472"/>
           </a:xfrm>
           <a:prstGeom prst="rect">
             <a:avLst/>
@@ -6146,27 +6345,27 @@
               </a:spcAft>
             </a:pPr>
             <a:r>
-              <a:rPr sz="1800" b="1" i="0">
+              <a:rPr sz="1200" b="1" i="0">
                 <a:solidFill>
                   <a:srgbClr val="0F8F85"/>
                 </a:solidFill>
                 <a:latin typeface="Calibri"/>
               </a:rPr>
-              <a:t>Two hard limits</a:t>
-            </a:r>
-          </a:p>
-        </p:txBody>
-      </p:sp>
-      <p:sp>
-        <p:nvSpPr>
-          <p:cNvPr id="12" name="TextBox 11"/>
+              <a:t>TWO HARD LIMITS</a:t>
+            </a:r>
+          </a:p>
+        </p:txBody>
+      </p:sp>
+      <p:sp>
+        <p:nvSpPr>
+          <p:cNvPr id="13" name="TextBox 12"/>
           <p:cNvSpPr txBox="1"/>
           <p:nvPr/>
         </p:nvSpPr>
         <p:spPr>
           <a:xfrm>
-            <a:off x="731520" y="2377440"/>
-            <a:ext cx="5669280" cy="749808"/>
+            <a:off x="777240" y="2423160"/>
+            <a:ext cx="5669279" cy="704088"/>
           </a:xfrm>
           <a:prstGeom prst="rect">
             <a:avLst/>
@@ -6179,7 +6378,7 @@
           </a:bodyPr>
           <a:lstStyle/>
           <a:p>
-            <a:pPr algn="l" marL="256032" indent="-256032">
+            <a:pPr algn="l" marL="274320" indent="-274320">
               <a:lnSpc>
                 <a:spcPct val="100000"/>
               </a:lnSpc>
@@ -6187,9 +6386,9 @@
                 <a:spcPts val="300"/>
               </a:spcAft>
               <a:buClr>
-                <a:srgbClr val="007A3D"/>
+                <a:srgbClr val="0F8F85"/>
               </a:buClr>
-              <a:buChar char="•"/>
+              <a:buChar char="▪"/>
             </a:pPr>
             <a:r>
               <a:rPr sz="1700" b="0" i="0">
@@ -6202,7 +6401,7 @@
             </a:r>
           </a:p>
           <a:p>
-            <a:pPr algn="l" marL="256032" indent="-256032">
+            <a:pPr algn="l" marL="274320" indent="-274320">
               <a:lnSpc>
                 <a:spcPct val="100000"/>
               </a:lnSpc>
@@ -6210,9 +6409,9 @@
                 <a:spcPts val="300"/>
               </a:spcAft>
               <a:buClr>
-                <a:srgbClr val="007A3D"/>
+                <a:srgbClr val="0F8F85"/>
               </a:buClr>
-              <a:buChar char="•"/>
+              <a:buChar char="▪"/>
             </a:pPr>
             <a:r>
               <a:rPr sz="1700" b="0" i="0">
@@ -6228,18 +6427,18 @@
       </p:sp>
       <p:sp>
         <p:nvSpPr>
-          <p:cNvPr id="13" name="Rounded Rectangle 12"/>
+          <p:cNvPr id="14" name="Rounded Rectangle 13"/>
           <p:cNvSpPr/>
           <p:nvPr/>
         </p:nvSpPr>
         <p:spPr>
           <a:xfrm>
             <a:off x="548640" y="3337560"/>
-            <a:ext cx="5943600" cy="1828800"/>
+            <a:ext cx="6035040" cy="1828800"/>
           </a:xfrm>
           <a:prstGeom prst="roundRect">
             <a:avLst>
-              <a:gd name="adj" fmla="val 6000"/>
+              <a:gd name="adj" fmla="val 4000"/>
             </a:avLst>
           </a:prstGeom>
           <a:solidFill>
@@ -6247,10 +6446,16 @@
           </a:solidFill>
           <a:ln w="9525">
             <a:solidFill>
-              <a:srgbClr val="D5DEE8"/>
+              <a:srgbClr val="DDE5EE"/>
             </a:solidFill>
           </a:ln>
-          <a:effectLst/>
+          <a:effectLst>
+            <a:outerShdw blurRad="114300" dist="25400" dir="5400000" algn="t" rotWithShape="0">
+              <a:srgbClr val="0B1220">
+                <a:alpha val="16000"/>
+              </a:srgbClr>
+            </a:outerShdw>
+          </a:effectLst>
         </p:spPr>
         <p:style>
           <a:lnRef idx="1">
@@ -6276,14 +6481,14 @@
       </p:sp>
       <p:sp>
         <p:nvSpPr>
-          <p:cNvPr id="14" name="Rectangle 13"/>
+          <p:cNvPr id="15" name="Rectangle 14"/>
           <p:cNvSpPr/>
           <p:nvPr/>
         </p:nvSpPr>
         <p:spPr>
           <a:xfrm>
-            <a:off x="548640" y="3337560"/>
-            <a:ext cx="82296" cy="1828800"/>
+            <a:off x="548640" y="3447288"/>
+            <a:ext cx="64008" cy="1609344"/>
           </a:xfrm>
           <a:prstGeom prst="rect">
             <a:avLst/>
@@ -6320,14 +6525,14 @@
       </p:sp>
       <p:sp>
         <p:nvSpPr>
-          <p:cNvPr id="15" name="TextBox 14"/>
+          <p:cNvPr id="16" name="TextBox 15"/>
           <p:cNvSpPr txBox="1"/>
           <p:nvPr/>
         </p:nvSpPr>
         <p:spPr>
           <a:xfrm>
-            <a:off x="731520" y="3410712"/>
-            <a:ext cx="5669280" cy="365760"/>
+            <a:off x="777240" y="3429000"/>
+            <a:ext cx="5669279" cy="347472"/>
           </a:xfrm>
           <a:prstGeom prst="rect">
             <a:avLst/>
@@ -6349,27 +6554,27 @@
               </a:spcAft>
             </a:pPr>
             <a:r>
-              <a:rPr sz="1700" b="1" i="0">
+              <a:rPr sz="1200" b="1" i="0">
                 <a:solidFill>
                   <a:srgbClr val="0F8F85"/>
                 </a:solidFill>
                 <a:latin typeface="Calibri"/>
               </a:rPr>
-              <a:t>Objectives</a:t>
-            </a:r>
-          </a:p>
-        </p:txBody>
-      </p:sp>
-      <p:sp>
-        <p:nvSpPr>
-          <p:cNvPr id="16" name="TextBox 15"/>
+              <a:t>OBJECTIVES</a:t>
+            </a:r>
+          </a:p>
+        </p:txBody>
+      </p:sp>
+      <p:sp>
+        <p:nvSpPr>
+          <p:cNvPr id="17" name="TextBox 16"/>
           <p:cNvSpPr txBox="1"/>
           <p:nvPr/>
         </p:nvSpPr>
         <p:spPr>
           <a:xfrm>
-            <a:off x="731520" y="3794760"/>
-            <a:ext cx="5669280" cy="1298448"/>
+            <a:off x="777240" y="3794760"/>
+            <a:ext cx="5669279" cy="1298448"/>
           </a:xfrm>
           <a:prstGeom prst="rect">
             <a:avLst/>
@@ -6382,7 +6587,7 @@
           </a:bodyPr>
           <a:lstStyle/>
           <a:p>
-            <a:pPr algn="l" marL="256032" indent="-256032">
+            <a:pPr algn="l" marL="274320" indent="-274320">
               <a:lnSpc>
                 <a:spcPct val="100000"/>
               </a:lnSpc>
@@ -6390,9 +6595,9 @@
                 <a:spcPts val="300"/>
               </a:spcAft>
               <a:buClr>
-                <a:srgbClr val="007A3D"/>
+                <a:srgbClr val="0F8F85"/>
               </a:buClr>
-              <a:buChar char="•"/>
+              <a:buChar char="▪"/>
             </a:pPr>
             <a:r>
               <a:rPr sz="1600" b="0" i="0">
@@ -6405,7 +6610,7 @@
             </a:r>
           </a:p>
           <a:p>
-            <a:pPr algn="l" marL="256032" indent="-256032">
+            <a:pPr algn="l" marL="274320" indent="-274320">
               <a:lnSpc>
                 <a:spcPct val="100000"/>
               </a:lnSpc>
@@ -6413,9 +6618,9 @@
                 <a:spcPts val="300"/>
               </a:spcAft>
               <a:buClr>
-                <a:srgbClr val="007A3D"/>
+                <a:srgbClr val="0F8F85"/>
               </a:buClr>
-              <a:buChar char="•"/>
+              <a:buChar char="▪"/>
             </a:pPr>
             <a:r>
               <a:rPr sz="1600" b="0" i="0">
@@ -6428,7 +6633,7 @@
             </a:r>
           </a:p>
           <a:p>
-            <a:pPr algn="l" marL="256032" indent="-256032">
+            <a:pPr algn="l" marL="274320" indent="-274320">
               <a:lnSpc>
                 <a:spcPct val="100000"/>
               </a:lnSpc>
@@ -6436,9 +6641,9 @@
                 <a:spcPts val="300"/>
               </a:spcAft>
               <a:buClr>
-                <a:srgbClr val="007A3D"/>
+                <a:srgbClr val="0F8F85"/>
               </a:buClr>
-              <a:buChar char="•"/>
+              <a:buChar char="▪"/>
             </a:pPr>
             <a:r>
               <a:rPr sz="1600" b="0" i="0">
@@ -6451,7 +6656,7 @@
             </a:r>
           </a:p>
           <a:p>
-            <a:pPr algn="l" marL="256032" indent="-256032">
+            <a:pPr algn="l" marL="274320" indent="-274320">
               <a:lnSpc>
                 <a:spcPct val="100000"/>
               </a:lnSpc>
@@ -6459,9 +6664,9 @@
                 <a:spcPts val="300"/>
               </a:spcAft>
               <a:buClr>
-                <a:srgbClr val="007A3D"/>
+                <a:srgbClr val="0F8F85"/>
               </a:buClr>
-              <a:buChar char="•"/>
+              <a:buChar char="▪"/>
             </a:pPr>
             <a:r>
               <a:rPr sz="1600" b="0" i="0">
@@ -6477,18 +6682,18 @@
       </p:sp>
       <p:sp>
         <p:nvSpPr>
-          <p:cNvPr id="17" name="Rounded Rectangle 16"/>
+          <p:cNvPr id="18" name="Rounded Rectangle 17"/>
           <p:cNvSpPr/>
           <p:nvPr/>
         </p:nvSpPr>
         <p:spPr>
           <a:xfrm>
             <a:off x="548640" y="5303520"/>
-            <a:ext cx="11155680" cy="868680"/>
+            <a:ext cx="11155680" cy="960120"/>
           </a:xfrm>
           <a:prstGeom prst="roundRect">
             <a:avLst>
-              <a:gd name="adj" fmla="val 6000"/>
+              <a:gd name="adj" fmla="val 4000"/>
             </a:avLst>
           </a:prstGeom>
           <a:solidFill>
@@ -6496,10 +6701,16 @@
           </a:solidFill>
           <a:ln w="9525">
             <a:solidFill>
-              <a:srgbClr val="D5DEE8"/>
+              <a:srgbClr val="DDE5EE"/>
             </a:solidFill>
           </a:ln>
-          <a:effectLst/>
+          <a:effectLst>
+            <a:outerShdw blurRad="114300" dist="25400" dir="5400000" algn="t" rotWithShape="0">
+              <a:srgbClr val="0B1220">
+                <a:alpha val="16000"/>
+              </a:srgbClr>
+            </a:outerShdw>
+          </a:effectLst>
         </p:spPr>
         <p:style>
           <a:lnRef idx="1">
@@ -6525,14 +6736,14 @@
       </p:sp>
       <p:sp>
         <p:nvSpPr>
-          <p:cNvPr id="18" name="Rectangle 17"/>
+          <p:cNvPr id="19" name="Rectangle 18"/>
           <p:cNvSpPr/>
           <p:nvPr/>
         </p:nvSpPr>
         <p:spPr>
           <a:xfrm>
-            <a:off x="548640" y="5303520"/>
-            <a:ext cx="82296" cy="868680"/>
+            <a:off x="548640" y="5413248"/>
+            <a:ext cx="64008" cy="740664"/>
           </a:xfrm>
           <a:prstGeom prst="rect">
             <a:avLst/>
@@ -6569,14 +6780,14 @@
       </p:sp>
       <p:sp>
         <p:nvSpPr>
-          <p:cNvPr id="19" name="TextBox 18"/>
+          <p:cNvPr id="20" name="TextBox 19"/>
           <p:cNvSpPr txBox="1"/>
           <p:nvPr/>
         </p:nvSpPr>
         <p:spPr>
           <a:xfrm>
-            <a:off x="777240" y="5349240"/>
-            <a:ext cx="10789920" cy="960120"/>
+            <a:off x="822960" y="5376672"/>
+            <a:ext cx="10698480" cy="822960"/>
           </a:xfrm>
           <a:prstGeom prst="rect">
             <a:avLst/>
@@ -6620,7 +6831,7 @@
       </p:sp>
       <p:sp>
         <p:nvSpPr>
-          <p:cNvPr id="20" name="Rounded Rectangle 19"/>
+          <p:cNvPr id="21" name="Rounded Rectangle 20"/>
           <p:cNvSpPr/>
           <p:nvPr/>
         </p:nvSpPr>
@@ -6631,18 +6842,24 @@
           </a:xfrm>
           <a:prstGeom prst="roundRect">
             <a:avLst>
-              <a:gd name="adj" fmla="val 6000"/>
+              <a:gd name="adj" fmla="val 12000"/>
             </a:avLst>
           </a:prstGeom>
           <a:solidFill>
-            <a:srgbClr val="E4F6F3"/>
+            <a:srgbClr val="E8F7F4"/>
           </a:solidFill>
           <a:ln w="9525">
             <a:solidFill>
               <a:srgbClr val="0F8F85"/>
             </a:solidFill>
           </a:ln>
-          <a:effectLst/>
+          <a:effectLst>
+            <a:outerShdw blurRad="114300" dist="25400" dir="5400000" algn="t" rotWithShape="0">
+              <a:srgbClr val="0B1220">
+                <a:alpha val="16000"/>
+              </a:srgbClr>
+            </a:outerShdw>
+          </a:effectLst>
         </p:spPr>
         <p:style>
           <a:lnRef idx="1">
@@ -6668,14 +6885,14 @@
       </p:sp>
       <p:sp>
         <p:nvSpPr>
-          <p:cNvPr id="21" name="TextBox 20"/>
+          <p:cNvPr id="22" name="TextBox 21"/>
           <p:cNvSpPr txBox="1"/>
           <p:nvPr/>
         </p:nvSpPr>
         <p:spPr>
           <a:xfrm>
-            <a:off x="7040880" y="1097280"/>
-            <a:ext cx="4206240" cy="566928"/>
+            <a:off x="7178040" y="1097280"/>
+            <a:ext cx="4023360" cy="566928"/>
           </a:xfrm>
           <a:prstGeom prst="rect">
             <a:avLst/>
@@ -6688,7 +6905,7 @@
           </a:bodyPr>
           <a:lstStyle/>
           <a:p>
-            <a:pPr algn="ctr">
+            <a:pPr algn="l">
               <a:lnSpc>
                 <a:spcPct val="100000"/>
               </a:lnSpc>
@@ -6697,20 +6914,29 @@
               </a:spcAft>
             </a:pPr>
             <a:r>
+              <a:rPr sz="1500" b="1" i="0">
+                <a:solidFill>
+                  <a:srgbClr val="0F8F85"/>
+                </a:solidFill>
+                <a:latin typeface="Calibri"/>
+              </a:rPr>
+              <a:t>Game  </a:t>
+            </a:r>
+            <a:r>
               <a:rPr sz="1500" b="0" i="0">
                 <a:solidFill>
                   <a:srgbClr val="1E293B"/>
                 </a:solidFill>
                 <a:latin typeface="Calibri"/>
               </a:rPr>
-              <a:t>Game: mission, AI, vehicles, sound</a:t>
-            </a:r>
-          </a:p>
-        </p:txBody>
-      </p:sp>
-      <p:sp>
-        <p:nvSpPr>
-          <p:cNvPr id="22" name="Rounded Rectangle 21"/>
+              <a:t>mission, AI, vehicles, sound</a:t>
+            </a:r>
+          </a:p>
+        </p:txBody>
+      </p:sp>
+      <p:sp>
+        <p:nvSpPr>
+          <p:cNvPr id="23" name="Rounded Rectangle 22"/>
           <p:cNvSpPr/>
           <p:nvPr/>
         </p:nvSpPr>
@@ -6721,18 +6947,24 @@
           </a:xfrm>
           <a:prstGeom prst="roundRect">
             <a:avLst>
-              <a:gd name="adj" fmla="val 6000"/>
+              <a:gd name="adj" fmla="val 12000"/>
             </a:avLst>
           </a:prstGeom>
           <a:solidFill>
-            <a:srgbClr val="D6EDEB"/>
+            <a:srgbClr val="DAEEEC"/>
           </a:solidFill>
           <a:ln w="9525">
             <a:solidFill>
               <a:srgbClr val="0F8F85"/>
             </a:solidFill>
           </a:ln>
-          <a:effectLst/>
+          <a:effectLst>
+            <a:outerShdw blurRad="114300" dist="25400" dir="5400000" algn="t" rotWithShape="0">
+              <a:srgbClr val="0B1220">
+                <a:alpha val="16000"/>
+              </a:srgbClr>
+            </a:outerShdw>
+          </a:effectLst>
         </p:spPr>
         <p:style>
           <a:lnRef idx="1">
@@ -6758,14 +6990,14 @@
       </p:sp>
       <p:sp>
         <p:nvSpPr>
-          <p:cNvPr id="23" name="TextBox 22"/>
+          <p:cNvPr id="24" name="TextBox 23"/>
           <p:cNvSpPr txBox="1"/>
           <p:nvPr/>
         </p:nvSpPr>
         <p:spPr>
           <a:xfrm>
-            <a:off x="7040880" y="1737360"/>
-            <a:ext cx="4206240" cy="566928"/>
+            <a:off x="7178040" y="1737360"/>
+            <a:ext cx="4023360" cy="566928"/>
           </a:xfrm>
           <a:prstGeom prst="rect">
             <a:avLst/>
@@ -6778,7 +7010,7 @@
           </a:bodyPr>
           <a:lstStyle/>
           <a:p>
-            <a:pPr algn="ctr">
+            <a:pPr algn="l">
               <a:lnSpc>
                 <a:spcPct val="100000"/>
               </a:lnSpc>
@@ -6787,20 +7019,29 @@
               </a:spcAft>
             </a:pPr>
             <a:r>
+              <a:rPr sz="1500" b="1" i="0">
+                <a:solidFill>
+                  <a:srgbClr val="0F8F85"/>
+                </a:solidFill>
+                <a:latin typeface="Calibri"/>
+              </a:rPr>
+              <a:t>Render  </a:t>
+            </a:r>
+            <a:r>
               <a:rPr sz="1500" b="0" i="0">
                 <a:solidFill>
                   <a:srgbClr val="1E293B"/>
                 </a:solidFill>
                 <a:latin typeface="Calibri"/>
               </a:rPr>
-              <a:t>Render: deferred, lights, sky, post</a:t>
-            </a:r>
-          </a:p>
-        </p:txBody>
-      </p:sp>
-      <p:sp>
-        <p:nvSpPr>
-          <p:cNvPr id="24" name="Rounded Rectangle 23"/>
+              <a:t>deferred, lights, sky, post</a:t>
+            </a:r>
+          </a:p>
+        </p:txBody>
+      </p:sp>
+      <p:sp>
+        <p:nvSpPr>
+          <p:cNvPr id="25" name="Rounded Rectangle 24"/>
           <p:cNvSpPr/>
           <p:nvPr/>
         </p:nvSpPr>
@@ -6811,18 +7052,24 @@
           </a:xfrm>
           <a:prstGeom prst="roundRect">
             <a:avLst>
-              <a:gd name="adj" fmla="val 6000"/>
+              <a:gd name="adj" fmla="val 12000"/>
             </a:avLst>
           </a:prstGeom>
           <a:solidFill>
-            <a:srgbClr val="C8E4E3"/>
+            <a:srgbClr val="CCE5E4"/>
           </a:solidFill>
           <a:ln w="9525">
             <a:solidFill>
               <a:srgbClr val="0F8F85"/>
             </a:solidFill>
           </a:ln>
-          <a:effectLst/>
+          <a:effectLst>
+            <a:outerShdw blurRad="114300" dist="25400" dir="5400000" algn="t" rotWithShape="0">
+              <a:srgbClr val="0B1220">
+                <a:alpha val="16000"/>
+              </a:srgbClr>
+            </a:outerShdw>
+          </a:effectLst>
         </p:spPr>
         <p:style>
           <a:lnRef idx="1">
@@ -6848,14 +7095,14 @@
       </p:sp>
       <p:sp>
         <p:nvSpPr>
-          <p:cNvPr id="25" name="TextBox 24"/>
+          <p:cNvPr id="26" name="TextBox 25"/>
           <p:cNvSpPr txBox="1"/>
           <p:nvPr/>
         </p:nvSpPr>
         <p:spPr>
           <a:xfrm>
-            <a:off x="7040880" y="2377439"/>
-            <a:ext cx="4206240" cy="566928"/>
+            <a:off x="7178040" y="2377439"/>
+            <a:ext cx="4023360" cy="566928"/>
           </a:xfrm>
           <a:prstGeom prst="rect">
             <a:avLst/>
@@ -6868,7 +7115,7 @@
           </a:bodyPr>
           <a:lstStyle/>
           <a:p>
-            <a:pPr algn="ctr">
+            <a:pPr algn="l">
               <a:lnSpc>
                 <a:spcPct val="100000"/>
               </a:lnSpc>
@@ -6877,20 +7124,29 @@
               </a:spcAft>
             </a:pPr>
             <a:r>
+              <a:rPr sz="1500" b="1" i="0">
+                <a:solidFill>
+                  <a:srgbClr val="0F8F85"/>
+                </a:solidFill>
+                <a:latin typeface="Calibri"/>
+              </a:rPr>
+              <a:t>World  </a:t>
+            </a:r>
+            <a:r>
               <a:rPr sz="1500" b="0" i="0">
                 <a:solidFill>
                   <a:srgbClr val="1E293B"/>
                 </a:solidFill>
                 <a:latin typeface="Calibri"/>
               </a:rPr>
-              <a:t>World: collision, terrain</a:t>
-            </a:r>
-          </a:p>
-        </p:txBody>
-      </p:sp>
-      <p:sp>
-        <p:nvSpPr>
-          <p:cNvPr id="26" name="Rounded Rectangle 25"/>
+              <a:t>collision, terrain</a:t>
+            </a:r>
+          </a:p>
+        </p:txBody>
+      </p:sp>
+      <p:sp>
+        <p:nvSpPr>
+          <p:cNvPr id="27" name="Rounded Rectangle 26"/>
           <p:cNvSpPr/>
           <p:nvPr/>
         </p:nvSpPr>
@@ -6901,18 +7157,24 @@
           </a:xfrm>
           <a:prstGeom prst="roundRect">
             <a:avLst>
-              <a:gd name="adj" fmla="val 6000"/>
+              <a:gd name="adj" fmla="val 12000"/>
             </a:avLst>
           </a:prstGeom>
           <a:solidFill>
-            <a:srgbClr val="BADBDB"/>
+            <a:srgbClr val="BEDCDC"/>
           </a:solidFill>
           <a:ln w="9525">
             <a:solidFill>
               <a:srgbClr val="0F8F85"/>
             </a:solidFill>
           </a:ln>
-          <a:effectLst/>
+          <a:effectLst>
+            <a:outerShdw blurRad="114300" dist="25400" dir="5400000" algn="t" rotWithShape="0">
+              <a:srgbClr val="0B1220">
+                <a:alpha val="16000"/>
+              </a:srgbClr>
+            </a:outerShdw>
+          </a:effectLst>
         </p:spPr>
         <p:style>
           <a:lnRef idx="1">
@@ -6938,14 +7200,14 @@
       </p:sp>
       <p:sp>
         <p:nvSpPr>
-          <p:cNvPr id="27" name="TextBox 26"/>
+          <p:cNvPr id="28" name="TextBox 27"/>
           <p:cNvSpPr txBox="1"/>
           <p:nvPr/>
         </p:nvSpPr>
         <p:spPr>
           <a:xfrm>
-            <a:off x="7040880" y="3017520"/>
-            <a:ext cx="4206240" cy="566928"/>
+            <a:off x="7178040" y="3017520"/>
+            <a:ext cx="4023360" cy="566928"/>
           </a:xfrm>
           <a:prstGeom prst="rect">
             <a:avLst/>
@@ -6958,7 +7220,7 @@
           </a:bodyPr>
           <a:lstStyle/>
           <a:p>
-            <a:pPr algn="ctr">
+            <a:pPr algn="l">
               <a:lnSpc>
                 <a:spcPct val="100000"/>
               </a:lnSpc>
@@ -6967,20 +7229,29 @@
               </a:spcAft>
             </a:pPr>
             <a:r>
+              <a:rPr sz="1500" b="1" i="0">
+                <a:solidFill>
+                  <a:srgbClr val="0F8F85"/>
+                </a:solidFill>
+                <a:latin typeface="Calibri"/>
+              </a:rPr>
+              <a:t>Procedural  </a:t>
+            </a:r>
+            <a:r>
               <a:rPr sz="1500" b="0" i="0">
                 <a:solidFill>
                   <a:srgbClr val="1E293B"/>
                 </a:solidFill>
                 <a:latin typeface="Calibri"/>
               </a:rPr>
-              <a:t>Procedural: noise, textures</a:t>
-            </a:r>
-          </a:p>
-        </p:txBody>
-      </p:sp>
-      <p:sp>
-        <p:nvSpPr>
-          <p:cNvPr id="28" name="Rounded Rectangle 27"/>
+              <a:t>noise, textures</a:t>
+            </a:r>
+          </a:p>
+        </p:txBody>
+      </p:sp>
+      <p:sp>
+        <p:nvSpPr>
+          <p:cNvPr id="29" name="Rounded Rectangle 28"/>
           <p:cNvSpPr/>
           <p:nvPr/>
         </p:nvSpPr>
@@ -6991,18 +7262,24 @@
           </a:xfrm>
           <a:prstGeom prst="roundRect">
             <a:avLst>
-              <a:gd name="adj" fmla="val 6000"/>
+              <a:gd name="adj" fmla="val 12000"/>
             </a:avLst>
           </a:prstGeom>
           <a:solidFill>
-            <a:srgbClr val="ACD2D3"/>
+            <a:srgbClr val="B0D3D4"/>
           </a:solidFill>
           <a:ln w="9525">
             <a:solidFill>
               <a:srgbClr val="0F8F85"/>
             </a:solidFill>
           </a:ln>
-          <a:effectLst/>
+          <a:effectLst>
+            <a:outerShdw blurRad="114300" dist="25400" dir="5400000" algn="t" rotWithShape="0">
+              <a:srgbClr val="0B1220">
+                <a:alpha val="16000"/>
+              </a:srgbClr>
+            </a:outerShdw>
+          </a:effectLst>
         </p:spPr>
         <p:style>
           <a:lnRef idx="1">
@@ -7028,14 +7305,14 @@
       </p:sp>
       <p:sp>
         <p:nvSpPr>
-          <p:cNvPr id="29" name="TextBox 28"/>
+          <p:cNvPr id="30" name="TextBox 29"/>
           <p:cNvSpPr txBox="1"/>
           <p:nvPr/>
         </p:nvSpPr>
         <p:spPr>
           <a:xfrm>
-            <a:off x="7040880" y="3657600"/>
-            <a:ext cx="4206240" cy="566928"/>
+            <a:off x="7178040" y="3657600"/>
+            <a:ext cx="4023360" cy="566928"/>
           </a:xfrm>
           <a:prstGeom prst="rect">
             <a:avLst/>
@@ -7048,7 +7325,7 @@
           </a:bodyPr>
           <a:lstStyle/>
           <a:p>
-            <a:pPr algn="ctr">
+            <a:pPr algn="l">
               <a:lnSpc>
                 <a:spcPct val="100000"/>
               </a:lnSpc>
@@ -7057,20 +7334,29 @@
               </a:spcAft>
             </a:pPr>
             <a:r>
+              <a:rPr sz="1500" b="1" i="0">
+                <a:solidFill>
+                  <a:srgbClr val="0F8F85"/>
+                </a:solidFill>
+                <a:latin typeface="Calibri"/>
+              </a:rPr>
+              <a:t>GPU  </a:t>
+            </a:r>
+            <a:r>
               <a:rPr sz="1500" b="0" i="0">
                 <a:solidFill>
                   <a:srgbClr val="1E293B"/>
                 </a:solidFill>
                 <a:latin typeface="Calibri"/>
               </a:rPr>
-              <a:t>GPU: shaders, buffers</a:t>
-            </a:r>
-          </a:p>
-        </p:txBody>
-      </p:sp>
-      <p:sp>
-        <p:nvSpPr>
-          <p:cNvPr id="30" name="Rounded Rectangle 29"/>
+              <a:t>shaders, buffers</a:t>
+            </a:r>
+          </a:p>
+        </p:txBody>
+      </p:sp>
+      <p:sp>
+        <p:nvSpPr>
+          <p:cNvPr id="31" name="Rounded Rectangle 30"/>
           <p:cNvSpPr/>
           <p:nvPr/>
         </p:nvSpPr>
@@ -7081,18 +7367,24 @@
           </a:xfrm>
           <a:prstGeom prst="roundRect">
             <a:avLst>
-              <a:gd name="adj" fmla="val 6000"/>
+              <a:gd name="adj" fmla="val 12000"/>
             </a:avLst>
           </a:prstGeom>
           <a:solidFill>
-            <a:srgbClr val="9EC9CB"/>
+            <a:srgbClr val="A2CACC"/>
           </a:solidFill>
           <a:ln w="9525">
             <a:solidFill>
               <a:srgbClr val="0F8F85"/>
             </a:solidFill>
           </a:ln>
-          <a:effectLst/>
+          <a:effectLst>
+            <a:outerShdw blurRad="114300" dist="25400" dir="5400000" algn="t" rotWithShape="0">
+              <a:srgbClr val="0B1220">
+                <a:alpha val="16000"/>
+              </a:srgbClr>
+            </a:outerShdw>
+          </a:effectLst>
         </p:spPr>
         <p:style>
           <a:lnRef idx="1">
@@ -7118,14 +7410,14 @@
       </p:sp>
       <p:sp>
         <p:nvSpPr>
-          <p:cNvPr id="31" name="TextBox 30"/>
+          <p:cNvPr id="32" name="TextBox 31"/>
           <p:cNvSpPr txBox="1"/>
           <p:nvPr/>
         </p:nvSpPr>
         <p:spPr>
           <a:xfrm>
-            <a:off x="7040880" y="4297680"/>
-            <a:ext cx="4206240" cy="566928"/>
+            <a:off x="7178040" y="4297680"/>
+            <a:ext cx="4023360" cy="566928"/>
           </a:xfrm>
           <a:prstGeom prst="rect">
             <a:avLst/>
@@ -7138,7 +7430,7 @@
           </a:bodyPr>
           <a:lstStyle/>
           <a:p>
-            <a:pPr algn="ctr">
+            <a:pPr algn="l">
               <a:lnSpc>
                 <a:spcPct val="100000"/>
               </a:lnSpc>
@@ -7147,20 +7439,29 @@
               </a:spcAft>
             </a:pPr>
             <a:r>
+              <a:rPr sz="1500" b="1" i="0">
+                <a:solidFill>
+                  <a:srgbClr val="0F8F85"/>
+                </a:solidFill>
+                <a:latin typeface="Calibri"/>
+              </a:rPr>
+              <a:t>Platform  </a:t>
+            </a:r>
+            <a:r>
               <a:rPr sz="1500" b="0" i="0">
                 <a:solidFill>
                   <a:srgbClr val="1E293B"/>
                 </a:solidFill>
                 <a:latin typeface="Calibri"/>
               </a:rPr>
-              <a:t>Platform: window, input</a:t>
+              <a:t>window, input</a:t>
             </a:r>
           </a:p>
         </p:txBody>
       </p:sp>
       <p:cxnSp>
         <p:nvCxnSpPr>
-          <p:cNvPr id="32" name="Connector 31"/>
+          <p:cNvPr id="33" name="Connector 32"/>
           <p:cNvCxnSpPr/>
           <p:nvPr/>
         </p:nvCxnSpPr>
@@ -7196,7 +7497,7 @@
       </p:cxnSp>
       <p:sp>
         <p:nvSpPr>
-          <p:cNvPr id="33" name="TextBox 32"/>
+          <p:cNvPr id="34" name="TextBox 33"/>
           <p:cNvSpPr txBox="1"/>
           <p:nvPr/>
         </p:nvSpPr>
@@ -7399,7 +7700,7 @@
         <p:spPr>
           <a:xfrm>
             <a:off x="731520" y="118872"/>
-            <a:ext cx="10058400" cy="640080"/>
+            <a:ext cx="10515600" cy="640080"/>
           </a:xfrm>
           <a:prstGeom prst="rect">
             <a:avLst/>
@@ -7440,8 +7741,8 @@
         </p:nvSpPr>
         <p:spPr>
           <a:xfrm>
-            <a:off x="10789920" y="6473952"/>
-            <a:ext cx="1188720" cy="274320"/>
+            <a:off x="548640" y="6492240"/>
+            <a:ext cx="5486400" cy="274320"/>
           </a:xfrm>
           <a:prstGeom prst="rect">
             <a:avLst/>
@@ -7454,6 +7755,48 @@
           </a:bodyPr>
           <a:lstStyle/>
           <a:p>
+            <a:pPr algn="l">
+              <a:lnSpc>
+                <a:spcPct val="100000"/>
+              </a:lnSpc>
+              <a:spcAft>
+                <a:spcPts val="400"/>
+              </a:spcAft>
+            </a:pPr>
+            <a:r>
+              <a:rPr sz="1000" b="0" i="0">
+                <a:solidFill>
+                  <a:srgbClr val="64748B"/>
+                </a:solidFill>
+                <a:latin typeface="Calibri"/>
+              </a:rPr>
+              <a:t>Sentinel  ·  CSE 4102  ·  KUET</a:t>
+            </a:r>
+          </a:p>
+        </p:txBody>
+      </p:sp>
+      <p:sp>
+        <p:nvSpPr>
+          <p:cNvPr id="8" name="TextBox 7"/>
+          <p:cNvSpPr txBox="1"/>
+          <p:nvPr/>
+        </p:nvSpPr>
+        <p:spPr>
+          <a:xfrm>
+            <a:off x="10789920" y="6492240"/>
+            <a:ext cx="1188720" cy="274320"/>
+          </a:xfrm>
+          <a:prstGeom prst="rect">
+            <a:avLst/>
+          </a:prstGeom>
+          <a:noFill/>
+        </p:spPr>
+        <p:txBody>
+          <a:bodyPr wrap="square" lIns="36576" rIns="36576" tIns="18288" bIns="18288" anchor="t">
+            <a:spAutoFit/>
+          </a:bodyPr>
+          <a:lstStyle/>
+          <a:p>
             <a:pPr algn="r">
               <a:lnSpc>
                 <a:spcPct val="100000"/>
@@ -7476,7 +7819,7 @@
       </p:sp>
       <p:pic>
         <p:nvPicPr>
-          <p:cNvPr id="8" name="Picture 7" descr="noise_stages.png"/>
+          <p:cNvPr id="9" name="Picture 8" descr="noise_stages.png"/>
           <p:cNvPicPr>
             <a:picLocks noChangeAspect="1"/>
           </p:cNvPicPr>
@@ -7490,29 +7833,31 @@
         </p:blipFill>
         <p:spPr>
           <a:xfrm>
-            <a:off x="1828800" y="1051560"/>
-            <a:ext cx="8503920" cy="1669481"/>
-          </a:xfrm>
-          <a:prstGeom prst="rect">
-            <a:avLst/>
-          </a:prstGeom>
-          <a:ln w="9525">
-            <a:solidFill>
-              <a:srgbClr val="D5DEE8"/>
-            </a:solidFill>
-          </a:ln>
+            <a:off x="1737360" y="1051560"/>
+            <a:ext cx="8686800" cy="1705384"/>
+          </a:xfrm>
+          <a:prstGeom prst="rect">
+            <a:avLst/>
+          </a:prstGeom>
+          <a:effectLst>
+            <a:outerShdw blurRad="127000" dist="38100" dir="5400000" algn="t" rotWithShape="0">
+              <a:srgbClr val="0B1220">
+                <a:alpha val="24000"/>
+              </a:srgbClr>
+            </a:outerShdw>
+          </a:effectLst>
         </p:spPr>
       </p:pic>
       <p:sp>
         <p:nvSpPr>
-          <p:cNvPr id="9" name="TextBox 8"/>
+          <p:cNvPr id="10" name="TextBox 9"/>
           <p:cNvSpPr txBox="1"/>
           <p:nvPr/>
         </p:nvSpPr>
         <p:spPr>
           <a:xfrm>
-            <a:off x="1828800" y="2748473"/>
-            <a:ext cx="8503920" cy="320040"/>
+            <a:off x="1737360" y="2793520"/>
+            <a:ext cx="8686800" cy="274320"/>
           </a:xfrm>
           <a:prstGeom prst="rect">
             <a:avLst/>
@@ -7534,7 +7879,7 @@
               </a:spcAft>
             </a:pPr>
             <a:r>
-              <a:rPr sz="1300" b="0" i="1">
+              <a:rPr sz="1200" b="0" i="1">
                 <a:solidFill>
                   <a:srgbClr val="64748B"/>
                 </a:solidFill>
@@ -7547,18 +7892,18 @@
       </p:sp>
       <p:sp>
         <p:nvSpPr>
-          <p:cNvPr id="10" name="Rounded Rectangle 9"/>
+          <p:cNvPr id="11" name="Rounded Rectangle 10"/>
           <p:cNvSpPr/>
           <p:nvPr/>
         </p:nvSpPr>
         <p:spPr>
           <a:xfrm>
-            <a:off x="548640" y="3178241"/>
-            <a:ext cx="5303520" cy="3176838"/>
+            <a:off x="548640" y="3214144"/>
+            <a:ext cx="5486400" cy="1874519"/>
           </a:xfrm>
           <a:prstGeom prst="roundRect">
             <a:avLst>
-              <a:gd name="adj" fmla="val 6000"/>
+              <a:gd name="adj" fmla="val 4000"/>
             </a:avLst>
           </a:prstGeom>
           <a:solidFill>
@@ -7566,10 +7911,16 @@
           </a:solidFill>
           <a:ln w="9525">
             <a:solidFill>
-              <a:srgbClr val="D5DEE8"/>
+              <a:srgbClr val="DDE5EE"/>
             </a:solidFill>
           </a:ln>
-          <a:effectLst/>
+          <a:effectLst>
+            <a:outerShdw blurRad="114300" dist="25400" dir="5400000" algn="t" rotWithShape="0">
+              <a:srgbClr val="0B1220">
+                <a:alpha val="16000"/>
+              </a:srgbClr>
+            </a:outerShdw>
+          </a:effectLst>
         </p:spPr>
         <p:style>
           <a:lnRef idx="1">
@@ -7595,14 +7946,58 @@
       </p:sp>
       <p:sp>
         <p:nvSpPr>
-          <p:cNvPr id="11" name="TextBox 10"/>
+          <p:cNvPr id="12" name="Rectangle 11"/>
+          <p:cNvSpPr/>
+          <p:nvPr/>
+        </p:nvSpPr>
+        <p:spPr>
+          <a:xfrm>
+            <a:off x="548640" y="3323872"/>
+            <a:ext cx="64008" cy="1655063"/>
+          </a:xfrm>
+          <a:prstGeom prst="rect">
+            <a:avLst/>
+          </a:prstGeom>
+          <a:solidFill>
+            <a:srgbClr val="0F8F85"/>
+          </a:solidFill>
+          <a:ln>
+            <a:noFill/>
+          </a:ln>
+          <a:effectLst/>
+        </p:spPr>
+        <p:style>
+          <a:lnRef idx="1">
+            <a:schemeClr val="accent1"/>
+          </a:lnRef>
+          <a:fillRef idx="3">
+            <a:schemeClr val="accent1"/>
+          </a:fillRef>
+          <a:effectRef idx="2">
+            <a:schemeClr val="accent1"/>
+          </a:effectRef>
+          <a:fontRef idx="minor">
+            <a:schemeClr val="lt1"/>
+          </a:fontRef>
+        </p:style>
+        <p:txBody>
+          <a:bodyPr rtlCol="0" anchor="ctr"/>
+          <a:lstStyle/>
+          <a:p>
+            <a:pPr algn="ctr"/>
+          </a:p>
+        </p:txBody>
+      </p:sp>
+      <p:sp>
+        <p:nvSpPr>
+          <p:cNvPr id="13" name="TextBox 12"/>
           <p:cNvSpPr txBox="1"/>
           <p:nvPr/>
         </p:nvSpPr>
         <p:spPr>
           <a:xfrm>
-            <a:off x="685800" y="3233105"/>
-            <a:ext cx="5029200" cy="320040"/>
+            <a:off x="777240" y="3305584"/>
+            <a:ext cx="5120640" cy="347472"/>
           </a:xfrm>
           <a:prstGeom prst="rect">
             <a:avLst/>
@@ -7624,20 +8019,20 @@
               </a:spcAft>
             </a:pPr>
             <a:r>
-              <a:rPr sz="1400" b="1" i="0">
+              <a:rPr sz="1200" b="1" i="0">
                 <a:solidFill>
                   <a:srgbClr val="0F8F85"/>
                 </a:solidFill>
                 <a:latin typeface="Calibri"/>
               </a:rPr>
-              <a:t>Fractal noise (tiles exactly)</a:t>
+              <a:t>FRACTAL NOISE (TILES EXACTLY)</a:t>
             </a:r>
           </a:p>
         </p:txBody>
       </p:sp>
       <p:pic>
         <p:nvPicPr>
-          <p:cNvPr id="12" name="Picture 11" descr="fractal.png"/>
+          <p:cNvPr id="14" name="Picture 13" descr="fractal.png"/>
           <p:cNvPicPr>
             <a:picLocks noChangeAspect="1"/>
           </p:cNvPicPr>
@@ -7651,8 +8046,8 @@
         </p:blipFill>
         <p:spPr>
           <a:xfrm>
-            <a:off x="685799" y="3589721"/>
-            <a:ext cx="5029200" cy="1555141"/>
+            <a:off x="1779308" y="3890800"/>
+            <a:ext cx="3025063" cy="868680"/>
           </a:xfrm>
           <a:prstGeom prst="rect">
             <a:avLst/>
@@ -7661,14 +8056,112 @@
       </p:pic>
       <p:sp>
         <p:nvSpPr>
-          <p:cNvPr id="13" name="TextBox 12"/>
+          <p:cNvPr id="15" name="Rounded Rectangle 14"/>
+          <p:cNvSpPr/>
+          <p:nvPr/>
+        </p:nvSpPr>
+        <p:spPr>
+          <a:xfrm>
+            <a:off x="548640" y="5225824"/>
+            <a:ext cx="5486400" cy="1129255"/>
+          </a:xfrm>
+          <a:prstGeom prst="roundRect">
+            <a:avLst>
+              <a:gd name="adj" fmla="val 4000"/>
+            </a:avLst>
+          </a:prstGeom>
+          <a:solidFill>
+            <a:srgbClr val="FFFFFF"/>
+          </a:solidFill>
+          <a:ln w="9525">
+            <a:solidFill>
+              <a:srgbClr val="DDE5EE"/>
+            </a:solidFill>
+          </a:ln>
+          <a:effectLst>
+            <a:outerShdw blurRad="114300" dist="25400" dir="5400000" algn="t" rotWithShape="0">
+              <a:srgbClr val="0B1220">
+                <a:alpha val="16000"/>
+              </a:srgbClr>
+            </a:outerShdw>
+          </a:effectLst>
+        </p:spPr>
+        <p:style>
+          <a:lnRef idx="1">
+            <a:schemeClr val="accent1"/>
+          </a:lnRef>
+          <a:fillRef idx="3">
+            <a:schemeClr val="accent1"/>
+          </a:fillRef>
+          <a:effectRef idx="2">
+            <a:schemeClr val="accent1"/>
+          </a:effectRef>
+          <a:fontRef idx="minor">
+            <a:schemeClr val="lt1"/>
+          </a:fontRef>
+        </p:style>
+        <p:txBody>
+          <a:bodyPr rtlCol="0" anchor="ctr"/>
+          <a:lstStyle/>
+          <a:p>
+            <a:pPr algn="ctr"/>
+          </a:p>
+        </p:txBody>
+      </p:sp>
+      <p:sp>
+        <p:nvSpPr>
+          <p:cNvPr id="16" name="Rectangle 15"/>
+          <p:cNvSpPr/>
+          <p:nvPr/>
+        </p:nvSpPr>
+        <p:spPr>
+          <a:xfrm>
+            <a:off x="548640" y="5335552"/>
+            <a:ext cx="64008" cy="909799"/>
+          </a:xfrm>
+          <a:prstGeom prst="rect">
+            <a:avLst/>
+          </a:prstGeom>
+          <a:solidFill>
+            <a:srgbClr val="0F8F85"/>
+          </a:solidFill>
+          <a:ln>
+            <a:noFill/>
+          </a:ln>
+          <a:effectLst/>
+        </p:spPr>
+        <p:style>
+          <a:lnRef idx="1">
+            <a:schemeClr val="accent1"/>
+          </a:lnRef>
+          <a:fillRef idx="3">
+            <a:schemeClr val="accent1"/>
+          </a:fillRef>
+          <a:effectRef idx="2">
+            <a:schemeClr val="accent1"/>
+          </a:effectRef>
+          <a:fontRef idx="minor">
+            <a:schemeClr val="lt1"/>
+          </a:fontRef>
+        </p:style>
+        <p:txBody>
+          <a:bodyPr rtlCol="0" anchor="ctr"/>
+          <a:lstStyle/>
+          <a:p>
+            <a:pPr algn="ctr"/>
+          </a:p>
+        </p:txBody>
+      </p:sp>
+      <p:sp>
+        <p:nvSpPr>
+          <p:cNvPr id="17" name="TextBox 16"/>
           <p:cNvSpPr txBox="1"/>
           <p:nvPr/>
         </p:nvSpPr>
         <p:spPr>
           <a:xfrm>
-            <a:off x="685800" y="5372801"/>
-            <a:ext cx="4937760" cy="320040"/>
+            <a:off x="777240" y="5317264"/>
+            <a:ext cx="5120640" cy="347472"/>
           </a:xfrm>
           <a:prstGeom prst="rect">
             <a:avLst/>
@@ -7690,20 +8183,20 @@
               </a:spcAft>
             </a:pPr>
             <a:r>
-              <a:rPr sz="1400" b="1" i="0">
+              <a:rPr sz="1200" b="1" i="0">
                 <a:solidFill>
                   <a:srgbClr val="0F8F85"/>
                 </a:solidFill>
                 <a:latin typeface="Calibri"/>
               </a:rPr>
-              <a:t>Vertex push by a noise deformer</a:t>
+              <a:t>VERTEX PUSH BY A NOISE DEFORMER</a:t>
             </a:r>
           </a:p>
         </p:txBody>
       </p:sp>
       <p:pic>
         <p:nvPicPr>
-          <p:cNvPr id="14" name="Picture 13" descr="push.png"/>
+          <p:cNvPr id="18" name="Picture 17" descr="push.png"/>
           <p:cNvPicPr>
             <a:picLocks noChangeAspect="1"/>
           </p:cNvPicPr>
@@ -7717,8 +8210,8 @@
         </p:blipFill>
         <p:spPr>
           <a:xfrm>
-            <a:off x="777240" y="5784281"/>
-            <a:ext cx="4846320" cy="392462"/>
+            <a:off x="891539" y="5792738"/>
+            <a:ext cx="4800600" cy="342900"/>
           </a:xfrm>
           <a:prstGeom prst="rect">
             <a:avLst/>
@@ -7727,14 +8220,14 @@
       </p:pic>
       <p:sp>
         <p:nvSpPr>
-          <p:cNvPr id="15" name="TextBox 14"/>
+          <p:cNvPr id="19" name="TextBox 18"/>
           <p:cNvSpPr txBox="1"/>
           <p:nvPr/>
         </p:nvSpPr>
         <p:spPr>
           <a:xfrm>
-            <a:off x="6217920" y="3178241"/>
-            <a:ext cx="5486400" cy="3108960"/>
+            <a:off x="6355080" y="3305584"/>
+            <a:ext cx="5394960" cy="3383280"/>
           </a:xfrm>
           <a:prstGeom prst="rect">
             <a:avLst/>
@@ -7747,17 +8240,17 @@
           </a:bodyPr>
           <a:lstStyle/>
           <a:p>
-            <a:pPr algn="l" marL="256032" indent="-256032">
-              <a:lnSpc>
-                <a:spcPct val="100000"/>
-              </a:lnSpc>
-              <a:spcAft>
-                <a:spcPts val="1000"/>
+            <a:pPr algn="l" marL="274320" indent="-274320">
+              <a:lnSpc>
+                <a:spcPct val="100000"/>
+              </a:lnSpc>
+              <a:spcAft>
+                <a:spcPts val="1100"/>
               </a:spcAft>
               <a:buClr>
-                <a:srgbClr val="007A3D"/>
+                <a:srgbClr val="0F8F85"/>
               </a:buClr>
-              <a:buChar char="•"/>
+              <a:buChar char="▪"/>
             </a:pPr>
             <a:r>
               <a:rPr sz="2000" b="0" i="0">
@@ -7770,17 +8263,17 @@
             </a:r>
           </a:p>
           <a:p>
-            <a:pPr algn="l" marL="256032" indent="-256032">
-              <a:lnSpc>
-                <a:spcPct val="100000"/>
-              </a:lnSpc>
-              <a:spcAft>
-                <a:spcPts val="1000"/>
+            <a:pPr algn="l" marL="274320" indent="-274320">
+              <a:lnSpc>
+                <a:spcPct val="100000"/>
+              </a:lnSpc>
+              <a:spcAft>
+                <a:spcPts val="1100"/>
               </a:spcAft>
               <a:buClr>
-                <a:srgbClr val="007A3D"/>
+                <a:srgbClr val="0F8F85"/>
               </a:buClr>
-              <a:buChar char="•"/>
+              <a:buChar char="▪"/>
             </a:pPr>
             <a:r>
               <a:rPr sz="2000" b="0" i="0">
@@ -7793,17 +8286,17 @@
             </a:r>
           </a:p>
           <a:p>
-            <a:pPr algn="l" marL="256032" indent="-256032">
-              <a:lnSpc>
-                <a:spcPct val="100000"/>
-              </a:lnSpc>
-              <a:spcAft>
-                <a:spcPts val="1000"/>
+            <a:pPr algn="l" marL="274320" indent="-274320">
+              <a:lnSpc>
+                <a:spcPct val="100000"/>
+              </a:lnSpc>
+              <a:spcAft>
+                <a:spcPts val="1100"/>
               </a:spcAft>
               <a:buClr>
-                <a:srgbClr val="007A3D"/>
+                <a:srgbClr val="0F8F85"/>
               </a:buClr>
-              <a:buChar char="•"/>
+              <a:buChar char="▪"/>
             </a:pPr>
             <a:r>
               <a:rPr sz="2000" b="0" i="0">
@@ -7816,17 +8309,17 @@
             </a:r>
           </a:p>
           <a:p>
-            <a:pPr algn="l" marL="256032" indent="-256032">
-              <a:lnSpc>
-                <a:spcPct val="100000"/>
-              </a:lnSpc>
-              <a:spcAft>
-                <a:spcPts val="1000"/>
+            <a:pPr algn="l" marL="274320" indent="-274320">
+              <a:lnSpc>
+                <a:spcPct val="100000"/>
+              </a:lnSpc>
+              <a:spcAft>
+                <a:spcPts val="1100"/>
               </a:spcAft>
               <a:buClr>
-                <a:srgbClr val="007A3D"/>
+                <a:srgbClr val="0F8F85"/>
               </a:buClr>
-              <a:buChar char="•"/>
+              <a:buChar char="▪"/>
             </a:pPr>
             <a:r>
               <a:rPr sz="2000" b="0" i="0">
@@ -8003,7 +8496,7 @@
         <p:spPr>
           <a:xfrm>
             <a:off x="731520" y="118872"/>
-            <a:ext cx="10058400" cy="640080"/>
+            <a:ext cx="10515600" cy="640080"/>
           </a:xfrm>
           <a:prstGeom prst="rect">
             <a:avLst/>
@@ -8044,8 +8537,8 @@
         </p:nvSpPr>
         <p:spPr>
           <a:xfrm>
-            <a:off x="10789920" y="6473952"/>
-            <a:ext cx="1188720" cy="274320"/>
+            <a:off x="548640" y="6492240"/>
+            <a:ext cx="5486400" cy="274320"/>
           </a:xfrm>
           <a:prstGeom prst="rect">
             <a:avLst/>
@@ -8058,6 +8551,48 @@
           </a:bodyPr>
           <a:lstStyle/>
           <a:p>
+            <a:pPr algn="l">
+              <a:lnSpc>
+                <a:spcPct val="100000"/>
+              </a:lnSpc>
+              <a:spcAft>
+                <a:spcPts val="400"/>
+              </a:spcAft>
+            </a:pPr>
+            <a:r>
+              <a:rPr sz="1000" b="0" i="0">
+                <a:solidFill>
+                  <a:srgbClr val="64748B"/>
+                </a:solidFill>
+                <a:latin typeface="Calibri"/>
+              </a:rPr>
+              <a:t>Sentinel  ·  CSE 4102  ·  KUET</a:t>
+            </a:r>
+          </a:p>
+        </p:txBody>
+      </p:sp>
+      <p:sp>
+        <p:nvSpPr>
+          <p:cNvPr id="8" name="TextBox 7"/>
+          <p:cNvSpPr txBox="1"/>
+          <p:nvPr/>
+        </p:nvSpPr>
+        <p:spPr>
+          <a:xfrm>
+            <a:off x="10789920" y="6492240"/>
+            <a:ext cx="1188720" cy="274320"/>
+          </a:xfrm>
+          <a:prstGeom prst="rect">
+            <a:avLst/>
+          </a:prstGeom>
+          <a:noFill/>
+        </p:spPr>
+        <p:txBody>
+          <a:bodyPr wrap="square" lIns="36576" rIns="36576" tIns="18288" bIns="18288" anchor="t">
+            <a:spAutoFit/>
+          </a:bodyPr>
+          <a:lstStyle/>
+          <a:p>
             <a:pPr algn="r">
               <a:lnSpc>
                 <a:spcPct val="100000"/>
@@ -8080,18 +8615,708 @@
       </p:sp>
       <p:sp>
         <p:nvSpPr>
-          <p:cNvPr id="8" name="Rounded Rectangle 7"/>
+          <p:cNvPr id="9" name="Pentagon 8"/>
           <p:cNvSpPr/>
           <p:nvPr/>
         </p:nvSpPr>
         <p:spPr>
           <a:xfrm>
             <a:off x="548640" y="1051560"/>
-            <a:ext cx="1691640" cy="777240"/>
+            <a:ext cx="1973580" cy="777240"/>
+          </a:xfrm>
+          <a:prstGeom prst="homePlate">
+            <a:avLst>
+              <a:gd name="adj" fmla="val 28000"/>
+            </a:avLst>
+          </a:prstGeom>
+          <a:solidFill>
+            <a:srgbClr val="E6F4F2"/>
+          </a:solidFill>
+          <a:ln w="12700">
+            <a:solidFill>
+              <a:srgbClr val="0F8F85"/>
+            </a:solidFill>
+          </a:ln>
+          <a:effectLst>
+            <a:outerShdw blurRad="63500" dist="12700" dir="5400000" algn="t" rotWithShape="0">
+              <a:srgbClr val="0B1220">
+                <a:alpha val="12000"/>
+              </a:srgbClr>
+            </a:outerShdw>
+          </a:effectLst>
+        </p:spPr>
+        <p:style>
+          <a:lnRef idx="1">
+            <a:schemeClr val="accent1"/>
+          </a:lnRef>
+          <a:fillRef idx="3">
+            <a:schemeClr val="accent1"/>
+          </a:fillRef>
+          <a:effectRef idx="2">
+            <a:schemeClr val="accent1"/>
+          </a:effectRef>
+          <a:fontRef idx="minor">
+            <a:schemeClr val="lt1"/>
+          </a:fontRef>
+        </p:style>
+        <p:txBody>
+          <a:bodyPr rtlCol="0" anchor="ctr"/>
+          <a:lstStyle/>
+          <a:p>
+            <a:pPr algn="ctr"/>
+          </a:p>
+        </p:txBody>
+      </p:sp>
+      <p:sp>
+        <p:nvSpPr>
+          <p:cNvPr id="10" name="TextBox 9"/>
+          <p:cNvSpPr txBox="1"/>
+          <p:nvPr/>
+        </p:nvSpPr>
+        <p:spPr>
+          <a:xfrm>
+            <a:off x="640080" y="1051560"/>
+            <a:ext cx="1607820" cy="777240"/>
+          </a:xfrm>
+          <a:prstGeom prst="rect">
+            <a:avLst/>
+          </a:prstGeom>
+          <a:noFill/>
+        </p:spPr>
+        <p:txBody>
+          <a:bodyPr wrap="square" lIns="36576" rIns="36576" tIns="18288" bIns="18288" anchor="ctr">
+            <a:spAutoFit/>
+          </a:bodyPr>
+          <a:lstStyle/>
+          <a:p>
+            <a:pPr algn="ctr">
+              <a:lnSpc>
+                <a:spcPct val="100000"/>
+              </a:lnSpc>
+              <a:spcAft>
+                <a:spcPts val="0"/>
+              </a:spcAft>
+            </a:pPr>
+            <a:r>
+              <a:rPr sz="1400" b="1" i="0">
+                <a:solidFill>
+                  <a:srgbClr val="1E293B"/>
+                </a:solidFill>
+                <a:latin typeface="Calibri"/>
+              </a:rPr>
+              <a:t>Primitive</a:t>
+            </a:r>
+          </a:p>
+          <a:p>
+            <a:pPr algn="ctr">
+              <a:lnSpc>
+                <a:spcPct val="100000"/>
+              </a:lnSpc>
+              <a:spcAft>
+                <a:spcPts val="0"/>
+              </a:spcAft>
+            </a:pPr>
+            <a:r>
+              <a:rPr sz="1400" b="1" i="0">
+                <a:solidFill>
+                  <a:srgbClr val="1E293B"/>
+                </a:solidFill>
+                <a:latin typeface="Calibri"/>
+              </a:rPr>
+              <a:t>mesh</a:t>
+            </a:r>
+          </a:p>
+        </p:txBody>
+      </p:sp>
+      <p:sp>
+        <p:nvSpPr>
+          <p:cNvPr id="11" name="Chevron 10"/>
+          <p:cNvSpPr/>
+          <p:nvPr/>
+        </p:nvSpPr>
+        <p:spPr>
+          <a:xfrm>
+            <a:off x="2385060" y="1051560"/>
+            <a:ext cx="1973580" cy="777240"/>
+          </a:xfrm>
+          <a:prstGeom prst="chevron">
+            <a:avLst>
+              <a:gd name="adj" fmla="val 28000"/>
+            </a:avLst>
+          </a:prstGeom>
+          <a:solidFill>
+            <a:srgbClr val="CCEAE6"/>
+          </a:solidFill>
+          <a:ln w="12700">
+            <a:solidFill>
+              <a:srgbClr val="0F8F85"/>
+            </a:solidFill>
+          </a:ln>
+          <a:effectLst>
+            <a:outerShdw blurRad="63500" dist="12700" dir="5400000" algn="t" rotWithShape="0">
+              <a:srgbClr val="0B1220">
+                <a:alpha val="12000"/>
+              </a:srgbClr>
+            </a:outerShdw>
+          </a:effectLst>
+        </p:spPr>
+        <p:style>
+          <a:lnRef idx="1">
+            <a:schemeClr val="accent1"/>
+          </a:lnRef>
+          <a:fillRef idx="3">
+            <a:schemeClr val="accent1"/>
+          </a:fillRef>
+          <a:effectRef idx="2">
+            <a:schemeClr val="accent1"/>
+          </a:effectRef>
+          <a:fontRef idx="minor">
+            <a:schemeClr val="lt1"/>
+          </a:fontRef>
+        </p:style>
+        <p:txBody>
+          <a:bodyPr rtlCol="0" anchor="ctr"/>
+          <a:lstStyle/>
+          <a:p>
+            <a:pPr algn="ctr"/>
+          </a:p>
+        </p:txBody>
+      </p:sp>
+      <p:sp>
+        <p:nvSpPr>
+          <p:cNvPr id="12" name="TextBox 11"/>
+          <p:cNvSpPr txBox="1"/>
+          <p:nvPr/>
+        </p:nvSpPr>
+        <p:spPr>
+          <a:xfrm>
+            <a:off x="2641092" y="1051560"/>
+            <a:ext cx="1607820" cy="777240"/>
+          </a:xfrm>
+          <a:prstGeom prst="rect">
+            <a:avLst/>
+          </a:prstGeom>
+          <a:noFill/>
+        </p:spPr>
+        <p:txBody>
+          <a:bodyPr wrap="square" lIns="36576" rIns="36576" tIns="18288" bIns="18288" anchor="ctr">
+            <a:spAutoFit/>
+          </a:bodyPr>
+          <a:lstStyle/>
+          <a:p>
+            <a:pPr algn="ctr">
+              <a:lnSpc>
+                <a:spcPct val="100000"/>
+              </a:lnSpc>
+              <a:spcAft>
+                <a:spcPts val="0"/>
+              </a:spcAft>
+            </a:pPr>
+            <a:r>
+              <a:rPr sz="1400" b="1" i="0">
+                <a:solidFill>
+                  <a:srgbClr val="1E293B"/>
+                </a:solidFill>
+                <a:latin typeface="Calibri"/>
+              </a:rPr>
+              <a:t>Deformers</a:t>
+            </a:r>
+          </a:p>
+          <a:p>
+            <a:pPr algn="ctr">
+              <a:lnSpc>
+                <a:spcPct val="100000"/>
+              </a:lnSpc>
+              <a:spcAft>
+                <a:spcPts val="0"/>
+              </a:spcAft>
+            </a:pPr>
+            <a:r>
+              <a:rPr sz="1400" b="1" i="0">
+                <a:solidFill>
+                  <a:srgbClr val="1E293B"/>
+                </a:solidFill>
+                <a:latin typeface="Calibri"/>
+              </a:rPr>
+              <a:t>(own space)</a:t>
+            </a:r>
+          </a:p>
+        </p:txBody>
+      </p:sp>
+      <p:sp>
+        <p:nvSpPr>
+          <p:cNvPr id="13" name="Chevron 12"/>
+          <p:cNvSpPr/>
+          <p:nvPr/>
+        </p:nvSpPr>
+        <p:spPr>
+          <a:xfrm>
+            <a:off x="4221480" y="1051560"/>
+            <a:ext cx="1973580" cy="777240"/>
+          </a:xfrm>
+          <a:prstGeom prst="chevron">
+            <a:avLst>
+              <a:gd name="adj" fmla="val 28000"/>
+            </a:avLst>
+          </a:prstGeom>
+          <a:solidFill>
+            <a:srgbClr val="E6F4F2"/>
+          </a:solidFill>
+          <a:ln w="12700">
+            <a:solidFill>
+              <a:srgbClr val="0F8F85"/>
+            </a:solidFill>
+          </a:ln>
+          <a:effectLst>
+            <a:outerShdw blurRad="63500" dist="12700" dir="5400000" algn="t" rotWithShape="0">
+              <a:srgbClr val="0B1220">
+                <a:alpha val="12000"/>
+              </a:srgbClr>
+            </a:outerShdw>
+          </a:effectLst>
+        </p:spPr>
+        <p:style>
+          <a:lnRef idx="1">
+            <a:schemeClr val="accent1"/>
+          </a:lnRef>
+          <a:fillRef idx="3">
+            <a:schemeClr val="accent1"/>
+          </a:fillRef>
+          <a:effectRef idx="2">
+            <a:schemeClr val="accent1"/>
+          </a:effectRef>
+          <a:fontRef idx="minor">
+            <a:schemeClr val="lt1"/>
+          </a:fontRef>
+        </p:style>
+        <p:txBody>
+          <a:bodyPr rtlCol="0" anchor="ctr"/>
+          <a:lstStyle/>
+          <a:p>
+            <a:pPr algn="ctr"/>
+          </a:p>
+        </p:txBody>
+      </p:sp>
+      <p:sp>
+        <p:nvSpPr>
+          <p:cNvPr id="14" name="TextBox 13"/>
+          <p:cNvSpPr txBox="1"/>
+          <p:nvPr/>
+        </p:nvSpPr>
+        <p:spPr>
+          <a:xfrm>
+            <a:off x="4477512" y="1051560"/>
+            <a:ext cx="1607820" cy="777240"/>
+          </a:xfrm>
+          <a:prstGeom prst="rect">
+            <a:avLst/>
+          </a:prstGeom>
+          <a:noFill/>
+        </p:spPr>
+        <p:txBody>
+          <a:bodyPr wrap="square" lIns="36576" rIns="36576" tIns="18288" bIns="18288" anchor="ctr">
+            <a:spAutoFit/>
+          </a:bodyPr>
+          <a:lstStyle/>
+          <a:p>
+            <a:pPr algn="ctr">
+              <a:lnSpc>
+                <a:spcPct val="100000"/>
+              </a:lnSpc>
+              <a:spcAft>
+                <a:spcPts val="0"/>
+              </a:spcAft>
+            </a:pPr>
+            <a:r>
+              <a:rPr sz="1400" b="1" i="0">
+                <a:solidFill>
+                  <a:srgbClr val="1E293B"/>
+                </a:solidFill>
+                <a:latin typeface="Calibri"/>
+              </a:rPr>
+              <a:t>M_part</a:t>
+            </a:r>
+          </a:p>
+          <a:p>
+            <a:pPr algn="ctr">
+              <a:lnSpc>
+                <a:spcPct val="100000"/>
+              </a:lnSpc>
+              <a:spcAft>
+                <a:spcPts val="0"/>
+              </a:spcAft>
+            </a:pPr>
+            <a:r>
+              <a:rPr sz="1400" b="1" i="0">
+                <a:solidFill>
+                  <a:srgbClr val="1E293B"/>
+                </a:solidFill>
+                <a:latin typeface="Calibri"/>
+              </a:rPr>
+              <a:t>scale, turn, move</a:t>
+            </a:r>
+          </a:p>
+        </p:txBody>
+      </p:sp>
+      <p:sp>
+        <p:nvSpPr>
+          <p:cNvPr id="15" name="Chevron 14"/>
+          <p:cNvSpPr/>
+          <p:nvPr/>
+        </p:nvSpPr>
+        <p:spPr>
+          <a:xfrm>
+            <a:off x="6057900" y="1051560"/>
+            <a:ext cx="1973580" cy="777240"/>
+          </a:xfrm>
+          <a:prstGeom prst="chevron">
+            <a:avLst>
+              <a:gd name="adj" fmla="val 28000"/>
+            </a:avLst>
+          </a:prstGeom>
+          <a:solidFill>
+            <a:srgbClr val="CCEAE6"/>
+          </a:solidFill>
+          <a:ln w="12700">
+            <a:solidFill>
+              <a:srgbClr val="0F8F85"/>
+            </a:solidFill>
+          </a:ln>
+          <a:effectLst>
+            <a:outerShdw blurRad="63500" dist="12700" dir="5400000" algn="t" rotWithShape="0">
+              <a:srgbClr val="0B1220">
+                <a:alpha val="12000"/>
+              </a:srgbClr>
+            </a:outerShdw>
+          </a:effectLst>
+        </p:spPr>
+        <p:style>
+          <a:lnRef idx="1">
+            <a:schemeClr val="accent1"/>
+          </a:lnRef>
+          <a:fillRef idx="3">
+            <a:schemeClr val="accent1"/>
+          </a:fillRef>
+          <a:effectRef idx="2">
+            <a:schemeClr val="accent1"/>
+          </a:effectRef>
+          <a:fontRef idx="minor">
+            <a:schemeClr val="lt1"/>
+          </a:fontRef>
+        </p:style>
+        <p:txBody>
+          <a:bodyPr rtlCol="0" anchor="ctr"/>
+          <a:lstStyle/>
+          <a:p>
+            <a:pPr algn="ctr"/>
+          </a:p>
+        </p:txBody>
+      </p:sp>
+      <p:sp>
+        <p:nvSpPr>
+          <p:cNvPr id="16" name="TextBox 15"/>
+          <p:cNvSpPr txBox="1"/>
+          <p:nvPr/>
+        </p:nvSpPr>
+        <p:spPr>
+          <a:xfrm>
+            <a:off x="6313932" y="1051560"/>
+            <a:ext cx="1607820" cy="777240"/>
+          </a:xfrm>
+          <a:prstGeom prst="rect">
+            <a:avLst/>
+          </a:prstGeom>
+          <a:noFill/>
+        </p:spPr>
+        <p:txBody>
+          <a:bodyPr wrap="square" lIns="36576" rIns="36576" tIns="18288" bIns="18288" anchor="ctr">
+            <a:spAutoFit/>
+          </a:bodyPr>
+          <a:lstStyle/>
+          <a:p>
+            <a:pPr algn="ctr">
+              <a:lnSpc>
+                <a:spcPct val="100000"/>
+              </a:lnSpc>
+              <a:spcAft>
+                <a:spcPts val="0"/>
+              </a:spcAft>
+            </a:pPr>
+            <a:r>
+              <a:rPr sz="1400" b="1" i="0">
+                <a:solidFill>
+                  <a:srgbClr val="1E293B"/>
+                </a:solidFill>
+                <a:latin typeface="Calibri"/>
+              </a:rPr>
+              <a:t>Merge by</a:t>
+            </a:r>
+          </a:p>
+          <a:p>
+            <a:pPr algn="ctr">
+              <a:lnSpc>
+                <a:spcPct val="100000"/>
+              </a:lnSpc>
+              <a:spcAft>
+                <a:spcPts val="0"/>
+              </a:spcAft>
+            </a:pPr>
+            <a:r>
+              <a:rPr sz="1400" b="1" i="0">
+                <a:solidFill>
+                  <a:srgbClr val="1E293B"/>
+                </a:solidFill>
+                <a:latin typeface="Calibri"/>
+              </a:rPr>
+              <a:t>material</a:t>
+            </a:r>
+          </a:p>
+        </p:txBody>
+      </p:sp>
+      <p:sp>
+        <p:nvSpPr>
+          <p:cNvPr id="17" name="Chevron 16"/>
+          <p:cNvSpPr/>
+          <p:nvPr/>
+        </p:nvSpPr>
+        <p:spPr>
+          <a:xfrm>
+            <a:off x="7894320" y="1051560"/>
+            <a:ext cx="1973580" cy="777240"/>
+          </a:xfrm>
+          <a:prstGeom prst="chevron">
+            <a:avLst>
+              <a:gd name="adj" fmla="val 28000"/>
+            </a:avLst>
+          </a:prstGeom>
+          <a:solidFill>
+            <a:srgbClr val="E6F4F2"/>
+          </a:solidFill>
+          <a:ln w="12700">
+            <a:solidFill>
+              <a:srgbClr val="0F8F85"/>
+            </a:solidFill>
+          </a:ln>
+          <a:effectLst>
+            <a:outerShdw blurRad="63500" dist="12700" dir="5400000" algn="t" rotWithShape="0">
+              <a:srgbClr val="0B1220">
+                <a:alpha val="12000"/>
+              </a:srgbClr>
+            </a:outerShdw>
+          </a:effectLst>
+        </p:spPr>
+        <p:style>
+          <a:lnRef idx="1">
+            <a:schemeClr val="accent1"/>
+          </a:lnRef>
+          <a:fillRef idx="3">
+            <a:schemeClr val="accent1"/>
+          </a:fillRef>
+          <a:effectRef idx="2">
+            <a:schemeClr val="accent1"/>
+          </a:effectRef>
+          <a:fontRef idx="minor">
+            <a:schemeClr val="lt1"/>
+          </a:fontRef>
+        </p:style>
+        <p:txBody>
+          <a:bodyPr rtlCol="0" anchor="ctr"/>
+          <a:lstStyle/>
+          <a:p>
+            <a:pPr algn="ctr"/>
+          </a:p>
+        </p:txBody>
+      </p:sp>
+      <p:sp>
+        <p:nvSpPr>
+          <p:cNvPr id="18" name="TextBox 17"/>
+          <p:cNvSpPr txBox="1"/>
+          <p:nvPr/>
+        </p:nvSpPr>
+        <p:spPr>
+          <a:xfrm>
+            <a:off x="8150351" y="1051560"/>
+            <a:ext cx="1607820" cy="777240"/>
+          </a:xfrm>
+          <a:prstGeom prst="rect">
+            <a:avLst/>
+          </a:prstGeom>
+          <a:noFill/>
+        </p:spPr>
+        <p:txBody>
+          <a:bodyPr wrap="square" lIns="36576" rIns="36576" tIns="18288" bIns="18288" anchor="ctr">
+            <a:spAutoFit/>
+          </a:bodyPr>
+          <a:lstStyle/>
+          <a:p>
+            <a:pPr algn="ctr">
+              <a:lnSpc>
+                <a:spcPct val="100000"/>
+              </a:lnSpc>
+              <a:spcAft>
+                <a:spcPts val="0"/>
+              </a:spcAft>
+            </a:pPr>
+            <a:r>
+              <a:rPr sz="1400" b="1" i="0">
+                <a:solidFill>
+                  <a:srgbClr val="1E293B"/>
+                </a:solidFill>
+                <a:latin typeface="Calibri"/>
+              </a:rPr>
+              <a:t>M_world</a:t>
+            </a:r>
+          </a:p>
+          <a:p>
+            <a:pPr algn="ctr">
+              <a:lnSpc>
+                <a:spcPct val="100000"/>
+              </a:lnSpc>
+              <a:spcAft>
+                <a:spcPts val="0"/>
+              </a:spcAft>
+            </a:pPr>
+            <a:r>
+              <a:rPr sz="1400" b="1" i="0">
+                <a:solidFill>
+                  <a:srgbClr val="1E293B"/>
+                </a:solidFill>
+                <a:latin typeface="Calibri"/>
+              </a:rPr>
+              <a:t>instances</a:t>
+            </a:r>
+          </a:p>
+        </p:txBody>
+      </p:sp>
+      <p:sp>
+        <p:nvSpPr>
+          <p:cNvPr id="19" name="Chevron 18"/>
+          <p:cNvSpPr/>
+          <p:nvPr/>
+        </p:nvSpPr>
+        <p:spPr>
+          <a:xfrm>
+            <a:off x="9730740" y="1051560"/>
+            <a:ext cx="1973580" cy="777240"/>
+          </a:xfrm>
+          <a:prstGeom prst="chevron">
+            <a:avLst>
+              <a:gd name="adj" fmla="val 28000"/>
+            </a:avLst>
+          </a:prstGeom>
+          <a:solidFill>
+            <a:srgbClr val="CCEAE6"/>
+          </a:solidFill>
+          <a:ln w="12700">
+            <a:solidFill>
+              <a:srgbClr val="0F8F85"/>
+            </a:solidFill>
+          </a:ln>
+          <a:effectLst>
+            <a:outerShdw blurRad="63500" dist="12700" dir="5400000" algn="t" rotWithShape="0">
+              <a:srgbClr val="0B1220">
+                <a:alpha val="12000"/>
+              </a:srgbClr>
+            </a:outerShdw>
+          </a:effectLst>
+        </p:spPr>
+        <p:style>
+          <a:lnRef idx="1">
+            <a:schemeClr val="accent1"/>
+          </a:lnRef>
+          <a:fillRef idx="3">
+            <a:schemeClr val="accent1"/>
+          </a:fillRef>
+          <a:effectRef idx="2">
+            <a:schemeClr val="accent1"/>
+          </a:effectRef>
+          <a:fontRef idx="minor">
+            <a:schemeClr val="lt1"/>
+          </a:fontRef>
+        </p:style>
+        <p:txBody>
+          <a:bodyPr rtlCol="0" anchor="ctr"/>
+          <a:lstStyle/>
+          <a:p>
+            <a:pPr algn="ctr"/>
+          </a:p>
+        </p:txBody>
+      </p:sp>
+      <p:sp>
+        <p:nvSpPr>
+          <p:cNvPr id="20" name="TextBox 19"/>
+          <p:cNvSpPr txBox="1"/>
+          <p:nvPr/>
+        </p:nvSpPr>
+        <p:spPr>
+          <a:xfrm>
+            <a:off x="9986771" y="1051560"/>
+            <a:ext cx="1607820" cy="777240"/>
+          </a:xfrm>
+          <a:prstGeom prst="rect">
+            <a:avLst/>
+          </a:prstGeom>
+          <a:noFill/>
+        </p:spPr>
+        <p:txBody>
+          <a:bodyPr wrap="square" lIns="36576" rIns="36576" tIns="18288" bIns="18288" anchor="ctr">
+            <a:spAutoFit/>
+          </a:bodyPr>
+          <a:lstStyle/>
+          <a:p>
+            <a:pPr algn="ctr">
+              <a:lnSpc>
+                <a:spcPct val="100000"/>
+              </a:lnSpc>
+              <a:spcAft>
+                <a:spcPts val="0"/>
+              </a:spcAft>
+            </a:pPr>
+            <a:r>
+              <a:rPr sz="1400" b="1" i="0">
+                <a:solidFill>
+                  <a:srgbClr val="1E293B"/>
+                </a:solidFill>
+                <a:latin typeface="Calibri"/>
+              </a:rPr>
+              <a:t>V then P</a:t>
+            </a:r>
+          </a:p>
+          <a:p>
+            <a:pPr algn="ctr">
+              <a:lnSpc>
+                <a:spcPct val="100000"/>
+              </a:lnSpc>
+              <a:spcAft>
+                <a:spcPts val="0"/>
+              </a:spcAft>
+            </a:pPr>
+            <a:r>
+              <a:rPr sz="1400" b="1" i="0">
+                <a:solidFill>
+                  <a:srgbClr val="1E293B"/>
+                </a:solidFill>
+                <a:latin typeface="Calibri"/>
+              </a:rPr>
+              <a:t>to screen</a:t>
+            </a:r>
+          </a:p>
+        </p:txBody>
+      </p:sp>
+      <p:sp>
+        <p:nvSpPr>
+          <p:cNvPr id="21" name="Rounded Rectangle 20"/>
+          <p:cNvSpPr/>
+          <p:nvPr/>
+        </p:nvSpPr>
+        <p:spPr>
+          <a:xfrm>
+            <a:off x="548640" y="2011680"/>
+            <a:ext cx="5669280" cy="2194560"/>
           </a:xfrm>
           <a:prstGeom prst="roundRect">
             <a:avLst>
-              <a:gd name="adj" fmla="val 6000"/>
+              <a:gd name="adj" fmla="val 4000"/>
             </a:avLst>
           </a:prstGeom>
           <a:solidFill>
@@ -8099,10 +9324,16 @@
           </a:solidFill>
           <a:ln w="9525">
             <a:solidFill>
-              <a:srgbClr val="0F8F85"/>
+              <a:srgbClr val="DDE5EE"/>
             </a:solidFill>
           </a:ln>
-          <a:effectLst/>
+          <a:effectLst>
+            <a:outerShdw blurRad="114300" dist="25400" dir="5400000" algn="t" rotWithShape="0">
+              <a:srgbClr val="0B1220">
+                <a:alpha val="16000"/>
+              </a:srgbClr>
+            </a:outerShdw>
+          </a:effectLst>
         </p:spPr>
         <p:style>
           <a:lnRef idx="1">
@@ -8128,124 +9359,23 @@
       </p:sp>
       <p:sp>
         <p:nvSpPr>
-          <p:cNvPr id="9" name="TextBox 8"/>
-          <p:cNvSpPr txBox="1"/>
-          <p:nvPr/>
-        </p:nvSpPr>
-        <p:spPr>
-          <a:xfrm>
-            <a:off x="548640" y="1051560"/>
-            <a:ext cx="1691640" cy="777240"/>
-          </a:xfrm>
-          <a:prstGeom prst="rect">
-            <a:avLst/>
-          </a:prstGeom>
-          <a:noFill/>
-        </p:spPr>
-        <p:txBody>
-          <a:bodyPr wrap="square" lIns="36576" rIns="36576" tIns="18288" bIns="18288" anchor="ctr">
-            <a:spAutoFit/>
-          </a:bodyPr>
-          <a:lstStyle/>
-          <a:p>
-            <a:pPr algn="ctr">
-              <a:lnSpc>
-                <a:spcPct val="100000"/>
-              </a:lnSpc>
-              <a:spcAft>
-                <a:spcPts val="0"/>
-              </a:spcAft>
-            </a:pPr>
-            <a:r>
-              <a:rPr sz="1500" b="0" i="0">
-                <a:solidFill>
-                  <a:srgbClr val="1E293B"/>
-                </a:solidFill>
-                <a:latin typeface="Calibri"/>
-              </a:rPr>
-              <a:t>Primitive</a:t>
-            </a:r>
-          </a:p>
-          <a:p>
-            <a:pPr algn="ctr">
-              <a:lnSpc>
-                <a:spcPct val="100000"/>
-              </a:lnSpc>
-              <a:spcAft>
-                <a:spcPts val="0"/>
-              </a:spcAft>
-            </a:pPr>
-            <a:r>
-              <a:rPr sz="1500" b="0" i="0">
-                <a:solidFill>
-                  <a:srgbClr val="1E293B"/>
-                </a:solidFill>
-                <a:latin typeface="Calibri"/>
-              </a:rPr>
-              <a:t>mesh</a:t>
-            </a:r>
-          </a:p>
-        </p:txBody>
-      </p:sp>
-      <p:cxnSp>
-        <p:nvCxnSpPr>
-          <p:cNvPr id="10" name="Connector 9"/>
-          <p:cNvCxnSpPr/>
-          <p:nvPr/>
-        </p:nvCxnSpPr>
-        <p:spPr>
-          <a:xfrm>
-            <a:off x="2240280" y="1435608"/>
-            <a:ext cx="182880" cy="0"/>
-          </a:xfrm>
-          <a:prstGeom prst="line">
-            <a:avLst/>
-          </a:prstGeom>
-          <a:ln w="19050">
-            <a:solidFill>
-              <a:srgbClr val="0F8F85"/>
-            </a:solidFill>
-            <a:tailEnd type="triangle"/>
-          </a:ln>
-        </p:spPr>
-        <p:style>
-          <a:lnRef idx="2">
-            <a:schemeClr val="accent1"/>
-          </a:lnRef>
-          <a:fillRef idx="0">
-            <a:schemeClr val="accent1"/>
-          </a:fillRef>
-          <a:effectRef idx="1">
-            <a:schemeClr val="accent1"/>
-          </a:effectRef>
-          <a:fontRef idx="minor">
-            <a:schemeClr val="tx1"/>
-          </a:fontRef>
-        </p:style>
-      </p:cxnSp>
-      <p:sp>
-        <p:nvSpPr>
-          <p:cNvPr id="11" name="Rounded Rectangle 10"/>
+          <p:cNvPr id="22" name="Rectangle 21"/>
           <p:cNvSpPr/>
           <p:nvPr/>
         </p:nvSpPr>
         <p:spPr>
           <a:xfrm>
-            <a:off x="2423160" y="1051560"/>
-            <a:ext cx="1691640" cy="777240"/>
-          </a:xfrm>
-          <a:prstGeom prst="roundRect">
-            <a:avLst>
-              <a:gd name="adj" fmla="val 6000"/>
-            </a:avLst>
+            <a:off x="548640" y="2121408"/>
+            <a:ext cx="64008" cy="1975104"/>
+          </a:xfrm>
+          <a:prstGeom prst="rect">
+            <a:avLst/>
           </a:prstGeom>
           <a:solidFill>
-            <a:srgbClr val="FFFFFF"/>
+            <a:srgbClr val="0F8F85"/>
           </a:solidFill>
-          <a:ln w="9525">
-            <a:solidFill>
-              <a:srgbClr val="0F8F85"/>
-            </a:solidFill>
+          <a:ln>
+            <a:noFill/>
           </a:ln>
           <a:effectLst/>
         </p:spPr>
@@ -8273,703 +9403,14 @@
       </p:sp>
       <p:sp>
         <p:nvSpPr>
-          <p:cNvPr id="12" name="TextBox 11"/>
+          <p:cNvPr id="23" name="TextBox 22"/>
           <p:cNvSpPr txBox="1"/>
           <p:nvPr/>
         </p:nvSpPr>
         <p:spPr>
           <a:xfrm>
-            <a:off x="2423160" y="1051560"/>
-            <a:ext cx="1691640" cy="777240"/>
-          </a:xfrm>
-          <a:prstGeom prst="rect">
-            <a:avLst/>
-          </a:prstGeom>
-          <a:noFill/>
-        </p:spPr>
-        <p:txBody>
-          <a:bodyPr wrap="square" lIns="36576" rIns="36576" tIns="18288" bIns="18288" anchor="ctr">
-            <a:spAutoFit/>
-          </a:bodyPr>
-          <a:lstStyle/>
-          <a:p>
-            <a:pPr algn="ctr">
-              <a:lnSpc>
-                <a:spcPct val="100000"/>
-              </a:lnSpc>
-              <a:spcAft>
-                <a:spcPts val="0"/>
-              </a:spcAft>
-            </a:pPr>
-            <a:r>
-              <a:rPr sz="1500" b="0" i="0">
-                <a:solidFill>
-                  <a:srgbClr val="1E293B"/>
-                </a:solidFill>
-                <a:latin typeface="Calibri"/>
-              </a:rPr>
-              <a:t>Deformers</a:t>
-            </a:r>
-          </a:p>
-          <a:p>
-            <a:pPr algn="ctr">
-              <a:lnSpc>
-                <a:spcPct val="100000"/>
-              </a:lnSpc>
-              <a:spcAft>
-                <a:spcPts val="0"/>
-              </a:spcAft>
-            </a:pPr>
-            <a:r>
-              <a:rPr sz="1500" b="0" i="0">
-                <a:solidFill>
-                  <a:srgbClr val="1E293B"/>
-                </a:solidFill>
-                <a:latin typeface="Calibri"/>
-              </a:rPr>
-              <a:t>(own space)</a:t>
-            </a:r>
-          </a:p>
-        </p:txBody>
-      </p:sp>
-      <p:cxnSp>
-        <p:nvCxnSpPr>
-          <p:cNvPr id="13" name="Connector 12"/>
-          <p:cNvCxnSpPr/>
-          <p:nvPr/>
-        </p:nvCxnSpPr>
-        <p:spPr>
-          <a:xfrm>
-            <a:off x="4114800" y="1435608"/>
-            <a:ext cx="182880" cy="0"/>
-          </a:xfrm>
-          <a:prstGeom prst="line">
-            <a:avLst/>
-          </a:prstGeom>
-          <a:ln w="19050">
-            <a:solidFill>
-              <a:srgbClr val="0F8F85"/>
-            </a:solidFill>
-            <a:tailEnd type="triangle"/>
-          </a:ln>
-        </p:spPr>
-        <p:style>
-          <a:lnRef idx="2">
-            <a:schemeClr val="accent1"/>
-          </a:lnRef>
-          <a:fillRef idx="0">
-            <a:schemeClr val="accent1"/>
-          </a:fillRef>
-          <a:effectRef idx="1">
-            <a:schemeClr val="accent1"/>
-          </a:effectRef>
-          <a:fontRef idx="minor">
-            <a:schemeClr val="tx1"/>
-          </a:fontRef>
-        </p:style>
-      </p:cxnSp>
-      <p:sp>
-        <p:nvSpPr>
-          <p:cNvPr id="14" name="Rounded Rectangle 13"/>
-          <p:cNvSpPr/>
-          <p:nvPr/>
-        </p:nvSpPr>
-        <p:spPr>
-          <a:xfrm>
-            <a:off x="4297680" y="1051560"/>
-            <a:ext cx="1691640" cy="777240"/>
-          </a:xfrm>
-          <a:prstGeom prst="roundRect">
-            <a:avLst>
-              <a:gd name="adj" fmla="val 6000"/>
-            </a:avLst>
-          </a:prstGeom>
-          <a:solidFill>
-            <a:srgbClr val="FFFFFF"/>
-          </a:solidFill>
-          <a:ln w="9525">
-            <a:solidFill>
-              <a:srgbClr val="0F8F85"/>
-            </a:solidFill>
-          </a:ln>
-          <a:effectLst/>
-        </p:spPr>
-        <p:style>
-          <a:lnRef idx="1">
-            <a:schemeClr val="accent1"/>
-          </a:lnRef>
-          <a:fillRef idx="3">
-            <a:schemeClr val="accent1"/>
-          </a:fillRef>
-          <a:effectRef idx="2">
-            <a:schemeClr val="accent1"/>
-          </a:effectRef>
-          <a:fontRef idx="minor">
-            <a:schemeClr val="lt1"/>
-          </a:fontRef>
-        </p:style>
-        <p:txBody>
-          <a:bodyPr rtlCol="0" anchor="ctr"/>
-          <a:lstStyle/>
-          <a:p>
-            <a:pPr algn="ctr"/>
-          </a:p>
-        </p:txBody>
-      </p:sp>
-      <p:sp>
-        <p:nvSpPr>
-          <p:cNvPr id="15" name="TextBox 14"/>
-          <p:cNvSpPr txBox="1"/>
-          <p:nvPr/>
-        </p:nvSpPr>
-        <p:spPr>
-          <a:xfrm>
-            <a:off x="4297680" y="1051560"/>
-            <a:ext cx="1691640" cy="777240"/>
-          </a:xfrm>
-          <a:prstGeom prst="rect">
-            <a:avLst/>
-          </a:prstGeom>
-          <a:noFill/>
-        </p:spPr>
-        <p:txBody>
-          <a:bodyPr wrap="square" lIns="36576" rIns="36576" tIns="18288" bIns="18288" anchor="ctr">
-            <a:spAutoFit/>
-          </a:bodyPr>
-          <a:lstStyle/>
-          <a:p>
-            <a:pPr algn="ctr">
-              <a:lnSpc>
-                <a:spcPct val="100000"/>
-              </a:lnSpc>
-              <a:spcAft>
-                <a:spcPts val="0"/>
-              </a:spcAft>
-            </a:pPr>
-            <a:r>
-              <a:rPr sz="1500" b="0" i="0">
-                <a:solidFill>
-                  <a:srgbClr val="1E293B"/>
-                </a:solidFill>
-                <a:latin typeface="Calibri"/>
-              </a:rPr>
-              <a:t>M_part</a:t>
-            </a:r>
-          </a:p>
-          <a:p>
-            <a:pPr algn="ctr">
-              <a:lnSpc>
-                <a:spcPct val="100000"/>
-              </a:lnSpc>
-              <a:spcAft>
-                <a:spcPts val="0"/>
-              </a:spcAft>
-            </a:pPr>
-            <a:r>
-              <a:rPr sz="1500" b="0" i="0">
-                <a:solidFill>
-                  <a:srgbClr val="1E293B"/>
-                </a:solidFill>
-                <a:latin typeface="Calibri"/>
-              </a:rPr>
-              <a:t>scale, turn, move</a:t>
-            </a:r>
-          </a:p>
-        </p:txBody>
-      </p:sp>
-      <p:cxnSp>
-        <p:nvCxnSpPr>
-          <p:cNvPr id="16" name="Connector 15"/>
-          <p:cNvCxnSpPr/>
-          <p:nvPr/>
-        </p:nvCxnSpPr>
-        <p:spPr>
-          <a:xfrm>
-            <a:off x="5989320" y="1435608"/>
-            <a:ext cx="182880" cy="0"/>
-          </a:xfrm>
-          <a:prstGeom prst="line">
-            <a:avLst/>
-          </a:prstGeom>
-          <a:ln w="19050">
-            <a:solidFill>
-              <a:srgbClr val="0F8F85"/>
-            </a:solidFill>
-            <a:tailEnd type="triangle"/>
-          </a:ln>
-        </p:spPr>
-        <p:style>
-          <a:lnRef idx="2">
-            <a:schemeClr val="accent1"/>
-          </a:lnRef>
-          <a:fillRef idx="0">
-            <a:schemeClr val="accent1"/>
-          </a:fillRef>
-          <a:effectRef idx="1">
-            <a:schemeClr val="accent1"/>
-          </a:effectRef>
-          <a:fontRef idx="minor">
-            <a:schemeClr val="tx1"/>
-          </a:fontRef>
-        </p:style>
-      </p:cxnSp>
-      <p:sp>
-        <p:nvSpPr>
-          <p:cNvPr id="17" name="Rounded Rectangle 16"/>
-          <p:cNvSpPr/>
-          <p:nvPr/>
-        </p:nvSpPr>
-        <p:spPr>
-          <a:xfrm>
-            <a:off x="6172200" y="1051560"/>
-            <a:ext cx="1691640" cy="777240"/>
-          </a:xfrm>
-          <a:prstGeom prst="roundRect">
-            <a:avLst>
-              <a:gd name="adj" fmla="val 6000"/>
-            </a:avLst>
-          </a:prstGeom>
-          <a:solidFill>
-            <a:srgbClr val="FFFFFF"/>
-          </a:solidFill>
-          <a:ln w="9525">
-            <a:solidFill>
-              <a:srgbClr val="0F8F85"/>
-            </a:solidFill>
-          </a:ln>
-          <a:effectLst/>
-        </p:spPr>
-        <p:style>
-          <a:lnRef idx="1">
-            <a:schemeClr val="accent1"/>
-          </a:lnRef>
-          <a:fillRef idx="3">
-            <a:schemeClr val="accent1"/>
-          </a:fillRef>
-          <a:effectRef idx="2">
-            <a:schemeClr val="accent1"/>
-          </a:effectRef>
-          <a:fontRef idx="minor">
-            <a:schemeClr val="lt1"/>
-          </a:fontRef>
-        </p:style>
-        <p:txBody>
-          <a:bodyPr rtlCol="0" anchor="ctr"/>
-          <a:lstStyle/>
-          <a:p>
-            <a:pPr algn="ctr"/>
-          </a:p>
-        </p:txBody>
-      </p:sp>
-      <p:sp>
-        <p:nvSpPr>
-          <p:cNvPr id="18" name="TextBox 17"/>
-          <p:cNvSpPr txBox="1"/>
-          <p:nvPr/>
-        </p:nvSpPr>
-        <p:spPr>
-          <a:xfrm>
-            <a:off x="6172200" y="1051560"/>
-            <a:ext cx="1691640" cy="777240"/>
-          </a:xfrm>
-          <a:prstGeom prst="rect">
-            <a:avLst/>
-          </a:prstGeom>
-          <a:noFill/>
-        </p:spPr>
-        <p:txBody>
-          <a:bodyPr wrap="square" lIns="36576" rIns="36576" tIns="18288" bIns="18288" anchor="ctr">
-            <a:spAutoFit/>
-          </a:bodyPr>
-          <a:lstStyle/>
-          <a:p>
-            <a:pPr algn="ctr">
-              <a:lnSpc>
-                <a:spcPct val="100000"/>
-              </a:lnSpc>
-              <a:spcAft>
-                <a:spcPts val="0"/>
-              </a:spcAft>
-            </a:pPr>
-            <a:r>
-              <a:rPr sz="1500" b="0" i="0">
-                <a:solidFill>
-                  <a:srgbClr val="1E293B"/>
-                </a:solidFill>
-                <a:latin typeface="Calibri"/>
-              </a:rPr>
-              <a:t>Merge by</a:t>
-            </a:r>
-          </a:p>
-          <a:p>
-            <a:pPr algn="ctr">
-              <a:lnSpc>
-                <a:spcPct val="100000"/>
-              </a:lnSpc>
-              <a:spcAft>
-                <a:spcPts val="0"/>
-              </a:spcAft>
-            </a:pPr>
-            <a:r>
-              <a:rPr sz="1500" b="0" i="0">
-                <a:solidFill>
-                  <a:srgbClr val="1E293B"/>
-                </a:solidFill>
-                <a:latin typeface="Calibri"/>
-              </a:rPr>
-              <a:t>material</a:t>
-            </a:r>
-          </a:p>
-        </p:txBody>
-      </p:sp>
-      <p:cxnSp>
-        <p:nvCxnSpPr>
-          <p:cNvPr id="19" name="Connector 18"/>
-          <p:cNvCxnSpPr/>
-          <p:nvPr/>
-        </p:nvCxnSpPr>
-        <p:spPr>
-          <a:xfrm>
-            <a:off x="7863840" y="1435608"/>
-            <a:ext cx="182880" cy="0"/>
-          </a:xfrm>
-          <a:prstGeom prst="line">
-            <a:avLst/>
-          </a:prstGeom>
-          <a:ln w="19050">
-            <a:solidFill>
-              <a:srgbClr val="0F8F85"/>
-            </a:solidFill>
-            <a:tailEnd type="triangle"/>
-          </a:ln>
-        </p:spPr>
-        <p:style>
-          <a:lnRef idx="2">
-            <a:schemeClr val="accent1"/>
-          </a:lnRef>
-          <a:fillRef idx="0">
-            <a:schemeClr val="accent1"/>
-          </a:fillRef>
-          <a:effectRef idx="1">
-            <a:schemeClr val="accent1"/>
-          </a:effectRef>
-          <a:fontRef idx="minor">
-            <a:schemeClr val="tx1"/>
-          </a:fontRef>
-        </p:style>
-      </p:cxnSp>
-      <p:sp>
-        <p:nvSpPr>
-          <p:cNvPr id="20" name="Rounded Rectangle 19"/>
-          <p:cNvSpPr/>
-          <p:nvPr/>
-        </p:nvSpPr>
-        <p:spPr>
-          <a:xfrm>
-            <a:off x="8046720" y="1051560"/>
-            <a:ext cx="1691640" cy="777240"/>
-          </a:xfrm>
-          <a:prstGeom prst="roundRect">
-            <a:avLst>
-              <a:gd name="adj" fmla="val 6000"/>
-            </a:avLst>
-          </a:prstGeom>
-          <a:solidFill>
-            <a:srgbClr val="FFFFFF"/>
-          </a:solidFill>
-          <a:ln w="9525">
-            <a:solidFill>
-              <a:srgbClr val="0F8F85"/>
-            </a:solidFill>
-          </a:ln>
-          <a:effectLst/>
-        </p:spPr>
-        <p:style>
-          <a:lnRef idx="1">
-            <a:schemeClr val="accent1"/>
-          </a:lnRef>
-          <a:fillRef idx="3">
-            <a:schemeClr val="accent1"/>
-          </a:fillRef>
-          <a:effectRef idx="2">
-            <a:schemeClr val="accent1"/>
-          </a:effectRef>
-          <a:fontRef idx="minor">
-            <a:schemeClr val="lt1"/>
-          </a:fontRef>
-        </p:style>
-        <p:txBody>
-          <a:bodyPr rtlCol="0" anchor="ctr"/>
-          <a:lstStyle/>
-          <a:p>
-            <a:pPr algn="ctr"/>
-          </a:p>
-        </p:txBody>
-      </p:sp>
-      <p:sp>
-        <p:nvSpPr>
-          <p:cNvPr id="21" name="TextBox 20"/>
-          <p:cNvSpPr txBox="1"/>
-          <p:nvPr/>
-        </p:nvSpPr>
-        <p:spPr>
-          <a:xfrm>
-            <a:off x="8046720" y="1051560"/>
-            <a:ext cx="1691640" cy="777240"/>
-          </a:xfrm>
-          <a:prstGeom prst="rect">
-            <a:avLst/>
-          </a:prstGeom>
-          <a:noFill/>
-        </p:spPr>
-        <p:txBody>
-          <a:bodyPr wrap="square" lIns="36576" rIns="36576" tIns="18288" bIns="18288" anchor="ctr">
-            <a:spAutoFit/>
-          </a:bodyPr>
-          <a:lstStyle/>
-          <a:p>
-            <a:pPr algn="ctr">
-              <a:lnSpc>
-                <a:spcPct val="100000"/>
-              </a:lnSpc>
-              <a:spcAft>
-                <a:spcPts val="0"/>
-              </a:spcAft>
-            </a:pPr>
-            <a:r>
-              <a:rPr sz="1500" b="0" i="0">
-                <a:solidFill>
-                  <a:srgbClr val="1E293B"/>
-                </a:solidFill>
-                <a:latin typeface="Calibri"/>
-              </a:rPr>
-              <a:t>M_world</a:t>
-            </a:r>
-          </a:p>
-          <a:p>
-            <a:pPr algn="ctr">
-              <a:lnSpc>
-                <a:spcPct val="100000"/>
-              </a:lnSpc>
-              <a:spcAft>
-                <a:spcPts val="0"/>
-              </a:spcAft>
-            </a:pPr>
-            <a:r>
-              <a:rPr sz="1500" b="0" i="0">
-                <a:solidFill>
-                  <a:srgbClr val="1E293B"/>
-                </a:solidFill>
-                <a:latin typeface="Calibri"/>
-              </a:rPr>
-              <a:t>instances</a:t>
-            </a:r>
-          </a:p>
-        </p:txBody>
-      </p:sp>
-      <p:cxnSp>
-        <p:nvCxnSpPr>
-          <p:cNvPr id="22" name="Connector 21"/>
-          <p:cNvCxnSpPr/>
-          <p:nvPr/>
-        </p:nvCxnSpPr>
-        <p:spPr>
-          <a:xfrm>
-            <a:off x="9738360" y="1435608"/>
-            <a:ext cx="182880" cy="0"/>
-          </a:xfrm>
-          <a:prstGeom prst="line">
-            <a:avLst/>
-          </a:prstGeom>
-          <a:ln w="19050">
-            <a:solidFill>
-              <a:srgbClr val="0F8F85"/>
-            </a:solidFill>
-            <a:tailEnd type="triangle"/>
-          </a:ln>
-        </p:spPr>
-        <p:style>
-          <a:lnRef idx="2">
-            <a:schemeClr val="accent1"/>
-          </a:lnRef>
-          <a:fillRef idx="0">
-            <a:schemeClr val="accent1"/>
-          </a:fillRef>
-          <a:effectRef idx="1">
-            <a:schemeClr val="accent1"/>
-          </a:effectRef>
-          <a:fontRef idx="minor">
-            <a:schemeClr val="tx1"/>
-          </a:fontRef>
-        </p:style>
-      </p:cxnSp>
-      <p:sp>
-        <p:nvSpPr>
-          <p:cNvPr id="23" name="Rounded Rectangle 22"/>
-          <p:cNvSpPr/>
-          <p:nvPr/>
-        </p:nvSpPr>
-        <p:spPr>
-          <a:xfrm>
-            <a:off x="9921240" y="1051560"/>
-            <a:ext cx="1691640" cy="777240"/>
-          </a:xfrm>
-          <a:prstGeom prst="roundRect">
-            <a:avLst>
-              <a:gd name="adj" fmla="val 6000"/>
-            </a:avLst>
-          </a:prstGeom>
-          <a:solidFill>
-            <a:srgbClr val="FFFFFF"/>
-          </a:solidFill>
-          <a:ln w="9525">
-            <a:solidFill>
-              <a:srgbClr val="0F8F85"/>
-            </a:solidFill>
-          </a:ln>
-          <a:effectLst/>
-        </p:spPr>
-        <p:style>
-          <a:lnRef idx="1">
-            <a:schemeClr val="accent1"/>
-          </a:lnRef>
-          <a:fillRef idx="3">
-            <a:schemeClr val="accent1"/>
-          </a:fillRef>
-          <a:effectRef idx="2">
-            <a:schemeClr val="accent1"/>
-          </a:effectRef>
-          <a:fontRef idx="minor">
-            <a:schemeClr val="lt1"/>
-          </a:fontRef>
-        </p:style>
-        <p:txBody>
-          <a:bodyPr rtlCol="0" anchor="ctr"/>
-          <a:lstStyle/>
-          <a:p>
-            <a:pPr algn="ctr"/>
-          </a:p>
-        </p:txBody>
-      </p:sp>
-      <p:sp>
-        <p:nvSpPr>
-          <p:cNvPr id="24" name="TextBox 23"/>
-          <p:cNvSpPr txBox="1"/>
-          <p:nvPr/>
-        </p:nvSpPr>
-        <p:spPr>
-          <a:xfrm>
-            <a:off x="9921240" y="1051560"/>
-            <a:ext cx="1691640" cy="777240"/>
-          </a:xfrm>
-          <a:prstGeom prst="rect">
-            <a:avLst/>
-          </a:prstGeom>
-          <a:noFill/>
-        </p:spPr>
-        <p:txBody>
-          <a:bodyPr wrap="square" lIns="36576" rIns="36576" tIns="18288" bIns="18288" anchor="ctr">
-            <a:spAutoFit/>
-          </a:bodyPr>
-          <a:lstStyle/>
-          <a:p>
-            <a:pPr algn="ctr">
-              <a:lnSpc>
-                <a:spcPct val="100000"/>
-              </a:lnSpc>
-              <a:spcAft>
-                <a:spcPts val="0"/>
-              </a:spcAft>
-            </a:pPr>
-            <a:r>
-              <a:rPr sz="1500" b="0" i="0">
-                <a:solidFill>
-                  <a:srgbClr val="1E293B"/>
-                </a:solidFill>
-                <a:latin typeface="Calibri"/>
-              </a:rPr>
-              <a:t>V then P</a:t>
-            </a:r>
-          </a:p>
-          <a:p>
-            <a:pPr algn="ctr">
-              <a:lnSpc>
-                <a:spcPct val="100000"/>
-              </a:lnSpc>
-              <a:spcAft>
-                <a:spcPts val="0"/>
-              </a:spcAft>
-            </a:pPr>
-            <a:r>
-              <a:rPr sz="1500" b="0" i="0">
-                <a:solidFill>
-                  <a:srgbClr val="1E293B"/>
-                </a:solidFill>
-                <a:latin typeface="Calibri"/>
-              </a:rPr>
-              <a:t>to screen</a:t>
-            </a:r>
-          </a:p>
-        </p:txBody>
-      </p:sp>
-      <p:sp>
-        <p:nvSpPr>
-          <p:cNvPr id="25" name="Rounded Rectangle 24"/>
-          <p:cNvSpPr/>
-          <p:nvPr/>
-        </p:nvSpPr>
-        <p:spPr>
-          <a:xfrm>
-            <a:off x="548640" y="2057400"/>
-            <a:ext cx="5669280" cy="2240280"/>
-          </a:xfrm>
-          <a:prstGeom prst="roundRect">
-            <a:avLst>
-              <a:gd name="adj" fmla="val 6000"/>
-            </a:avLst>
-          </a:prstGeom>
-          <a:solidFill>
-            <a:srgbClr val="FFFFFF"/>
-          </a:solidFill>
-          <a:ln w="9525">
-            <a:solidFill>
-              <a:srgbClr val="D5DEE8"/>
-            </a:solidFill>
-          </a:ln>
-          <a:effectLst/>
-        </p:spPr>
-        <p:style>
-          <a:lnRef idx="1">
-            <a:schemeClr val="accent1"/>
-          </a:lnRef>
-          <a:fillRef idx="3">
-            <a:schemeClr val="accent1"/>
-          </a:fillRef>
-          <a:effectRef idx="2">
-            <a:schemeClr val="accent1"/>
-          </a:effectRef>
-          <a:fontRef idx="minor">
-            <a:schemeClr val="lt1"/>
-          </a:fontRef>
-        </p:style>
-        <p:txBody>
-          <a:bodyPr rtlCol="0" anchor="ctr"/>
-          <a:lstStyle/>
-          <a:p>
-            <a:pPr algn="ctr"/>
-          </a:p>
-        </p:txBody>
-      </p:sp>
-      <p:sp>
-        <p:nvSpPr>
-          <p:cNvPr id="26" name="TextBox 25"/>
-          <p:cNvSpPr txBox="1"/>
-          <p:nvPr/>
-        </p:nvSpPr>
-        <p:spPr>
-          <a:xfrm>
-            <a:off x="685800" y="2103120"/>
-            <a:ext cx="5394960" cy="365760"/>
+            <a:off x="777240" y="2103120"/>
+            <a:ext cx="5303520" cy="347472"/>
           </a:xfrm>
           <a:prstGeom prst="rect">
             <a:avLst/>
@@ -8991,20 +9432,20 @@
               </a:spcAft>
             </a:pPr>
             <a:r>
-              <a:rPr sz="1700" b="1" i="0">
+              <a:rPr sz="1200" b="1" i="0">
                 <a:solidFill>
                   <a:srgbClr val="0F8F85"/>
                 </a:solidFill>
                 <a:latin typeface="Calibri"/>
               </a:rPr>
-              <a:t>One part: scale, then turn, then move</a:t>
+              <a:t>ONE PART: SCALE, THEN TURN, THEN MOVE</a:t>
             </a:r>
           </a:p>
         </p:txBody>
       </p:sp>
       <p:pic>
         <p:nvPicPr>
-          <p:cNvPr id="27" name="Picture 26" descr="mpart.png"/>
+          <p:cNvPr id="24" name="Picture 23" descr="mpart.png"/>
           <p:cNvPicPr>
             <a:picLocks noChangeAspect="1"/>
           </p:cNvPicPr>
@@ -9018,8 +9459,8 @@
         </p:blipFill>
         <p:spPr>
           <a:xfrm>
-            <a:off x="731520" y="2542032"/>
-            <a:ext cx="5303520" cy="442486"/>
+            <a:off x="1104938" y="2838411"/>
+            <a:ext cx="4556683" cy="358216"/>
           </a:xfrm>
           <a:prstGeom prst="rect">
             <a:avLst/>
@@ -9028,14 +9469,14 @@
       </p:pic>
       <p:sp>
         <p:nvSpPr>
-          <p:cNvPr id="28" name="TextBox 27"/>
+          <p:cNvPr id="25" name="TextBox 24"/>
           <p:cNvSpPr txBox="1"/>
           <p:nvPr/>
         </p:nvSpPr>
         <p:spPr>
           <a:xfrm>
-            <a:off x="685800" y="3017520"/>
-            <a:ext cx="5394960" cy="1280160"/>
+            <a:off x="777240" y="3602735"/>
+            <a:ext cx="5303520" cy="566928"/>
           </a:xfrm>
           <a:prstGeom prst="rect">
             <a:avLst/>
@@ -9043,7 +9484,7 @@
           <a:noFill/>
         </p:spPr>
         <p:txBody>
-          <a:bodyPr wrap="square" lIns="36576" rIns="36576" tIns="18288" bIns="18288" anchor="t">
+          <a:bodyPr wrap="square" lIns="36576" rIns="36576" tIns="18288" bIns="18288" anchor="ctr">
             <a:spAutoFit/>
           </a:bodyPr>
           <a:lstStyle/>
@@ -9053,17 +9494,17 @@
                 <a:spcPct val="100000"/>
               </a:lnSpc>
               <a:spcAft>
-                <a:spcPts val="400"/>
-              </a:spcAft>
-            </a:pPr>
-            <a:r>
-              <a:rPr sz="1600" b="0" i="0">
-                <a:solidFill>
-                  <a:srgbClr val="1E293B"/>
-                </a:solidFill>
-                <a:latin typeface="Calibri"/>
-              </a:rPr>
-              <a:t>Matrices act right to left: the brick is stretched, turned about its own centre, and moved last.</a:t>
+                <a:spcPts val="100"/>
+              </a:spcAft>
+            </a:pPr>
+            <a:r>
+              <a:rPr sz="1300" b="0" i="0">
+                <a:solidFill>
+                  <a:srgbClr val="64748B"/>
+                </a:solidFill>
+                <a:latin typeface="Calibri"/>
+              </a:rPr>
+              <a:t>Right to left: stretched, turned about its own centre, moved last.</a:t>
             </a:r>
           </a:p>
           <a:p>
@@ -9072,35 +9513,35 @@
                 <a:spcPct val="100000"/>
               </a:lnSpc>
               <a:spcAft>
-                <a:spcPts val="400"/>
-              </a:spcAft>
-            </a:pPr>
-            <a:r>
-              <a:rPr sz="1600" b="0" i="0">
-                <a:solidFill>
-                  <a:srgbClr val="1E293B"/>
-                </a:solidFill>
-                <a:latin typeface="Calibri"/>
-              </a:rPr>
-              <a:t>(1,0,0) → S(2,1,1) → R_y 90° → T(5,0,0) = (5, 0, −2)</a:t>
-            </a:r>
-          </a:p>
-        </p:txBody>
-      </p:sp>
-      <p:sp>
-        <p:nvSpPr>
-          <p:cNvPr id="29" name="Rounded Rectangle 28"/>
+                <a:spcPts val="100"/>
+              </a:spcAft>
+            </a:pPr>
+            <a:r>
+              <a:rPr sz="1300" b="0" i="0">
+                <a:solidFill>
+                  <a:srgbClr val="64748B"/>
+                </a:solidFill>
+                <a:latin typeface="Calibri"/>
+              </a:rPr>
+              <a:t>Example: (1,0,0) → S(2,1,1) → R_y 90° → T(5,0,0) = (5, 0, −2)</a:t>
+            </a:r>
+          </a:p>
+        </p:txBody>
+      </p:sp>
+      <p:sp>
+        <p:nvSpPr>
+          <p:cNvPr id="26" name="Rounded Rectangle 25"/>
           <p:cNvSpPr/>
           <p:nvPr/>
         </p:nvSpPr>
         <p:spPr>
           <a:xfrm>
-            <a:off x="548640" y="4434840"/>
-            <a:ext cx="5669280" cy="1920240"/>
+            <a:off x="548640" y="4343400"/>
+            <a:ext cx="5669280" cy="2011680"/>
           </a:xfrm>
           <a:prstGeom prst="roundRect">
             <a:avLst>
-              <a:gd name="adj" fmla="val 6000"/>
+              <a:gd name="adj" fmla="val 4000"/>
             </a:avLst>
           </a:prstGeom>
           <a:solidFill>
@@ -9108,10 +9549,16 @@
           </a:solidFill>
           <a:ln w="9525">
             <a:solidFill>
-              <a:srgbClr val="D5DEE8"/>
+              <a:srgbClr val="DDE5EE"/>
             </a:solidFill>
           </a:ln>
-          <a:effectLst/>
+          <a:effectLst>
+            <a:outerShdw blurRad="114300" dist="25400" dir="5400000" algn="t" rotWithShape="0">
+              <a:srgbClr val="0B1220">
+                <a:alpha val="16000"/>
+              </a:srgbClr>
+            </a:outerShdw>
+          </a:effectLst>
         </p:spPr>
         <p:style>
           <a:lnRef idx="1">
@@ -9137,14 +9584,58 @@
       </p:sp>
       <p:sp>
         <p:nvSpPr>
-          <p:cNvPr id="30" name="TextBox 29"/>
+          <p:cNvPr id="27" name="Rectangle 26"/>
+          <p:cNvSpPr/>
+          <p:nvPr/>
+        </p:nvSpPr>
+        <p:spPr>
+          <a:xfrm>
+            <a:off x="548640" y="4453128"/>
+            <a:ext cx="64008" cy="1792224"/>
+          </a:xfrm>
+          <a:prstGeom prst="rect">
+            <a:avLst/>
+          </a:prstGeom>
+          <a:solidFill>
+            <a:srgbClr val="0F8F85"/>
+          </a:solidFill>
+          <a:ln>
+            <a:noFill/>
+          </a:ln>
+          <a:effectLst/>
+        </p:spPr>
+        <p:style>
+          <a:lnRef idx="1">
+            <a:schemeClr val="accent1"/>
+          </a:lnRef>
+          <a:fillRef idx="3">
+            <a:schemeClr val="accent1"/>
+          </a:fillRef>
+          <a:effectRef idx="2">
+            <a:schemeClr val="accent1"/>
+          </a:effectRef>
+          <a:fontRef idx="minor">
+            <a:schemeClr val="lt1"/>
+          </a:fontRef>
+        </p:style>
+        <p:txBody>
+          <a:bodyPr rtlCol="0" anchor="ctr"/>
+          <a:lstStyle/>
+          <a:p>
+            <a:pPr algn="ctr"/>
+          </a:p>
+        </p:txBody>
+      </p:sp>
+      <p:sp>
+        <p:nvSpPr>
+          <p:cNvPr id="28" name="TextBox 27"/>
           <p:cNvSpPr txBox="1"/>
           <p:nvPr/>
         </p:nvSpPr>
         <p:spPr>
           <a:xfrm>
-            <a:off x="685800" y="4480560"/>
-            <a:ext cx="5394960" cy="365760"/>
+            <a:off x="777240" y="4434840"/>
+            <a:ext cx="5303520" cy="347472"/>
           </a:xfrm>
           <a:prstGeom prst="rect">
             <a:avLst/>
@@ -9166,20 +9657,20 @@
               </a:spcAft>
             </a:pPr>
             <a:r>
-              <a:rPr sz="1700" b="1" i="0">
+              <a:rPr sz="1200" b="1" i="0">
                 <a:solidFill>
                   <a:srgbClr val="0F8F85"/>
                 </a:solidFill>
                 <a:latin typeface="Calibri"/>
               </a:rPr>
-              <a:t>Normals use the inverse transpose</a:t>
+              <a:t>NORMALS USE THE INVERSE TRANSPOSE</a:t>
             </a:r>
           </a:p>
         </p:txBody>
       </p:sp>
       <p:pic>
         <p:nvPicPr>
-          <p:cNvPr id="31" name="Picture 30" descr="nmat.png"/>
+          <p:cNvPr id="29" name="Picture 28" descr="nmat.png"/>
           <p:cNvPicPr>
             <a:picLocks noChangeAspect="1"/>
           </p:cNvPicPr>
@@ -9193,8 +9684,8 @@
         </p:blipFill>
         <p:spPr>
           <a:xfrm>
-            <a:off x="777240" y="4892040"/>
-            <a:ext cx="2079345" cy="822960"/>
+            <a:off x="2358351" y="4867236"/>
+            <a:ext cx="2049856" cy="781126"/>
           </a:xfrm>
           <a:prstGeom prst="rect">
             <a:avLst/>
@@ -9203,14 +9694,14 @@
       </p:pic>
       <p:sp>
         <p:nvSpPr>
-          <p:cNvPr id="32" name="TextBox 31"/>
+          <p:cNvPr id="30" name="TextBox 29"/>
           <p:cNvSpPr txBox="1"/>
           <p:nvPr/>
         </p:nvSpPr>
         <p:spPr>
           <a:xfrm>
-            <a:off x="2926080" y="4937760"/>
-            <a:ext cx="3200400" cy="822960"/>
+            <a:off x="777240" y="5751576"/>
+            <a:ext cx="5303520" cy="566928"/>
           </a:xfrm>
           <a:prstGeom prst="rect">
             <a:avLst/>
@@ -9218,7 +9709,7 @@
           <a:noFill/>
         </p:spPr>
         <p:txBody>
-          <a:bodyPr wrap="square" lIns="36576" rIns="36576" tIns="18288" bIns="18288" anchor="t">
+          <a:bodyPr wrap="square" lIns="36576" rIns="36576" tIns="18288" bIns="18288" anchor="ctr">
             <a:spAutoFit/>
           </a:bodyPr>
           <a:lstStyle/>
@@ -9228,53 +9719,11 @@
                 <a:spcPct val="100000"/>
               </a:lnSpc>
               <a:spcAft>
-                <a:spcPts val="200"/>
-              </a:spcAft>
-            </a:pPr>
-            <a:r>
-              <a:rPr sz="1600" b="0" i="0">
-                <a:solidFill>
-                  <a:srgbClr val="1E293B"/>
-                </a:solidFill>
-                <a:latin typeface="Calibri"/>
-              </a:rPr>
-              <a:t>stays perpendicular after a stretch</a:t>
-            </a:r>
-          </a:p>
-        </p:txBody>
-      </p:sp>
-      <p:sp>
-        <p:nvSpPr>
-          <p:cNvPr id="33" name="TextBox 32"/>
-          <p:cNvSpPr txBox="1"/>
-          <p:nvPr/>
-        </p:nvSpPr>
-        <p:spPr>
-          <a:xfrm>
-            <a:off x="685800" y="5760720"/>
-            <a:ext cx="5394960" cy="548640"/>
-          </a:xfrm>
-          <a:prstGeom prst="rect">
-            <a:avLst/>
-          </a:prstGeom>
-          <a:noFill/>
-        </p:spPr>
-        <p:txBody>
-          <a:bodyPr wrap="square" lIns="36576" rIns="36576" tIns="18288" bIns="18288" anchor="t">
-            <a:spAutoFit/>
-          </a:bodyPr>
-          <a:lstStyle/>
-          <a:p>
-            <a:pPr algn="l">
-              <a:lnSpc>
-                <a:spcPct val="100000"/>
-              </a:lnSpc>
-              <a:spcAft>
-                <a:spcPts val="400"/>
-              </a:spcAft>
-            </a:pPr>
-            <a:r>
-              <a:rPr sz="1500" b="0" i="0">
+                <a:spcPts val="100"/>
+              </a:spcAft>
+            </a:pPr>
+            <a:r>
+              <a:rPr sz="1300" b="0" i="0">
                 <a:solidFill>
                   <a:srgbClr val="64748B"/>
                 </a:solidFill>
@@ -9287,18 +9736,18 @@
       </p:sp>
       <p:sp>
         <p:nvSpPr>
-          <p:cNvPr id="34" name="Rounded Rectangle 33"/>
+          <p:cNvPr id="31" name="Rounded Rectangle 30"/>
           <p:cNvSpPr/>
           <p:nvPr/>
         </p:nvSpPr>
         <p:spPr>
           <a:xfrm>
-            <a:off x="6492240" y="2057400"/>
-            <a:ext cx="5212080" cy="1600200"/>
+            <a:off x="6446520" y="2011680"/>
+            <a:ext cx="5257800" cy="1783080"/>
           </a:xfrm>
           <a:prstGeom prst="roundRect">
             <a:avLst>
-              <a:gd name="adj" fmla="val 6000"/>
+              <a:gd name="adj" fmla="val 4000"/>
             </a:avLst>
           </a:prstGeom>
           <a:solidFill>
@@ -9306,10 +9755,16 @@
           </a:solidFill>
           <a:ln w="9525">
             <a:solidFill>
-              <a:srgbClr val="D5DEE8"/>
+              <a:srgbClr val="DDE5EE"/>
             </a:solidFill>
           </a:ln>
-          <a:effectLst/>
+          <a:effectLst>
+            <a:outerShdw blurRad="114300" dist="25400" dir="5400000" algn="t" rotWithShape="0">
+              <a:srgbClr val="0B1220">
+                <a:alpha val="16000"/>
+              </a:srgbClr>
+            </a:outerShdw>
+          </a:effectLst>
         </p:spPr>
         <p:style>
           <a:lnRef idx="1">
@@ -9335,14 +9790,58 @@
       </p:sp>
       <p:sp>
         <p:nvSpPr>
-          <p:cNvPr id="35" name="TextBox 34"/>
+          <p:cNvPr id="32" name="Rectangle 31"/>
+          <p:cNvSpPr/>
+          <p:nvPr/>
+        </p:nvSpPr>
+        <p:spPr>
+          <a:xfrm>
+            <a:off x="6446520" y="2121408"/>
+            <a:ext cx="64008" cy="1563624"/>
+          </a:xfrm>
+          <a:prstGeom prst="rect">
+            <a:avLst/>
+          </a:prstGeom>
+          <a:solidFill>
+            <a:srgbClr val="0F8F85"/>
+          </a:solidFill>
+          <a:ln>
+            <a:noFill/>
+          </a:ln>
+          <a:effectLst/>
+        </p:spPr>
+        <p:style>
+          <a:lnRef idx="1">
+            <a:schemeClr val="accent1"/>
+          </a:lnRef>
+          <a:fillRef idx="3">
+            <a:schemeClr val="accent1"/>
+          </a:fillRef>
+          <a:effectRef idx="2">
+            <a:schemeClr val="accent1"/>
+          </a:effectRef>
+          <a:fontRef idx="minor">
+            <a:schemeClr val="lt1"/>
+          </a:fontRef>
+        </p:style>
+        <p:txBody>
+          <a:bodyPr rtlCol="0" anchor="ctr"/>
+          <a:lstStyle/>
+          <a:p>
+            <a:pPr algn="ctr"/>
+          </a:p>
+        </p:txBody>
+      </p:sp>
+      <p:sp>
+        <p:nvSpPr>
+          <p:cNvPr id="33" name="TextBox 32"/>
           <p:cNvSpPr txBox="1"/>
           <p:nvPr/>
         </p:nvSpPr>
         <p:spPr>
           <a:xfrm>
-            <a:off x="6629400" y="2103120"/>
-            <a:ext cx="4937760" cy="365760"/>
+            <a:off x="6675120" y="2103120"/>
+            <a:ext cx="4892040" cy="347472"/>
           </a:xfrm>
           <a:prstGeom prst="rect">
             <a:avLst/>
@@ -9364,20 +9863,20 @@
               </a:spcAft>
             </a:pPr>
             <a:r>
-              <a:rPr sz="1700" b="1" i="0">
+              <a:rPr sz="1200" b="1" i="0">
                 <a:solidFill>
                   <a:srgbClr val="0F8F85"/>
                 </a:solidFill>
                 <a:latin typeface="Calibri"/>
               </a:rPr>
-              <a:t>Rotation about y</a:t>
+              <a:t>ROTATION ABOUT Y</a:t>
             </a:r>
           </a:p>
         </p:txBody>
       </p:sp>
       <p:pic>
         <p:nvPicPr>
-          <p:cNvPr id="36" name="Picture 35" descr="ry.png"/>
+          <p:cNvPr id="34" name="Picture 33" descr="ry.png"/>
           <p:cNvPicPr>
             <a:picLocks noChangeAspect="1"/>
           </p:cNvPicPr>
@@ -9391,8 +9890,8 @@
         </p:blipFill>
         <p:spPr>
           <a:xfrm>
-            <a:off x="6949440" y="2514600"/>
-            <a:ext cx="3375251" cy="1051560"/>
+            <a:off x="7237133" y="2513114"/>
+            <a:ext cx="3676573" cy="1127683"/>
           </a:xfrm>
           <a:prstGeom prst="rect">
             <a:avLst/>
@@ -9401,18 +9900,18 @@
       </p:pic>
       <p:sp>
         <p:nvSpPr>
-          <p:cNvPr id="37" name="Rounded Rectangle 36"/>
+          <p:cNvPr id="35" name="Rounded Rectangle 34"/>
           <p:cNvSpPr/>
           <p:nvPr/>
         </p:nvSpPr>
         <p:spPr>
           <a:xfrm>
-            <a:off x="6492240" y="3794760"/>
-            <a:ext cx="5212080" cy="1325880"/>
+            <a:off x="6446520" y="3931920"/>
+            <a:ext cx="5257800" cy="1188720"/>
           </a:xfrm>
           <a:prstGeom prst="roundRect">
             <a:avLst>
-              <a:gd name="adj" fmla="val 6000"/>
+              <a:gd name="adj" fmla="val 4000"/>
             </a:avLst>
           </a:prstGeom>
           <a:solidFill>
@@ -9420,10 +9919,16 @@
           </a:solidFill>
           <a:ln w="9525">
             <a:solidFill>
-              <a:srgbClr val="D5DEE8"/>
+              <a:srgbClr val="DDE5EE"/>
             </a:solidFill>
           </a:ln>
-          <a:effectLst/>
+          <a:effectLst>
+            <a:outerShdw blurRad="114300" dist="25400" dir="5400000" algn="t" rotWithShape="0">
+              <a:srgbClr val="0B1220">
+                <a:alpha val="16000"/>
+              </a:srgbClr>
+            </a:outerShdw>
+          </a:effectLst>
         </p:spPr>
         <p:style>
           <a:lnRef idx="1">
@@ -9449,14 +9954,58 @@
       </p:sp>
       <p:sp>
         <p:nvSpPr>
-          <p:cNvPr id="38" name="TextBox 37"/>
+          <p:cNvPr id="36" name="Rectangle 35"/>
+          <p:cNvSpPr/>
+          <p:nvPr/>
+        </p:nvSpPr>
+        <p:spPr>
+          <a:xfrm>
+            <a:off x="6446520" y="4041648"/>
+            <a:ext cx="64008" cy="969264"/>
+          </a:xfrm>
+          <a:prstGeom prst="rect">
+            <a:avLst/>
+          </a:prstGeom>
+          <a:solidFill>
+            <a:srgbClr val="0F8F85"/>
+          </a:solidFill>
+          <a:ln>
+            <a:noFill/>
+          </a:ln>
+          <a:effectLst/>
+        </p:spPr>
+        <p:style>
+          <a:lnRef idx="1">
+            <a:schemeClr val="accent1"/>
+          </a:lnRef>
+          <a:fillRef idx="3">
+            <a:schemeClr val="accent1"/>
+          </a:fillRef>
+          <a:effectRef idx="2">
+            <a:schemeClr val="accent1"/>
+          </a:effectRef>
+          <a:fontRef idx="minor">
+            <a:schemeClr val="lt1"/>
+          </a:fontRef>
+        </p:style>
+        <p:txBody>
+          <a:bodyPr rtlCol="0" anchor="ctr"/>
+          <a:lstStyle/>
+          <a:p>
+            <a:pPr algn="ctr"/>
+          </a:p>
+        </p:txBody>
+      </p:sp>
+      <p:sp>
+        <p:nvSpPr>
+          <p:cNvPr id="37" name="TextBox 36"/>
           <p:cNvSpPr txBox="1"/>
           <p:nvPr/>
         </p:nvSpPr>
         <p:spPr>
           <a:xfrm>
-            <a:off x="6629400" y="3840480"/>
-            <a:ext cx="4937760" cy="365760"/>
+            <a:off x="6675120" y="4023359"/>
+            <a:ext cx="4892040" cy="347472"/>
           </a:xfrm>
           <a:prstGeom prst="rect">
             <a:avLst/>
@@ -9478,20 +10027,20 @@
               </a:spcAft>
             </a:pPr>
             <a:r>
-              <a:rPr sz="1700" b="1" i="0">
+              <a:rPr sz="1200" b="1" i="0">
                 <a:solidFill>
                   <a:srgbClr val="0F8F85"/>
                 </a:solidFill>
                 <a:latin typeface="Calibri"/>
               </a:rPr>
-              <a:t>Hierarchy: products down the chain</a:t>
+              <a:t>HIERARCHY: PRODUCTS DOWN THE CHAIN</a:t>
             </a:r>
           </a:p>
         </p:txBody>
       </p:sp>
       <p:pic>
         <p:nvPicPr>
-          <p:cNvPr id="39" name="Picture 38" descr="mgun.png"/>
+          <p:cNvPr id="38" name="Picture 37" descr="mgun.png"/>
           <p:cNvPicPr>
             <a:picLocks noChangeAspect="1"/>
           </p:cNvPicPr>
@@ -9505,8 +10054,8 @@
         </p:blipFill>
         <p:spPr>
           <a:xfrm>
-            <a:off x="6629400" y="4297680"/>
-            <a:ext cx="4937760" cy="369671"/>
+            <a:off x="6766560" y="4538260"/>
+            <a:ext cx="4617720" cy="323510"/>
           </a:xfrm>
           <a:prstGeom prst="rect">
             <a:avLst/>
@@ -9515,60 +10064,18 @@
       </p:pic>
       <p:sp>
         <p:nvSpPr>
-          <p:cNvPr id="40" name="TextBox 39"/>
-          <p:cNvSpPr txBox="1"/>
-          <p:nvPr/>
-        </p:nvSpPr>
-        <p:spPr>
-          <a:xfrm>
-            <a:off x="6629400" y="4663440"/>
-            <a:ext cx="4937760" cy="457200"/>
-          </a:xfrm>
-          <a:prstGeom prst="rect">
-            <a:avLst/>
-          </a:prstGeom>
-          <a:noFill/>
-        </p:spPr>
-        <p:txBody>
-          <a:bodyPr wrap="square" lIns="36576" rIns="36576" tIns="18288" bIns="18288" anchor="t">
-            <a:spAutoFit/>
-          </a:bodyPr>
-          <a:lstStyle/>
-          <a:p>
-            <a:pPr algn="l">
-              <a:lnSpc>
-                <a:spcPct val="100000"/>
-              </a:lnSpc>
-              <a:spcAft>
-                <a:spcPts val="400"/>
-              </a:spcAft>
-            </a:pPr>
-            <a:r>
-              <a:rPr sz="1500" b="0" i="0">
-                <a:solidFill>
-                  <a:srgbClr val="64748B"/>
-                </a:solidFill>
-                <a:latin typeface="Calibri"/>
-              </a:rPr>
-              <a:t>Turning the hull carries turret and gun</a:t>
-            </a:r>
-          </a:p>
-        </p:txBody>
-      </p:sp>
-      <p:sp>
-        <p:nvSpPr>
-          <p:cNvPr id="41" name="Rounded Rectangle 40"/>
+          <p:cNvPr id="39" name="Rounded Rectangle 38"/>
           <p:cNvSpPr/>
           <p:nvPr/>
         </p:nvSpPr>
         <p:spPr>
           <a:xfrm>
-            <a:off x="6492240" y="5257800"/>
-            <a:ext cx="5212080" cy="1097280"/>
+            <a:off x="6446520" y="5257800"/>
+            <a:ext cx="5257800" cy="1097280"/>
           </a:xfrm>
           <a:prstGeom prst="roundRect">
             <a:avLst>
-              <a:gd name="adj" fmla="val 6000"/>
+              <a:gd name="adj" fmla="val 4000"/>
             </a:avLst>
           </a:prstGeom>
           <a:solidFill>
@@ -9576,10 +10083,16 @@
           </a:solidFill>
           <a:ln w="9525">
             <a:solidFill>
-              <a:srgbClr val="D5DEE8"/>
+              <a:srgbClr val="DDE5EE"/>
             </a:solidFill>
           </a:ln>
-          <a:effectLst/>
+          <a:effectLst>
+            <a:outerShdw blurRad="114300" dist="25400" dir="5400000" algn="t" rotWithShape="0">
+              <a:srgbClr val="0B1220">
+                <a:alpha val="16000"/>
+              </a:srgbClr>
+            </a:outerShdw>
+          </a:effectLst>
         </p:spPr>
         <p:style>
           <a:lnRef idx="1">
@@ -9605,14 +10118,58 @@
       </p:sp>
       <p:sp>
         <p:nvSpPr>
-          <p:cNvPr id="42" name="TextBox 41"/>
+          <p:cNvPr id="40" name="Rectangle 39"/>
+          <p:cNvSpPr/>
+          <p:nvPr/>
+        </p:nvSpPr>
+        <p:spPr>
+          <a:xfrm>
+            <a:off x="6446520" y="5367528"/>
+            <a:ext cx="64008" cy="877824"/>
+          </a:xfrm>
+          <a:prstGeom prst="rect">
+            <a:avLst/>
+          </a:prstGeom>
+          <a:solidFill>
+            <a:srgbClr val="0F8F85"/>
+          </a:solidFill>
+          <a:ln>
+            <a:noFill/>
+          </a:ln>
+          <a:effectLst/>
+        </p:spPr>
+        <p:style>
+          <a:lnRef idx="1">
+            <a:schemeClr val="accent1"/>
+          </a:lnRef>
+          <a:fillRef idx="3">
+            <a:schemeClr val="accent1"/>
+          </a:fillRef>
+          <a:effectRef idx="2">
+            <a:schemeClr val="accent1"/>
+          </a:effectRef>
+          <a:fontRef idx="minor">
+            <a:schemeClr val="lt1"/>
+          </a:fontRef>
+        </p:style>
+        <p:txBody>
+          <a:bodyPr rtlCol="0" anchor="ctr"/>
+          <a:lstStyle/>
+          <a:p>
+            <a:pPr algn="ctr"/>
+          </a:p>
+        </p:txBody>
+      </p:sp>
+      <p:sp>
+        <p:nvSpPr>
+          <p:cNvPr id="41" name="TextBox 40"/>
           <p:cNvSpPr txBox="1"/>
           <p:nvPr/>
         </p:nvSpPr>
         <p:spPr>
           <a:xfrm>
-            <a:off x="6629400" y="5303520"/>
-            <a:ext cx="4937760" cy="365760"/>
+            <a:off x="6675120" y="5349240"/>
+            <a:ext cx="4892040" cy="347472"/>
           </a:xfrm>
           <a:prstGeom prst="rect">
             <a:avLst/>
@@ -9634,20 +10191,20 @@
               </a:spcAft>
             </a:pPr>
             <a:r>
-              <a:rPr sz="1700" b="1" i="0">
+              <a:rPr sz="1200" b="1" i="0">
                 <a:solidFill>
                   <a:srgbClr val="0F8F85"/>
                 </a:solidFill>
                 <a:latin typeface="Calibri"/>
               </a:rPr>
-              <a:t>World to screen</a:t>
+              <a:t>WORLD TO SCREEN</a:t>
             </a:r>
           </a:p>
         </p:txBody>
       </p:sp>
       <p:pic>
         <p:nvPicPr>
-          <p:cNvPr id="43" name="Picture 42" descr="clip.png"/>
+          <p:cNvPr id="42" name="Picture 41" descr="clip.png"/>
           <p:cNvPicPr>
             <a:picLocks noChangeAspect="1"/>
           </p:cNvPicPr>
@@ -9661,8 +10218,8 @@
         </p:blipFill>
         <p:spPr>
           <a:xfrm>
-            <a:off x="6675120" y="5760720"/>
-            <a:ext cx="4206240" cy="495286"/>
+            <a:off x="7500023" y="5808726"/>
+            <a:ext cx="3150793" cy="342900"/>
           </a:xfrm>
           <a:prstGeom prst="rect">
             <a:avLst/>
@@ -9832,7 +10389,7 @@
         <p:spPr>
           <a:xfrm>
             <a:off x="731520" y="118872"/>
-            <a:ext cx="10058400" cy="640080"/>
+            <a:ext cx="10515600" cy="640080"/>
           </a:xfrm>
           <a:prstGeom prst="rect">
             <a:avLst/>
@@ -9873,8 +10430,8 @@
         </p:nvSpPr>
         <p:spPr>
           <a:xfrm>
-            <a:off x="10789920" y="6473952"/>
-            <a:ext cx="1188720" cy="274320"/>
+            <a:off x="548640" y="6492240"/>
+            <a:ext cx="5486400" cy="274320"/>
           </a:xfrm>
           <a:prstGeom prst="rect">
             <a:avLst/>
@@ -9887,6 +10444,48 @@
           </a:bodyPr>
           <a:lstStyle/>
           <a:p>
+            <a:pPr algn="l">
+              <a:lnSpc>
+                <a:spcPct val="100000"/>
+              </a:lnSpc>
+              <a:spcAft>
+                <a:spcPts val="400"/>
+              </a:spcAft>
+            </a:pPr>
+            <a:r>
+              <a:rPr sz="1000" b="0" i="0">
+                <a:solidFill>
+                  <a:srgbClr val="64748B"/>
+                </a:solidFill>
+                <a:latin typeface="Calibri"/>
+              </a:rPr>
+              <a:t>Sentinel  ·  CSE 4102  ·  KUET</a:t>
+            </a:r>
+          </a:p>
+        </p:txBody>
+      </p:sp>
+      <p:sp>
+        <p:nvSpPr>
+          <p:cNvPr id="8" name="TextBox 7"/>
+          <p:cNvSpPr txBox="1"/>
+          <p:nvPr/>
+        </p:nvSpPr>
+        <p:spPr>
+          <a:xfrm>
+            <a:off x="10789920" y="6492240"/>
+            <a:ext cx="1188720" cy="274320"/>
+          </a:xfrm>
+          <a:prstGeom prst="rect">
+            <a:avLst/>
+          </a:prstGeom>
+          <a:noFill/>
+        </p:spPr>
+        <p:txBody>
+          <a:bodyPr wrap="square" lIns="36576" rIns="36576" tIns="18288" bIns="18288" anchor="t">
+            <a:spAutoFit/>
+          </a:bodyPr>
+          <a:lstStyle/>
+          <a:p>
             <a:pPr algn="r">
               <a:lnSpc>
                 <a:spcPct val="100000"/>
@@ -9903,13 +10502,153 @@
                 <a:latin typeface="Calibri"/>
               </a:rPr>
               <a:t>6 / 10</a:t>
+            </a:r>
+          </a:p>
+        </p:txBody>
+      </p:sp>
+      <p:sp>
+        <p:nvSpPr>
+          <p:cNvPr id="9" name="Rounded Rectangle 8"/>
+          <p:cNvSpPr/>
+          <p:nvPr/>
+        </p:nvSpPr>
+        <p:spPr>
+          <a:xfrm>
+            <a:off x="548640" y="1005840"/>
+            <a:ext cx="8046720" cy="1188720"/>
+          </a:xfrm>
+          <a:prstGeom prst="roundRect">
+            <a:avLst>
+              <a:gd name="adj" fmla="val 4000"/>
+            </a:avLst>
+          </a:prstGeom>
+          <a:solidFill>
+            <a:srgbClr val="FFFFFF"/>
+          </a:solidFill>
+          <a:ln w="9525">
+            <a:solidFill>
+              <a:srgbClr val="DDE5EE"/>
+            </a:solidFill>
+          </a:ln>
+          <a:effectLst>
+            <a:outerShdw blurRad="114300" dist="25400" dir="5400000" algn="t" rotWithShape="0">
+              <a:srgbClr val="0B1220">
+                <a:alpha val="16000"/>
+              </a:srgbClr>
+            </a:outerShdw>
+          </a:effectLst>
+        </p:spPr>
+        <p:style>
+          <a:lnRef idx="1">
+            <a:schemeClr val="accent1"/>
+          </a:lnRef>
+          <a:fillRef idx="3">
+            <a:schemeClr val="accent1"/>
+          </a:fillRef>
+          <a:effectRef idx="2">
+            <a:schemeClr val="accent1"/>
+          </a:effectRef>
+          <a:fontRef idx="minor">
+            <a:schemeClr val="lt1"/>
+          </a:fontRef>
+        </p:style>
+        <p:txBody>
+          <a:bodyPr rtlCol="0" anchor="ctr"/>
+          <a:lstStyle/>
+          <a:p>
+            <a:pPr algn="ctr"/>
+          </a:p>
+        </p:txBody>
+      </p:sp>
+      <p:sp>
+        <p:nvSpPr>
+          <p:cNvPr id="10" name="Rectangle 9"/>
+          <p:cNvSpPr/>
+          <p:nvPr/>
+        </p:nvSpPr>
+        <p:spPr>
+          <a:xfrm>
+            <a:off x="548640" y="1115568"/>
+            <a:ext cx="64008" cy="969264"/>
+          </a:xfrm>
+          <a:prstGeom prst="rect">
+            <a:avLst/>
+          </a:prstGeom>
+          <a:solidFill>
+            <a:srgbClr val="0F8F85"/>
+          </a:solidFill>
+          <a:ln>
+            <a:noFill/>
+          </a:ln>
+          <a:effectLst/>
+        </p:spPr>
+        <p:style>
+          <a:lnRef idx="1">
+            <a:schemeClr val="accent1"/>
+          </a:lnRef>
+          <a:fillRef idx="3">
+            <a:schemeClr val="accent1"/>
+          </a:fillRef>
+          <a:effectRef idx="2">
+            <a:schemeClr val="accent1"/>
+          </a:effectRef>
+          <a:fontRef idx="minor">
+            <a:schemeClr val="lt1"/>
+          </a:fontRef>
+        </p:style>
+        <p:txBody>
+          <a:bodyPr rtlCol="0" anchor="ctr"/>
+          <a:lstStyle/>
+          <a:p>
+            <a:pPr algn="ctr"/>
+          </a:p>
+        </p:txBody>
+      </p:sp>
+      <p:sp>
+        <p:nvSpPr>
+          <p:cNvPr id="11" name="TextBox 10"/>
+          <p:cNvSpPr txBox="1"/>
+          <p:nvPr/>
+        </p:nvSpPr>
+        <p:spPr>
+          <a:xfrm>
+            <a:off x="777240" y="1097280"/>
+            <a:ext cx="7680960" cy="347472"/>
+          </a:xfrm>
+          <a:prstGeom prst="rect">
+            <a:avLst/>
+          </a:prstGeom>
+          <a:noFill/>
+        </p:spPr>
+        <p:txBody>
+          <a:bodyPr wrap="square" lIns="36576" rIns="36576" tIns="18288" bIns="18288" anchor="t">
+            <a:spAutoFit/>
+          </a:bodyPr>
+          <a:lstStyle/>
+          <a:p>
+            <a:pPr algn="l">
+              <a:lnSpc>
+                <a:spcPct val="100000"/>
+              </a:lnSpc>
+              <a:spcAft>
+                <a:spcPts val="400"/>
+              </a:spcAft>
+            </a:pPr>
+            <a:r>
+              <a:rPr sz="1200" b="1" i="0">
+                <a:solidFill>
+                  <a:srgbClr val="0F8F85"/>
+                </a:solidFill>
+                <a:latin typeface="Calibri"/>
+              </a:rPr>
+              <a:t>DIRECT LIGHT + AMBIENT + EMISSION</a:t>
             </a:r>
           </a:p>
         </p:txBody>
       </p:sp>
       <p:pic>
         <p:nvPicPr>
-          <p:cNvPr id="8" name="Picture 7" descr="sum.png"/>
+          <p:cNvPr id="12" name="Picture 11" descr="sum.png"/>
           <p:cNvPicPr>
             <a:picLocks noChangeAspect="1"/>
           </p:cNvPicPr>
@@ -9923,8 +10662,8 @@
         </p:blipFill>
         <p:spPr>
           <a:xfrm>
-            <a:off x="548640" y="1051560"/>
-            <a:ext cx="8412480" cy="853352"/>
+            <a:off x="1368057" y="1463040"/>
+            <a:ext cx="6407885" cy="621792"/>
           </a:xfrm>
           <a:prstGeom prst="rect">
             <a:avLst/>
@@ -9933,14 +10672,14 @@
       </p:pic>
       <p:sp>
         <p:nvSpPr>
-          <p:cNvPr id="9" name="TextBox 8"/>
+          <p:cNvPr id="13" name="TextBox 12"/>
           <p:cNvSpPr txBox="1"/>
           <p:nvPr/>
         </p:nvSpPr>
         <p:spPr>
           <a:xfrm>
-            <a:off x="9418320" y="1024128"/>
-            <a:ext cx="2377440" cy="731520"/>
+            <a:off x="8778240" y="1234440"/>
+            <a:ext cx="3017520" cy="822960"/>
           </a:xfrm>
           <a:prstGeom prst="rect">
             <a:avLst/>
@@ -9958,7 +10697,7 @@
                 <a:spcPct val="100000"/>
               </a:lnSpc>
               <a:spcAft>
-                <a:spcPts val="400"/>
+                <a:spcPts val="0"/>
               </a:spcAft>
             </a:pPr>
             <a:r>
@@ -9968,25 +10707,44 @@
                 </a:solidFill>
                 <a:latin typeface="Calibri"/>
               </a:rPr>
-              <a:t>f = model, att = falloff, sh = shadow</a:t>
-            </a:r>
-          </a:p>
-        </p:txBody>
-      </p:sp>
-      <p:sp>
-        <p:nvSpPr>
-          <p:cNvPr id="10" name="Rounded Rectangle 9"/>
+              <a:t>f = illumination model</a:t>
+            </a:r>
+          </a:p>
+          <a:p>
+            <a:pPr algn="l">
+              <a:lnSpc>
+                <a:spcPct val="100000"/>
+              </a:lnSpc>
+              <a:spcAft>
+                <a:spcPts val="0"/>
+              </a:spcAft>
+            </a:pPr>
+            <a:r>
+              <a:rPr sz="1300" b="0" i="1">
+                <a:solidFill>
+                  <a:srgbClr val="64748B"/>
+                </a:solidFill>
+                <a:latin typeface="Calibri"/>
+              </a:rPr>
+              <a:t>att = falloff   sh = shadow</a:t>
+            </a:r>
+          </a:p>
+        </p:txBody>
+      </p:sp>
+      <p:sp>
+        <p:nvSpPr>
+          <p:cNvPr id="14" name="Rounded Rectangle 13"/>
           <p:cNvSpPr/>
           <p:nvPr/>
         </p:nvSpPr>
         <p:spPr>
           <a:xfrm>
-            <a:off x="548640" y="1783080"/>
-            <a:ext cx="6400800" cy="4572000"/>
+            <a:off x="548640" y="2331720"/>
+            <a:ext cx="6400800" cy="4023360"/>
           </a:xfrm>
           <a:prstGeom prst="roundRect">
             <a:avLst>
-              <a:gd name="adj" fmla="val 6000"/>
+              <a:gd name="adj" fmla="val 4000"/>
             </a:avLst>
           </a:prstGeom>
           <a:solidFill>
@@ -9994,10 +10752,16 @@
           </a:solidFill>
           <a:ln w="9525">
             <a:solidFill>
-              <a:srgbClr val="D5DEE8"/>
+              <a:srgbClr val="DDE5EE"/>
             </a:solidFill>
           </a:ln>
-          <a:effectLst/>
+          <a:effectLst>
+            <a:outerShdw blurRad="114300" dist="25400" dir="5400000" algn="t" rotWithShape="0">
+              <a:srgbClr val="0B1220">
+                <a:alpha val="16000"/>
+              </a:srgbClr>
+            </a:outerShdw>
+          </a:effectLst>
         </p:spPr>
         <p:style>
           <a:lnRef idx="1">
@@ -10023,13 +10787,57 @@
       </p:sp>
       <p:sp>
         <p:nvSpPr>
-          <p:cNvPr id="11" name="TextBox 10"/>
+          <p:cNvPr id="15" name="Rectangle 14"/>
+          <p:cNvSpPr/>
+          <p:nvPr/>
+        </p:nvSpPr>
+        <p:spPr>
+          <a:xfrm>
+            <a:off x="548640" y="2441448"/>
+            <a:ext cx="64008" cy="3803904"/>
+          </a:xfrm>
+          <a:prstGeom prst="rect">
+            <a:avLst/>
+          </a:prstGeom>
+          <a:solidFill>
+            <a:srgbClr val="0F8F85"/>
+          </a:solidFill>
+          <a:ln>
+            <a:noFill/>
+          </a:ln>
+          <a:effectLst/>
+        </p:spPr>
+        <p:style>
+          <a:lnRef idx="1">
+            <a:schemeClr val="accent1"/>
+          </a:lnRef>
+          <a:fillRef idx="3">
+            <a:schemeClr val="accent1"/>
+          </a:fillRef>
+          <a:effectRef idx="2">
+            <a:schemeClr val="accent1"/>
+          </a:effectRef>
+          <a:fontRef idx="minor">
+            <a:schemeClr val="lt1"/>
+          </a:fontRef>
+        </p:style>
+        <p:txBody>
+          <a:bodyPr rtlCol="0" anchor="ctr"/>
+          <a:lstStyle/>
+          <a:p>
+            <a:pPr algn="ctr"/>
+          </a:p>
+        </p:txBody>
+      </p:sp>
+      <p:sp>
+        <p:nvSpPr>
+          <p:cNvPr id="16" name="TextBox 15"/>
           <p:cNvSpPr txBox="1"/>
           <p:nvPr/>
         </p:nvSpPr>
         <p:spPr>
           <a:xfrm>
-            <a:off x="685800" y="1929384"/>
+            <a:off x="777240" y="2450592"/>
             <a:ext cx="1920240" cy="502920"/>
           </a:xfrm>
           <a:prstGeom prst="rect">
@@ -10065,7 +10873,7 @@
       </p:sp>
       <p:pic>
         <p:nvPicPr>
-          <p:cNvPr id="12" name="Picture 11" descr="lambert.png"/>
+          <p:cNvPr id="17" name="Picture 16" descr="lambert.png"/>
           <p:cNvPicPr>
             <a:picLocks noChangeAspect="1"/>
           </p:cNvPicPr>
@@ -10079,8 +10887,8 @@
         </p:blipFill>
         <p:spPr>
           <a:xfrm>
-            <a:off x="2651760" y="1892807"/>
-            <a:ext cx="852856" cy="566928"/>
+            <a:off x="2743200" y="2441448"/>
+            <a:ext cx="725484" cy="481523"/>
           </a:xfrm>
           <a:prstGeom prst="rect">
             <a:avLst/>
@@ -10089,13 +10897,57 @@
       </p:pic>
       <p:sp>
         <p:nvSpPr>
-          <p:cNvPr id="13" name="TextBox 12"/>
+          <p:cNvPr id="18" name="Rectangle 17"/>
+          <p:cNvSpPr/>
+          <p:nvPr/>
+        </p:nvSpPr>
+        <p:spPr>
+          <a:xfrm>
+            <a:off x="777240" y="3026664"/>
+            <a:ext cx="5943600" cy="10972"/>
+          </a:xfrm>
+          <a:prstGeom prst="rect">
+            <a:avLst/>
+          </a:prstGeom>
+          <a:solidFill>
+            <a:srgbClr val="DDE5EE"/>
+          </a:solidFill>
+          <a:ln>
+            <a:noFill/>
+          </a:ln>
+          <a:effectLst/>
+        </p:spPr>
+        <p:style>
+          <a:lnRef idx="1">
+            <a:schemeClr val="accent1"/>
+          </a:lnRef>
+          <a:fillRef idx="3">
+            <a:schemeClr val="accent1"/>
+          </a:fillRef>
+          <a:effectRef idx="2">
+            <a:schemeClr val="accent1"/>
+          </a:effectRef>
+          <a:fontRef idx="minor">
+            <a:schemeClr val="lt1"/>
+          </a:fontRef>
+        </p:style>
+        <p:txBody>
+          <a:bodyPr rtlCol="0" anchor="ctr"/>
+          <a:lstStyle/>
+          <a:p>
+            <a:pPr algn="ctr"/>
+          </a:p>
+        </p:txBody>
+      </p:sp>
+      <p:sp>
+        <p:nvSpPr>
+          <p:cNvPr id="19" name="TextBox 18"/>
           <p:cNvSpPr txBox="1"/>
           <p:nvPr/>
         </p:nvSpPr>
         <p:spPr>
           <a:xfrm>
-            <a:off x="685800" y="2670048"/>
+            <a:off x="777240" y="3099816"/>
             <a:ext cx="1920240" cy="502920"/>
           </a:xfrm>
           <a:prstGeom prst="rect">
@@ -10131,7 +10983,7 @@
       </p:sp>
       <p:pic>
         <p:nvPicPr>
-          <p:cNvPr id="14" name="Picture 13" descr="phong.png"/>
+          <p:cNvPr id="20" name="Picture 19" descr="phong.png"/>
           <p:cNvPicPr>
             <a:picLocks noChangeAspect="1"/>
           </p:cNvPicPr>
@@ -10145,8 +10997,8 @@
         </p:blipFill>
         <p:spPr>
           <a:xfrm>
-            <a:off x="2651760" y="2633472"/>
-            <a:ext cx="3272559" cy="530352"/>
+            <a:off x="2743200" y="3090672"/>
+            <a:ext cx="3345770" cy="530352"/>
           </a:xfrm>
           <a:prstGeom prst="rect">
             <a:avLst/>
@@ -10155,13 +11007,57 @@
       </p:pic>
       <p:sp>
         <p:nvSpPr>
-          <p:cNvPr id="15" name="TextBox 14"/>
+          <p:cNvPr id="21" name="Rectangle 20"/>
+          <p:cNvSpPr/>
+          <p:nvPr/>
+        </p:nvSpPr>
+        <p:spPr>
+          <a:xfrm>
+            <a:off x="777240" y="3675887"/>
+            <a:ext cx="5943600" cy="10972"/>
+          </a:xfrm>
+          <a:prstGeom prst="rect">
+            <a:avLst/>
+          </a:prstGeom>
+          <a:solidFill>
+            <a:srgbClr val="DDE5EE"/>
+          </a:solidFill>
+          <a:ln>
+            <a:noFill/>
+          </a:ln>
+          <a:effectLst/>
+        </p:spPr>
+        <p:style>
+          <a:lnRef idx="1">
+            <a:schemeClr val="accent1"/>
+          </a:lnRef>
+          <a:fillRef idx="3">
+            <a:schemeClr val="accent1"/>
+          </a:fillRef>
+          <a:effectRef idx="2">
+            <a:schemeClr val="accent1"/>
+          </a:effectRef>
+          <a:fontRef idx="minor">
+            <a:schemeClr val="lt1"/>
+          </a:fontRef>
+        </p:style>
+        <p:txBody>
+          <a:bodyPr rtlCol="0" anchor="ctr"/>
+          <a:lstStyle/>
+          <a:p>
+            <a:pPr algn="ctr"/>
+          </a:p>
+        </p:txBody>
+      </p:sp>
+      <p:sp>
+        <p:nvSpPr>
+          <p:cNvPr id="22" name="TextBox 21"/>
           <p:cNvSpPr txBox="1"/>
           <p:nvPr/>
         </p:nvSpPr>
         <p:spPr>
           <a:xfrm>
-            <a:off x="685800" y="3410712"/>
+            <a:off x="777240" y="3749039"/>
             <a:ext cx="1920240" cy="502920"/>
           </a:xfrm>
           <a:prstGeom prst="rect">
@@ -10197,7 +11093,7 @@
       </p:sp>
       <p:pic>
         <p:nvPicPr>
-          <p:cNvPr id="16" name="Picture 15" descr="blinn.png"/>
+          <p:cNvPr id="23" name="Picture 22" descr="blinn.png"/>
           <p:cNvPicPr>
             <a:picLocks noChangeAspect="1"/>
           </p:cNvPicPr>
@@ -10211,8 +11107,8 @@
         </p:blipFill>
         <p:spPr>
           <a:xfrm>
-            <a:off x="2651760" y="3374136"/>
-            <a:ext cx="3313672" cy="530352"/>
+            <a:off x="2743200" y="3739896"/>
+            <a:ext cx="3392705" cy="530352"/>
           </a:xfrm>
           <a:prstGeom prst="rect">
             <a:avLst/>
@@ -10221,13 +11117,57 @@
       </p:pic>
       <p:sp>
         <p:nvSpPr>
-          <p:cNvPr id="17" name="TextBox 16"/>
+          <p:cNvPr id="24" name="Rectangle 23"/>
+          <p:cNvSpPr/>
+          <p:nvPr/>
+        </p:nvSpPr>
+        <p:spPr>
+          <a:xfrm>
+            <a:off x="777240" y="4325112"/>
+            <a:ext cx="5943600" cy="10972"/>
+          </a:xfrm>
+          <a:prstGeom prst="rect">
+            <a:avLst/>
+          </a:prstGeom>
+          <a:solidFill>
+            <a:srgbClr val="DDE5EE"/>
+          </a:solidFill>
+          <a:ln>
+            <a:noFill/>
+          </a:ln>
+          <a:effectLst/>
+        </p:spPr>
+        <p:style>
+          <a:lnRef idx="1">
+            <a:schemeClr val="accent1"/>
+          </a:lnRef>
+          <a:fillRef idx="3">
+            <a:schemeClr val="accent1"/>
+          </a:fillRef>
+          <a:effectRef idx="2">
+            <a:schemeClr val="accent1"/>
+          </a:effectRef>
+          <a:fontRef idx="minor">
+            <a:schemeClr val="lt1"/>
+          </a:fontRef>
+        </p:style>
+        <p:txBody>
+          <a:bodyPr rtlCol="0" anchor="ctr"/>
+          <a:lstStyle/>
+          <a:p>
+            <a:pPr algn="ctr"/>
+          </a:p>
+        </p:txBody>
+      </p:sp>
+      <p:sp>
+        <p:nvSpPr>
+          <p:cNvPr id="25" name="TextBox 24"/>
           <p:cNvSpPr txBox="1"/>
           <p:nvPr/>
         </p:nvSpPr>
         <p:spPr>
           <a:xfrm>
-            <a:off x="685800" y="4151376"/>
+            <a:off x="777240" y="4398264"/>
             <a:ext cx="1920240" cy="502920"/>
           </a:xfrm>
           <a:prstGeom prst="rect">
@@ -10263,7 +11203,7 @@
       </p:sp>
       <p:pic>
         <p:nvPicPr>
-          <p:cNvPr id="18" name="Picture 17" descr="oren.png"/>
+          <p:cNvPr id="26" name="Picture 25" descr="oren.png"/>
           <p:cNvPicPr>
             <a:picLocks noChangeAspect="1"/>
           </p:cNvPicPr>
@@ -10277,8 +11217,8 @@
         </p:blipFill>
         <p:spPr>
           <a:xfrm>
-            <a:off x="2651760" y="4114800"/>
-            <a:ext cx="4206240" cy="514593"/>
+            <a:off x="2743200" y="4389120"/>
+            <a:ext cx="4023360" cy="461932"/>
           </a:xfrm>
           <a:prstGeom prst="rect">
             <a:avLst/>
@@ -10287,13 +11227,57 @@
       </p:pic>
       <p:sp>
         <p:nvSpPr>
-          <p:cNvPr id="19" name="TextBox 18"/>
+          <p:cNvPr id="27" name="Rectangle 26"/>
+          <p:cNvSpPr/>
+          <p:nvPr/>
+        </p:nvSpPr>
+        <p:spPr>
+          <a:xfrm>
+            <a:off x="777240" y="4974336"/>
+            <a:ext cx="5943600" cy="10972"/>
+          </a:xfrm>
+          <a:prstGeom prst="rect">
+            <a:avLst/>
+          </a:prstGeom>
+          <a:solidFill>
+            <a:srgbClr val="DDE5EE"/>
+          </a:solidFill>
+          <a:ln>
+            <a:noFill/>
+          </a:ln>
+          <a:effectLst/>
+        </p:spPr>
+        <p:style>
+          <a:lnRef idx="1">
+            <a:schemeClr val="accent1"/>
+          </a:lnRef>
+          <a:fillRef idx="3">
+            <a:schemeClr val="accent1"/>
+          </a:fillRef>
+          <a:effectRef idx="2">
+            <a:schemeClr val="accent1"/>
+          </a:effectRef>
+          <a:fontRef idx="minor">
+            <a:schemeClr val="lt1"/>
+          </a:fontRef>
+        </p:style>
+        <p:txBody>
+          <a:bodyPr rtlCol="0" anchor="ctr"/>
+          <a:lstStyle/>
+          <a:p>
+            <a:pPr algn="ctr"/>
+          </a:p>
+        </p:txBody>
+      </p:sp>
+      <p:sp>
+        <p:nvSpPr>
+          <p:cNvPr id="28" name="TextBox 27"/>
           <p:cNvSpPr txBox="1"/>
           <p:nvPr/>
         </p:nvSpPr>
         <p:spPr>
           <a:xfrm>
-            <a:off x="685800" y="4892040"/>
+            <a:off x="777240" y="5047488"/>
             <a:ext cx="1920240" cy="502920"/>
           </a:xfrm>
           <a:prstGeom prst="rect">
@@ -10329,7 +11313,7 @@
       </p:sp>
       <p:pic>
         <p:nvPicPr>
-          <p:cNvPr id="20" name="Picture 19" descr="ct2.png"/>
+          <p:cNvPr id="29" name="Picture 28" descr="ct2.png"/>
           <p:cNvPicPr>
             <a:picLocks noChangeAspect="1"/>
           </p:cNvPicPr>
@@ -10343,8 +11327,8 @@
         </p:blipFill>
         <p:spPr>
           <a:xfrm>
-            <a:off x="2651760" y="4855464"/>
-            <a:ext cx="3296093" cy="566928"/>
+            <a:off x="2743200" y="5038344"/>
+            <a:ext cx="3146602" cy="530352"/>
           </a:xfrm>
           <a:prstGeom prst="rect">
             <a:avLst/>
@@ -10353,13 +11337,57 @@
       </p:pic>
       <p:sp>
         <p:nvSpPr>
-          <p:cNvPr id="21" name="TextBox 20"/>
+          <p:cNvPr id="30" name="Rectangle 29"/>
+          <p:cNvSpPr/>
+          <p:nvPr/>
+        </p:nvSpPr>
+        <p:spPr>
+          <a:xfrm>
+            <a:off x="777240" y="5623560"/>
+            <a:ext cx="5943600" cy="10972"/>
+          </a:xfrm>
+          <a:prstGeom prst="rect">
+            <a:avLst/>
+          </a:prstGeom>
+          <a:solidFill>
+            <a:srgbClr val="DDE5EE"/>
+          </a:solidFill>
+          <a:ln>
+            <a:noFill/>
+          </a:ln>
+          <a:effectLst/>
+        </p:spPr>
+        <p:style>
+          <a:lnRef idx="1">
+            <a:schemeClr val="accent1"/>
+          </a:lnRef>
+          <a:fillRef idx="3">
+            <a:schemeClr val="accent1"/>
+          </a:fillRef>
+          <a:effectRef idx="2">
+            <a:schemeClr val="accent1"/>
+          </a:effectRef>
+          <a:fontRef idx="minor">
+            <a:schemeClr val="lt1"/>
+          </a:fontRef>
+        </p:style>
+        <p:txBody>
+          <a:bodyPr rtlCol="0" anchor="ctr"/>
+          <a:lstStyle/>
+          <a:p>
+            <a:pPr algn="ctr"/>
+          </a:p>
+        </p:txBody>
+      </p:sp>
+      <p:sp>
+        <p:nvSpPr>
+          <p:cNvPr id="31" name="TextBox 30"/>
           <p:cNvSpPr txBox="1"/>
           <p:nvPr/>
         </p:nvSpPr>
         <p:spPr>
           <a:xfrm>
-            <a:off x="685800" y="5632704"/>
+            <a:off x="777240" y="5696712"/>
             <a:ext cx="1920240" cy="502920"/>
           </a:xfrm>
           <a:prstGeom prst="rect">
@@ -10395,7 +11423,7 @@
       </p:sp>
       <p:pic>
         <p:nvPicPr>
-          <p:cNvPr id="22" name="Picture 21" descr="sss.png"/>
+          <p:cNvPr id="32" name="Picture 31" descr="sss.png"/>
           <p:cNvPicPr>
             <a:picLocks noChangeAspect="1"/>
           </p:cNvPicPr>
@@ -10409,8 +11437,8 @@
         </p:blipFill>
         <p:spPr>
           <a:xfrm>
-            <a:off x="2651760" y="5596128"/>
-            <a:ext cx="2632165" cy="566928"/>
+            <a:off x="2743200" y="5687568"/>
+            <a:ext cx="2981815" cy="530352"/>
           </a:xfrm>
           <a:prstGeom prst="rect">
             <a:avLst/>
@@ -10419,7 +11447,7 @@
       </p:pic>
       <p:pic>
         <p:nvPicPr>
-          <p:cNvPr id="23" name="Picture 22" descr="models.jpg"/>
+          <p:cNvPr id="33" name="Picture 32" descr="models.jpg"/>
           <p:cNvPicPr>
             <a:picLocks noChangeAspect="1"/>
           </p:cNvPicPr>
@@ -10433,28 +11461,35 @@
         </p:blipFill>
         <p:spPr>
           <a:xfrm>
-            <a:off x="7223760" y="1783080"/>
+            <a:off x="7223760" y="2331720"/>
             <a:ext cx="4480560" cy="766411"/>
           </a:xfrm>
           <a:prstGeom prst="rect">
             <a:avLst/>
           </a:prstGeom>
-          <a:ln w="9525">
+          <a:ln w="28575">
             <a:solidFill>
-              <a:srgbClr val="D5DEE8"/>
+              <a:srgbClr val="FFFFFF"/>
             </a:solidFill>
           </a:ln>
+          <a:effectLst>
+            <a:outerShdw blurRad="127000" dist="38100" dir="5400000" algn="t" rotWithShape="0">
+              <a:srgbClr val="0B1220">
+                <a:alpha val="24000"/>
+              </a:srgbClr>
+            </a:outerShdw>
+          </a:effectLst>
         </p:spPr>
       </p:pic>
       <p:sp>
         <p:nvSpPr>
-          <p:cNvPr id="24" name="TextBox 23"/>
+          <p:cNvPr id="34" name="TextBox 33"/>
           <p:cNvSpPr txBox="1"/>
           <p:nvPr/>
         </p:nvSpPr>
         <p:spPr>
           <a:xfrm>
-            <a:off x="7223760" y="2567779"/>
+            <a:off x="7223760" y="3125563"/>
             <a:ext cx="4480560" cy="274320"/>
           </a:xfrm>
           <a:prstGeom prst="rect">
@@ -10483,25 +11518,25 @@
                 </a:solidFill>
                 <a:latin typeface="Calibri"/>
               </a:rPr>
-              <a:t>Six models, one sphere each</a:t>
-            </a:r>
-          </a:p>
-        </p:txBody>
-      </p:sp>
-      <p:sp>
-        <p:nvSpPr>
-          <p:cNvPr id="25" name="Rounded Rectangle 24"/>
+              <a:t>Lambert · Phong · Blinn–Phong · Oren–Nayar · Cook–Torrance · Subsurface</a:t>
+            </a:r>
+          </a:p>
+        </p:txBody>
+      </p:sp>
+      <p:sp>
+        <p:nvSpPr>
+          <p:cNvPr id="35" name="Rounded Rectangle 34"/>
           <p:cNvSpPr/>
           <p:nvPr/>
         </p:nvSpPr>
         <p:spPr>
           <a:xfrm>
-            <a:off x="7223760" y="2915251"/>
-            <a:ext cx="4480560" cy="3439828"/>
+            <a:off x="7223760" y="3482179"/>
+            <a:ext cx="4480560" cy="2872900"/>
           </a:xfrm>
           <a:prstGeom prst="roundRect">
             <a:avLst>
-              <a:gd name="adj" fmla="val 6000"/>
+              <a:gd name="adj" fmla="val 4000"/>
             </a:avLst>
           </a:prstGeom>
           <a:solidFill>
@@ -10509,10 +11544,16 @@
           </a:solidFill>
           <a:ln w="9525">
             <a:solidFill>
-              <a:srgbClr val="D5DEE8"/>
+              <a:srgbClr val="DDE5EE"/>
             </a:solidFill>
           </a:ln>
-          <a:effectLst/>
+          <a:effectLst>
+            <a:outerShdw blurRad="114300" dist="25400" dir="5400000" algn="t" rotWithShape="0">
+              <a:srgbClr val="0B1220">
+                <a:alpha val="16000"/>
+              </a:srgbClr>
+            </a:outerShdw>
+          </a:effectLst>
         </p:spPr>
         <p:style>
           <a:lnRef idx="1">
@@ -10538,14 +11579,58 @@
       </p:sp>
       <p:sp>
         <p:nvSpPr>
-          <p:cNvPr id="26" name="TextBox 25"/>
+          <p:cNvPr id="36" name="Rectangle 35"/>
+          <p:cNvSpPr/>
+          <p:nvPr/>
+        </p:nvSpPr>
+        <p:spPr>
+          <a:xfrm>
+            <a:off x="7223760" y="3591907"/>
+            <a:ext cx="64008" cy="2653444"/>
+          </a:xfrm>
+          <a:prstGeom prst="rect">
+            <a:avLst/>
+          </a:prstGeom>
+          <a:solidFill>
+            <a:srgbClr val="0F8F85"/>
+          </a:solidFill>
+          <a:ln>
+            <a:noFill/>
+          </a:ln>
+          <a:effectLst/>
+        </p:spPr>
+        <p:style>
+          <a:lnRef idx="1">
+            <a:schemeClr val="accent1"/>
+          </a:lnRef>
+          <a:fillRef idx="3">
+            <a:schemeClr val="accent1"/>
+          </a:fillRef>
+          <a:effectRef idx="2">
+            <a:schemeClr val="accent1"/>
+          </a:effectRef>
+          <a:fontRef idx="minor">
+            <a:schemeClr val="lt1"/>
+          </a:fontRef>
+        </p:style>
+        <p:txBody>
+          <a:bodyPr rtlCol="0" anchor="ctr"/>
+          <a:lstStyle/>
+          <a:p>
+            <a:pPr algn="ctr"/>
+          </a:p>
+        </p:txBody>
+      </p:sp>
+      <p:sp>
+        <p:nvSpPr>
+          <p:cNvPr id="37" name="TextBox 36"/>
           <p:cNvSpPr txBox="1"/>
           <p:nvPr/>
         </p:nvSpPr>
         <p:spPr>
           <a:xfrm>
-            <a:off x="7360920" y="2951827"/>
-            <a:ext cx="4206240" cy="365760"/>
+            <a:off x="7452360" y="3573619"/>
+            <a:ext cx="4114800" cy="347472"/>
           </a:xfrm>
           <a:prstGeom prst="rect">
             <a:avLst/>
@@ -10567,27 +11652,27 @@
               </a:spcAft>
             </a:pPr>
             <a:r>
-              <a:rPr sz="1700" b="1" i="0">
+              <a:rPr sz="1200" b="1" i="0">
                 <a:solidFill>
                   <a:srgbClr val="0F8F85"/>
                 </a:solidFill>
                 <a:latin typeface="Calibri"/>
               </a:rPr>
-              <a:t>Light sources</a:t>
-            </a:r>
-          </a:p>
-        </p:txBody>
-      </p:sp>
-      <p:sp>
-        <p:nvSpPr>
-          <p:cNvPr id="27" name="TextBox 26"/>
+              <a:t>LIGHT SOURCES</a:t>
+            </a:r>
+          </a:p>
+        </p:txBody>
+      </p:sp>
+      <p:sp>
+        <p:nvSpPr>
+          <p:cNvPr id="38" name="TextBox 37"/>
           <p:cNvSpPr txBox="1"/>
           <p:nvPr/>
         </p:nvSpPr>
         <p:spPr>
           <a:xfrm>
-            <a:off x="7360920" y="3372451"/>
-            <a:ext cx="4206240" cy="1554480"/>
+            <a:off x="7452360" y="3921091"/>
+            <a:ext cx="4114800" cy="1325880"/>
           </a:xfrm>
           <a:prstGeom prst="rect">
             <a:avLst/>
@@ -10600,20 +11685,20 @@
           </a:bodyPr>
           <a:lstStyle/>
           <a:p>
-            <a:pPr algn="l" marL="256032" indent="-256032">
-              <a:lnSpc>
-                <a:spcPct val="100000"/>
-              </a:lnSpc>
-              <a:spcAft>
-                <a:spcPts val="300"/>
+            <a:pPr algn="l" marL="274320" indent="-274320">
+              <a:lnSpc>
+                <a:spcPct val="100000"/>
+              </a:lnSpc>
+              <a:spcAft>
+                <a:spcPts val="200"/>
               </a:spcAft>
               <a:buClr>
-                <a:srgbClr val="007A3D"/>
+                <a:srgbClr val="0F8F85"/>
               </a:buClr>
-              <a:buChar char="•"/>
-            </a:pPr>
-            <a:r>
-              <a:rPr sz="1600" b="0" i="0">
+              <a:buChar char="▪"/>
+            </a:pPr>
+            <a:r>
+              <a:rPr sz="1500" b="0" i="0">
                 <a:solidFill>
                   <a:srgbClr val="1E293B"/>
                 </a:solidFill>
@@ -10623,20 +11708,20 @@
             </a:r>
           </a:p>
           <a:p>
-            <a:pPr algn="l" marL="256032" indent="-256032">
-              <a:lnSpc>
-                <a:spcPct val="100000"/>
-              </a:lnSpc>
-              <a:spcAft>
-                <a:spcPts val="300"/>
+            <a:pPr algn="l" marL="274320" indent="-274320">
+              <a:lnSpc>
+                <a:spcPct val="100000"/>
+              </a:lnSpc>
+              <a:spcAft>
+                <a:spcPts val="200"/>
               </a:spcAft>
               <a:buClr>
-                <a:srgbClr val="007A3D"/>
+                <a:srgbClr val="0F8F85"/>
               </a:buClr>
-              <a:buChar char="•"/>
-            </a:pPr>
-            <a:r>
-              <a:rPr sz="1600" b="0" i="0">
+              <a:buChar char="▪"/>
+            </a:pPr>
+            <a:r>
+              <a:rPr sz="1500" b="0" i="0">
                 <a:solidFill>
                   <a:srgbClr val="1E293B"/>
                 </a:solidFill>
@@ -10646,20 +11731,20 @@
             </a:r>
           </a:p>
           <a:p>
-            <a:pPr algn="l" marL="256032" indent="-256032">
-              <a:lnSpc>
-                <a:spcPct val="100000"/>
-              </a:lnSpc>
-              <a:spcAft>
-                <a:spcPts val="300"/>
+            <a:pPr algn="l" marL="274320" indent="-274320">
+              <a:lnSpc>
+                <a:spcPct val="100000"/>
+              </a:lnSpc>
+              <a:spcAft>
+                <a:spcPts val="200"/>
               </a:spcAft>
               <a:buClr>
-                <a:srgbClr val="007A3D"/>
+                <a:srgbClr val="0F8F85"/>
               </a:buClr>
-              <a:buChar char="•"/>
-            </a:pPr>
-            <a:r>
-              <a:rPr sz="1600" b="0" i="0">
+              <a:buChar char="▪"/>
+            </a:pPr>
+            <a:r>
+              <a:rPr sz="1500" b="0" i="0">
                 <a:solidFill>
                   <a:srgbClr val="1E293B"/>
                 </a:solidFill>
@@ -10669,20 +11754,20 @@
             </a:r>
           </a:p>
           <a:p>
-            <a:pPr algn="l" marL="256032" indent="-256032">
-              <a:lnSpc>
-                <a:spcPct val="100000"/>
-              </a:lnSpc>
-              <a:spcAft>
-                <a:spcPts val="300"/>
+            <a:pPr algn="l" marL="274320" indent="-274320">
+              <a:lnSpc>
+                <a:spcPct val="100000"/>
+              </a:lnSpc>
+              <a:spcAft>
+                <a:spcPts val="200"/>
               </a:spcAft>
               <a:buClr>
-                <a:srgbClr val="007A3D"/>
+                <a:srgbClr val="0F8F85"/>
               </a:buClr>
-              <a:buChar char="•"/>
-            </a:pPr>
-            <a:r>
-              <a:rPr sz="1600" b="0" i="0">
+              <a:buChar char="▪"/>
+            </a:pPr>
+            <a:r>
+              <a:rPr sz="1500" b="0" i="0">
                 <a:solidFill>
                   <a:srgbClr val="1E293B"/>
                 </a:solidFill>
@@ -10695,7 +11780,7 @@
       </p:sp>
       <p:pic>
         <p:nvPicPr>
-          <p:cNvPr id="28" name="Picture 27" descr="att.png"/>
+          <p:cNvPr id="39" name="Picture 38" descr="att.png"/>
           <p:cNvPicPr>
             <a:picLocks noChangeAspect="1"/>
           </p:cNvPicPr>
@@ -10709,8 +11794,8 @@
         </p:blipFill>
         <p:spPr>
           <a:xfrm>
-            <a:off x="7360920" y="5257800"/>
-            <a:ext cx="3108960" cy="617754"/>
+            <a:off x="7779989" y="5577840"/>
+            <a:ext cx="3368100" cy="640080"/>
           </a:xfrm>
           <a:prstGeom prst="rect">
             <a:avLst/>
@@ -10880,7 +11965,7 @@
         <p:spPr>
           <a:xfrm>
             <a:off x="731520" y="118872"/>
-            <a:ext cx="10058400" cy="640080"/>
+            <a:ext cx="10515600" cy="640080"/>
           </a:xfrm>
           <a:prstGeom prst="rect">
             <a:avLst/>
@@ -10921,8 +12006,8 @@
         </p:nvSpPr>
         <p:spPr>
           <a:xfrm>
-            <a:off x="10789920" y="6473952"/>
-            <a:ext cx="1188720" cy="274320"/>
+            <a:off x="548640" y="6492240"/>
+            <a:ext cx="5486400" cy="274320"/>
           </a:xfrm>
           <a:prstGeom prst="rect">
             <a:avLst/>
@@ -10935,6 +12020,48 @@
           </a:bodyPr>
           <a:lstStyle/>
           <a:p>
+            <a:pPr algn="l">
+              <a:lnSpc>
+                <a:spcPct val="100000"/>
+              </a:lnSpc>
+              <a:spcAft>
+                <a:spcPts val="400"/>
+              </a:spcAft>
+            </a:pPr>
+            <a:r>
+              <a:rPr sz="1000" b="0" i="0">
+                <a:solidFill>
+                  <a:srgbClr val="64748B"/>
+                </a:solidFill>
+                <a:latin typeface="Calibri"/>
+              </a:rPr>
+              <a:t>Sentinel  ·  CSE 4102  ·  KUET</a:t>
+            </a:r>
+          </a:p>
+        </p:txBody>
+      </p:sp>
+      <p:sp>
+        <p:nvSpPr>
+          <p:cNvPr id="8" name="TextBox 7"/>
+          <p:cNvSpPr txBox="1"/>
+          <p:nvPr/>
+        </p:nvSpPr>
+        <p:spPr>
+          <a:xfrm>
+            <a:off x="10789920" y="6492240"/>
+            <a:ext cx="1188720" cy="274320"/>
+          </a:xfrm>
+          <a:prstGeom prst="rect">
+            <a:avLst/>
+          </a:prstGeom>
+          <a:noFill/>
+        </p:spPr>
+        <p:txBody>
+          <a:bodyPr wrap="square" lIns="36576" rIns="36576" tIns="18288" bIns="18288" anchor="t">
+            <a:spAutoFit/>
+          </a:bodyPr>
+          <a:lstStyle/>
+          <a:p>
             <a:pPr algn="r">
               <a:lnSpc>
                 <a:spcPct val="100000"/>
@@ -10957,18 +12084,855 @@
       </p:sp>
       <p:sp>
         <p:nvSpPr>
-          <p:cNvPr id="8" name="Rounded Rectangle 7"/>
+          <p:cNvPr id="9" name="Pentagon 8"/>
           <p:cNvSpPr/>
           <p:nvPr/>
         </p:nvSpPr>
         <p:spPr>
           <a:xfrm>
-            <a:off x="548640" y="1097280"/>
-            <a:ext cx="1417320" cy="731520"/>
+            <a:off x="548640" y="1051560"/>
+            <a:ext cx="1711234" cy="777240"/>
+          </a:xfrm>
+          <a:prstGeom prst="homePlate">
+            <a:avLst>
+              <a:gd name="adj" fmla="val 28000"/>
+            </a:avLst>
+          </a:prstGeom>
+          <a:solidFill>
+            <a:srgbClr val="E6F4F2"/>
+          </a:solidFill>
+          <a:ln w="12700">
+            <a:solidFill>
+              <a:srgbClr val="0F8F85"/>
+            </a:solidFill>
+          </a:ln>
+          <a:effectLst>
+            <a:outerShdw blurRad="63500" dist="12700" dir="5400000" algn="t" rotWithShape="0">
+              <a:srgbClr val="0B1220">
+                <a:alpha val="12000"/>
+              </a:srgbClr>
+            </a:outerShdw>
+          </a:effectLst>
+        </p:spPr>
+        <p:style>
+          <a:lnRef idx="1">
+            <a:schemeClr val="accent1"/>
+          </a:lnRef>
+          <a:fillRef idx="3">
+            <a:schemeClr val="accent1"/>
+          </a:fillRef>
+          <a:effectRef idx="2">
+            <a:schemeClr val="accent1"/>
+          </a:effectRef>
+          <a:fontRef idx="minor">
+            <a:schemeClr val="lt1"/>
+          </a:fontRef>
+        </p:style>
+        <p:txBody>
+          <a:bodyPr rtlCol="0" anchor="ctr"/>
+          <a:lstStyle/>
+          <a:p>
+            <a:pPr algn="ctr"/>
+          </a:p>
+        </p:txBody>
+      </p:sp>
+      <p:sp>
+        <p:nvSpPr>
+          <p:cNvPr id="10" name="TextBox 9"/>
+          <p:cNvSpPr txBox="1"/>
+          <p:nvPr/>
+        </p:nvSpPr>
+        <p:spPr>
+          <a:xfrm>
+            <a:off x="640080" y="1051560"/>
+            <a:ext cx="1345474" cy="777240"/>
+          </a:xfrm>
+          <a:prstGeom prst="rect">
+            <a:avLst/>
+          </a:prstGeom>
+          <a:noFill/>
+        </p:spPr>
+        <p:txBody>
+          <a:bodyPr wrap="square" lIns="36576" rIns="36576" tIns="18288" bIns="18288" anchor="ctr">
+            <a:spAutoFit/>
+          </a:bodyPr>
+          <a:lstStyle/>
+          <a:p>
+            <a:pPr algn="ctr">
+              <a:lnSpc>
+                <a:spcPct val="100000"/>
+              </a:lnSpc>
+              <a:spcAft>
+                <a:spcPts val="0"/>
+              </a:spcAft>
+            </a:pPr>
+            <a:r>
+              <a:rPr sz="1300" b="1" i="0">
+                <a:solidFill>
+                  <a:srgbClr val="1E293B"/>
+                </a:solidFill>
+                <a:latin typeface="Calibri"/>
+              </a:rPr>
+              <a:t>Sky</a:t>
+            </a:r>
+          </a:p>
+          <a:p>
+            <a:pPr algn="ctr">
+              <a:lnSpc>
+                <a:spcPct val="100000"/>
+              </a:lnSpc>
+              <a:spcAft>
+                <a:spcPts val="0"/>
+              </a:spcAft>
+            </a:pPr>
+            <a:r>
+              <a:rPr sz="1300" b="1" i="0">
+                <a:solidFill>
+                  <a:srgbClr val="1E293B"/>
+                </a:solidFill>
+                <a:latin typeface="Calibri"/>
+              </a:rPr>
+              <a:t>table</a:t>
+            </a:r>
+          </a:p>
+        </p:txBody>
+      </p:sp>
+      <p:sp>
+        <p:nvSpPr>
+          <p:cNvPr id="11" name="Chevron 10"/>
+          <p:cNvSpPr/>
+          <p:nvPr/>
+        </p:nvSpPr>
+        <p:spPr>
+          <a:xfrm>
+            <a:off x="2122714" y="1051560"/>
+            <a:ext cx="1711234" cy="777240"/>
+          </a:xfrm>
+          <a:prstGeom prst="chevron">
+            <a:avLst>
+              <a:gd name="adj" fmla="val 28000"/>
+            </a:avLst>
+          </a:prstGeom>
+          <a:solidFill>
+            <a:srgbClr val="CCEAE6"/>
+          </a:solidFill>
+          <a:ln w="12700">
+            <a:solidFill>
+              <a:srgbClr val="0F8F85"/>
+            </a:solidFill>
+          </a:ln>
+          <a:effectLst>
+            <a:outerShdw blurRad="63500" dist="12700" dir="5400000" algn="t" rotWithShape="0">
+              <a:srgbClr val="0B1220">
+                <a:alpha val="12000"/>
+              </a:srgbClr>
+            </a:outerShdw>
+          </a:effectLst>
+        </p:spPr>
+        <p:style>
+          <a:lnRef idx="1">
+            <a:schemeClr val="accent1"/>
+          </a:lnRef>
+          <a:fillRef idx="3">
+            <a:schemeClr val="accent1"/>
+          </a:fillRef>
+          <a:effectRef idx="2">
+            <a:schemeClr val="accent1"/>
+          </a:effectRef>
+          <a:fontRef idx="minor">
+            <a:schemeClr val="lt1"/>
+          </a:fontRef>
+        </p:style>
+        <p:txBody>
+          <a:bodyPr rtlCol="0" anchor="ctr"/>
+          <a:lstStyle/>
+          <a:p>
+            <a:pPr algn="ctr"/>
+          </a:p>
+        </p:txBody>
+      </p:sp>
+      <p:sp>
+        <p:nvSpPr>
+          <p:cNvPr id="12" name="TextBox 11"/>
+          <p:cNvSpPr txBox="1"/>
+          <p:nvPr/>
+        </p:nvSpPr>
+        <p:spPr>
+          <a:xfrm>
+            <a:off x="2378746" y="1051560"/>
+            <a:ext cx="1345474" cy="777240"/>
+          </a:xfrm>
+          <a:prstGeom prst="rect">
+            <a:avLst/>
+          </a:prstGeom>
+          <a:noFill/>
+        </p:spPr>
+        <p:txBody>
+          <a:bodyPr wrap="square" lIns="36576" rIns="36576" tIns="18288" bIns="18288" anchor="ctr">
+            <a:spAutoFit/>
+          </a:bodyPr>
+          <a:lstStyle/>
+          <a:p>
+            <a:pPr algn="ctr">
+              <a:lnSpc>
+                <a:spcPct val="100000"/>
+              </a:lnSpc>
+              <a:spcAft>
+                <a:spcPts val="0"/>
+              </a:spcAft>
+            </a:pPr>
+            <a:r>
+              <a:rPr sz="1300" b="1" i="0">
+                <a:solidFill>
+                  <a:srgbClr val="1E293B"/>
+                </a:solidFill>
+                <a:latin typeface="Calibri"/>
+              </a:rPr>
+              <a:t>Shadows</a:t>
+            </a:r>
+          </a:p>
+          <a:p>
+            <a:pPr algn="ctr">
+              <a:lnSpc>
+                <a:spcPct val="100000"/>
+              </a:lnSpc>
+              <a:spcAft>
+                <a:spcPts val="0"/>
+              </a:spcAft>
+            </a:pPr>
+            <a:r>
+              <a:rPr sz="1300" b="1" i="0">
+                <a:solidFill>
+                  <a:srgbClr val="1E293B"/>
+                </a:solidFill>
+                <a:latin typeface="Calibri"/>
+              </a:rPr>
+              <a:t>3 cascades</a:t>
+            </a:r>
+          </a:p>
+        </p:txBody>
+      </p:sp>
+      <p:sp>
+        <p:nvSpPr>
+          <p:cNvPr id="13" name="Chevron 12"/>
+          <p:cNvSpPr/>
+          <p:nvPr/>
+        </p:nvSpPr>
+        <p:spPr>
+          <a:xfrm>
+            <a:off x="3696788" y="1051560"/>
+            <a:ext cx="1711234" cy="777240"/>
+          </a:xfrm>
+          <a:prstGeom prst="chevron">
+            <a:avLst>
+              <a:gd name="adj" fmla="val 28000"/>
+            </a:avLst>
+          </a:prstGeom>
+          <a:solidFill>
+            <a:srgbClr val="E6F4F2"/>
+          </a:solidFill>
+          <a:ln w="12700">
+            <a:solidFill>
+              <a:srgbClr val="0F8F85"/>
+            </a:solidFill>
+          </a:ln>
+          <a:effectLst>
+            <a:outerShdw blurRad="63500" dist="12700" dir="5400000" algn="t" rotWithShape="0">
+              <a:srgbClr val="0B1220">
+                <a:alpha val="12000"/>
+              </a:srgbClr>
+            </a:outerShdw>
+          </a:effectLst>
+        </p:spPr>
+        <p:style>
+          <a:lnRef idx="1">
+            <a:schemeClr val="accent1"/>
+          </a:lnRef>
+          <a:fillRef idx="3">
+            <a:schemeClr val="accent1"/>
+          </a:fillRef>
+          <a:effectRef idx="2">
+            <a:schemeClr val="accent1"/>
+          </a:effectRef>
+          <a:fontRef idx="minor">
+            <a:schemeClr val="lt1"/>
+          </a:fontRef>
+        </p:style>
+        <p:txBody>
+          <a:bodyPr rtlCol="0" anchor="ctr"/>
+          <a:lstStyle/>
+          <a:p>
+            <a:pPr algn="ctr"/>
+          </a:p>
+        </p:txBody>
+      </p:sp>
+      <p:sp>
+        <p:nvSpPr>
+          <p:cNvPr id="14" name="TextBox 13"/>
+          <p:cNvSpPr txBox="1"/>
+          <p:nvPr/>
+        </p:nvSpPr>
+        <p:spPr>
+          <a:xfrm>
+            <a:off x="3952820" y="1051560"/>
+            <a:ext cx="1345474" cy="777240"/>
+          </a:xfrm>
+          <a:prstGeom prst="rect">
+            <a:avLst/>
+          </a:prstGeom>
+          <a:noFill/>
+        </p:spPr>
+        <p:txBody>
+          <a:bodyPr wrap="square" lIns="36576" rIns="36576" tIns="18288" bIns="18288" anchor="ctr">
+            <a:spAutoFit/>
+          </a:bodyPr>
+          <a:lstStyle/>
+          <a:p>
+            <a:pPr algn="ctr">
+              <a:lnSpc>
+                <a:spcPct val="100000"/>
+              </a:lnSpc>
+              <a:spcAft>
+                <a:spcPts val="0"/>
+              </a:spcAft>
+            </a:pPr>
+            <a:r>
+              <a:rPr sz="1300" b="1" i="0">
+                <a:solidFill>
+                  <a:srgbClr val="1E293B"/>
+                </a:solidFill>
+                <a:latin typeface="Calibri"/>
+              </a:rPr>
+              <a:t>Geometry</a:t>
+            </a:r>
+          </a:p>
+          <a:p>
+            <a:pPr algn="ctr">
+              <a:lnSpc>
+                <a:spcPct val="100000"/>
+              </a:lnSpc>
+              <a:spcAft>
+                <a:spcPts val="0"/>
+              </a:spcAft>
+            </a:pPr>
+            <a:r>
+              <a:rPr sz="1300" b="1" i="0">
+                <a:solidFill>
+                  <a:srgbClr val="1E293B"/>
+                </a:solidFill>
+                <a:latin typeface="Calibri"/>
+              </a:rPr>
+              <a:t>G-buffer</a:t>
+            </a:r>
+          </a:p>
+        </p:txBody>
+      </p:sp>
+      <p:sp>
+        <p:nvSpPr>
+          <p:cNvPr id="15" name="Chevron 14"/>
+          <p:cNvSpPr/>
+          <p:nvPr/>
+        </p:nvSpPr>
+        <p:spPr>
+          <a:xfrm>
+            <a:off x="5270862" y="1051560"/>
+            <a:ext cx="1711234" cy="777240"/>
+          </a:xfrm>
+          <a:prstGeom prst="chevron">
+            <a:avLst>
+              <a:gd name="adj" fmla="val 28000"/>
+            </a:avLst>
+          </a:prstGeom>
+          <a:solidFill>
+            <a:srgbClr val="CCEAE6"/>
+          </a:solidFill>
+          <a:ln w="12700">
+            <a:solidFill>
+              <a:srgbClr val="0F8F85"/>
+            </a:solidFill>
+          </a:ln>
+          <a:effectLst>
+            <a:outerShdw blurRad="63500" dist="12700" dir="5400000" algn="t" rotWithShape="0">
+              <a:srgbClr val="0B1220">
+                <a:alpha val="12000"/>
+              </a:srgbClr>
+            </a:outerShdw>
+          </a:effectLst>
+        </p:spPr>
+        <p:style>
+          <a:lnRef idx="1">
+            <a:schemeClr val="accent1"/>
+          </a:lnRef>
+          <a:fillRef idx="3">
+            <a:schemeClr val="accent1"/>
+          </a:fillRef>
+          <a:effectRef idx="2">
+            <a:schemeClr val="accent1"/>
+          </a:effectRef>
+          <a:fontRef idx="minor">
+            <a:schemeClr val="lt1"/>
+          </a:fontRef>
+        </p:style>
+        <p:txBody>
+          <a:bodyPr rtlCol="0" anchor="ctr"/>
+          <a:lstStyle/>
+          <a:p>
+            <a:pPr algn="ctr"/>
+          </a:p>
+        </p:txBody>
+      </p:sp>
+      <p:sp>
+        <p:nvSpPr>
+          <p:cNvPr id="16" name="TextBox 15"/>
+          <p:cNvSpPr txBox="1"/>
+          <p:nvPr/>
+        </p:nvSpPr>
+        <p:spPr>
+          <a:xfrm>
+            <a:off x="5526894" y="1051560"/>
+            <a:ext cx="1345474" cy="777240"/>
+          </a:xfrm>
+          <a:prstGeom prst="rect">
+            <a:avLst/>
+          </a:prstGeom>
+          <a:noFill/>
+        </p:spPr>
+        <p:txBody>
+          <a:bodyPr wrap="square" lIns="36576" rIns="36576" tIns="18288" bIns="18288" anchor="ctr">
+            <a:spAutoFit/>
+          </a:bodyPr>
+          <a:lstStyle/>
+          <a:p>
+            <a:pPr algn="ctr">
+              <a:lnSpc>
+                <a:spcPct val="100000"/>
+              </a:lnSpc>
+              <a:spcAft>
+                <a:spcPts val="0"/>
+              </a:spcAft>
+            </a:pPr>
+            <a:r>
+              <a:rPr sz="1300" b="1" i="0">
+                <a:solidFill>
+                  <a:srgbClr val="1E293B"/>
+                </a:solidFill>
+                <a:latin typeface="Calibri"/>
+              </a:rPr>
+              <a:t>SSAO</a:t>
+            </a:r>
+          </a:p>
+        </p:txBody>
+      </p:sp>
+      <p:sp>
+        <p:nvSpPr>
+          <p:cNvPr id="17" name="Chevron 16"/>
+          <p:cNvSpPr/>
+          <p:nvPr/>
+        </p:nvSpPr>
+        <p:spPr>
+          <a:xfrm>
+            <a:off x="6844937" y="1051560"/>
+            <a:ext cx="1711234" cy="777240"/>
+          </a:xfrm>
+          <a:prstGeom prst="chevron">
+            <a:avLst>
+              <a:gd name="adj" fmla="val 28000"/>
+            </a:avLst>
+          </a:prstGeom>
+          <a:solidFill>
+            <a:srgbClr val="E6F4F2"/>
+          </a:solidFill>
+          <a:ln w="12700">
+            <a:solidFill>
+              <a:srgbClr val="0F8F85"/>
+            </a:solidFill>
+          </a:ln>
+          <a:effectLst>
+            <a:outerShdw blurRad="63500" dist="12700" dir="5400000" algn="t" rotWithShape="0">
+              <a:srgbClr val="0B1220">
+                <a:alpha val="12000"/>
+              </a:srgbClr>
+            </a:outerShdw>
+          </a:effectLst>
+        </p:spPr>
+        <p:style>
+          <a:lnRef idx="1">
+            <a:schemeClr val="accent1"/>
+          </a:lnRef>
+          <a:fillRef idx="3">
+            <a:schemeClr val="accent1"/>
+          </a:fillRef>
+          <a:effectRef idx="2">
+            <a:schemeClr val="accent1"/>
+          </a:effectRef>
+          <a:fontRef idx="minor">
+            <a:schemeClr val="lt1"/>
+          </a:fontRef>
+        </p:style>
+        <p:txBody>
+          <a:bodyPr rtlCol="0" anchor="ctr"/>
+          <a:lstStyle/>
+          <a:p>
+            <a:pPr algn="ctr"/>
+          </a:p>
+        </p:txBody>
+      </p:sp>
+      <p:sp>
+        <p:nvSpPr>
+          <p:cNvPr id="18" name="TextBox 17"/>
+          <p:cNvSpPr txBox="1"/>
+          <p:nvPr/>
+        </p:nvSpPr>
+        <p:spPr>
+          <a:xfrm>
+            <a:off x="7100969" y="1051560"/>
+            <a:ext cx="1345474" cy="777240"/>
+          </a:xfrm>
+          <a:prstGeom prst="rect">
+            <a:avLst/>
+          </a:prstGeom>
+          <a:noFill/>
+        </p:spPr>
+        <p:txBody>
+          <a:bodyPr wrap="square" lIns="36576" rIns="36576" tIns="18288" bIns="18288" anchor="ctr">
+            <a:spAutoFit/>
+          </a:bodyPr>
+          <a:lstStyle/>
+          <a:p>
+            <a:pPr algn="ctr">
+              <a:lnSpc>
+                <a:spcPct val="100000"/>
+              </a:lnSpc>
+              <a:spcAft>
+                <a:spcPts val="0"/>
+              </a:spcAft>
+            </a:pPr>
+            <a:r>
+              <a:rPr sz="1300" b="1" i="0">
+                <a:solidFill>
+                  <a:srgbClr val="1E293B"/>
+                </a:solidFill>
+                <a:latin typeface="Calibri"/>
+              </a:rPr>
+              <a:t>Lighting,</a:t>
+            </a:r>
+          </a:p>
+          <a:p>
+            <a:pPr algn="ctr">
+              <a:lnSpc>
+                <a:spcPct val="100000"/>
+              </a:lnSpc>
+              <a:spcAft>
+                <a:spcPts val="0"/>
+              </a:spcAft>
+            </a:pPr>
+            <a:r>
+              <a:rPr sz="1300" b="1" i="0">
+                <a:solidFill>
+                  <a:srgbClr val="1E293B"/>
+                </a:solidFill>
+                <a:latin typeface="Calibri"/>
+              </a:rPr>
+              <a:t>reflect, fog</a:t>
+            </a:r>
+          </a:p>
+        </p:txBody>
+      </p:sp>
+      <p:sp>
+        <p:nvSpPr>
+          <p:cNvPr id="19" name="Chevron 18"/>
+          <p:cNvSpPr/>
+          <p:nvPr/>
+        </p:nvSpPr>
+        <p:spPr>
+          <a:xfrm>
+            <a:off x="8419011" y="1051560"/>
+            <a:ext cx="1711234" cy="777240"/>
+          </a:xfrm>
+          <a:prstGeom prst="chevron">
+            <a:avLst>
+              <a:gd name="adj" fmla="val 28000"/>
+            </a:avLst>
+          </a:prstGeom>
+          <a:solidFill>
+            <a:srgbClr val="CCEAE6"/>
+          </a:solidFill>
+          <a:ln w="12700">
+            <a:solidFill>
+              <a:srgbClr val="0F8F85"/>
+            </a:solidFill>
+          </a:ln>
+          <a:effectLst>
+            <a:outerShdw blurRad="63500" dist="12700" dir="5400000" algn="t" rotWithShape="0">
+              <a:srgbClr val="0B1220">
+                <a:alpha val="12000"/>
+              </a:srgbClr>
+            </a:outerShdw>
+          </a:effectLst>
+        </p:spPr>
+        <p:style>
+          <a:lnRef idx="1">
+            <a:schemeClr val="accent1"/>
+          </a:lnRef>
+          <a:fillRef idx="3">
+            <a:schemeClr val="accent1"/>
+          </a:fillRef>
+          <a:effectRef idx="2">
+            <a:schemeClr val="accent1"/>
+          </a:effectRef>
+          <a:fontRef idx="minor">
+            <a:schemeClr val="lt1"/>
+          </a:fontRef>
+        </p:style>
+        <p:txBody>
+          <a:bodyPr rtlCol="0" anchor="ctr"/>
+          <a:lstStyle/>
+          <a:p>
+            <a:pPr algn="ctr"/>
+          </a:p>
+        </p:txBody>
+      </p:sp>
+      <p:sp>
+        <p:nvSpPr>
+          <p:cNvPr id="20" name="TextBox 19"/>
+          <p:cNvSpPr txBox="1"/>
+          <p:nvPr/>
+        </p:nvSpPr>
+        <p:spPr>
+          <a:xfrm>
+            <a:off x="8675043" y="1051560"/>
+            <a:ext cx="1345474" cy="777240"/>
+          </a:xfrm>
+          <a:prstGeom prst="rect">
+            <a:avLst/>
+          </a:prstGeom>
+          <a:noFill/>
+        </p:spPr>
+        <p:txBody>
+          <a:bodyPr wrap="square" lIns="36576" rIns="36576" tIns="18288" bIns="18288" anchor="ctr">
+            <a:spAutoFit/>
+          </a:bodyPr>
+          <a:lstStyle/>
+          <a:p>
+            <a:pPr algn="ctr">
+              <a:lnSpc>
+                <a:spcPct val="100000"/>
+              </a:lnSpc>
+              <a:spcAft>
+                <a:spcPts val="0"/>
+              </a:spcAft>
+            </a:pPr>
+            <a:r>
+              <a:rPr sz="1300" b="1" i="0">
+                <a:solidFill>
+                  <a:srgbClr val="1E293B"/>
+                </a:solidFill>
+                <a:latin typeface="Calibri"/>
+              </a:rPr>
+              <a:t>Smoke,</a:t>
+            </a:r>
+          </a:p>
+          <a:p>
+            <a:pPr algn="ctr">
+              <a:lnSpc>
+                <a:spcPct val="100000"/>
+              </a:lnSpc>
+              <a:spcAft>
+                <a:spcPts val="0"/>
+              </a:spcAft>
+            </a:pPr>
+            <a:r>
+              <a:rPr sz="1300" b="1" i="0">
+                <a:solidFill>
+                  <a:srgbClr val="1E293B"/>
+                </a:solidFill>
+                <a:latin typeface="Calibri"/>
+              </a:rPr>
+              <a:t>fire</a:t>
+            </a:r>
+          </a:p>
+        </p:txBody>
+      </p:sp>
+      <p:sp>
+        <p:nvSpPr>
+          <p:cNvPr id="21" name="Chevron 20"/>
+          <p:cNvSpPr/>
+          <p:nvPr/>
+        </p:nvSpPr>
+        <p:spPr>
+          <a:xfrm>
+            <a:off x="9993085" y="1051560"/>
+            <a:ext cx="1711234" cy="777240"/>
+          </a:xfrm>
+          <a:prstGeom prst="chevron">
+            <a:avLst>
+              <a:gd name="adj" fmla="val 28000"/>
+            </a:avLst>
+          </a:prstGeom>
+          <a:solidFill>
+            <a:srgbClr val="E6F4F2"/>
+          </a:solidFill>
+          <a:ln w="12700">
+            <a:solidFill>
+              <a:srgbClr val="0F8F85"/>
+            </a:solidFill>
+          </a:ln>
+          <a:effectLst>
+            <a:outerShdw blurRad="63500" dist="12700" dir="5400000" algn="t" rotWithShape="0">
+              <a:srgbClr val="0B1220">
+                <a:alpha val="12000"/>
+              </a:srgbClr>
+            </a:outerShdw>
+          </a:effectLst>
+        </p:spPr>
+        <p:style>
+          <a:lnRef idx="1">
+            <a:schemeClr val="accent1"/>
+          </a:lnRef>
+          <a:fillRef idx="3">
+            <a:schemeClr val="accent1"/>
+          </a:fillRef>
+          <a:effectRef idx="2">
+            <a:schemeClr val="accent1"/>
+          </a:effectRef>
+          <a:fontRef idx="minor">
+            <a:schemeClr val="lt1"/>
+          </a:fontRef>
+        </p:style>
+        <p:txBody>
+          <a:bodyPr rtlCol="0" anchor="ctr"/>
+          <a:lstStyle/>
+          <a:p>
+            <a:pPr algn="ctr"/>
+          </a:p>
+        </p:txBody>
+      </p:sp>
+      <p:sp>
+        <p:nvSpPr>
+          <p:cNvPr id="22" name="TextBox 21"/>
+          <p:cNvSpPr txBox="1"/>
+          <p:nvPr/>
+        </p:nvSpPr>
+        <p:spPr>
+          <a:xfrm>
+            <a:off x="10249117" y="1051560"/>
+            <a:ext cx="1345474" cy="777240"/>
+          </a:xfrm>
+          <a:prstGeom prst="rect">
+            <a:avLst/>
+          </a:prstGeom>
+          <a:noFill/>
+        </p:spPr>
+        <p:txBody>
+          <a:bodyPr wrap="square" lIns="36576" rIns="36576" tIns="18288" bIns="18288" anchor="ctr">
+            <a:spAutoFit/>
+          </a:bodyPr>
+          <a:lstStyle/>
+          <a:p>
+            <a:pPr algn="ctr">
+              <a:lnSpc>
+                <a:spcPct val="100000"/>
+              </a:lnSpc>
+              <a:spcAft>
+                <a:spcPts val="0"/>
+              </a:spcAft>
+            </a:pPr>
+            <a:r>
+              <a:rPr sz="1300" b="1" i="0">
+                <a:solidFill>
+                  <a:srgbClr val="1E293B"/>
+                </a:solidFill>
+                <a:latin typeface="Calibri"/>
+              </a:rPr>
+              <a:t>Bloom, ACES,</a:t>
+            </a:r>
+          </a:p>
+          <a:p>
+            <a:pPr algn="ctr">
+              <a:lnSpc>
+                <a:spcPct val="100000"/>
+              </a:lnSpc>
+              <a:spcAft>
+                <a:spcPts val="0"/>
+              </a:spcAft>
+            </a:pPr>
+            <a:r>
+              <a:rPr sz="1300" b="1" i="0">
+                <a:solidFill>
+                  <a:srgbClr val="1E293B"/>
+                </a:solidFill>
+                <a:latin typeface="Calibri"/>
+              </a:rPr>
+              <a:t>FXAA</a:t>
+            </a:r>
+          </a:p>
+        </p:txBody>
+      </p:sp>
+      <p:sp>
+        <p:nvSpPr>
+          <p:cNvPr id="23" name="TextBox 22"/>
+          <p:cNvSpPr txBox="1"/>
+          <p:nvPr/>
+        </p:nvSpPr>
+        <p:spPr>
+          <a:xfrm>
+            <a:off x="548640" y="2011680"/>
+            <a:ext cx="6309360" cy="822960"/>
+          </a:xfrm>
+          <a:prstGeom prst="rect">
+            <a:avLst/>
+          </a:prstGeom>
+          <a:noFill/>
+        </p:spPr>
+        <p:txBody>
+          <a:bodyPr wrap="square" lIns="36576" rIns="36576" tIns="18288" bIns="18288" anchor="t">
+            <a:spAutoFit/>
+          </a:bodyPr>
+          <a:lstStyle/>
+          <a:p>
+            <a:pPr algn="l">
+              <a:lnSpc>
+                <a:spcPct val="100000"/>
+              </a:lnSpc>
+              <a:spcAft>
+                <a:spcPts val="400"/>
+              </a:spcAft>
+            </a:pPr>
+            <a:r>
+              <a:rPr sz="1700" b="1" i="0">
+                <a:solidFill>
+                  <a:srgbClr val="0F8F85"/>
+                </a:solidFill>
+                <a:latin typeface="Calibri"/>
+              </a:rPr>
+              <a:t>Deferred shading: </a:t>
+            </a:r>
+            <a:r>
+              <a:rPr sz="1700" b="0" i="0">
+                <a:solidFill>
+                  <a:srgbClr val="1E293B"/>
+                </a:solidFill>
+                <a:latin typeface="Calibri"/>
+              </a:rPr>
+              <a:t>store colour, normal, shininess and depth first, then light each pixel once.</a:t>
+            </a:r>
+          </a:p>
+        </p:txBody>
+      </p:sp>
+      <p:sp>
+        <p:nvSpPr>
+          <p:cNvPr id="24" name="Rounded Rectangle 23"/>
+          <p:cNvSpPr/>
+          <p:nvPr/>
+        </p:nvSpPr>
+        <p:spPr>
+          <a:xfrm>
+            <a:off x="548640" y="2880360"/>
+            <a:ext cx="6309360" cy="1737360"/>
           </a:xfrm>
           <a:prstGeom prst="roundRect">
             <a:avLst>
-              <a:gd name="adj" fmla="val 6000"/>
+              <a:gd name="adj" fmla="val 4000"/>
             </a:avLst>
           </a:prstGeom>
           <a:solidFill>
@@ -10976,10 +12940,16 @@
           </a:solidFill>
           <a:ln w="9525">
             <a:solidFill>
-              <a:srgbClr val="0F8F85"/>
+              <a:srgbClr val="DDE5EE"/>
             </a:solidFill>
           </a:ln>
-          <a:effectLst/>
+          <a:effectLst>
+            <a:outerShdw blurRad="114300" dist="25400" dir="5400000" algn="t" rotWithShape="0">
+              <a:srgbClr val="0B1220">
+                <a:alpha val="16000"/>
+              </a:srgbClr>
+            </a:outerShdw>
+          </a:effectLst>
         </p:spPr>
         <p:style>
           <a:lnRef idx="1">
@@ -11005,124 +12975,23 @@
       </p:sp>
       <p:sp>
         <p:nvSpPr>
-          <p:cNvPr id="9" name="TextBox 8"/>
-          <p:cNvSpPr txBox="1"/>
-          <p:nvPr/>
-        </p:nvSpPr>
-        <p:spPr>
-          <a:xfrm>
-            <a:off x="548640" y="1097280"/>
-            <a:ext cx="1417320" cy="731520"/>
-          </a:xfrm>
-          <a:prstGeom prst="rect">
-            <a:avLst/>
-          </a:prstGeom>
-          <a:noFill/>
-        </p:spPr>
-        <p:txBody>
-          <a:bodyPr wrap="square" lIns="36576" rIns="36576" tIns="18288" bIns="18288" anchor="ctr">
-            <a:spAutoFit/>
-          </a:bodyPr>
-          <a:lstStyle/>
-          <a:p>
-            <a:pPr algn="ctr">
-              <a:lnSpc>
-                <a:spcPct val="100000"/>
-              </a:lnSpc>
-              <a:spcAft>
-                <a:spcPts val="0"/>
-              </a:spcAft>
-            </a:pPr>
-            <a:r>
-              <a:rPr sz="1300" b="0" i="0">
-                <a:solidFill>
-                  <a:srgbClr val="1E293B"/>
-                </a:solidFill>
-                <a:latin typeface="Calibri"/>
-              </a:rPr>
-              <a:t>Sky</a:t>
-            </a:r>
-          </a:p>
-          <a:p>
-            <a:pPr algn="ctr">
-              <a:lnSpc>
-                <a:spcPct val="100000"/>
-              </a:lnSpc>
-              <a:spcAft>
-                <a:spcPts val="0"/>
-              </a:spcAft>
-            </a:pPr>
-            <a:r>
-              <a:rPr sz="1300" b="0" i="0">
-                <a:solidFill>
-                  <a:srgbClr val="1E293B"/>
-                </a:solidFill>
-                <a:latin typeface="Calibri"/>
-              </a:rPr>
-              <a:t>table</a:t>
-            </a:r>
-          </a:p>
-        </p:txBody>
-      </p:sp>
-      <p:cxnSp>
-        <p:nvCxnSpPr>
-          <p:cNvPr id="10" name="Connector 9"/>
-          <p:cNvCxnSpPr/>
-          <p:nvPr/>
-        </p:nvCxnSpPr>
-        <p:spPr>
-          <a:xfrm>
-            <a:off x="1965960" y="1463040"/>
-            <a:ext cx="182880" cy="0"/>
-          </a:xfrm>
-          <a:prstGeom prst="line">
-            <a:avLst/>
-          </a:prstGeom>
-          <a:ln w="19050">
-            <a:solidFill>
-              <a:srgbClr val="0F8F85"/>
-            </a:solidFill>
-            <a:tailEnd type="triangle"/>
-          </a:ln>
-        </p:spPr>
-        <p:style>
-          <a:lnRef idx="2">
-            <a:schemeClr val="accent1"/>
-          </a:lnRef>
-          <a:fillRef idx="0">
-            <a:schemeClr val="accent1"/>
-          </a:fillRef>
-          <a:effectRef idx="1">
-            <a:schemeClr val="accent1"/>
-          </a:effectRef>
-          <a:fontRef idx="minor">
-            <a:schemeClr val="tx1"/>
-          </a:fontRef>
-        </p:style>
-      </p:cxnSp>
-      <p:sp>
-        <p:nvSpPr>
-          <p:cNvPr id="11" name="Rounded Rectangle 10"/>
+          <p:cNvPr id="25" name="Rectangle 24"/>
           <p:cNvSpPr/>
           <p:nvPr/>
         </p:nvSpPr>
         <p:spPr>
           <a:xfrm>
-            <a:off x="2148840" y="1097280"/>
-            <a:ext cx="1417320" cy="731520"/>
-          </a:xfrm>
-          <a:prstGeom prst="roundRect">
-            <a:avLst>
-              <a:gd name="adj" fmla="val 6000"/>
-            </a:avLst>
+            <a:off x="548640" y="2990088"/>
+            <a:ext cx="64008" cy="1517904"/>
+          </a:xfrm>
+          <a:prstGeom prst="rect">
+            <a:avLst/>
           </a:prstGeom>
           <a:solidFill>
-            <a:srgbClr val="FFFFFF"/>
+            <a:srgbClr val="0F8F85"/>
           </a:solidFill>
-          <a:ln w="9525">
-            <a:solidFill>
-              <a:srgbClr val="0F8F85"/>
-            </a:solidFill>
+          <a:ln>
+            <a:noFill/>
           </a:ln>
           <a:effectLst/>
         </p:spPr>
@@ -11150,781 +13019,14 @@
       </p:sp>
       <p:sp>
         <p:nvSpPr>
-          <p:cNvPr id="12" name="TextBox 11"/>
+          <p:cNvPr id="26" name="TextBox 25"/>
           <p:cNvSpPr txBox="1"/>
           <p:nvPr/>
         </p:nvSpPr>
         <p:spPr>
           <a:xfrm>
-            <a:off x="2148840" y="1097280"/>
-            <a:ext cx="1417320" cy="731520"/>
-          </a:xfrm>
-          <a:prstGeom prst="rect">
-            <a:avLst/>
-          </a:prstGeom>
-          <a:noFill/>
-        </p:spPr>
-        <p:txBody>
-          <a:bodyPr wrap="square" lIns="36576" rIns="36576" tIns="18288" bIns="18288" anchor="ctr">
-            <a:spAutoFit/>
-          </a:bodyPr>
-          <a:lstStyle/>
-          <a:p>
-            <a:pPr algn="ctr">
-              <a:lnSpc>
-                <a:spcPct val="100000"/>
-              </a:lnSpc>
-              <a:spcAft>
-                <a:spcPts val="0"/>
-              </a:spcAft>
-            </a:pPr>
-            <a:r>
-              <a:rPr sz="1300" b="0" i="0">
-                <a:solidFill>
-                  <a:srgbClr val="1E293B"/>
-                </a:solidFill>
-                <a:latin typeface="Calibri"/>
-              </a:rPr>
-              <a:t>Shadows</a:t>
-            </a:r>
-          </a:p>
-          <a:p>
-            <a:pPr algn="ctr">
-              <a:lnSpc>
-                <a:spcPct val="100000"/>
-              </a:lnSpc>
-              <a:spcAft>
-                <a:spcPts val="0"/>
-              </a:spcAft>
-            </a:pPr>
-            <a:r>
-              <a:rPr sz="1300" b="0" i="0">
-                <a:solidFill>
-                  <a:srgbClr val="1E293B"/>
-                </a:solidFill>
-                <a:latin typeface="Calibri"/>
-              </a:rPr>
-              <a:t>3 cascades</a:t>
-            </a:r>
-          </a:p>
-        </p:txBody>
-      </p:sp>
-      <p:cxnSp>
-        <p:nvCxnSpPr>
-          <p:cNvPr id="13" name="Connector 12"/>
-          <p:cNvCxnSpPr/>
-          <p:nvPr/>
-        </p:nvCxnSpPr>
-        <p:spPr>
-          <a:xfrm>
-            <a:off x="3566160" y="1463040"/>
-            <a:ext cx="182880" cy="0"/>
-          </a:xfrm>
-          <a:prstGeom prst="line">
-            <a:avLst/>
-          </a:prstGeom>
-          <a:ln w="19050">
-            <a:solidFill>
-              <a:srgbClr val="0F8F85"/>
-            </a:solidFill>
-            <a:tailEnd type="triangle"/>
-          </a:ln>
-        </p:spPr>
-        <p:style>
-          <a:lnRef idx="2">
-            <a:schemeClr val="accent1"/>
-          </a:lnRef>
-          <a:fillRef idx="0">
-            <a:schemeClr val="accent1"/>
-          </a:fillRef>
-          <a:effectRef idx="1">
-            <a:schemeClr val="accent1"/>
-          </a:effectRef>
-          <a:fontRef idx="minor">
-            <a:schemeClr val="tx1"/>
-          </a:fontRef>
-        </p:style>
-      </p:cxnSp>
-      <p:sp>
-        <p:nvSpPr>
-          <p:cNvPr id="14" name="Rounded Rectangle 13"/>
-          <p:cNvSpPr/>
-          <p:nvPr/>
-        </p:nvSpPr>
-        <p:spPr>
-          <a:xfrm>
-            <a:off x="3749039" y="1097280"/>
-            <a:ext cx="1417320" cy="731520"/>
-          </a:xfrm>
-          <a:prstGeom prst="roundRect">
-            <a:avLst>
-              <a:gd name="adj" fmla="val 6000"/>
-            </a:avLst>
-          </a:prstGeom>
-          <a:solidFill>
-            <a:srgbClr val="FFFFFF"/>
-          </a:solidFill>
-          <a:ln w="9525">
-            <a:solidFill>
-              <a:srgbClr val="0F8F85"/>
-            </a:solidFill>
-          </a:ln>
-          <a:effectLst/>
-        </p:spPr>
-        <p:style>
-          <a:lnRef idx="1">
-            <a:schemeClr val="accent1"/>
-          </a:lnRef>
-          <a:fillRef idx="3">
-            <a:schemeClr val="accent1"/>
-          </a:fillRef>
-          <a:effectRef idx="2">
-            <a:schemeClr val="accent1"/>
-          </a:effectRef>
-          <a:fontRef idx="minor">
-            <a:schemeClr val="lt1"/>
-          </a:fontRef>
-        </p:style>
-        <p:txBody>
-          <a:bodyPr rtlCol="0" anchor="ctr"/>
-          <a:lstStyle/>
-          <a:p>
-            <a:pPr algn="ctr"/>
-          </a:p>
-        </p:txBody>
-      </p:sp>
-      <p:sp>
-        <p:nvSpPr>
-          <p:cNvPr id="15" name="TextBox 14"/>
-          <p:cNvSpPr txBox="1"/>
-          <p:nvPr/>
-        </p:nvSpPr>
-        <p:spPr>
-          <a:xfrm>
-            <a:off x="3749039" y="1097280"/>
-            <a:ext cx="1417320" cy="731520"/>
-          </a:xfrm>
-          <a:prstGeom prst="rect">
-            <a:avLst/>
-          </a:prstGeom>
-          <a:noFill/>
-        </p:spPr>
-        <p:txBody>
-          <a:bodyPr wrap="square" lIns="36576" rIns="36576" tIns="18288" bIns="18288" anchor="ctr">
-            <a:spAutoFit/>
-          </a:bodyPr>
-          <a:lstStyle/>
-          <a:p>
-            <a:pPr algn="ctr">
-              <a:lnSpc>
-                <a:spcPct val="100000"/>
-              </a:lnSpc>
-              <a:spcAft>
-                <a:spcPts val="0"/>
-              </a:spcAft>
-            </a:pPr>
-            <a:r>
-              <a:rPr sz="1300" b="0" i="0">
-                <a:solidFill>
-                  <a:srgbClr val="1E293B"/>
-                </a:solidFill>
-                <a:latin typeface="Calibri"/>
-              </a:rPr>
-              <a:t>Geometry</a:t>
-            </a:r>
-          </a:p>
-          <a:p>
-            <a:pPr algn="ctr">
-              <a:lnSpc>
-                <a:spcPct val="100000"/>
-              </a:lnSpc>
-              <a:spcAft>
-                <a:spcPts val="0"/>
-              </a:spcAft>
-            </a:pPr>
-            <a:r>
-              <a:rPr sz="1300" b="0" i="0">
-                <a:solidFill>
-                  <a:srgbClr val="1E293B"/>
-                </a:solidFill>
-                <a:latin typeface="Calibri"/>
-              </a:rPr>
-              <a:t>G-buffer</a:t>
-            </a:r>
-          </a:p>
-        </p:txBody>
-      </p:sp>
-      <p:cxnSp>
-        <p:nvCxnSpPr>
-          <p:cNvPr id="16" name="Connector 15"/>
-          <p:cNvCxnSpPr/>
-          <p:nvPr/>
-        </p:nvCxnSpPr>
-        <p:spPr>
-          <a:xfrm>
-            <a:off x="5166359" y="1463040"/>
-            <a:ext cx="182881" cy="0"/>
-          </a:xfrm>
-          <a:prstGeom prst="line">
-            <a:avLst/>
-          </a:prstGeom>
-          <a:ln w="19050">
-            <a:solidFill>
-              <a:srgbClr val="0F8F85"/>
-            </a:solidFill>
-            <a:tailEnd type="triangle"/>
-          </a:ln>
-        </p:spPr>
-        <p:style>
-          <a:lnRef idx="2">
-            <a:schemeClr val="accent1"/>
-          </a:lnRef>
-          <a:fillRef idx="0">
-            <a:schemeClr val="accent1"/>
-          </a:fillRef>
-          <a:effectRef idx="1">
-            <a:schemeClr val="accent1"/>
-          </a:effectRef>
-          <a:fontRef idx="minor">
-            <a:schemeClr val="tx1"/>
-          </a:fontRef>
-        </p:style>
-      </p:cxnSp>
-      <p:sp>
-        <p:nvSpPr>
-          <p:cNvPr id="17" name="Rounded Rectangle 16"/>
-          <p:cNvSpPr/>
-          <p:nvPr/>
-        </p:nvSpPr>
-        <p:spPr>
-          <a:xfrm>
-            <a:off x="5349240" y="1097280"/>
-            <a:ext cx="1417320" cy="731520"/>
-          </a:xfrm>
-          <a:prstGeom prst="roundRect">
-            <a:avLst>
-              <a:gd name="adj" fmla="val 6000"/>
-            </a:avLst>
-          </a:prstGeom>
-          <a:solidFill>
-            <a:srgbClr val="FFFFFF"/>
-          </a:solidFill>
-          <a:ln w="9525">
-            <a:solidFill>
-              <a:srgbClr val="0F8F85"/>
-            </a:solidFill>
-          </a:ln>
-          <a:effectLst/>
-        </p:spPr>
-        <p:style>
-          <a:lnRef idx="1">
-            <a:schemeClr val="accent1"/>
-          </a:lnRef>
-          <a:fillRef idx="3">
-            <a:schemeClr val="accent1"/>
-          </a:fillRef>
-          <a:effectRef idx="2">
-            <a:schemeClr val="accent1"/>
-          </a:effectRef>
-          <a:fontRef idx="minor">
-            <a:schemeClr val="lt1"/>
-          </a:fontRef>
-        </p:style>
-        <p:txBody>
-          <a:bodyPr rtlCol="0" anchor="ctr"/>
-          <a:lstStyle/>
-          <a:p>
-            <a:pPr algn="ctr"/>
-          </a:p>
-        </p:txBody>
-      </p:sp>
-      <p:sp>
-        <p:nvSpPr>
-          <p:cNvPr id="18" name="TextBox 17"/>
-          <p:cNvSpPr txBox="1"/>
-          <p:nvPr/>
-        </p:nvSpPr>
-        <p:spPr>
-          <a:xfrm>
-            <a:off x="5349240" y="1097280"/>
-            <a:ext cx="1417320" cy="731520"/>
-          </a:xfrm>
-          <a:prstGeom prst="rect">
-            <a:avLst/>
-          </a:prstGeom>
-          <a:noFill/>
-        </p:spPr>
-        <p:txBody>
-          <a:bodyPr wrap="square" lIns="36576" rIns="36576" tIns="18288" bIns="18288" anchor="ctr">
-            <a:spAutoFit/>
-          </a:bodyPr>
-          <a:lstStyle/>
-          <a:p>
-            <a:pPr algn="ctr">
-              <a:lnSpc>
-                <a:spcPct val="100000"/>
-              </a:lnSpc>
-              <a:spcAft>
-                <a:spcPts val="0"/>
-              </a:spcAft>
-            </a:pPr>
-            <a:r>
-              <a:rPr sz="1300" b="0" i="0">
-                <a:solidFill>
-                  <a:srgbClr val="1E293B"/>
-                </a:solidFill>
-                <a:latin typeface="Calibri"/>
-              </a:rPr>
-              <a:t>SSAO</a:t>
-            </a:r>
-          </a:p>
-        </p:txBody>
-      </p:sp>
-      <p:cxnSp>
-        <p:nvCxnSpPr>
-          <p:cNvPr id="19" name="Connector 18"/>
-          <p:cNvCxnSpPr/>
-          <p:nvPr/>
-        </p:nvCxnSpPr>
-        <p:spPr>
-          <a:xfrm>
-            <a:off x="6766559" y="1463040"/>
-            <a:ext cx="182881" cy="0"/>
-          </a:xfrm>
-          <a:prstGeom prst="line">
-            <a:avLst/>
-          </a:prstGeom>
-          <a:ln w="19050">
-            <a:solidFill>
-              <a:srgbClr val="0F8F85"/>
-            </a:solidFill>
-            <a:tailEnd type="triangle"/>
-          </a:ln>
-        </p:spPr>
-        <p:style>
-          <a:lnRef idx="2">
-            <a:schemeClr val="accent1"/>
-          </a:lnRef>
-          <a:fillRef idx="0">
-            <a:schemeClr val="accent1"/>
-          </a:fillRef>
-          <a:effectRef idx="1">
-            <a:schemeClr val="accent1"/>
-          </a:effectRef>
-          <a:fontRef idx="minor">
-            <a:schemeClr val="tx1"/>
-          </a:fontRef>
-        </p:style>
-      </p:cxnSp>
-      <p:sp>
-        <p:nvSpPr>
-          <p:cNvPr id="20" name="Rounded Rectangle 19"/>
-          <p:cNvSpPr/>
-          <p:nvPr/>
-        </p:nvSpPr>
-        <p:spPr>
-          <a:xfrm>
-            <a:off x="6949440" y="1097280"/>
-            <a:ext cx="1417320" cy="731520"/>
-          </a:xfrm>
-          <a:prstGeom prst="roundRect">
-            <a:avLst>
-              <a:gd name="adj" fmla="val 6000"/>
-            </a:avLst>
-          </a:prstGeom>
-          <a:solidFill>
-            <a:srgbClr val="FFFFFF"/>
-          </a:solidFill>
-          <a:ln w="9525">
-            <a:solidFill>
-              <a:srgbClr val="0F8F85"/>
-            </a:solidFill>
-          </a:ln>
-          <a:effectLst/>
-        </p:spPr>
-        <p:style>
-          <a:lnRef idx="1">
-            <a:schemeClr val="accent1"/>
-          </a:lnRef>
-          <a:fillRef idx="3">
-            <a:schemeClr val="accent1"/>
-          </a:fillRef>
-          <a:effectRef idx="2">
-            <a:schemeClr val="accent1"/>
-          </a:effectRef>
-          <a:fontRef idx="minor">
-            <a:schemeClr val="lt1"/>
-          </a:fontRef>
-        </p:style>
-        <p:txBody>
-          <a:bodyPr rtlCol="0" anchor="ctr"/>
-          <a:lstStyle/>
-          <a:p>
-            <a:pPr algn="ctr"/>
-          </a:p>
-        </p:txBody>
-      </p:sp>
-      <p:sp>
-        <p:nvSpPr>
-          <p:cNvPr id="21" name="TextBox 20"/>
-          <p:cNvSpPr txBox="1"/>
-          <p:nvPr/>
-        </p:nvSpPr>
-        <p:spPr>
-          <a:xfrm>
-            <a:off x="6949440" y="1097280"/>
-            <a:ext cx="1417320" cy="731520"/>
-          </a:xfrm>
-          <a:prstGeom prst="rect">
-            <a:avLst/>
-          </a:prstGeom>
-          <a:noFill/>
-        </p:spPr>
-        <p:txBody>
-          <a:bodyPr wrap="square" lIns="36576" rIns="36576" tIns="18288" bIns="18288" anchor="ctr">
-            <a:spAutoFit/>
-          </a:bodyPr>
-          <a:lstStyle/>
-          <a:p>
-            <a:pPr algn="ctr">
-              <a:lnSpc>
-                <a:spcPct val="100000"/>
-              </a:lnSpc>
-              <a:spcAft>
-                <a:spcPts val="0"/>
-              </a:spcAft>
-            </a:pPr>
-            <a:r>
-              <a:rPr sz="1300" b="0" i="0">
-                <a:solidFill>
-                  <a:srgbClr val="1E293B"/>
-                </a:solidFill>
-                <a:latin typeface="Calibri"/>
-              </a:rPr>
-              <a:t>Lighting,</a:t>
-            </a:r>
-          </a:p>
-          <a:p>
-            <a:pPr algn="ctr">
-              <a:lnSpc>
-                <a:spcPct val="100000"/>
-              </a:lnSpc>
-              <a:spcAft>
-                <a:spcPts val="0"/>
-              </a:spcAft>
-            </a:pPr>
-            <a:r>
-              <a:rPr sz="1300" b="0" i="0">
-                <a:solidFill>
-                  <a:srgbClr val="1E293B"/>
-                </a:solidFill>
-                <a:latin typeface="Calibri"/>
-              </a:rPr>
-              <a:t>reflect, fog</a:t>
-            </a:r>
-          </a:p>
-        </p:txBody>
-      </p:sp>
-      <p:cxnSp>
-        <p:nvCxnSpPr>
-          <p:cNvPr id="22" name="Connector 21"/>
-          <p:cNvCxnSpPr/>
-          <p:nvPr/>
-        </p:nvCxnSpPr>
-        <p:spPr>
-          <a:xfrm>
-            <a:off x="8366760" y="1463040"/>
-            <a:ext cx="182880" cy="0"/>
-          </a:xfrm>
-          <a:prstGeom prst="line">
-            <a:avLst/>
-          </a:prstGeom>
-          <a:ln w="19050">
-            <a:solidFill>
-              <a:srgbClr val="0F8F85"/>
-            </a:solidFill>
-            <a:tailEnd type="triangle"/>
-          </a:ln>
-        </p:spPr>
-        <p:style>
-          <a:lnRef idx="2">
-            <a:schemeClr val="accent1"/>
-          </a:lnRef>
-          <a:fillRef idx="0">
-            <a:schemeClr val="accent1"/>
-          </a:fillRef>
-          <a:effectRef idx="1">
-            <a:schemeClr val="accent1"/>
-          </a:effectRef>
-          <a:fontRef idx="minor">
-            <a:schemeClr val="tx1"/>
-          </a:fontRef>
-        </p:style>
-      </p:cxnSp>
-      <p:sp>
-        <p:nvSpPr>
-          <p:cNvPr id="23" name="Rounded Rectangle 22"/>
-          <p:cNvSpPr/>
-          <p:nvPr/>
-        </p:nvSpPr>
-        <p:spPr>
-          <a:xfrm>
-            <a:off x="8549640" y="1097280"/>
-            <a:ext cx="1417320" cy="731520"/>
-          </a:xfrm>
-          <a:prstGeom prst="roundRect">
-            <a:avLst>
-              <a:gd name="adj" fmla="val 6000"/>
-            </a:avLst>
-          </a:prstGeom>
-          <a:solidFill>
-            <a:srgbClr val="FFFFFF"/>
-          </a:solidFill>
-          <a:ln w="9525">
-            <a:solidFill>
-              <a:srgbClr val="0F8F85"/>
-            </a:solidFill>
-          </a:ln>
-          <a:effectLst/>
-        </p:spPr>
-        <p:style>
-          <a:lnRef idx="1">
-            <a:schemeClr val="accent1"/>
-          </a:lnRef>
-          <a:fillRef idx="3">
-            <a:schemeClr val="accent1"/>
-          </a:fillRef>
-          <a:effectRef idx="2">
-            <a:schemeClr val="accent1"/>
-          </a:effectRef>
-          <a:fontRef idx="minor">
-            <a:schemeClr val="lt1"/>
-          </a:fontRef>
-        </p:style>
-        <p:txBody>
-          <a:bodyPr rtlCol="0" anchor="ctr"/>
-          <a:lstStyle/>
-          <a:p>
-            <a:pPr algn="ctr"/>
-          </a:p>
-        </p:txBody>
-      </p:sp>
-      <p:sp>
-        <p:nvSpPr>
-          <p:cNvPr id="24" name="TextBox 23"/>
-          <p:cNvSpPr txBox="1"/>
-          <p:nvPr/>
-        </p:nvSpPr>
-        <p:spPr>
-          <a:xfrm>
-            <a:off x="8549640" y="1097280"/>
-            <a:ext cx="1417320" cy="731520"/>
-          </a:xfrm>
-          <a:prstGeom prst="rect">
-            <a:avLst/>
-          </a:prstGeom>
-          <a:noFill/>
-        </p:spPr>
-        <p:txBody>
-          <a:bodyPr wrap="square" lIns="36576" rIns="36576" tIns="18288" bIns="18288" anchor="ctr">
-            <a:spAutoFit/>
-          </a:bodyPr>
-          <a:lstStyle/>
-          <a:p>
-            <a:pPr algn="ctr">
-              <a:lnSpc>
-                <a:spcPct val="100000"/>
-              </a:lnSpc>
-              <a:spcAft>
-                <a:spcPts val="0"/>
-              </a:spcAft>
-            </a:pPr>
-            <a:r>
-              <a:rPr sz="1300" b="0" i="0">
-                <a:solidFill>
-                  <a:srgbClr val="1E293B"/>
-                </a:solidFill>
-                <a:latin typeface="Calibri"/>
-              </a:rPr>
-              <a:t>Smoke,</a:t>
-            </a:r>
-          </a:p>
-          <a:p>
-            <a:pPr algn="ctr">
-              <a:lnSpc>
-                <a:spcPct val="100000"/>
-              </a:lnSpc>
-              <a:spcAft>
-                <a:spcPts val="0"/>
-              </a:spcAft>
-            </a:pPr>
-            <a:r>
-              <a:rPr sz="1300" b="0" i="0">
-                <a:solidFill>
-                  <a:srgbClr val="1E293B"/>
-                </a:solidFill>
-                <a:latin typeface="Calibri"/>
-              </a:rPr>
-              <a:t>fire</a:t>
-            </a:r>
-          </a:p>
-        </p:txBody>
-      </p:sp>
-      <p:cxnSp>
-        <p:nvCxnSpPr>
-          <p:cNvPr id="25" name="Connector 24"/>
-          <p:cNvCxnSpPr/>
-          <p:nvPr/>
-        </p:nvCxnSpPr>
-        <p:spPr>
-          <a:xfrm>
-            <a:off x="9966960" y="1463040"/>
-            <a:ext cx="182880" cy="0"/>
-          </a:xfrm>
-          <a:prstGeom prst="line">
-            <a:avLst/>
-          </a:prstGeom>
-          <a:ln w="19050">
-            <a:solidFill>
-              <a:srgbClr val="0F8F85"/>
-            </a:solidFill>
-            <a:tailEnd type="triangle"/>
-          </a:ln>
-        </p:spPr>
-        <p:style>
-          <a:lnRef idx="2">
-            <a:schemeClr val="accent1"/>
-          </a:lnRef>
-          <a:fillRef idx="0">
-            <a:schemeClr val="accent1"/>
-          </a:fillRef>
-          <a:effectRef idx="1">
-            <a:schemeClr val="accent1"/>
-          </a:effectRef>
-          <a:fontRef idx="minor">
-            <a:schemeClr val="tx1"/>
-          </a:fontRef>
-        </p:style>
-      </p:cxnSp>
-      <p:sp>
-        <p:nvSpPr>
-          <p:cNvPr id="26" name="Rounded Rectangle 25"/>
-          <p:cNvSpPr/>
-          <p:nvPr/>
-        </p:nvSpPr>
-        <p:spPr>
-          <a:xfrm>
-            <a:off x="10149840" y="1097280"/>
-            <a:ext cx="1417320" cy="731520"/>
-          </a:xfrm>
-          <a:prstGeom prst="roundRect">
-            <a:avLst>
-              <a:gd name="adj" fmla="val 6000"/>
-            </a:avLst>
-          </a:prstGeom>
-          <a:solidFill>
-            <a:srgbClr val="FFFFFF"/>
-          </a:solidFill>
-          <a:ln w="9525">
-            <a:solidFill>
-              <a:srgbClr val="0F8F85"/>
-            </a:solidFill>
-          </a:ln>
-          <a:effectLst/>
-        </p:spPr>
-        <p:style>
-          <a:lnRef idx="1">
-            <a:schemeClr val="accent1"/>
-          </a:lnRef>
-          <a:fillRef idx="3">
-            <a:schemeClr val="accent1"/>
-          </a:fillRef>
-          <a:effectRef idx="2">
-            <a:schemeClr val="accent1"/>
-          </a:effectRef>
-          <a:fontRef idx="minor">
-            <a:schemeClr val="lt1"/>
-          </a:fontRef>
-        </p:style>
-        <p:txBody>
-          <a:bodyPr rtlCol="0" anchor="ctr"/>
-          <a:lstStyle/>
-          <a:p>
-            <a:pPr algn="ctr"/>
-          </a:p>
-        </p:txBody>
-      </p:sp>
-      <p:sp>
-        <p:nvSpPr>
-          <p:cNvPr id="27" name="TextBox 26"/>
-          <p:cNvSpPr txBox="1"/>
-          <p:nvPr/>
-        </p:nvSpPr>
-        <p:spPr>
-          <a:xfrm>
-            <a:off x="10149840" y="1097280"/>
-            <a:ext cx="1417320" cy="731520"/>
-          </a:xfrm>
-          <a:prstGeom prst="rect">
-            <a:avLst/>
-          </a:prstGeom>
-          <a:noFill/>
-        </p:spPr>
-        <p:txBody>
-          <a:bodyPr wrap="square" lIns="36576" rIns="36576" tIns="18288" bIns="18288" anchor="ctr">
-            <a:spAutoFit/>
-          </a:bodyPr>
-          <a:lstStyle/>
-          <a:p>
-            <a:pPr algn="ctr">
-              <a:lnSpc>
-                <a:spcPct val="100000"/>
-              </a:lnSpc>
-              <a:spcAft>
-                <a:spcPts val="0"/>
-              </a:spcAft>
-            </a:pPr>
-            <a:r>
-              <a:rPr sz="1300" b="0" i="0">
-                <a:solidFill>
-                  <a:srgbClr val="1E293B"/>
-                </a:solidFill>
-                <a:latin typeface="Calibri"/>
-              </a:rPr>
-              <a:t>Bloom, ACES,</a:t>
-            </a:r>
-          </a:p>
-          <a:p>
-            <a:pPr algn="ctr">
-              <a:lnSpc>
-                <a:spcPct val="100000"/>
-              </a:lnSpc>
-              <a:spcAft>
-                <a:spcPts val="0"/>
-              </a:spcAft>
-            </a:pPr>
-            <a:r>
-              <a:rPr sz="1300" b="0" i="0">
-                <a:solidFill>
-                  <a:srgbClr val="1E293B"/>
-                </a:solidFill>
-                <a:latin typeface="Calibri"/>
-              </a:rPr>
-              <a:t>FXAA</a:t>
-            </a:r>
-          </a:p>
-        </p:txBody>
-      </p:sp>
-      <p:sp>
-        <p:nvSpPr>
-          <p:cNvPr id="28" name="TextBox 27"/>
-          <p:cNvSpPr txBox="1"/>
-          <p:nvPr/>
-        </p:nvSpPr>
-        <p:spPr>
-          <a:xfrm>
-            <a:off x="548640" y="2011680"/>
-            <a:ext cx="6309360" cy="868680"/>
+            <a:off x="777240" y="2971800"/>
+            <a:ext cx="5943600" cy="347472"/>
           </a:xfrm>
           <a:prstGeom prst="rect">
             <a:avLst/>
@@ -11946,119 +13048,20 @@
               </a:spcAft>
             </a:pPr>
             <a:r>
-              <a:rPr sz="1600" b="1" i="0">
-                <a:solidFill>
-                  <a:srgbClr val="1E293B"/>
-                </a:solidFill>
-                <a:latin typeface="Calibri"/>
-              </a:rPr>
-              <a:t>Deferred shading: </a:t>
-            </a:r>
-            <a:r>
-              <a:rPr sz="1600" b="0" i="0">
-                <a:solidFill>
-                  <a:srgbClr val="1E293B"/>
-                </a:solidFill>
-                <a:latin typeface="Calibri"/>
-              </a:rPr>
-              <a:t>store colour, normal, shininess and depth first, then light each pixel once.</a:t>
-            </a:r>
-          </a:p>
-        </p:txBody>
-      </p:sp>
-      <p:sp>
-        <p:nvSpPr>
-          <p:cNvPr id="29" name="Rounded Rectangle 28"/>
-          <p:cNvSpPr/>
-          <p:nvPr/>
-        </p:nvSpPr>
-        <p:spPr>
-          <a:xfrm>
-            <a:off x="548640" y="2926080"/>
-            <a:ext cx="6309360" cy="3429000"/>
-          </a:xfrm>
-          <a:prstGeom prst="roundRect">
-            <a:avLst>
-              <a:gd name="adj" fmla="val 6000"/>
-            </a:avLst>
-          </a:prstGeom>
-          <a:solidFill>
-            <a:srgbClr val="FFFFFF"/>
-          </a:solidFill>
-          <a:ln w="9525">
-            <a:solidFill>
-              <a:srgbClr val="D5DEE8"/>
-            </a:solidFill>
-          </a:ln>
-          <a:effectLst/>
-        </p:spPr>
-        <p:style>
-          <a:lnRef idx="1">
-            <a:schemeClr val="accent1"/>
-          </a:lnRef>
-          <a:fillRef idx="3">
-            <a:schemeClr val="accent1"/>
-          </a:fillRef>
-          <a:effectRef idx="2">
-            <a:schemeClr val="accent1"/>
-          </a:effectRef>
-          <a:fontRef idx="minor">
-            <a:schemeClr val="lt1"/>
-          </a:fontRef>
-        </p:style>
-        <p:txBody>
-          <a:bodyPr rtlCol="0" anchor="ctr"/>
-          <a:lstStyle/>
-          <a:p>
-            <a:pPr algn="ctr"/>
-          </a:p>
-        </p:txBody>
-      </p:sp>
-      <p:sp>
-        <p:nvSpPr>
-          <p:cNvPr id="30" name="TextBox 29"/>
-          <p:cNvSpPr txBox="1"/>
-          <p:nvPr/>
-        </p:nvSpPr>
-        <p:spPr>
-          <a:xfrm>
-            <a:off x="685800" y="2971800"/>
-            <a:ext cx="5943600" cy="365760"/>
-          </a:xfrm>
-          <a:prstGeom prst="rect">
-            <a:avLst/>
-          </a:prstGeom>
-          <a:noFill/>
-        </p:spPr>
-        <p:txBody>
-          <a:bodyPr wrap="square" lIns="36576" rIns="36576" tIns="18288" bIns="18288" anchor="t">
-            <a:spAutoFit/>
-          </a:bodyPr>
-          <a:lstStyle/>
-          <a:p>
-            <a:pPr algn="l">
-              <a:lnSpc>
-                <a:spcPct val="100000"/>
-              </a:lnSpc>
-              <a:spcAft>
-                <a:spcPts val="400"/>
-              </a:spcAft>
-            </a:pPr>
-            <a:r>
-              <a:rPr sz="1600" b="1" i="0">
+              <a:rPr sz="1200" b="1" i="0">
                 <a:solidFill>
                   <a:srgbClr val="0F8F85"/>
                 </a:solidFill>
                 <a:latin typeface="Calibri"/>
               </a:rPr>
-              <a:t>Cascaded shadow maps (λ = 0.75, N = 3, n = 0.1, r = 100 m)</a:t>
+              <a:t>CASCADED SHADOW MAPS  (Λ = 0.75, N = 3, N = 0.1 M, R = 100 M)</a:t>
             </a:r>
           </a:p>
         </p:txBody>
       </p:sp>
       <p:pic>
         <p:nvPicPr>
-          <p:cNvPr id="31" name="Picture 30" descr="csm.png"/>
+          <p:cNvPr id="27" name="Picture 26" descr="csm.png"/>
           <p:cNvPicPr>
             <a:picLocks noChangeAspect="1"/>
           </p:cNvPicPr>
@@ -12072,8 +13075,8 @@
         </p:blipFill>
         <p:spPr>
           <a:xfrm>
-            <a:off x="822960" y="3383280"/>
-            <a:ext cx="5120640" cy="710891"/>
+            <a:off x="1313044" y="3337560"/>
+            <a:ext cx="4780551" cy="640079"/>
           </a:xfrm>
           <a:prstGeom prst="rect">
             <a:avLst/>
@@ -12082,14 +13085,154 @@
       </p:pic>
       <p:sp>
         <p:nvSpPr>
-          <p:cNvPr id="32" name="TextBox 31"/>
+          <p:cNvPr id="28" name="TextBox 27"/>
           <p:cNvSpPr txBox="1"/>
           <p:nvPr/>
         </p:nvSpPr>
         <p:spPr>
           <a:xfrm>
-            <a:off x="685800" y="4160520"/>
-            <a:ext cx="5943600" cy="640080"/>
+            <a:off x="777240" y="4014215"/>
+            <a:ext cx="5943600" cy="566928"/>
+          </a:xfrm>
+          <a:prstGeom prst="rect">
+            <a:avLst/>
+          </a:prstGeom>
+          <a:noFill/>
+        </p:spPr>
+        <p:txBody>
+          <a:bodyPr wrap="square" lIns="36576" rIns="36576" tIns="18288" bIns="18288" anchor="ctr">
+            <a:spAutoFit/>
+          </a:bodyPr>
+          <a:lstStyle/>
+          <a:p>
+            <a:pPr algn="l">
+              <a:lnSpc>
+                <a:spcPct val="100000"/>
+              </a:lnSpc>
+              <a:spcAft>
+                <a:spcPts val="100"/>
+              </a:spcAft>
+            </a:pPr>
+            <a:r>
+              <a:rPr sz="1300" b="0" i="0">
+                <a:solidFill>
+                  <a:srgbClr val="64748B"/>
+                </a:solidFill>
+                <a:latin typeface="Calibri"/>
+              </a:rPr>
+              <a:t>Cuts at 9.1, 24.2, 100 m · normal-offset lookup · 8 rotated PCF taps</a:t>
+            </a:r>
+          </a:p>
+        </p:txBody>
+      </p:sp>
+      <p:sp>
+        <p:nvSpPr>
+          <p:cNvPr id="29" name="Rounded Rectangle 28"/>
+          <p:cNvSpPr/>
+          <p:nvPr/>
+        </p:nvSpPr>
+        <p:spPr>
+          <a:xfrm>
+            <a:off x="548640" y="4754880"/>
+            <a:ext cx="6309360" cy="1600200"/>
+          </a:xfrm>
+          <a:prstGeom prst="roundRect">
+            <a:avLst>
+              <a:gd name="adj" fmla="val 4000"/>
+            </a:avLst>
+          </a:prstGeom>
+          <a:solidFill>
+            <a:srgbClr val="FFFFFF"/>
+          </a:solidFill>
+          <a:ln w="9525">
+            <a:solidFill>
+              <a:srgbClr val="DDE5EE"/>
+            </a:solidFill>
+          </a:ln>
+          <a:effectLst>
+            <a:outerShdw blurRad="114300" dist="25400" dir="5400000" algn="t" rotWithShape="0">
+              <a:srgbClr val="0B1220">
+                <a:alpha val="16000"/>
+              </a:srgbClr>
+            </a:outerShdw>
+          </a:effectLst>
+        </p:spPr>
+        <p:style>
+          <a:lnRef idx="1">
+            <a:schemeClr val="accent1"/>
+          </a:lnRef>
+          <a:fillRef idx="3">
+            <a:schemeClr val="accent1"/>
+          </a:fillRef>
+          <a:effectRef idx="2">
+            <a:schemeClr val="accent1"/>
+          </a:effectRef>
+          <a:fontRef idx="minor">
+            <a:schemeClr val="lt1"/>
+          </a:fontRef>
+        </p:style>
+        <p:txBody>
+          <a:bodyPr rtlCol="0" anchor="ctr"/>
+          <a:lstStyle/>
+          <a:p>
+            <a:pPr algn="ctr"/>
+          </a:p>
+        </p:txBody>
+      </p:sp>
+      <p:sp>
+        <p:nvSpPr>
+          <p:cNvPr id="30" name="Rectangle 29"/>
+          <p:cNvSpPr/>
+          <p:nvPr/>
+        </p:nvSpPr>
+        <p:spPr>
+          <a:xfrm>
+            <a:off x="548640" y="4864608"/>
+            <a:ext cx="64008" cy="1380744"/>
+          </a:xfrm>
+          <a:prstGeom prst="rect">
+            <a:avLst/>
+          </a:prstGeom>
+          <a:solidFill>
+            <a:srgbClr val="0F8F85"/>
+          </a:solidFill>
+          <a:ln>
+            <a:noFill/>
+          </a:ln>
+          <a:effectLst/>
+        </p:spPr>
+        <p:style>
+          <a:lnRef idx="1">
+            <a:schemeClr val="accent1"/>
+          </a:lnRef>
+          <a:fillRef idx="3">
+            <a:schemeClr val="accent1"/>
+          </a:fillRef>
+          <a:effectRef idx="2">
+            <a:schemeClr val="accent1"/>
+          </a:effectRef>
+          <a:fontRef idx="minor">
+            <a:schemeClr val="lt1"/>
+          </a:fontRef>
+        </p:style>
+        <p:txBody>
+          <a:bodyPr rtlCol="0" anchor="ctr"/>
+          <a:lstStyle/>
+          <a:p>
+            <a:pPr algn="ctr"/>
+          </a:p>
+        </p:txBody>
+      </p:sp>
+      <p:sp>
+        <p:nvSpPr>
+          <p:cNvPr id="31" name="TextBox 30"/>
+          <p:cNvSpPr txBox="1"/>
+          <p:nvPr/>
+        </p:nvSpPr>
+        <p:spPr>
+          <a:xfrm>
+            <a:off x="777240" y="4846320"/>
+            <a:ext cx="5943600" cy="347472"/>
           </a:xfrm>
           <a:prstGeom prst="rect">
             <a:avLst/>
@@ -12107,66 +13250,24 @@
                 <a:spcPct val="100000"/>
               </a:lnSpc>
               <a:spcAft>
-                <a:spcPts val="200"/>
-              </a:spcAft>
-            </a:pPr>
-            <a:r>
-              <a:rPr sz="1500" b="0" i="0">
-                <a:solidFill>
-                  <a:srgbClr val="1E293B"/>
-                </a:solidFill>
-                <a:latin typeface="Calibri"/>
-              </a:rPr>
-              <a:t>Cuts at 9.1, 24.2, 100 m; normal-offset lookup, 8 rotated PCF taps</a:t>
-            </a:r>
-          </a:p>
-        </p:txBody>
-      </p:sp>
-      <p:sp>
-        <p:nvSpPr>
-          <p:cNvPr id="33" name="TextBox 32"/>
-          <p:cNvSpPr txBox="1"/>
-          <p:nvPr/>
-        </p:nvSpPr>
-        <p:spPr>
-          <a:xfrm>
-            <a:off x="685800" y="4709160"/>
-            <a:ext cx="5943600" cy="365760"/>
-          </a:xfrm>
-          <a:prstGeom prst="rect">
-            <a:avLst/>
-          </a:prstGeom>
-          <a:noFill/>
-        </p:spPr>
-        <p:txBody>
-          <a:bodyPr wrap="square" lIns="36576" rIns="36576" tIns="18288" bIns="18288" anchor="t">
-            <a:spAutoFit/>
-          </a:bodyPr>
-          <a:lstStyle/>
-          <a:p>
-            <a:pPr algn="l">
-              <a:lnSpc>
-                <a:spcPct val="100000"/>
-              </a:lnSpc>
-              <a:spcAft>
                 <a:spcPts val="400"/>
               </a:spcAft>
             </a:pPr>
             <a:r>
-              <a:rPr sz="1600" b="1" i="0">
+              <a:rPr sz="1200" b="1" i="0">
                 <a:solidFill>
                   <a:srgbClr val="0F8F85"/>
                 </a:solidFill>
                 <a:latin typeface="Calibri"/>
               </a:rPr>
-              <a:t>Fog and tone map</a:t>
+              <a:t>FOG AND TONE MAP</a:t>
             </a:r>
           </a:p>
         </p:txBody>
       </p:sp>
       <p:pic>
         <p:nvPicPr>
-          <p:cNvPr id="34" name="Picture 33" descr="fog.png"/>
+          <p:cNvPr id="32" name="Picture 31" descr="fog.png"/>
           <p:cNvPicPr>
             <a:picLocks noChangeAspect="1"/>
           </p:cNvPicPr>
@@ -12180,8 +13281,8 @@
         </p:blipFill>
         <p:spPr>
           <a:xfrm>
-            <a:off x="822960" y="5074920"/>
-            <a:ext cx="2834640" cy="265084"/>
+            <a:off x="1744031" y="5212080"/>
+            <a:ext cx="3918577" cy="324076"/>
           </a:xfrm>
           <a:prstGeom prst="rect">
             <a:avLst/>
@@ -12190,7 +13291,7 @@
       </p:pic>
       <p:pic>
         <p:nvPicPr>
-          <p:cNvPr id="35" name="Picture 34" descr="aces.png"/>
+          <p:cNvPr id="33" name="Picture 32" descr="aces.png"/>
           <p:cNvPicPr>
             <a:picLocks noChangeAspect="1"/>
           </p:cNvPicPr>
@@ -12204,59 +13305,17 @@
         </p:blipFill>
         <p:spPr>
           <a:xfrm>
-            <a:off x="3931920" y="4983480"/>
-            <a:ext cx="2743200" cy="558209"/>
+            <a:off x="2113070" y="5613180"/>
+            <a:ext cx="3180498" cy="632171"/>
           </a:xfrm>
           <a:prstGeom prst="rect">
             <a:avLst/>
           </a:prstGeom>
         </p:spPr>
       </p:pic>
-      <p:sp>
-        <p:nvSpPr>
-          <p:cNvPr id="36" name="TextBox 35"/>
-          <p:cNvSpPr txBox="1"/>
-          <p:nvPr/>
-        </p:nvSpPr>
-        <p:spPr>
-          <a:xfrm>
-            <a:off x="685800" y="5760720"/>
-            <a:ext cx="6035040" cy="548640"/>
-          </a:xfrm>
-          <a:prstGeom prst="rect">
-            <a:avLst/>
-          </a:prstGeom>
-          <a:noFill/>
-        </p:spPr>
-        <p:txBody>
-          <a:bodyPr wrap="square" lIns="36576" rIns="36576" tIns="18288" bIns="18288" anchor="t">
-            <a:spAutoFit/>
-          </a:bodyPr>
-          <a:lstStyle/>
-          <a:p>
-            <a:pPr algn="l">
-              <a:lnSpc>
-                <a:spcPct val="100000"/>
-              </a:lnSpc>
-              <a:spcAft>
-                <a:spcPts val="400"/>
-              </a:spcAft>
-            </a:pPr>
-            <a:r>
-              <a:rPr sz="1500" b="0" i="0">
-                <a:solidFill>
-                  <a:srgbClr val="64748B"/>
-                </a:solidFill>
-                <a:latin typeface="Calibri"/>
-              </a:rPr>
-              <a:t>Ambient = sky diffuse + split-sum specular, times SSAO</a:t>
-            </a:r>
-          </a:p>
-        </p:txBody>
-      </p:sp>
       <p:pic>
         <p:nvPicPr>
-          <p:cNvPr id="37" name="Picture 36" descr="dusk.jpg"/>
+          <p:cNvPr id="34" name="Picture 33" descr="dusk.jpg"/>
           <p:cNvPicPr>
             <a:picLocks noChangeAspect="1"/>
           </p:cNvPicPr>
@@ -12270,29 +13329,36 @@
         </p:blipFill>
         <p:spPr>
           <a:xfrm>
-            <a:off x="7178040" y="2057400"/>
+            <a:off x="7178040" y="2011680"/>
             <a:ext cx="4572000" cy="2571750"/>
           </a:xfrm>
           <a:prstGeom prst="rect">
             <a:avLst/>
           </a:prstGeom>
-          <a:ln w="9525">
+          <a:ln w="28575">
             <a:solidFill>
-              <a:srgbClr val="D5DEE8"/>
+              <a:srgbClr val="FFFFFF"/>
             </a:solidFill>
           </a:ln>
+          <a:effectLst>
+            <a:outerShdw blurRad="127000" dist="38100" dir="5400000" algn="t" rotWithShape="0">
+              <a:srgbClr val="0B1220">
+                <a:alpha val="24000"/>
+              </a:srgbClr>
+            </a:outerShdw>
+          </a:effectLst>
         </p:spPr>
       </p:pic>
       <p:sp>
         <p:nvSpPr>
-          <p:cNvPr id="38" name="TextBox 37"/>
+          <p:cNvPr id="35" name="TextBox 34"/>
           <p:cNvSpPr txBox="1"/>
           <p:nvPr/>
         </p:nvSpPr>
         <p:spPr>
           <a:xfrm>
-            <a:off x="7178040" y="4702302"/>
-            <a:ext cx="4572000" cy="365760"/>
+            <a:off x="7178040" y="4638294"/>
+            <a:ext cx="4572000" cy="274320"/>
           </a:xfrm>
           <a:prstGeom prst="rect">
             <a:avLst/>
@@ -12314,7 +13380,7 @@
               </a:spcAft>
             </a:pPr>
             <a:r>
-              <a:rPr sz="1400" b="0" i="1">
+              <a:rPr sz="1200" b="0" i="1">
                 <a:solidFill>
                   <a:srgbClr val="64748B"/>
                 </a:solidFill>
@@ -12327,14 +13393,14 @@
       </p:sp>
       <p:sp>
         <p:nvSpPr>
-          <p:cNvPr id="39" name="TextBox 38"/>
+          <p:cNvPr id="36" name="TextBox 35"/>
           <p:cNvSpPr txBox="1"/>
           <p:nvPr/>
         </p:nvSpPr>
         <p:spPr>
           <a:xfrm>
-            <a:off x="7178040" y="5177790"/>
-            <a:ext cx="4572000" cy="1097280"/>
+            <a:off x="7178040" y="5086350"/>
+            <a:ext cx="4572000" cy="1371600"/>
           </a:xfrm>
           <a:prstGeom prst="rect">
             <a:avLst/>
@@ -12356,13 +13422,13 @@
               </a:spcAft>
             </a:pPr>
             <a:r>
-              <a:rPr sz="1600" b="0" i="0">
+              <a:rPr sz="1500" b="0" i="0">
                 <a:solidFill>
                   <a:srgbClr val="1E293B"/>
                 </a:solidFill>
                 <a:latin typeface="Calibri"/>
               </a:rPr>
-              <a:t>Sun, moon, lamps, cascaded shadows, SSAO, screen-space reflections, bloom and FXAA</a:t>
+              <a:t>Sun, moon, lamps, cascaded shadows, SSAO, screen-space reflections, bloom and FXAA. Ambient = sky diffuse + split-sum specular, times SSAO.</a:t>
             </a:r>
           </a:p>
         </p:txBody>
@@ -12530,7 +13596,7 @@
         <p:spPr>
           <a:xfrm>
             <a:off x="731520" y="118872"/>
-            <a:ext cx="10058400" cy="640080"/>
+            <a:ext cx="10515600" cy="640080"/>
           </a:xfrm>
           <a:prstGeom prst="rect">
             <a:avLst/>
@@ -12571,8 +13637,8 @@
         </p:nvSpPr>
         <p:spPr>
           <a:xfrm>
-            <a:off x="10789920" y="6473952"/>
-            <a:ext cx="1188720" cy="274320"/>
+            <a:off x="548640" y="6492240"/>
+            <a:ext cx="5486400" cy="274320"/>
           </a:xfrm>
           <a:prstGeom prst="rect">
             <a:avLst/>
@@ -12585,6 +13651,48 @@
           </a:bodyPr>
           <a:lstStyle/>
           <a:p>
+            <a:pPr algn="l">
+              <a:lnSpc>
+                <a:spcPct val="100000"/>
+              </a:lnSpc>
+              <a:spcAft>
+                <a:spcPts val="400"/>
+              </a:spcAft>
+            </a:pPr>
+            <a:r>
+              <a:rPr sz="1000" b="0" i="0">
+                <a:solidFill>
+                  <a:srgbClr val="64748B"/>
+                </a:solidFill>
+                <a:latin typeface="Calibri"/>
+              </a:rPr>
+              <a:t>Sentinel  ·  CSE 4102  ·  KUET</a:t>
+            </a:r>
+          </a:p>
+        </p:txBody>
+      </p:sp>
+      <p:sp>
+        <p:nvSpPr>
+          <p:cNvPr id="8" name="TextBox 7"/>
+          <p:cNvSpPr txBox="1"/>
+          <p:nvPr/>
+        </p:nvSpPr>
+        <p:spPr>
+          <a:xfrm>
+            <a:off x="10789920" y="6492240"/>
+            <a:ext cx="1188720" cy="274320"/>
+          </a:xfrm>
+          <a:prstGeom prst="rect">
+            <a:avLst/>
+          </a:prstGeom>
+          <a:noFill/>
+        </p:spPr>
+        <p:txBody>
+          <a:bodyPr wrap="square" lIns="36576" rIns="36576" tIns="18288" bIns="18288" anchor="t">
+            <a:spAutoFit/>
+          </a:bodyPr>
+          <a:lstStyle/>
+          <a:p>
             <a:pPr algn="r">
               <a:lnSpc>
                 <a:spcPct val="100000"/>
@@ -12602,20 +13710,118 @@
               </a:rPr>
               <a:t>8 / 10</a:t>
             </a:r>
+          </a:p>
+        </p:txBody>
+      </p:sp>
+      <p:sp>
+        <p:nvSpPr>
+          <p:cNvPr id="9" name="Rounded Rectangle 8"/>
+          <p:cNvSpPr/>
+          <p:nvPr/>
+        </p:nvSpPr>
+        <p:spPr>
+          <a:xfrm>
+            <a:off x="548640" y="1051560"/>
+            <a:ext cx="5760720" cy="2788920"/>
+          </a:xfrm>
+          <a:prstGeom prst="roundRect">
+            <a:avLst>
+              <a:gd name="adj" fmla="val 4000"/>
+            </a:avLst>
+          </a:prstGeom>
+          <a:solidFill>
+            <a:srgbClr val="FFFFFF"/>
+          </a:solidFill>
+          <a:ln w="9525">
+            <a:solidFill>
+              <a:srgbClr val="DDE5EE"/>
+            </a:solidFill>
+          </a:ln>
+          <a:effectLst>
+            <a:outerShdw blurRad="114300" dist="25400" dir="5400000" algn="t" rotWithShape="0">
+              <a:srgbClr val="0B1220">
+                <a:alpha val="16000"/>
+              </a:srgbClr>
+            </a:outerShdw>
+          </a:effectLst>
+        </p:spPr>
+        <p:style>
+          <a:lnRef idx="1">
+            <a:schemeClr val="accent1"/>
+          </a:lnRef>
+          <a:fillRef idx="3">
+            <a:schemeClr val="accent1"/>
+          </a:fillRef>
+          <a:effectRef idx="2">
+            <a:schemeClr val="accent1"/>
+          </a:effectRef>
+          <a:fontRef idx="minor">
+            <a:schemeClr val="lt1"/>
+          </a:fontRef>
+        </p:style>
+        <p:txBody>
+          <a:bodyPr rtlCol="0" anchor="ctr"/>
+          <a:lstStyle/>
+          <a:p>
+            <a:pPr algn="ctr"/>
+          </a:p>
+        </p:txBody>
+      </p:sp>
+      <p:sp>
+        <p:nvSpPr>
+          <p:cNvPr id="10" name="Rectangle 9"/>
+          <p:cNvSpPr/>
+          <p:nvPr/>
+        </p:nvSpPr>
+        <p:spPr>
+          <a:xfrm>
+            <a:off x="548640" y="1161288"/>
+            <a:ext cx="64008" cy="2569463"/>
+          </a:xfrm>
+          <a:prstGeom prst="rect">
+            <a:avLst/>
+          </a:prstGeom>
+          <a:solidFill>
+            <a:srgbClr val="0F8F85"/>
+          </a:solidFill>
+          <a:ln>
+            <a:noFill/>
+          </a:ln>
+          <a:effectLst/>
+        </p:spPr>
+        <p:style>
+          <a:lnRef idx="1">
+            <a:schemeClr val="accent1"/>
+          </a:lnRef>
+          <a:fillRef idx="3">
+            <a:schemeClr val="accent1"/>
+          </a:fillRef>
+          <a:effectRef idx="2">
+            <a:schemeClr val="accent1"/>
+          </a:effectRef>
+          <a:fontRef idx="minor">
+            <a:schemeClr val="lt1"/>
+          </a:fontRef>
+        </p:style>
+        <p:txBody>
+          <a:bodyPr rtlCol="0" anchor="ctr"/>
+          <a:lstStyle/>
+          <a:p>
+            <a:pPr algn="ctr"/>
           </a:p>
         </p:txBody>
       </p:sp>
       <p:graphicFrame>
         <p:nvGraphicFramePr>
-          <p:cNvPr id="8" name="Chart 7"/>
+          <p:cNvPr id="11" name="Chart 10"/>
           <p:cNvGraphicFramePr>
             <a:graphicFrameLocks noGrp="1"/>
           </p:cNvGraphicFramePr>
           <p:nvPr/>
         </p:nvGraphicFramePr>
         <p:xfrm>
-          <a:off x="548640" y="1051560"/>
-          <a:ext cx="5669280" cy="2514600"/>
+          <a:off x="731520" y="1097280"/>
+          <a:ext cx="5486400" cy="2697480"/>
         </p:xfrm>
         <a:graphic>
           <a:graphicData uri="http://schemas.openxmlformats.org/drawingml/2006/chart">
@@ -12625,14 +13831,14 @@
       </p:graphicFrame>
       <p:sp>
         <p:nvSpPr>
-          <p:cNvPr id="9" name="TextBox 8"/>
+          <p:cNvPr id="12" name="TextBox 11"/>
           <p:cNvSpPr txBox="1"/>
           <p:nvPr/>
         </p:nvSpPr>
         <p:spPr>
           <a:xfrm>
-            <a:off x="548640" y="3611880"/>
-            <a:ext cx="5669280" cy="411480"/>
+            <a:off x="548640" y="3931920"/>
+            <a:ext cx="5760720" cy="411480"/>
           </a:xfrm>
           <a:prstGeom prst="rect">
             <a:avLst/>
@@ -12676,15 +13882,15 @@
       </p:sp>
       <p:graphicFrame>
         <p:nvGraphicFramePr>
-          <p:cNvPr id="10" name="Table 9"/>
+          <p:cNvPr id="13" name="Table 12"/>
           <p:cNvGraphicFramePr>
             <a:graphicFrameLocks noGrp="1"/>
           </p:cNvGraphicFramePr>
           <p:nvPr/>
         </p:nvGraphicFramePr>
         <p:xfrm>
-          <a:off x="548640" y="4114800"/>
-          <a:ext cx="5669280" cy="2194560"/>
+          <a:off x="548640" y="4434840"/>
+          <a:ext cx="5760720" cy="1920240"/>
         </p:xfrm>
         <a:graphic>
           <a:graphicData uri="http://schemas.openxmlformats.org/drawingml/2006/table">
@@ -12693,10 +13899,10 @@
                 <a:tableStyleId>{5C22544A-7EE6-4342-B048-85BDC9FD1C3A}</a:tableStyleId>
               </a:tblPr>
               <a:tblGrid>
-                <a:gridCol w="4206240"/>
+                <a:gridCol w="4297680"/>
                 <a:gridCol w="1463040"/>
               </a:tblGrid>
-              <a:tr h="365760">
+              <a:tr h="320040">
                 <a:tc>
                   <a:txBody>
                     <a:bodyPr/>
@@ -12714,7 +13920,7 @@
                       </a:r>
                     </a:p>
                   </a:txBody>
-                  <a:tcPr marT="27432" marB="27432">
+                  <a:tcPr marT="18288" marB="18288">
                     <a:solidFill>
                       <a:srgbClr val="0F8F85"/>
                     </a:solidFill>
@@ -12737,14 +13943,14 @@
                       </a:r>
                     </a:p>
                   </a:txBody>
-                  <a:tcPr marT="27432" marB="27432">
+                  <a:tcPr marT="18288" marB="18288">
                     <a:solidFill>
                       <a:srgbClr val="0F8F85"/>
                     </a:solidFill>
                   </a:tcPr>
                 </a:tc>
               </a:tr>
-              <a:tr h="365760">
+              <a:tr h="320040">
                 <a:tc>
                   <a:txBody>
                     <a:bodyPr/>
@@ -12762,7 +13968,7 @@
                       </a:r>
                     </a:p>
                   </a:txBody>
-                  <a:tcPr marT="27432" marB="27432">
+                  <a:tcPr marT="18288" marB="18288">
                     <a:solidFill>
                       <a:srgbClr val="FFFFFF"/>
                     </a:solidFill>
@@ -12785,14 +13991,14 @@
                       </a:r>
                     </a:p>
                   </a:txBody>
-                  <a:tcPr marT="27432" marB="27432">
+                  <a:tcPr marT="18288" marB="18288">
                     <a:solidFill>
                       <a:srgbClr val="FFFFFF"/>
                     </a:solidFill>
                   </a:tcPr>
                 </a:tc>
               </a:tr>
-              <a:tr h="365760">
+              <a:tr h="320040">
                 <a:tc>
                   <a:txBody>
                     <a:bodyPr/>
@@ -12810,7 +14016,7 @@
                       </a:r>
                     </a:p>
                   </a:txBody>
-                  <a:tcPr marT="27432" marB="27432">
+                  <a:tcPr marT="18288" marB="18288">
                     <a:solidFill>
                       <a:srgbClr val="E6F4F2"/>
                     </a:solidFill>
@@ -12833,14 +14039,14 @@
                       </a:r>
                     </a:p>
                   </a:txBody>
-                  <a:tcPr marT="27432" marB="27432">
+                  <a:tcPr marT="18288" marB="18288">
                     <a:solidFill>
                       <a:srgbClr val="E6F4F2"/>
                     </a:solidFill>
                   </a:tcPr>
                 </a:tc>
               </a:tr>
-              <a:tr h="365760">
+              <a:tr h="320040">
                 <a:tc>
                   <a:txBody>
                     <a:bodyPr/>
@@ -12858,7 +14064,7 @@
                       </a:r>
                     </a:p>
                   </a:txBody>
-                  <a:tcPr marT="27432" marB="27432">
+                  <a:tcPr marT="18288" marB="18288">
                     <a:solidFill>
                       <a:srgbClr val="FFFFFF"/>
                     </a:solidFill>
@@ -12881,14 +14087,14 @@
                       </a:r>
                     </a:p>
                   </a:txBody>
-                  <a:tcPr marT="27432" marB="27432">
+                  <a:tcPr marT="18288" marB="18288">
                     <a:solidFill>
                       <a:srgbClr val="FFFFFF"/>
                     </a:solidFill>
                   </a:tcPr>
                 </a:tc>
               </a:tr>
-              <a:tr h="365760">
+              <a:tr h="320040">
                 <a:tc>
                   <a:txBody>
                     <a:bodyPr/>
@@ -12906,7 +14112,7 @@
                       </a:r>
                     </a:p>
                   </a:txBody>
-                  <a:tcPr marT="27432" marB="27432">
+                  <a:tcPr marT="18288" marB="18288">
                     <a:solidFill>
                       <a:srgbClr val="E6F4F2"/>
                     </a:solidFill>
@@ -12929,14 +14135,14 @@
                       </a:r>
                     </a:p>
                   </a:txBody>
-                  <a:tcPr marT="27432" marB="27432">
+                  <a:tcPr marT="18288" marB="18288">
                     <a:solidFill>
                       <a:srgbClr val="E6F4F2"/>
                     </a:solidFill>
                   </a:tcPr>
                 </a:tc>
               </a:tr>
-              <a:tr h="365760">
+              <a:tr h="320040">
                 <a:tc>
                   <a:txBody>
                     <a:bodyPr/>
@@ -12954,7 +14160,7 @@
                       </a:r>
                     </a:p>
                   </a:txBody>
-                  <a:tcPr marT="27432" marB="27432">
+                  <a:tcPr marT="18288" marB="18288">
                     <a:solidFill>
                       <a:srgbClr val="FFFFFF"/>
                     </a:solidFill>
@@ -12977,7 +14183,7 @@
                       </a:r>
                     </a:p>
                   </a:txBody>
-                  <a:tcPr marT="27432" marB="27432">
+                  <a:tcPr marT="18288" marB="18288">
                     <a:solidFill>
                       <a:srgbClr val="FFFFFF"/>
                     </a:solidFill>
@@ -12990,14 +14196,14 @@
       </p:graphicFrame>
       <p:sp>
         <p:nvSpPr>
-          <p:cNvPr id="11" name="TextBox 10"/>
+          <p:cNvPr id="14" name="TextBox 13"/>
           <p:cNvSpPr txBox="1"/>
           <p:nvPr/>
         </p:nvSpPr>
         <p:spPr>
           <a:xfrm>
-            <a:off x="6492240" y="1051560"/>
-            <a:ext cx="5212080" cy="960120"/>
+            <a:off x="6583680" y="1051560"/>
+            <a:ext cx="5120640" cy="960120"/>
           </a:xfrm>
           <a:prstGeom prst="rect">
             <a:avLst/>
@@ -13041,7 +14247,7 @@
       </p:sp>
       <p:pic>
         <p:nvPicPr>
-          <p:cNvPr id="12" name="Picture 11" descr="gate_night_bug.jpg"/>
+          <p:cNvPr id="15" name="Picture 14" descr="gate_night_bug.jpg"/>
           <p:cNvPicPr>
             <a:picLocks noChangeAspect="1"/>
           </p:cNvPicPr>
@@ -13055,22 +14261,29 @@
         </p:blipFill>
         <p:spPr>
           <a:xfrm>
-            <a:off x="6492240" y="2103120"/>
-            <a:ext cx="2542032" cy="1429893"/>
-          </a:xfrm>
-          <a:prstGeom prst="rect">
-            <a:avLst/>
-          </a:prstGeom>
-          <a:ln w="9525">
+            <a:off x="6583680" y="2103120"/>
+            <a:ext cx="2487168" cy="1399032"/>
+          </a:xfrm>
+          <a:prstGeom prst="rect">
+            <a:avLst/>
+          </a:prstGeom>
+          <a:ln w="28575">
             <a:solidFill>
-              <a:srgbClr val="D5DEE8"/>
+              <a:srgbClr val="FFFFFF"/>
             </a:solidFill>
           </a:ln>
+          <a:effectLst>
+            <a:outerShdw blurRad="127000" dist="38100" dir="5400000" algn="t" rotWithShape="0">
+              <a:srgbClr val="0B1220">
+                <a:alpha val="24000"/>
+              </a:srgbClr>
+            </a:outerShdw>
+          </a:effectLst>
         </p:spPr>
       </p:pic>
       <p:pic>
         <p:nvPicPr>
-          <p:cNvPr id="13" name="Picture 12" descr="gate_night.jpg"/>
+          <p:cNvPr id="16" name="Picture 15" descr="gate_night.jpg"/>
           <p:cNvPicPr>
             <a:picLocks noChangeAspect="1"/>
           </p:cNvPicPr>
@@ -13084,29 +14297,36 @@
         </p:blipFill>
         <p:spPr>
           <a:xfrm>
-            <a:off x="9162288" y="2103120"/>
-            <a:ext cx="2542032" cy="1429893"/>
-          </a:xfrm>
-          <a:prstGeom prst="rect">
-            <a:avLst/>
-          </a:prstGeom>
-          <a:ln w="9525">
+            <a:off x="9217152" y="2103120"/>
+            <a:ext cx="2487168" cy="1399032"/>
+          </a:xfrm>
+          <a:prstGeom prst="rect">
+            <a:avLst/>
+          </a:prstGeom>
+          <a:ln w="28575">
             <a:solidFill>
-              <a:srgbClr val="D5DEE8"/>
+              <a:srgbClr val="FFFFFF"/>
             </a:solidFill>
           </a:ln>
+          <a:effectLst>
+            <a:outerShdw blurRad="127000" dist="38100" dir="5400000" algn="t" rotWithShape="0">
+              <a:srgbClr val="0B1220">
+                <a:alpha val="24000"/>
+              </a:srgbClr>
+            </a:outerShdw>
+          </a:effectLst>
         </p:spPr>
       </p:pic>
       <p:sp>
         <p:nvSpPr>
-          <p:cNvPr id="14" name="TextBox 13"/>
+          <p:cNvPr id="17" name="TextBox 16"/>
           <p:cNvSpPr txBox="1"/>
           <p:nvPr/>
         </p:nvSpPr>
         <p:spPr>
           <a:xfrm>
-            <a:off x="6492240" y="3551300"/>
-            <a:ext cx="2542032" cy="274320"/>
+            <a:off x="6583680" y="3538728"/>
+            <a:ext cx="2487168" cy="274320"/>
           </a:xfrm>
           <a:prstGeom prst="rect">
             <a:avLst/>
@@ -13141,14 +14361,14 @@
       </p:sp>
       <p:sp>
         <p:nvSpPr>
-          <p:cNvPr id="15" name="TextBox 14"/>
+          <p:cNvPr id="18" name="TextBox 17"/>
           <p:cNvSpPr txBox="1"/>
           <p:nvPr/>
         </p:nvSpPr>
         <p:spPr>
           <a:xfrm>
-            <a:off x="9162288" y="3551300"/>
-            <a:ext cx="2542032" cy="274320"/>
+            <a:off x="9217152" y="3538728"/>
+            <a:ext cx="2487168" cy="274320"/>
           </a:xfrm>
           <a:prstGeom prst="rect">
             <a:avLst/>
@@ -13183,18 +14403,18 @@
       </p:sp>
       <p:sp>
         <p:nvSpPr>
-          <p:cNvPr id="16" name="Rounded Rectangle 15"/>
+          <p:cNvPr id="19" name="Rounded Rectangle 18"/>
           <p:cNvSpPr/>
           <p:nvPr/>
         </p:nvSpPr>
         <p:spPr>
           <a:xfrm>
-            <a:off x="6492240" y="4114800"/>
-            <a:ext cx="5212080" cy="2194560"/>
+            <a:off x="6583680" y="4114800"/>
+            <a:ext cx="5120640" cy="2240280"/>
           </a:xfrm>
           <a:prstGeom prst="roundRect">
             <a:avLst>
-              <a:gd name="adj" fmla="val 6000"/>
+              <a:gd name="adj" fmla="val 4000"/>
             </a:avLst>
           </a:prstGeom>
           <a:solidFill>
@@ -13202,10 +14422,16 @@
           </a:solidFill>
           <a:ln w="9525">
             <a:solidFill>
-              <a:srgbClr val="D5DEE8"/>
+              <a:srgbClr val="DDE5EE"/>
             </a:solidFill>
           </a:ln>
-          <a:effectLst/>
+          <a:effectLst>
+            <a:outerShdw blurRad="114300" dist="25400" dir="5400000" algn="t" rotWithShape="0">
+              <a:srgbClr val="0B1220">
+                <a:alpha val="16000"/>
+              </a:srgbClr>
+            </a:outerShdw>
+          </a:effectLst>
         </p:spPr>
         <p:style>
           <a:lnRef idx="1">
@@ -13231,14 +14457,14 @@
       </p:sp>
       <p:sp>
         <p:nvSpPr>
-          <p:cNvPr id="17" name="Rectangle 16"/>
+          <p:cNvPr id="20" name="Rectangle 19"/>
           <p:cNvSpPr/>
           <p:nvPr/>
         </p:nvSpPr>
         <p:spPr>
           <a:xfrm>
-            <a:off x="6492240" y="4114800"/>
-            <a:ext cx="82296" cy="2194560"/>
+            <a:off x="6583680" y="4224528"/>
+            <a:ext cx="64008" cy="2020824"/>
           </a:xfrm>
           <a:prstGeom prst="rect">
             <a:avLst/>
@@ -13275,14 +14501,14 @@
       </p:sp>
       <p:sp>
         <p:nvSpPr>
-          <p:cNvPr id="18" name="TextBox 17"/>
+          <p:cNvPr id="21" name="TextBox 20"/>
           <p:cNvSpPr txBox="1"/>
           <p:nvPr/>
         </p:nvSpPr>
         <p:spPr>
           <a:xfrm>
-            <a:off x="6675120" y="4187952"/>
-            <a:ext cx="4937760" cy="365760"/>
+            <a:off x="6812280" y="4206240"/>
+            <a:ext cx="4754879" cy="347472"/>
           </a:xfrm>
           <a:prstGeom prst="rect">
             <a:avLst/>
@@ -13304,27 +14530,27 @@
               </a:spcAft>
             </a:pPr>
             <a:r>
-              <a:rPr sz="1500" b="1" i="0">
+              <a:rPr sz="1200" b="1" i="0">
                 <a:solidFill>
                   <a:srgbClr val="0F8F85"/>
                 </a:solidFill>
                 <a:latin typeface="Calibri"/>
               </a:rPr>
-              <a:t>Limits and future work</a:t>
-            </a:r>
-          </a:p>
-        </p:txBody>
-      </p:sp>
-      <p:sp>
-        <p:nvSpPr>
-          <p:cNvPr id="19" name="TextBox 18"/>
+              <a:t>LIMITS AND FUTURE WORK</a:t>
+            </a:r>
+          </a:p>
+        </p:txBody>
+      </p:sp>
+      <p:sp>
+        <p:nvSpPr>
+          <p:cNvPr id="22" name="TextBox 21"/>
           <p:cNvSpPr txBox="1"/>
           <p:nvPr/>
         </p:nvSpPr>
         <p:spPr>
           <a:xfrm>
-            <a:off x="6675120" y="4572000"/>
-            <a:ext cx="4937760" cy="1664207"/>
+            <a:off x="6812280" y="4572000"/>
+            <a:ext cx="4754879" cy="1709928"/>
           </a:xfrm>
           <a:prstGeom prst="rect">
             <a:avLst/>
@@ -13337,7 +14563,7 @@
           </a:bodyPr>
           <a:lstStyle/>
           <a:p>
-            <a:pPr algn="l" marL="256032" indent="-256032">
+            <a:pPr algn="l" marL="274320" indent="-274320">
               <a:lnSpc>
                 <a:spcPct val="100000"/>
               </a:lnSpc>
@@ -13345,9 +14571,9 @@
                 <a:spcPts val="300"/>
               </a:spcAft>
               <a:buClr>
-                <a:srgbClr val="007A3D"/>
+                <a:srgbClr val="0F8F85"/>
               </a:buClr>
-              <a:buChar char="•"/>
+              <a:buChar char="▪"/>
             </a:pPr>
             <a:r>
               <a:rPr sz="1400" b="0" i="0">
@@ -13360,7 +14586,7 @@
             </a:r>
           </a:p>
           <a:p>
-            <a:pPr algn="l" marL="256032" indent="-256032">
+            <a:pPr algn="l" marL="274320" indent="-274320">
               <a:lnSpc>
                 <a:spcPct val="100000"/>
               </a:lnSpc>
@@ -13368,9 +14594,9 @@
                 <a:spcPts val="300"/>
               </a:spcAft>
               <a:buClr>
-                <a:srgbClr val="007A3D"/>
+                <a:srgbClr val="0F8F85"/>
               </a:buClr>
-              <a:buChar char="•"/>
+              <a:buChar char="▪"/>
             </a:pPr>
             <a:r>
               <a:rPr sz="1400" b="0" i="0">
@@ -13379,11 +14605,11 @@
                 </a:solidFill>
                 <a:latin typeface="Calibri"/>
               </a:rPr>
-              <a:t>Leaf cards, screen-space GI, point-light shadows, multiplayer, compute port</a:t>
-            </a:r>
-          </a:p>
-          <a:p>
-            <a:pPr algn="l" marL="256032" indent="-256032">
+              <a:t>Leaf cards, screen-space GI, point-light shadows, multiplayer</a:t>
+            </a:r>
+          </a:p>
+          <a:p>
+            <a:pPr algn="l" marL="274320" indent="-274320">
               <a:lnSpc>
                 <a:spcPct val="100000"/>
               </a:lnSpc>
@@ -13391,9 +14617,9 @@
                 <a:spcPts val="300"/>
               </a:spcAft>
               <a:buClr>
-                <a:srgbClr val="007A3D"/>
+                <a:srgbClr val="0F8F85"/>
               </a:buClr>
-              <a:buChar char="•"/>
+              <a:buChar char="▪"/>
             </a:pPr>
             <a:r>
               <a:rPr sz="1400" b="0" i="0">
@@ -13570,7 +14796,7 @@
         <p:spPr>
           <a:xfrm>
             <a:off x="731520" y="118872"/>
-            <a:ext cx="10058400" cy="640080"/>
+            <a:ext cx="10515600" cy="640080"/>
           </a:xfrm>
           <a:prstGeom prst="rect">
             <a:avLst/>
@@ -13611,7 +14837,49 @@
         </p:nvSpPr>
         <p:spPr>
           <a:xfrm>
-            <a:off x="10789920" y="6473952"/>
+            <a:off x="548640" y="6492240"/>
+            <a:ext cx="5486400" cy="274320"/>
+          </a:xfrm>
+          <a:prstGeom prst="rect">
+            <a:avLst/>
+          </a:prstGeom>
+          <a:noFill/>
+        </p:spPr>
+        <p:txBody>
+          <a:bodyPr wrap="square" lIns="36576" rIns="36576" tIns="18288" bIns="18288" anchor="t">
+            <a:spAutoFit/>
+          </a:bodyPr>
+          <a:lstStyle/>
+          <a:p>
+            <a:pPr algn="l">
+              <a:lnSpc>
+                <a:spcPct val="100000"/>
+              </a:lnSpc>
+              <a:spcAft>
+                <a:spcPts val="400"/>
+              </a:spcAft>
+            </a:pPr>
+            <a:r>
+              <a:rPr sz="1000" b="0" i="0">
+                <a:solidFill>
+                  <a:srgbClr val="64748B"/>
+                </a:solidFill>
+                <a:latin typeface="Calibri"/>
+              </a:rPr>
+              <a:t>Sentinel  ·  CSE 4102  ·  KUET</a:t>
+            </a:r>
+          </a:p>
+        </p:txBody>
+      </p:sp>
+      <p:sp>
+        <p:nvSpPr>
+          <p:cNvPr id="8" name="TextBox 7"/>
+          <p:cNvSpPr txBox="1"/>
+          <p:nvPr/>
+        </p:nvSpPr>
+        <p:spPr>
+          <a:xfrm>
+            <a:off x="10789920" y="6492240"/>
             <a:ext cx="1188720" cy="274320"/>
           </a:xfrm>
           <a:prstGeom prst="rect">

--- a/Docs/Deliverables/Slides/Sentinel_Presentation.pptx
+++ b/Docs/Deliverables/Slides/Sentinel_Presentation.pptx
@@ -7833,8 +7833,8 @@
         </p:blipFill>
         <p:spPr>
           <a:xfrm>
-            <a:off x="1737360" y="1051560"/>
-            <a:ext cx="8686800" cy="1705384"/>
+            <a:off x="548640" y="1051560"/>
+            <a:ext cx="5486400" cy="1077084"/>
           </a:xfrm>
           <a:prstGeom prst="rect">
             <a:avLst/>
@@ -7856,8 +7856,8 @@
         </p:nvSpPr>
         <p:spPr>
           <a:xfrm>
-            <a:off x="1737360" y="2793520"/>
-            <a:ext cx="8686800" cy="274320"/>
+            <a:off x="548640" y="2156076"/>
+            <a:ext cx="5486400" cy="274320"/>
           </a:xfrm>
           <a:prstGeom prst="rect">
             <a:avLst/>
@@ -7898,8 +7898,8 @@
         </p:nvSpPr>
         <p:spPr>
           <a:xfrm>
-            <a:off x="548640" y="3214144"/>
-            <a:ext cx="5486400" cy="1874519"/>
+            <a:off x="548640" y="2540124"/>
+            <a:ext cx="5486400" cy="2331720"/>
           </a:xfrm>
           <a:prstGeom prst="roundRect">
             <a:avLst>
@@ -7952,8 +7952,8 @@
         </p:nvSpPr>
         <p:spPr>
           <a:xfrm>
-            <a:off x="548640" y="3323872"/>
-            <a:ext cx="64008" cy="1655063"/>
+            <a:off x="548640" y="2649852"/>
+            <a:ext cx="64008" cy="2112263"/>
           </a:xfrm>
           <a:prstGeom prst="rect">
             <a:avLst/>
@@ -7996,7 +7996,7 @@
         </p:nvSpPr>
         <p:spPr>
           <a:xfrm>
-            <a:off x="777240" y="3305584"/>
+            <a:off x="777240" y="2631564"/>
             <a:ext cx="5120640" cy="347472"/>
           </a:xfrm>
           <a:prstGeom prst="rect">
@@ -8046,8 +8046,8 @@
         </p:blipFill>
         <p:spPr>
           <a:xfrm>
-            <a:off x="1779308" y="3890800"/>
-            <a:ext cx="3025063" cy="868680"/>
+            <a:off x="2066323" y="2997324"/>
+            <a:ext cx="2451032" cy="1764792"/>
           </a:xfrm>
           <a:prstGeom prst="rect">
             <a:avLst/>
@@ -8062,8 +8062,8 @@
         </p:nvSpPr>
         <p:spPr>
           <a:xfrm>
-            <a:off x="548640" y="5225824"/>
-            <a:ext cx="5486400" cy="1129255"/>
+            <a:off x="548640" y="5009004"/>
+            <a:ext cx="5486400" cy="1346075"/>
           </a:xfrm>
           <a:prstGeom prst="roundRect">
             <a:avLst>
@@ -8116,8 +8116,8 @@
         </p:nvSpPr>
         <p:spPr>
           <a:xfrm>
-            <a:off x="548640" y="5335552"/>
-            <a:ext cx="64008" cy="909799"/>
+            <a:off x="548640" y="5118732"/>
+            <a:ext cx="64008" cy="1126619"/>
           </a:xfrm>
           <a:prstGeom prst="rect">
             <a:avLst/>
@@ -8160,7 +8160,7 @@
         </p:nvSpPr>
         <p:spPr>
           <a:xfrm>
-            <a:off x="777240" y="5317264"/>
+            <a:off x="777240" y="5100444"/>
             <a:ext cx="5120640" cy="347472"/>
           </a:xfrm>
           <a:prstGeom prst="rect">
@@ -8210,8 +8210,8 @@
         </p:blipFill>
         <p:spPr>
           <a:xfrm>
-            <a:off x="891539" y="5792738"/>
-            <a:ext cx="4800600" cy="342900"/>
+            <a:off x="868680" y="5729277"/>
+            <a:ext cx="4846320" cy="253001"/>
           </a:xfrm>
           <a:prstGeom prst="rect">
             <a:avLst/>
@@ -8226,8 +8226,8 @@
         </p:nvSpPr>
         <p:spPr>
           <a:xfrm>
-            <a:off x="6355080" y="3305584"/>
-            <a:ext cx="5394960" cy="3383280"/>
+            <a:off x="6355080" y="1097280"/>
+            <a:ext cx="5349240" cy="3017520"/>
           </a:xfrm>
           <a:prstGeom prst="rect">
             <a:avLst/>
@@ -8245,7 +8245,7 @@
                 <a:spcPct val="100000"/>
               </a:lnSpc>
               <a:spcAft>
-                <a:spcPts val="1100"/>
+                <a:spcPts val="900"/>
               </a:spcAft>
               <a:buClr>
                 <a:srgbClr val="0F8F85"/>
@@ -8253,7 +8253,7 @@
               <a:buChar char="▪"/>
             </a:pPr>
             <a:r>
-              <a:rPr sz="2000" b="0" i="0">
+              <a:rPr sz="1900" b="0" i="0">
                 <a:solidFill>
                   <a:srgbClr val="1E293B"/>
                 </a:solidFill>
@@ -8268,7 +8268,7 @@
                 <a:spcPct val="100000"/>
               </a:lnSpc>
               <a:spcAft>
-                <a:spcPts val="1100"/>
+                <a:spcPts val="900"/>
               </a:spcAft>
               <a:buClr>
                 <a:srgbClr val="0F8F85"/>
@@ -8276,7 +8276,7 @@
               <a:buChar char="▪"/>
             </a:pPr>
             <a:r>
-              <a:rPr sz="2000" b="0" i="0">
+              <a:rPr sz="1900" b="0" i="0">
                 <a:solidFill>
                   <a:srgbClr val="1E293B"/>
                 </a:solidFill>
@@ -8291,7 +8291,7 @@
                 <a:spcPct val="100000"/>
               </a:lnSpc>
               <a:spcAft>
-                <a:spcPts val="1100"/>
+                <a:spcPts val="900"/>
               </a:spcAft>
               <a:buClr>
                 <a:srgbClr val="0F8F85"/>
@@ -8299,7 +8299,7 @@
               <a:buChar char="▪"/>
             </a:pPr>
             <a:r>
-              <a:rPr sz="2000" b="0" i="0">
+              <a:rPr sz="1900" b="0" i="0">
                 <a:solidFill>
                   <a:srgbClr val="1E293B"/>
                 </a:solidFill>
@@ -8314,7 +8314,7 @@
                 <a:spcPct val="100000"/>
               </a:lnSpc>
               <a:spcAft>
-                <a:spcPts val="1100"/>
+                <a:spcPts val="900"/>
               </a:spcAft>
               <a:buClr>
                 <a:srgbClr val="0F8F85"/>
@@ -8322,13 +8322,91 @@
               <a:buChar char="▪"/>
             </a:pPr>
             <a:r>
-              <a:rPr sz="2000" b="0" i="0">
+              <a:rPr sz="1900" b="0" i="0">
                 <a:solidFill>
                   <a:srgbClr val="1E293B"/>
                 </a:solidFill>
                 <a:latin typeface="Calibri"/>
               </a:rPr>
               <a:t>Soldiers: skeletons with two-bone IK legs</a:t>
+            </a:r>
+          </a:p>
+        </p:txBody>
+      </p:sp>
+      <p:pic>
+        <p:nvPicPr>
+          <p:cNvPr id="20" name="Picture 19" descr="showroom.jpg"/>
+          <p:cNvPicPr>
+            <a:picLocks noChangeAspect="1"/>
+          </p:cNvPicPr>
+          <p:nvPr/>
+        </p:nvPicPr>
+        <p:blipFill>
+          <a:blip r:embed="rId7"/>
+          <a:stretch>
+            <a:fillRect/>
+          </a:stretch>
+        </p:blipFill>
+        <p:spPr>
+          <a:xfrm>
+            <a:off x="6766560" y="3931920"/>
+            <a:ext cx="4206240" cy="2366010"/>
+          </a:xfrm>
+          <a:prstGeom prst="rect">
+            <a:avLst/>
+          </a:prstGeom>
+          <a:ln w="28575">
+            <a:solidFill>
+              <a:srgbClr val="FFFFFF"/>
+            </a:solidFill>
+          </a:ln>
+          <a:effectLst>
+            <a:outerShdw blurRad="127000" dist="38100" dir="5400000" algn="t" rotWithShape="0">
+              <a:srgbClr val="0B1220">
+                <a:alpha val="24000"/>
+              </a:srgbClr>
+            </a:outerShdw>
+          </a:effectLst>
+        </p:spPr>
+      </p:pic>
+      <p:sp>
+        <p:nvSpPr>
+          <p:cNvPr id="21" name="TextBox 20"/>
+          <p:cNvSpPr txBox="1"/>
+          <p:nvPr/>
+        </p:nvSpPr>
+        <p:spPr>
+          <a:xfrm>
+            <a:off x="6766560" y="6334505"/>
+            <a:ext cx="4206240" cy="274320"/>
+          </a:xfrm>
+          <a:prstGeom prst="rect">
+            <a:avLst/>
+          </a:prstGeom>
+          <a:noFill/>
+        </p:spPr>
+        <p:txBody>
+          <a:bodyPr wrap="square" lIns="36576" rIns="36576" tIns="18288" bIns="18288" anchor="t">
+            <a:spAutoFit/>
+          </a:bodyPr>
+          <a:lstStyle/>
+          <a:p>
+            <a:pPr algn="ctr">
+              <a:lnSpc>
+                <a:spcPct val="100000"/>
+              </a:lnSpc>
+              <a:spcAft>
+                <a:spcPts val="400"/>
+              </a:spcAft>
+            </a:pPr>
+            <a:r>
+              <a:rPr sz="1200" b="0" i="1">
+                <a:solidFill>
+                  <a:srgbClr val="64748B"/>
+                </a:solidFill>
+                <a:latin typeface="Calibri"/>
+              </a:rPr>
+              <a:t>The material showroom: one sphere per recipe</a:t>
             </a:r>
           </a:p>
         </p:txBody>
@@ -9684,8 +9762,8 @@
         </p:blipFill>
         <p:spPr>
           <a:xfrm>
-            <a:off x="2358351" y="4867236"/>
-            <a:ext cx="2049856" cy="781126"/>
+            <a:off x="868680" y="4933558"/>
+            <a:ext cx="5029200" cy="648482"/>
           </a:xfrm>
           <a:prstGeom prst="rect">
             <a:avLst/>
@@ -10054,8 +10132,8 @@
         </p:blipFill>
         <p:spPr>
           <a:xfrm>
-            <a:off x="6766560" y="4538260"/>
-            <a:ext cx="4617720" cy="323510"/>
+            <a:off x="6766560" y="4541450"/>
+            <a:ext cx="4617720" cy="317130"/>
           </a:xfrm>
           <a:prstGeom prst="rect">
             <a:avLst/>
@@ -10515,7 +10593,7 @@
         <p:spPr>
           <a:xfrm>
             <a:off x="548640" y="1005840"/>
-            <a:ext cx="8046720" cy="1188720"/>
+            <a:ext cx="11155680" cy="1188720"/>
           </a:xfrm>
           <a:prstGeom prst="roundRect">
             <a:avLst>
@@ -10613,7 +10691,7 @@
         <p:spPr>
           <a:xfrm>
             <a:off x="777240" y="1097280"/>
-            <a:ext cx="7680960" cy="347472"/>
+            <a:ext cx="10789919" cy="347472"/>
           </a:xfrm>
           <a:prstGeom prst="rect">
             <a:avLst/>
@@ -10641,7 +10719,7 @@
                 </a:solidFill>
                 <a:latin typeface="Calibri"/>
               </a:rPr>
-              <a:t>DIRECT LIGHT + AMBIENT + EMISSION</a:t>
+              <a:t>DIRECT LIGHT + AMBIENT + EMISSION     (F: ILLUMINATION MODEL · ATT: FALLOFF · SH: SHADOW · N_L: NUMBER OF LIGHTS)</a:t>
             </a:r>
           </a:p>
         </p:txBody>
@@ -10662,8 +10740,8 @@
         </p:blipFill>
         <p:spPr>
           <a:xfrm>
-            <a:off x="1368057" y="1463040"/>
-            <a:ext cx="6407885" cy="621792"/>
+            <a:off x="3552097" y="1463040"/>
+            <a:ext cx="5148764" cy="621792"/>
           </a:xfrm>
           <a:prstGeom prst="rect">
             <a:avLst/>
@@ -10672,68 +10750,7 @@
       </p:pic>
       <p:sp>
         <p:nvSpPr>
-          <p:cNvPr id="13" name="TextBox 12"/>
-          <p:cNvSpPr txBox="1"/>
-          <p:nvPr/>
-        </p:nvSpPr>
-        <p:spPr>
-          <a:xfrm>
-            <a:off x="8778240" y="1234440"/>
-            <a:ext cx="3017520" cy="822960"/>
-          </a:xfrm>
-          <a:prstGeom prst="rect">
-            <a:avLst/>
-          </a:prstGeom>
-          <a:noFill/>
-        </p:spPr>
-        <p:txBody>
-          <a:bodyPr wrap="square" lIns="36576" rIns="36576" tIns="18288" bIns="18288" anchor="t">
-            <a:spAutoFit/>
-          </a:bodyPr>
-          <a:lstStyle/>
-          <a:p>
-            <a:pPr algn="l">
-              <a:lnSpc>
-                <a:spcPct val="100000"/>
-              </a:lnSpc>
-              <a:spcAft>
-                <a:spcPts val="0"/>
-              </a:spcAft>
-            </a:pPr>
-            <a:r>
-              <a:rPr sz="1300" b="0" i="1">
-                <a:solidFill>
-                  <a:srgbClr val="64748B"/>
-                </a:solidFill>
-                <a:latin typeface="Calibri"/>
-              </a:rPr>
-              <a:t>f = illumination model</a:t>
-            </a:r>
-          </a:p>
-          <a:p>
-            <a:pPr algn="l">
-              <a:lnSpc>
-                <a:spcPct val="100000"/>
-              </a:lnSpc>
-              <a:spcAft>
-                <a:spcPts val="0"/>
-              </a:spcAft>
-            </a:pPr>
-            <a:r>
-              <a:rPr sz="1300" b="0" i="1">
-                <a:solidFill>
-                  <a:srgbClr val="64748B"/>
-                </a:solidFill>
-                <a:latin typeface="Calibri"/>
-              </a:rPr>
-              <a:t>att = falloff   sh = shadow</a:t>
-            </a:r>
-          </a:p>
-        </p:txBody>
-      </p:sp>
-      <p:sp>
-        <p:nvSpPr>
-          <p:cNvPr id="14" name="Rounded Rectangle 13"/>
+          <p:cNvPr id="13" name="Rounded Rectangle 12"/>
           <p:cNvSpPr/>
           <p:nvPr/>
         </p:nvSpPr>
@@ -10787,7 +10804,7 @@
       </p:sp>
       <p:sp>
         <p:nvSpPr>
-          <p:cNvPr id="15" name="Rectangle 14"/>
+          <p:cNvPr id="14" name="Rectangle 13"/>
           <p:cNvSpPr/>
           <p:nvPr/>
         </p:nvSpPr>
@@ -10831,14 +10848,14 @@
       </p:sp>
       <p:sp>
         <p:nvSpPr>
-          <p:cNvPr id="16" name="TextBox 15"/>
+          <p:cNvPr id="15" name="TextBox 14"/>
           <p:cNvSpPr txBox="1"/>
           <p:nvPr/>
         </p:nvSpPr>
         <p:spPr>
           <a:xfrm>
             <a:off x="777240" y="2450592"/>
-            <a:ext cx="1920240" cy="502920"/>
+            <a:ext cx="1828800" cy="502920"/>
           </a:xfrm>
           <a:prstGeom prst="rect">
             <a:avLst/>
@@ -10873,7 +10890,7 @@
       </p:sp>
       <p:pic>
         <p:nvPicPr>
-          <p:cNvPr id="17" name="Picture 16" descr="lambert.png"/>
+          <p:cNvPr id="16" name="Picture 15" descr="lambert.png"/>
           <p:cNvPicPr>
             <a:picLocks noChangeAspect="1"/>
           </p:cNvPicPr>
@@ -10887,7 +10904,7 @@
         </p:blipFill>
         <p:spPr>
           <a:xfrm>
-            <a:off x="2743200" y="2441448"/>
+            <a:off x="2606040" y="2441448"/>
             <a:ext cx="725484" cy="481523"/>
           </a:xfrm>
           <a:prstGeom prst="rect">
@@ -10897,7 +10914,7 @@
       </p:pic>
       <p:sp>
         <p:nvSpPr>
-          <p:cNvPr id="18" name="Rectangle 17"/>
+          <p:cNvPr id="17" name="Rectangle 16"/>
           <p:cNvSpPr/>
           <p:nvPr/>
         </p:nvSpPr>
@@ -10941,14 +10958,14 @@
       </p:sp>
       <p:sp>
         <p:nvSpPr>
-          <p:cNvPr id="19" name="TextBox 18"/>
+          <p:cNvPr id="18" name="TextBox 17"/>
           <p:cNvSpPr txBox="1"/>
           <p:nvPr/>
         </p:nvSpPr>
         <p:spPr>
           <a:xfrm>
             <a:off x="777240" y="3099816"/>
-            <a:ext cx="1920240" cy="502920"/>
+            <a:ext cx="1828800" cy="502920"/>
           </a:xfrm>
           <a:prstGeom prst="rect">
             <a:avLst/>
@@ -10983,7 +11000,7 @@
       </p:sp>
       <p:pic>
         <p:nvPicPr>
-          <p:cNvPr id="20" name="Picture 19" descr="phong.png"/>
+          <p:cNvPr id="19" name="Picture 18" descr="phong.png"/>
           <p:cNvPicPr>
             <a:picLocks noChangeAspect="1"/>
           </p:cNvPicPr>
@@ -10997,8 +11014,8 @@
         </p:blipFill>
         <p:spPr>
           <a:xfrm>
-            <a:off x="2743200" y="3090672"/>
-            <a:ext cx="3345770" cy="530352"/>
+            <a:off x="2606040" y="3090672"/>
+            <a:ext cx="3630989" cy="548640"/>
           </a:xfrm>
           <a:prstGeom prst="rect">
             <a:avLst/>
@@ -11007,7 +11024,7 @@
       </p:pic>
       <p:sp>
         <p:nvSpPr>
-          <p:cNvPr id="21" name="Rectangle 20"/>
+          <p:cNvPr id="20" name="Rectangle 19"/>
           <p:cNvSpPr/>
           <p:nvPr/>
         </p:nvSpPr>
@@ -11051,14 +11068,14 @@
       </p:sp>
       <p:sp>
         <p:nvSpPr>
-          <p:cNvPr id="22" name="TextBox 21"/>
+          <p:cNvPr id="21" name="TextBox 20"/>
           <p:cNvSpPr txBox="1"/>
           <p:nvPr/>
         </p:nvSpPr>
         <p:spPr>
           <a:xfrm>
             <a:off x="777240" y="3749039"/>
-            <a:ext cx="1920240" cy="502920"/>
+            <a:ext cx="1828800" cy="502920"/>
           </a:xfrm>
           <a:prstGeom prst="rect">
             <a:avLst/>
@@ -11093,7 +11110,7 @@
       </p:sp>
       <p:pic>
         <p:nvPicPr>
-          <p:cNvPr id="23" name="Picture 22" descr="blinn.png"/>
+          <p:cNvPr id="22" name="Picture 21" descr="blinn.png"/>
           <p:cNvPicPr>
             <a:picLocks noChangeAspect="1"/>
           </p:cNvPicPr>
@@ -11107,8 +11124,8 @@
         </p:blipFill>
         <p:spPr>
           <a:xfrm>
-            <a:off x="2743200" y="3739896"/>
-            <a:ext cx="3392705" cy="530352"/>
+            <a:off x="2606040" y="3739896"/>
+            <a:ext cx="3676451" cy="548640"/>
           </a:xfrm>
           <a:prstGeom prst="rect">
             <a:avLst/>
@@ -11117,7 +11134,7 @@
       </p:pic>
       <p:sp>
         <p:nvSpPr>
-          <p:cNvPr id="24" name="Rectangle 23"/>
+          <p:cNvPr id="23" name="Rectangle 22"/>
           <p:cNvSpPr/>
           <p:nvPr/>
         </p:nvSpPr>
@@ -11161,14 +11178,14 @@
       </p:sp>
       <p:sp>
         <p:nvSpPr>
-          <p:cNvPr id="25" name="TextBox 24"/>
+          <p:cNvPr id="24" name="TextBox 23"/>
           <p:cNvSpPr txBox="1"/>
           <p:nvPr/>
         </p:nvSpPr>
         <p:spPr>
           <a:xfrm>
             <a:off x="777240" y="4398264"/>
-            <a:ext cx="1920240" cy="502920"/>
+            <a:ext cx="1828800" cy="502920"/>
           </a:xfrm>
           <a:prstGeom prst="rect">
             <a:avLst/>
@@ -11203,7 +11220,7 @@
       </p:sp>
       <p:pic>
         <p:nvPicPr>
-          <p:cNvPr id="26" name="Picture 25" descr="oren.png"/>
+          <p:cNvPr id="25" name="Picture 24" descr="oren.png"/>
           <p:cNvPicPr>
             <a:picLocks noChangeAspect="1"/>
           </p:cNvPicPr>
@@ -11217,8 +11234,8 @@
         </p:blipFill>
         <p:spPr>
           <a:xfrm>
-            <a:off x="2743200" y="4389120"/>
-            <a:ext cx="4023360" cy="461932"/>
+            <a:off x="2606040" y="4389120"/>
+            <a:ext cx="4206240" cy="463060"/>
           </a:xfrm>
           <a:prstGeom prst="rect">
             <a:avLst/>
@@ -11227,7 +11244,7 @@
       </p:pic>
       <p:sp>
         <p:nvSpPr>
-          <p:cNvPr id="27" name="Rectangle 26"/>
+          <p:cNvPr id="26" name="Rectangle 25"/>
           <p:cNvSpPr/>
           <p:nvPr/>
         </p:nvSpPr>
@@ -11271,14 +11288,14 @@
       </p:sp>
       <p:sp>
         <p:nvSpPr>
-          <p:cNvPr id="28" name="TextBox 27"/>
+          <p:cNvPr id="27" name="TextBox 26"/>
           <p:cNvSpPr txBox="1"/>
           <p:nvPr/>
         </p:nvSpPr>
         <p:spPr>
           <a:xfrm>
             <a:off x="777240" y="5047488"/>
-            <a:ext cx="1920240" cy="502920"/>
+            <a:ext cx="1828800" cy="502920"/>
           </a:xfrm>
           <a:prstGeom prst="rect">
             <a:avLst/>
@@ -11313,7 +11330,7 @@
       </p:sp>
       <p:pic>
         <p:nvPicPr>
-          <p:cNvPr id="29" name="Picture 28" descr="ct2.png"/>
+          <p:cNvPr id="28" name="Picture 27" descr="ct2.png"/>
           <p:cNvPicPr>
             <a:picLocks noChangeAspect="1"/>
           </p:cNvPicPr>
@@ -11327,8 +11344,8 @@
         </p:blipFill>
         <p:spPr>
           <a:xfrm>
-            <a:off x="2743200" y="5038344"/>
-            <a:ext cx="3146602" cy="530352"/>
+            <a:off x="2606040" y="5038344"/>
+            <a:ext cx="3255106" cy="548640"/>
           </a:xfrm>
           <a:prstGeom prst="rect">
             <a:avLst/>
@@ -11337,7 +11354,7 @@
       </p:pic>
       <p:sp>
         <p:nvSpPr>
-          <p:cNvPr id="30" name="Rectangle 29"/>
+          <p:cNvPr id="29" name="Rectangle 28"/>
           <p:cNvSpPr/>
           <p:nvPr/>
         </p:nvSpPr>
@@ -11381,14 +11398,14 @@
       </p:sp>
       <p:sp>
         <p:nvSpPr>
-          <p:cNvPr id="31" name="TextBox 30"/>
+          <p:cNvPr id="30" name="TextBox 29"/>
           <p:cNvSpPr txBox="1"/>
           <p:nvPr/>
         </p:nvSpPr>
         <p:spPr>
           <a:xfrm>
             <a:off x="777240" y="5696712"/>
-            <a:ext cx="1920240" cy="502920"/>
+            <a:ext cx="1828800" cy="502920"/>
           </a:xfrm>
           <a:prstGeom prst="rect">
             <a:avLst/>
@@ -11423,7 +11440,7 @@
       </p:sp>
       <p:pic>
         <p:nvPicPr>
-          <p:cNvPr id="32" name="Picture 31" descr="sss.png"/>
+          <p:cNvPr id="31" name="Picture 30" descr="sss.png"/>
           <p:cNvPicPr>
             <a:picLocks noChangeAspect="1"/>
           </p:cNvPicPr>
@@ -11437,102 +11454,24 @@
         </p:blipFill>
         <p:spPr>
           <a:xfrm>
-            <a:off x="2743200" y="5687568"/>
-            <a:ext cx="2981815" cy="530352"/>
+            <a:off x="2606040" y="5687568"/>
+            <a:ext cx="3843144" cy="548640"/>
           </a:xfrm>
           <a:prstGeom prst="rect">
             <a:avLst/>
           </a:prstGeom>
         </p:spPr>
       </p:pic>
-      <p:pic>
-        <p:nvPicPr>
-          <p:cNvPr id="33" name="Picture 32" descr="models.jpg"/>
-          <p:cNvPicPr>
-            <a:picLocks noChangeAspect="1"/>
-          </p:cNvPicPr>
-          <p:nvPr/>
-        </p:nvPicPr>
-        <p:blipFill>
-          <a:blip r:embed="rId11"/>
-          <a:stretch>
-            <a:fillRect/>
-          </a:stretch>
-        </p:blipFill>
+      <p:sp>
+        <p:nvSpPr>
+          <p:cNvPr id="32" name="Rounded Rectangle 31"/>
+          <p:cNvSpPr/>
+          <p:nvPr/>
+        </p:nvSpPr>
         <p:spPr>
           <a:xfrm>
             <a:off x="7223760" y="2331720"/>
-            <a:ext cx="4480560" cy="766411"/>
-          </a:xfrm>
-          <a:prstGeom prst="rect">
-            <a:avLst/>
-          </a:prstGeom>
-          <a:ln w="28575">
-            <a:solidFill>
-              <a:srgbClr val="FFFFFF"/>
-            </a:solidFill>
-          </a:ln>
-          <a:effectLst>
-            <a:outerShdw blurRad="127000" dist="38100" dir="5400000" algn="t" rotWithShape="0">
-              <a:srgbClr val="0B1220">
-                <a:alpha val="24000"/>
-              </a:srgbClr>
-            </a:outerShdw>
-          </a:effectLst>
-        </p:spPr>
-      </p:pic>
-      <p:sp>
-        <p:nvSpPr>
-          <p:cNvPr id="34" name="TextBox 33"/>
-          <p:cNvSpPr txBox="1"/>
-          <p:nvPr/>
-        </p:nvSpPr>
-        <p:spPr>
-          <a:xfrm>
-            <a:off x="7223760" y="3125563"/>
-            <a:ext cx="4480560" cy="274320"/>
-          </a:xfrm>
-          <a:prstGeom prst="rect">
-            <a:avLst/>
-          </a:prstGeom>
-          <a:noFill/>
-        </p:spPr>
-        <p:txBody>
-          <a:bodyPr wrap="square" lIns="36576" rIns="36576" tIns="18288" bIns="18288" anchor="t">
-            <a:spAutoFit/>
-          </a:bodyPr>
-          <a:lstStyle/>
-          <a:p>
-            <a:pPr algn="ctr">
-              <a:lnSpc>
-                <a:spcPct val="100000"/>
-              </a:lnSpc>
-              <a:spcAft>
-                <a:spcPts val="400"/>
-              </a:spcAft>
-            </a:pPr>
-            <a:r>
-              <a:rPr sz="1200" b="0" i="1">
-                <a:solidFill>
-                  <a:srgbClr val="64748B"/>
-                </a:solidFill>
-                <a:latin typeface="Calibri"/>
-              </a:rPr>
-              <a:t>Lambert · Phong · Blinn–Phong · Oren–Nayar · Cook–Torrance · Subsurface</a:t>
-            </a:r>
-          </a:p>
-        </p:txBody>
-      </p:sp>
-      <p:sp>
-        <p:nvSpPr>
-          <p:cNvPr id="35" name="Rounded Rectangle 34"/>
-          <p:cNvSpPr/>
-          <p:nvPr/>
-        </p:nvSpPr>
-        <p:spPr>
-          <a:xfrm>
-            <a:off x="7223760" y="3482179"/>
-            <a:ext cx="4480560" cy="2872900"/>
+            <a:ext cx="4480560" cy="1600200"/>
           </a:xfrm>
           <a:prstGeom prst="roundRect">
             <a:avLst>
@@ -11579,14 +11518,14 @@
       </p:sp>
       <p:sp>
         <p:nvSpPr>
-          <p:cNvPr id="36" name="Rectangle 35"/>
+          <p:cNvPr id="33" name="Rectangle 32"/>
           <p:cNvSpPr/>
           <p:nvPr/>
         </p:nvSpPr>
         <p:spPr>
           <a:xfrm>
-            <a:off x="7223760" y="3591907"/>
-            <a:ext cx="64008" cy="2653444"/>
+            <a:off x="7223760" y="2441448"/>
+            <a:ext cx="64008" cy="1380744"/>
           </a:xfrm>
           <a:prstGeom prst="rect">
             <a:avLst/>
@@ -11623,13 +11562,13 @@
       </p:sp>
       <p:sp>
         <p:nvSpPr>
-          <p:cNvPr id="37" name="TextBox 36"/>
+          <p:cNvPr id="34" name="TextBox 33"/>
           <p:cNvSpPr txBox="1"/>
           <p:nvPr/>
         </p:nvSpPr>
         <p:spPr>
           <a:xfrm>
-            <a:off x="7452360" y="3573619"/>
+            <a:off x="7452360" y="2423160"/>
             <a:ext cx="4114800" cy="347472"/>
           </a:xfrm>
           <a:prstGeom prst="rect">
@@ -11665,14 +11604,14 @@
       </p:sp>
       <p:sp>
         <p:nvSpPr>
-          <p:cNvPr id="38" name="TextBox 37"/>
+          <p:cNvPr id="35" name="TextBox 34"/>
           <p:cNvSpPr txBox="1"/>
           <p:nvPr/>
         </p:nvSpPr>
         <p:spPr>
           <a:xfrm>
-            <a:off x="7452360" y="3921091"/>
-            <a:ext cx="4114800" cy="1325880"/>
+            <a:off x="7452360" y="2697480"/>
+            <a:ext cx="4114800" cy="365760"/>
           </a:xfrm>
           <a:prstGeom prst="rect">
             <a:avLst/>
@@ -11685,102 +11624,193 @@
           </a:bodyPr>
           <a:lstStyle/>
           <a:p>
-            <a:pPr algn="l" marL="274320" indent="-274320">
-              <a:lnSpc>
-                <a:spcPct val="100000"/>
-              </a:lnSpc>
-              <a:spcAft>
-                <a:spcPts val="200"/>
-              </a:spcAft>
-              <a:buClr>
-                <a:srgbClr val="0F8F85"/>
-              </a:buClr>
-              <a:buChar char="▪"/>
-            </a:pPr>
-            <a:r>
-              <a:rPr sz="1500" b="0" i="0">
-                <a:solidFill>
-                  <a:srgbClr val="1E293B"/>
+            <a:pPr algn="l">
+              <a:lnSpc>
+                <a:spcPct val="100000"/>
+              </a:lnSpc>
+              <a:spcAft>
+                <a:spcPts val="400"/>
+              </a:spcAft>
+            </a:pPr>
+            <a:r>
+              <a:rPr sz="1300" b="0" i="0">
+                <a:solidFill>
+                  <a:srgbClr val="64748B"/>
                 </a:solidFill>
                 <a:latin typeface="Calibri"/>
               </a:rPr>
-              <a:t>Directional: sun, moon</a:t>
-            </a:r>
-          </a:p>
-          <a:p>
-            <a:pPr algn="l" marL="274320" indent="-274320">
-              <a:lnSpc>
-                <a:spcPct val="100000"/>
-              </a:lnSpc>
-              <a:spcAft>
-                <a:spcPts val="200"/>
-              </a:spcAft>
-              <a:buClr>
-                <a:srgbClr val="0F8F85"/>
-              </a:buClr>
-              <a:buChar char="▪"/>
-            </a:pPr>
-            <a:r>
-              <a:rPr sz="1500" b="0" i="0">
-                <a:solidFill>
-                  <a:srgbClr val="1E293B"/>
-                </a:solidFill>
-                <a:latin typeface="Calibri"/>
-              </a:rPr>
-              <a:t>Point: lamps, flashes</a:t>
-            </a:r>
-          </a:p>
-          <a:p>
-            <a:pPr algn="l" marL="274320" indent="-274320">
-              <a:lnSpc>
-                <a:spcPct val="100000"/>
-              </a:lnSpc>
-              <a:spcAft>
-                <a:spcPts val="200"/>
-              </a:spcAft>
-              <a:buClr>
-                <a:srgbClr val="0F8F85"/>
-              </a:buClr>
-              <a:buChar char="▪"/>
-            </a:pPr>
-            <a:r>
-              <a:rPr sz="1500" b="0" i="0">
-                <a:solidFill>
-                  <a:srgbClr val="1E293B"/>
-                </a:solidFill>
-                <a:latin typeface="Calibri"/>
-              </a:rPr>
-              <a:t>Spot: floodlights (cone)</a:t>
-            </a:r>
-          </a:p>
-          <a:p>
-            <a:pPr algn="l" marL="274320" indent="-274320">
-              <a:lnSpc>
-                <a:spcPct val="100000"/>
-              </a:lnSpc>
-              <a:spcAft>
-                <a:spcPts val="200"/>
-              </a:spcAft>
-              <a:buClr>
-                <a:srgbClr val="0F8F85"/>
-              </a:buClr>
-              <a:buChar char="▪"/>
-            </a:pPr>
-            <a:r>
-              <a:rPr sz="1500" b="0" i="0">
-                <a:solidFill>
-                  <a:srgbClr val="1E293B"/>
-                </a:solidFill>
-                <a:latin typeface="Calibri"/>
-              </a:rPr>
-              <a:t>Area: 4×4 point samples</a:t>
+              <a:t>Directional · Point · Spot · Area (4×4 samples)</a:t>
             </a:r>
           </a:p>
         </p:txBody>
       </p:sp>
       <p:pic>
         <p:nvPicPr>
-          <p:cNvPr id="39" name="Picture 38" descr="att.png"/>
+          <p:cNvPr id="36" name="Picture 35" descr="att.png"/>
+          <p:cNvPicPr>
+            <a:picLocks noChangeAspect="1"/>
+          </p:cNvPicPr>
+          <p:nvPr/>
+        </p:nvPicPr>
+        <p:blipFill>
+          <a:blip r:embed="rId11"/>
+          <a:stretch>
+            <a:fillRect/>
+          </a:stretch>
+        </p:blipFill>
+        <p:spPr>
+          <a:xfrm>
+            <a:off x="7976516" y="3017520"/>
+            <a:ext cx="2975046" cy="868680"/>
+          </a:xfrm>
+          <a:prstGeom prst="rect">
+            <a:avLst/>
+          </a:prstGeom>
+        </p:spPr>
+      </p:pic>
+      <p:sp>
+        <p:nvSpPr>
+          <p:cNvPr id="37" name="Rounded Rectangle 36"/>
+          <p:cNvSpPr/>
+          <p:nvPr/>
+        </p:nvSpPr>
+        <p:spPr>
+          <a:xfrm>
+            <a:off x="7223760" y="4069080"/>
+            <a:ext cx="4480560" cy="2286000"/>
+          </a:xfrm>
+          <a:prstGeom prst="roundRect">
+            <a:avLst>
+              <a:gd name="adj" fmla="val 4000"/>
+            </a:avLst>
+          </a:prstGeom>
+          <a:solidFill>
+            <a:srgbClr val="FFFFFF"/>
+          </a:solidFill>
+          <a:ln w="9525">
+            <a:solidFill>
+              <a:srgbClr val="DDE5EE"/>
+            </a:solidFill>
+          </a:ln>
+          <a:effectLst>
+            <a:outerShdw blurRad="114300" dist="25400" dir="5400000" algn="t" rotWithShape="0">
+              <a:srgbClr val="0B1220">
+                <a:alpha val="16000"/>
+              </a:srgbClr>
+            </a:outerShdw>
+          </a:effectLst>
+        </p:spPr>
+        <p:style>
+          <a:lnRef idx="1">
+            <a:schemeClr val="accent1"/>
+          </a:lnRef>
+          <a:fillRef idx="3">
+            <a:schemeClr val="accent1"/>
+          </a:fillRef>
+          <a:effectRef idx="2">
+            <a:schemeClr val="accent1"/>
+          </a:effectRef>
+          <a:fontRef idx="minor">
+            <a:schemeClr val="lt1"/>
+          </a:fontRef>
+        </p:style>
+        <p:txBody>
+          <a:bodyPr rtlCol="0" anchor="ctr"/>
+          <a:lstStyle/>
+          <a:p>
+            <a:pPr algn="ctr"/>
+          </a:p>
+        </p:txBody>
+      </p:sp>
+      <p:sp>
+        <p:nvSpPr>
+          <p:cNvPr id="38" name="Rectangle 37"/>
+          <p:cNvSpPr/>
+          <p:nvPr/>
+        </p:nvSpPr>
+        <p:spPr>
+          <a:xfrm>
+            <a:off x="7223760" y="4178808"/>
+            <a:ext cx="64008" cy="2066543"/>
+          </a:xfrm>
+          <a:prstGeom prst="rect">
+            <a:avLst/>
+          </a:prstGeom>
+          <a:solidFill>
+            <a:srgbClr val="0F8F85"/>
+          </a:solidFill>
+          <a:ln>
+            <a:noFill/>
+          </a:ln>
+          <a:effectLst/>
+        </p:spPr>
+        <p:style>
+          <a:lnRef idx="1">
+            <a:schemeClr val="accent1"/>
+          </a:lnRef>
+          <a:fillRef idx="3">
+            <a:schemeClr val="accent1"/>
+          </a:fillRef>
+          <a:effectRef idx="2">
+            <a:schemeClr val="accent1"/>
+          </a:effectRef>
+          <a:fontRef idx="minor">
+            <a:schemeClr val="lt1"/>
+          </a:fontRef>
+        </p:style>
+        <p:txBody>
+          <a:bodyPr rtlCol="0" anchor="ctr"/>
+          <a:lstStyle/>
+          <a:p>
+            <a:pPr algn="ctr"/>
+          </a:p>
+        </p:txBody>
+      </p:sp>
+      <p:sp>
+        <p:nvSpPr>
+          <p:cNvPr id="39" name="TextBox 38"/>
+          <p:cNvSpPr txBox="1"/>
+          <p:nvPr/>
+        </p:nvSpPr>
+        <p:spPr>
+          <a:xfrm>
+            <a:off x="7452360" y="4160520"/>
+            <a:ext cx="4114800" cy="347472"/>
+          </a:xfrm>
+          <a:prstGeom prst="rect">
+            <a:avLst/>
+          </a:prstGeom>
+          <a:noFill/>
+        </p:spPr>
+        <p:txBody>
+          <a:bodyPr wrap="square" lIns="36576" rIns="36576" tIns="18288" bIns="18288" anchor="t">
+            <a:spAutoFit/>
+          </a:bodyPr>
+          <a:lstStyle/>
+          <a:p>
+            <a:pPr algn="l">
+              <a:lnSpc>
+                <a:spcPct val="100000"/>
+              </a:lnSpc>
+              <a:spcAft>
+                <a:spcPts val="400"/>
+              </a:spcAft>
+            </a:pPr>
+            <a:r>
+              <a:rPr sz="1200" b="1" i="0">
+                <a:solidFill>
+                  <a:srgbClr val="0F8F85"/>
+                </a:solidFill>
+                <a:latin typeface="Calibri"/>
+              </a:rPr>
+              <a:t>DEFINITIONS USED ABOVE</a:t>
+            </a:r>
+          </a:p>
+        </p:txBody>
+      </p:sp>
+      <p:pic>
+        <p:nvPicPr>
+          <p:cNvPr id="40" name="Picture 39" descr="defs.png"/>
           <p:cNvPicPr>
             <a:picLocks noChangeAspect="1"/>
           </p:cNvPicPr>
@@ -11794,8 +11824,32 @@
         </p:blipFill>
         <p:spPr>
           <a:xfrm>
-            <a:off x="7779989" y="5577840"/>
-            <a:ext cx="3368100" cy="640080"/>
+            <a:off x="7543800" y="4740606"/>
+            <a:ext cx="3840480" cy="831154"/>
+          </a:xfrm>
+          <a:prstGeom prst="rect">
+            <a:avLst/>
+          </a:prstGeom>
+        </p:spPr>
+      </p:pic>
+      <p:pic>
+        <p:nvPicPr>
+          <p:cNvPr id="41" name="Picture 40" descr="ctdefs.png"/>
+          <p:cNvPicPr>
+            <a:picLocks noChangeAspect="1"/>
+          </p:cNvPicPr>
+          <p:nvPr/>
+        </p:nvPicPr>
+        <p:blipFill>
+          <a:blip r:embed="rId13"/>
+          <a:stretch>
+            <a:fillRect/>
+          </a:stretch>
+        </p:blipFill>
+        <p:spPr>
+          <a:xfrm>
+            <a:off x="7543800" y="5681488"/>
+            <a:ext cx="3840480" cy="349536"/>
           </a:xfrm>
           <a:prstGeom prst="rect">
             <a:avLst/>
@@ -13075,8 +13129,8 @@
         </p:blipFill>
         <p:spPr>
           <a:xfrm>
-            <a:off x="1313044" y="3337560"/>
-            <a:ext cx="4780551" cy="640079"/>
+            <a:off x="868680" y="3358920"/>
+            <a:ext cx="5669280" cy="597359"/>
           </a:xfrm>
           <a:prstGeom prst="rect">
             <a:avLst/>
@@ -13281,8 +13335,8 @@
         </p:blipFill>
         <p:spPr>
           <a:xfrm>
-            <a:off x="1744031" y="5212080"/>
-            <a:ext cx="3918577" cy="324076"/>
+            <a:off x="918171" y="5217858"/>
+            <a:ext cx="5570296" cy="384733"/>
           </a:xfrm>
           <a:prstGeom prst="rect">
             <a:avLst/>
@@ -13305,8 +13359,8 @@
         </p:blipFill>
         <p:spPr>
           <a:xfrm>
-            <a:off x="2113070" y="5613180"/>
-            <a:ext cx="3180498" cy="632171"/>
+            <a:off x="868680" y="5694032"/>
+            <a:ext cx="5669280" cy="545541"/>
           </a:xfrm>
           <a:prstGeom prst="rect">
             <a:avLst/>

--- a/Docs/Deliverables/Slides/Sentinel_Presentation.pptx
+++ b/Docs/Deliverables/Slides/Sentinel_Presentation.pptx
@@ -8046,8 +8046,8 @@
         </p:blipFill>
         <p:spPr>
           <a:xfrm>
-            <a:off x="2066323" y="2997324"/>
-            <a:ext cx="2451032" cy="1764792"/>
+            <a:off x="2034574" y="2951604"/>
+            <a:ext cx="2514530" cy="1810511"/>
           </a:xfrm>
           <a:prstGeom prst="rect">
             <a:avLst/>
@@ -8210,7 +8210,7 @@
         </p:blipFill>
         <p:spPr>
           <a:xfrm>
-            <a:off x="868680" y="5729277"/>
+            <a:off x="868680" y="5706417"/>
             <a:ext cx="4846320" cy="253001"/>
           </a:xfrm>
           <a:prstGeom prst="rect">
@@ -8349,8 +8349,8 @@
         </p:blipFill>
         <p:spPr>
           <a:xfrm>
-            <a:off x="6766560" y="3931920"/>
-            <a:ext cx="4206240" cy="2366010"/>
+            <a:off x="6492240" y="3429000"/>
+            <a:ext cx="5120640" cy="2880360"/>
           </a:xfrm>
           <a:prstGeom prst="rect">
             <a:avLst/>
@@ -8377,8 +8377,8 @@
         </p:nvSpPr>
         <p:spPr>
           <a:xfrm>
-            <a:off x="6766560" y="6334505"/>
-            <a:ext cx="4206240" cy="274320"/>
+            <a:off x="6492240" y="6364224"/>
+            <a:ext cx="5120640" cy="274320"/>
           </a:xfrm>
           <a:prstGeom prst="rect">
             <a:avLst/>
@@ -9537,7 +9537,7 @@
         </p:blipFill>
         <p:spPr>
           <a:xfrm>
-            <a:off x="1104938" y="2838411"/>
+            <a:off x="1104938" y="2824695"/>
             <a:ext cx="4556683" cy="358216"/>
           </a:xfrm>
           <a:prstGeom prst="rect">
@@ -9553,8 +9553,8 @@
         </p:nvSpPr>
         <p:spPr>
           <a:xfrm>
-            <a:off x="777240" y="3602735"/>
-            <a:ext cx="5303520" cy="566928"/>
+            <a:off x="777240" y="3694175"/>
+            <a:ext cx="5303520" cy="493776"/>
           </a:xfrm>
           <a:prstGeom prst="rect">
             <a:avLst/>
@@ -9562,7 +9562,7 @@
           <a:noFill/>
         </p:spPr>
         <p:txBody>
-          <a:bodyPr wrap="square" lIns="36576" rIns="36576" tIns="18288" bIns="18288" anchor="ctr">
+          <a:bodyPr wrap="square" lIns="36576" rIns="36576" tIns="18288" bIns="18288" anchor="b">
             <a:spAutoFit/>
           </a:bodyPr>
           <a:lstStyle/>
@@ -9572,11 +9572,11 @@
                 <a:spcPct val="100000"/>
               </a:lnSpc>
               <a:spcAft>
-                <a:spcPts val="100"/>
-              </a:spcAft>
-            </a:pPr>
-            <a:r>
-              <a:rPr sz="1300" b="0" i="0">
+                <a:spcPts val="0"/>
+              </a:spcAft>
+            </a:pPr>
+            <a:r>
+              <a:rPr sz="1200" b="0" i="0">
                 <a:solidFill>
                   <a:srgbClr val="64748B"/>
                 </a:solidFill>
@@ -9591,11 +9591,11 @@
                 <a:spcPct val="100000"/>
               </a:lnSpc>
               <a:spcAft>
-                <a:spcPts val="100"/>
-              </a:spcAft>
-            </a:pPr>
-            <a:r>
-              <a:rPr sz="1300" b="0" i="0">
+                <a:spcPts val="0"/>
+              </a:spcAft>
+            </a:pPr>
+            <a:r>
+              <a:rPr sz="1200" b="0" i="0">
                 <a:solidFill>
                   <a:srgbClr val="64748B"/>
                 </a:solidFill>
@@ -9762,7 +9762,7 @@
         </p:blipFill>
         <p:spPr>
           <a:xfrm>
-            <a:off x="868680" y="4933558"/>
+            <a:off x="868680" y="5011282"/>
             <a:ext cx="5029200" cy="648482"/>
           </a:xfrm>
           <a:prstGeom prst="rect">
@@ -9778,8 +9778,8 @@
         </p:nvSpPr>
         <p:spPr>
           <a:xfrm>
-            <a:off x="777240" y="5751576"/>
-            <a:ext cx="5303520" cy="566928"/>
+            <a:off x="777240" y="6044184"/>
+            <a:ext cx="5303520" cy="292608"/>
           </a:xfrm>
           <a:prstGeom prst="rect">
             <a:avLst/>
@@ -9787,7 +9787,7 @@
           <a:noFill/>
         </p:spPr>
         <p:txBody>
-          <a:bodyPr wrap="square" lIns="36576" rIns="36576" tIns="18288" bIns="18288" anchor="ctr">
+          <a:bodyPr wrap="square" lIns="36576" rIns="36576" tIns="18288" bIns="18288" anchor="b">
             <a:spAutoFit/>
           </a:bodyPr>
           <a:lstStyle/>
@@ -9797,11 +9797,11 @@
                 <a:spcPct val="100000"/>
               </a:lnSpc>
               <a:spcAft>
-                <a:spcPts val="100"/>
-              </a:spcAft>
-            </a:pPr>
-            <a:r>
-              <a:rPr sz="1300" b="0" i="0">
+                <a:spcPts val="0"/>
+              </a:spcAft>
+            </a:pPr>
+            <a:r>
+              <a:rPr sz="1200" b="0" i="0">
                 <a:solidFill>
                   <a:srgbClr val="64748B"/>
                 </a:solidFill>
@@ -9968,7 +9968,7 @@
         </p:blipFill>
         <p:spPr>
           <a:xfrm>
-            <a:off x="7237133" y="2513114"/>
+            <a:off x="7237133" y="2490254"/>
             <a:ext cx="3676573" cy="1127683"/>
           </a:xfrm>
           <a:prstGeom prst="rect">
@@ -10132,7 +10132,7 @@
         </p:blipFill>
         <p:spPr>
           <a:xfrm>
-            <a:off x="6766560" y="4541450"/>
+            <a:off x="6766560" y="4518590"/>
             <a:ext cx="4617720" cy="317130"/>
           </a:xfrm>
           <a:prstGeom prst="rect">
@@ -10296,7 +10296,7 @@
         </p:blipFill>
         <p:spPr>
           <a:xfrm>
-            <a:off x="7500023" y="5808726"/>
+            <a:off x="7500023" y="5785866"/>
             <a:ext cx="3150793" cy="342900"/>
           </a:xfrm>
           <a:prstGeom prst="rect">
@@ -10592,8 +10592,8 @@
         </p:nvSpPr>
         <p:spPr>
           <a:xfrm>
-            <a:off x="548640" y="1005840"/>
-            <a:ext cx="11155680" cy="1188720"/>
+            <a:off x="548640" y="987552"/>
+            <a:ext cx="8138160" cy="1280160"/>
           </a:xfrm>
           <a:prstGeom prst="roundRect">
             <a:avLst>
@@ -10646,8 +10646,8 @@
         </p:nvSpPr>
         <p:spPr>
           <a:xfrm>
-            <a:off x="548640" y="1115568"/>
-            <a:ext cx="64008" cy="969264"/>
+            <a:off x="548640" y="1097280"/>
+            <a:ext cx="64008" cy="1060704"/>
           </a:xfrm>
           <a:prstGeom prst="rect">
             <a:avLst/>
@@ -10690,8 +10690,8 @@
         </p:nvSpPr>
         <p:spPr>
           <a:xfrm>
-            <a:off x="777240" y="1097280"/>
-            <a:ext cx="10789919" cy="347472"/>
+            <a:off x="777240" y="1078992"/>
+            <a:ext cx="7772400" cy="347472"/>
           </a:xfrm>
           <a:prstGeom prst="rect">
             <a:avLst/>
@@ -10719,7 +10719,7 @@
                 </a:solidFill>
                 <a:latin typeface="Calibri"/>
               </a:rPr>
-              <a:t>DIRECT LIGHT + AMBIENT + EMISSION     (F: ILLUMINATION MODEL · ATT: FALLOFF · SH: SHADOW · N_L: NUMBER OF LIGHTS)</a:t>
+              <a:t>DIRECT LIGHT + AMBIENT + EMISSION</a:t>
             </a:r>
           </a:p>
         </p:txBody>
@@ -10740,8 +10740,8 @@
         </p:blipFill>
         <p:spPr>
           <a:xfrm>
-            <a:off x="3552097" y="1463040"/>
-            <a:ext cx="5148764" cy="621792"/>
+            <a:off x="1475459" y="1399032"/>
+            <a:ext cx="6284520" cy="758951"/>
           </a:xfrm>
           <a:prstGeom prst="rect">
             <a:avLst/>
@@ -10756,8 +10756,8 @@
         </p:nvSpPr>
         <p:spPr>
           <a:xfrm>
-            <a:off x="548640" y="2331720"/>
-            <a:ext cx="6400800" cy="4023360"/>
+            <a:off x="8823960" y="987552"/>
+            <a:ext cx="2880360" cy="1280160"/>
           </a:xfrm>
           <a:prstGeom prst="roundRect">
             <a:avLst>
@@ -10810,14 +10810,14 @@
         </p:nvSpPr>
         <p:spPr>
           <a:xfrm>
-            <a:off x="548640" y="2441448"/>
-            <a:ext cx="64008" cy="3803904"/>
+            <a:off x="8823960" y="1097280"/>
+            <a:ext cx="64008" cy="1060704"/>
           </a:xfrm>
           <a:prstGeom prst="rect">
             <a:avLst/>
           </a:prstGeom>
           <a:solidFill>
-            <a:srgbClr val="0F8F85"/>
+            <a:srgbClr val="F59E0B"/>
           </a:solidFill>
           <a:ln>
             <a:noFill/>
@@ -10854,8 +10854,8 @@
         </p:nvSpPr>
         <p:spPr>
           <a:xfrm>
-            <a:off x="777240" y="2450592"/>
-            <a:ext cx="1828800" cy="502920"/>
+            <a:off x="9052560" y="1078992"/>
+            <a:ext cx="2514600" cy="347472"/>
           </a:xfrm>
           <a:prstGeom prst="rect">
             <a:avLst/>
@@ -10863,7 +10863,7 @@
           <a:noFill/>
         </p:spPr>
         <p:txBody>
-          <a:bodyPr wrap="square" lIns="36576" rIns="36576" tIns="18288" bIns="18288" anchor="ctr">
+          <a:bodyPr wrap="square" lIns="36576" rIns="36576" tIns="18288" bIns="18288" anchor="t">
             <a:spAutoFit/>
           </a:bodyPr>
           <a:lstStyle/>
@@ -10877,95 +10877,27 @@
               </a:spcAft>
             </a:pPr>
             <a:r>
-              <a:rPr sz="1600" b="1" i="0">
+              <a:rPr sz="1200" b="1" i="0">
                 <a:solidFill>
                   <a:srgbClr val="0F8F85"/>
                 </a:solidFill>
                 <a:latin typeface="Calibri"/>
               </a:rPr>
-              <a:t>Lambert</a:t>
-            </a:r>
-          </a:p>
-        </p:txBody>
-      </p:sp>
-      <p:pic>
-        <p:nvPicPr>
-          <p:cNvPr id="16" name="Picture 15" descr="lambert.png"/>
-          <p:cNvPicPr>
-            <a:picLocks noChangeAspect="1"/>
-          </p:cNvPicPr>
-          <p:nvPr/>
-        </p:nvPicPr>
-        <p:blipFill>
-          <a:blip r:embed="rId5"/>
-          <a:stretch>
-            <a:fillRect/>
-          </a:stretch>
-        </p:blipFill>
-        <p:spPr>
-          <a:xfrm>
-            <a:off x="2606040" y="2441448"/>
-            <a:ext cx="725484" cy="481523"/>
-          </a:xfrm>
-          <a:prstGeom prst="rect">
-            <a:avLst/>
-          </a:prstGeom>
-        </p:spPr>
-      </p:pic>
-      <p:sp>
-        <p:nvSpPr>
-          <p:cNvPr id="17" name="Rectangle 16"/>
-          <p:cNvSpPr/>
-          <p:nvPr/>
-        </p:nvSpPr>
-        <p:spPr>
-          <a:xfrm>
-            <a:off x="777240" y="3026664"/>
-            <a:ext cx="5943600" cy="10972"/>
-          </a:xfrm>
-          <a:prstGeom prst="rect">
-            <a:avLst/>
-          </a:prstGeom>
-          <a:solidFill>
-            <a:srgbClr val="DDE5EE"/>
-          </a:solidFill>
-          <a:ln>
-            <a:noFill/>
-          </a:ln>
-          <a:effectLst/>
-        </p:spPr>
-        <p:style>
-          <a:lnRef idx="1">
-            <a:schemeClr val="accent1"/>
-          </a:lnRef>
-          <a:fillRef idx="3">
-            <a:schemeClr val="accent1"/>
-          </a:fillRef>
-          <a:effectRef idx="2">
-            <a:schemeClr val="accent1"/>
-          </a:effectRef>
-          <a:fontRef idx="minor">
-            <a:schemeClr val="lt1"/>
-          </a:fontRef>
-        </p:style>
-        <p:txBody>
-          <a:bodyPr rtlCol="0" anchor="ctr"/>
-          <a:lstStyle/>
-          <a:p>
-            <a:pPr algn="ctr"/>
-          </a:p>
-        </p:txBody>
-      </p:sp>
-      <p:sp>
-        <p:nvSpPr>
-          <p:cNvPr id="18" name="TextBox 17"/>
+              <a:t>SYMBOLS</a:t>
+            </a:r>
+          </a:p>
+        </p:txBody>
+      </p:sp>
+      <p:sp>
+        <p:nvSpPr>
+          <p:cNvPr id="16" name="TextBox 15"/>
           <p:cNvSpPr txBox="1"/>
           <p:nvPr/>
         </p:nvSpPr>
         <p:spPr>
           <a:xfrm>
-            <a:off x="777240" y="3099816"/>
-            <a:ext cx="1828800" cy="502920"/>
+            <a:off x="9052560" y="1371600"/>
+            <a:ext cx="2606040" cy="914400"/>
           </a:xfrm>
           <a:prstGeom prst="rect">
             <a:avLst/>
@@ -10973,7 +10905,7 @@
           <a:noFill/>
         </p:spPr>
         <p:txBody>
-          <a:bodyPr wrap="square" lIns="36576" rIns="36576" tIns="18288" bIns="18288" anchor="ctr">
+          <a:bodyPr wrap="square" lIns="36576" rIns="36576" tIns="18288" bIns="18288" anchor="t">
             <a:spAutoFit/>
           </a:bodyPr>
           <a:lstStyle/>
@@ -10983,495 +10915,88 @@
                 <a:spcPct val="100000"/>
               </a:lnSpc>
               <a:spcAft>
-                <a:spcPts val="400"/>
-              </a:spcAft>
-            </a:pPr>
-            <a:r>
-              <a:rPr sz="1600" b="1" i="0">
-                <a:solidFill>
-                  <a:srgbClr val="0F8F85"/>
-                </a:solidFill>
-                <a:latin typeface="Calibri"/>
-              </a:rPr>
-              <a:t>Phong</a:t>
-            </a:r>
-          </a:p>
-        </p:txBody>
-      </p:sp>
-      <p:pic>
-        <p:nvPicPr>
-          <p:cNvPr id="19" name="Picture 18" descr="phong.png"/>
-          <p:cNvPicPr>
-            <a:picLocks noChangeAspect="1"/>
-          </p:cNvPicPr>
-          <p:nvPr/>
-        </p:nvPicPr>
-        <p:blipFill>
-          <a:blip r:embed="rId6"/>
-          <a:stretch>
-            <a:fillRect/>
-          </a:stretch>
-        </p:blipFill>
-        <p:spPr>
-          <a:xfrm>
-            <a:off x="2606040" y="3090672"/>
-            <a:ext cx="3630989" cy="548640"/>
-          </a:xfrm>
-          <a:prstGeom prst="rect">
-            <a:avLst/>
-          </a:prstGeom>
-        </p:spPr>
-      </p:pic>
-      <p:sp>
-        <p:nvSpPr>
-          <p:cNvPr id="20" name="Rectangle 19"/>
+                <a:spcPts val="0"/>
+              </a:spcAft>
+            </a:pPr>
+            <a:r>
+              <a:rPr sz="1200" b="0" i="0">
+                <a:solidFill>
+                  <a:srgbClr val="64748B"/>
+                </a:solidFill>
+                <a:latin typeface="Calibri"/>
+              </a:rPr>
+              <a:t>f: illumination model</a:t>
+            </a:r>
+          </a:p>
+          <a:p>
+            <a:pPr algn="l">
+              <a:lnSpc>
+                <a:spcPct val="100000"/>
+              </a:lnSpc>
+              <a:spcAft>
+                <a:spcPts val="0"/>
+              </a:spcAft>
+            </a:pPr>
+            <a:r>
+              <a:rPr sz="1200" b="0" i="0">
+                <a:solidFill>
+                  <a:srgbClr val="64748B"/>
+                </a:solidFill>
+                <a:latin typeface="Calibri"/>
+              </a:rPr>
+              <a:t>att: falloff · sh: shadow</a:t>
+            </a:r>
+          </a:p>
+          <a:p>
+            <a:pPr algn="l">
+              <a:lnSpc>
+                <a:spcPct val="100000"/>
+              </a:lnSpc>
+              <a:spcAft>
+                <a:spcPts val="0"/>
+              </a:spcAft>
+            </a:pPr>
+            <a:r>
+              <a:rPr sz="1200" b="0" i="0">
+                <a:solidFill>
+                  <a:srgbClr val="64748B"/>
+                </a:solidFill>
+                <a:latin typeface="Calibri"/>
+              </a:rPr>
+              <a:t>N_L: lights · AO: occlusion</a:t>
+            </a:r>
+          </a:p>
+          <a:p>
+            <a:pPr algn="l">
+              <a:lnSpc>
+                <a:spcPct val="100000"/>
+              </a:lnSpc>
+              <a:spcAft>
+                <a:spcPts val="0"/>
+              </a:spcAft>
+            </a:pPr>
+            <a:r>
+              <a:rPr sz="1200" b="0" i="0">
+                <a:solidFill>
+                  <a:srgbClr val="64748B"/>
+                </a:solidFill>
+                <a:latin typeface="Calibri"/>
+              </a:rPr>
+              <a:t>e: emission</a:t>
+            </a:r>
+          </a:p>
+        </p:txBody>
+      </p:sp>
+      <p:sp>
+        <p:nvSpPr>
+          <p:cNvPr id="17" name="Rounded Rectangle 16"/>
           <p:cNvSpPr/>
           <p:nvPr/>
         </p:nvSpPr>
         <p:spPr>
           <a:xfrm>
-            <a:off x="777240" y="3675887"/>
-            <a:ext cx="5943600" cy="10972"/>
-          </a:xfrm>
-          <a:prstGeom prst="rect">
-            <a:avLst/>
-          </a:prstGeom>
-          <a:solidFill>
-            <a:srgbClr val="DDE5EE"/>
-          </a:solidFill>
-          <a:ln>
-            <a:noFill/>
-          </a:ln>
-          <a:effectLst/>
-        </p:spPr>
-        <p:style>
-          <a:lnRef idx="1">
-            <a:schemeClr val="accent1"/>
-          </a:lnRef>
-          <a:fillRef idx="3">
-            <a:schemeClr val="accent1"/>
-          </a:fillRef>
-          <a:effectRef idx="2">
-            <a:schemeClr val="accent1"/>
-          </a:effectRef>
-          <a:fontRef idx="minor">
-            <a:schemeClr val="lt1"/>
-          </a:fontRef>
-        </p:style>
-        <p:txBody>
-          <a:bodyPr rtlCol="0" anchor="ctr"/>
-          <a:lstStyle/>
-          <a:p>
-            <a:pPr algn="ctr"/>
-          </a:p>
-        </p:txBody>
-      </p:sp>
-      <p:sp>
-        <p:nvSpPr>
-          <p:cNvPr id="21" name="TextBox 20"/>
-          <p:cNvSpPr txBox="1"/>
-          <p:nvPr/>
-        </p:nvSpPr>
-        <p:spPr>
-          <a:xfrm>
-            <a:off x="777240" y="3749039"/>
-            <a:ext cx="1828800" cy="502920"/>
-          </a:xfrm>
-          <a:prstGeom prst="rect">
-            <a:avLst/>
-          </a:prstGeom>
-          <a:noFill/>
-        </p:spPr>
-        <p:txBody>
-          <a:bodyPr wrap="square" lIns="36576" rIns="36576" tIns="18288" bIns="18288" anchor="ctr">
-            <a:spAutoFit/>
-          </a:bodyPr>
-          <a:lstStyle/>
-          <a:p>
-            <a:pPr algn="l">
-              <a:lnSpc>
-                <a:spcPct val="100000"/>
-              </a:lnSpc>
-              <a:spcAft>
-                <a:spcPts val="400"/>
-              </a:spcAft>
-            </a:pPr>
-            <a:r>
-              <a:rPr sz="1600" b="1" i="0">
-                <a:solidFill>
-                  <a:srgbClr val="0F8F85"/>
-                </a:solidFill>
-                <a:latin typeface="Calibri"/>
-              </a:rPr>
-              <a:t>Blinn–Phong</a:t>
-            </a:r>
-          </a:p>
-        </p:txBody>
-      </p:sp>
-      <p:pic>
-        <p:nvPicPr>
-          <p:cNvPr id="22" name="Picture 21" descr="blinn.png"/>
-          <p:cNvPicPr>
-            <a:picLocks noChangeAspect="1"/>
-          </p:cNvPicPr>
-          <p:nvPr/>
-        </p:nvPicPr>
-        <p:blipFill>
-          <a:blip r:embed="rId7"/>
-          <a:stretch>
-            <a:fillRect/>
-          </a:stretch>
-        </p:blipFill>
-        <p:spPr>
-          <a:xfrm>
-            <a:off x="2606040" y="3739896"/>
-            <a:ext cx="3676451" cy="548640"/>
-          </a:xfrm>
-          <a:prstGeom prst="rect">
-            <a:avLst/>
-          </a:prstGeom>
-        </p:spPr>
-      </p:pic>
-      <p:sp>
-        <p:nvSpPr>
-          <p:cNvPr id="23" name="Rectangle 22"/>
-          <p:cNvSpPr/>
-          <p:nvPr/>
-        </p:nvSpPr>
-        <p:spPr>
-          <a:xfrm>
-            <a:off x="777240" y="4325112"/>
-            <a:ext cx="5943600" cy="10972"/>
-          </a:xfrm>
-          <a:prstGeom prst="rect">
-            <a:avLst/>
-          </a:prstGeom>
-          <a:solidFill>
-            <a:srgbClr val="DDE5EE"/>
-          </a:solidFill>
-          <a:ln>
-            <a:noFill/>
-          </a:ln>
-          <a:effectLst/>
-        </p:spPr>
-        <p:style>
-          <a:lnRef idx="1">
-            <a:schemeClr val="accent1"/>
-          </a:lnRef>
-          <a:fillRef idx="3">
-            <a:schemeClr val="accent1"/>
-          </a:fillRef>
-          <a:effectRef idx="2">
-            <a:schemeClr val="accent1"/>
-          </a:effectRef>
-          <a:fontRef idx="minor">
-            <a:schemeClr val="lt1"/>
-          </a:fontRef>
-        </p:style>
-        <p:txBody>
-          <a:bodyPr rtlCol="0" anchor="ctr"/>
-          <a:lstStyle/>
-          <a:p>
-            <a:pPr algn="ctr"/>
-          </a:p>
-        </p:txBody>
-      </p:sp>
-      <p:sp>
-        <p:nvSpPr>
-          <p:cNvPr id="24" name="TextBox 23"/>
-          <p:cNvSpPr txBox="1"/>
-          <p:nvPr/>
-        </p:nvSpPr>
-        <p:spPr>
-          <a:xfrm>
-            <a:off x="777240" y="4398264"/>
-            <a:ext cx="1828800" cy="502920"/>
-          </a:xfrm>
-          <a:prstGeom prst="rect">
-            <a:avLst/>
-          </a:prstGeom>
-          <a:noFill/>
-        </p:spPr>
-        <p:txBody>
-          <a:bodyPr wrap="square" lIns="36576" rIns="36576" tIns="18288" bIns="18288" anchor="ctr">
-            <a:spAutoFit/>
-          </a:bodyPr>
-          <a:lstStyle/>
-          <a:p>
-            <a:pPr algn="l">
-              <a:lnSpc>
-                <a:spcPct val="100000"/>
-              </a:lnSpc>
-              <a:spcAft>
-                <a:spcPts val="400"/>
-              </a:spcAft>
-            </a:pPr>
-            <a:r>
-              <a:rPr sz="1600" b="1" i="0">
-                <a:solidFill>
-                  <a:srgbClr val="0F8F85"/>
-                </a:solidFill>
-                <a:latin typeface="Calibri"/>
-              </a:rPr>
-              <a:t>Oren–Nayar</a:t>
-            </a:r>
-          </a:p>
-        </p:txBody>
-      </p:sp>
-      <p:pic>
-        <p:nvPicPr>
-          <p:cNvPr id="25" name="Picture 24" descr="oren.png"/>
-          <p:cNvPicPr>
-            <a:picLocks noChangeAspect="1"/>
-          </p:cNvPicPr>
-          <p:nvPr/>
-        </p:nvPicPr>
-        <p:blipFill>
-          <a:blip r:embed="rId8"/>
-          <a:stretch>
-            <a:fillRect/>
-          </a:stretch>
-        </p:blipFill>
-        <p:spPr>
-          <a:xfrm>
-            <a:off x="2606040" y="4389120"/>
-            <a:ext cx="4206240" cy="463060"/>
-          </a:xfrm>
-          <a:prstGeom prst="rect">
-            <a:avLst/>
-          </a:prstGeom>
-        </p:spPr>
-      </p:pic>
-      <p:sp>
-        <p:nvSpPr>
-          <p:cNvPr id="26" name="Rectangle 25"/>
-          <p:cNvSpPr/>
-          <p:nvPr/>
-        </p:nvSpPr>
-        <p:spPr>
-          <a:xfrm>
-            <a:off x="777240" y="4974336"/>
-            <a:ext cx="5943600" cy="10972"/>
-          </a:xfrm>
-          <a:prstGeom prst="rect">
-            <a:avLst/>
-          </a:prstGeom>
-          <a:solidFill>
-            <a:srgbClr val="DDE5EE"/>
-          </a:solidFill>
-          <a:ln>
-            <a:noFill/>
-          </a:ln>
-          <a:effectLst/>
-        </p:spPr>
-        <p:style>
-          <a:lnRef idx="1">
-            <a:schemeClr val="accent1"/>
-          </a:lnRef>
-          <a:fillRef idx="3">
-            <a:schemeClr val="accent1"/>
-          </a:fillRef>
-          <a:effectRef idx="2">
-            <a:schemeClr val="accent1"/>
-          </a:effectRef>
-          <a:fontRef idx="minor">
-            <a:schemeClr val="lt1"/>
-          </a:fontRef>
-        </p:style>
-        <p:txBody>
-          <a:bodyPr rtlCol="0" anchor="ctr"/>
-          <a:lstStyle/>
-          <a:p>
-            <a:pPr algn="ctr"/>
-          </a:p>
-        </p:txBody>
-      </p:sp>
-      <p:sp>
-        <p:nvSpPr>
-          <p:cNvPr id="27" name="TextBox 26"/>
-          <p:cNvSpPr txBox="1"/>
-          <p:nvPr/>
-        </p:nvSpPr>
-        <p:spPr>
-          <a:xfrm>
-            <a:off x="777240" y="5047488"/>
-            <a:ext cx="1828800" cy="502920"/>
-          </a:xfrm>
-          <a:prstGeom prst="rect">
-            <a:avLst/>
-          </a:prstGeom>
-          <a:noFill/>
-        </p:spPr>
-        <p:txBody>
-          <a:bodyPr wrap="square" lIns="36576" rIns="36576" tIns="18288" bIns="18288" anchor="ctr">
-            <a:spAutoFit/>
-          </a:bodyPr>
-          <a:lstStyle/>
-          <a:p>
-            <a:pPr algn="l">
-              <a:lnSpc>
-                <a:spcPct val="100000"/>
-              </a:lnSpc>
-              <a:spcAft>
-                <a:spcPts val="400"/>
-              </a:spcAft>
-            </a:pPr>
-            <a:r>
-              <a:rPr sz="1600" b="1" i="0">
-                <a:solidFill>
-                  <a:srgbClr val="0F8F85"/>
-                </a:solidFill>
-                <a:latin typeface="Calibri"/>
-              </a:rPr>
-              <a:t>Cook–Torrance</a:t>
-            </a:r>
-          </a:p>
-        </p:txBody>
-      </p:sp>
-      <p:pic>
-        <p:nvPicPr>
-          <p:cNvPr id="28" name="Picture 27" descr="ct2.png"/>
-          <p:cNvPicPr>
-            <a:picLocks noChangeAspect="1"/>
-          </p:cNvPicPr>
-          <p:nvPr/>
-        </p:nvPicPr>
-        <p:blipFill>
-          <a:blip r:embed="rId9"/>
-          <a:stretch>
-            <a:fillRect/>
-          </a:stretch>
-        </p:blipFill>
-        <p:spPr>
-          <a:xfrm>
-            <a:off x="2606040" y="5038344"/>
-            <a:ext cx="3255106" cy="548640"/>
-          </a:xfrm>
-          <a:prstGeom prst="rect">
-            <a:avLst/>
-          </a:prstGeom>
-        </p:spPr>
-      </p:pic>
-      <p:sp>
-        <p:nvSpPr>
-          <p:cNvPr id="29" name="Rectangle 28"/>
-          <p:cNvSpPr/>
-          <p:nvPr/>
-        </p:nvSpPr>
-        <p:spPr>
-          <a:xfrm>
-            <a:off x="777240" y="5623560"/>
-            <a:ext cx="5943600" cy="10972"/>
-          </a:xfrm>
-          <a:prstGeom prst="rect">
-            <a:avLst/>
-          </a:prstGeom>
-          <a:solidFill>
-            <a:srgbClr val="DDE5EE"/>
-          </a:solidFill>
-          <a:ln>
-            <a:noFill/>
-          </a:ln>
-          <a:effectLst/>
-        </p:spPr>
-        <p:style>
-          <a:lnRef idx="1">
-            <a:schemeClr val="accent1"/>
-          </a:lnRef>
-          <a:fillRef idx="3">
-            <a:schemeClr val="accent1"/>
-          </a:fillRef>
-          <a:effectRef idx="2">
-            <a:schemeClr val="accent1"/>
-          </a:effectRef>
-          <a:fontRef idx="minor">
-            <a:schemeClr val="lt1"/>
-          </a:fontRef>
-        </p:style>
-        <p:txBody>
-          <a:bodyPr rtlCol="0" anchor="ctr"/>
-          <a:lstStyle/>
-          <a:p>
-            <a:pPr algn="ctr"/>
-          </a:p>
-        </p:txBody>
-      </p:sp>
-      <p:sp>
-        <p:nvSpPr>
-          <p:cNvPr id="30" name="TextBox 29"/>
-          <p:cNvSpPr txBox="1"/>
-          <p:nvPr/>
-        </p:nvSpPr>
-        <p:spPr>
-          <a:xfrm>
-            <a:off x="777240" y="5696712"/>
-            <a:ext cx="1828800" cy="502920"/>
-          </a:xfrm>
-          <a:prstGeom prst="rect">
-            <a:avLst/>
-          </a:prstGeom>
-          <a:noFill/>
-        </p:spPr>
-        <p:txBody>
-          <a:bodyPr wrap="square" lIns="36576" rIns="36576" tIns="18288" bIns="18288" anchor="ctr">
-            <a:spAutoFit/>
-          </a:bodyPr>
-          <a:lstStyle/>
-          <a:p>
-            <a:pPr algn="l">
-              <a:lnSpc>
-                <a:spcPct val="100000"/>
-              </a:lnSpc>
-              <a:spcAft>
-                <a:spcPts val="400"/>
-              </a:spcAft>
-            </a:pPr>
-            <a:r>
-              <a:rPr sz="1600" b="1" i="0">
-                <a:solidFill>
-                  <a:srgbClr val="0F8F85"/>
-                </a:solidFill>
-                <a:latin typeface="Calibri"/>
-              </a:rPr>
-              <a:t>Subsurface</a:t>
-            </a:r>
-          </a:p>
-        </p:txBody>
-      </p:sp>
-      <p:pic>
-        <p:nvPicPr>
-          <p:cNvPr id="31" name="Picture 30" descr="sss.png"/>
-          <p:cNvPicPr>
-            <a:picLocks noChangeAspect="1"/>
-          </p:cNvPicPr>
-          <p:nvPr/>
-        </p:nvPicPr>
-        <p:blipFill>
-          <a:blip r:embed="rId10"/>
-          <a:stretch>
-            <a:fillRect/>
-          </a:stretch>
-        </p:blipFill>
-        <p:spPr>
-          <a:xfrm>
-            <a:off x="2606040" y="5687568"/>
-            <a:ext cx="3843144" cy="548640"/>
-          </a:xfrm>
-          <a:prstGeom prst="rect">
-            <a:avLst/>
-          </a:prstGeom>
-        </p:spPr>
-      </p:pic>
-      <p:sp>
-        <p:nvSpPr>
-          <p:cNvPr id="32" name="Rounded Rectangle 31"/>
-          <p:cNvSpPr/>
-          <p:nvPr/>
-        </p:nvSpPr>
-        <p:spPr>
-          <a:xfrm>
-            <a:off x="7223760" y="2331720"/>
-            <a:ext cx="4480560" cy="1600200"/>
+            <a:off x="548640" y="2331720"/>
+            <a:ext cx="6400800" cy="4023360"/>
           </a:xfrm>
           <a:prstGeom prst="roundRect">
             <a:avLst>
@@ -11518,14 +11043,14 @@
       </p:sp>
       <p:sp>
         <p:nvSpPr>
-          <p:cNvPr id="33" name="Rectangle 32"/>
+          <p:cNvPr id="18" name="Rectangle 17"/>
           <p:cNvSpPr/>
           <p:nvPr/>
         </p:nvSpPr>
         <p:spPr>
           <a:xfrm>
-            <a:off x="7223760" y="2441448"/>
-            <a:ext cx="64008" cy="1380744"/>
+            <a:off x="548640" y="2441448"/>
+            <a:ext cx="64008" cy="3803904"/>
           </a:xfrm>
           <a:prstGeom prst="rect">
             <a:avLst/>
@@ -11562,14 +11087,14 @@
       </p:sp>
       <p:sp>
         <p:nvSpPr>
-          <p:cNvPr id="34" name="TextBox 33"/>
+          <p:cNvPr id="19" name="TextBox 18"/>
           <p:cNvSpPr txBox="1"/>
           <p:nvPr/>
         </p:nvSpPr>
         <p:spPr>
           <a:xfrm>
-            <a:off x="7452360" y="2423160"/>
-            <a:ext cx="4114800" cy="347472"/>
+            <a:off x="777240" y="2450592"/>
+            <a:ext cx="1828800" cy="502920"/>
           </a:xfrm>
           <a:prstGeom prst="rect">
             <a:avLst/>
@@ -11577,7 +11102,7 @@
           <a:noFill/>
         </p:spPr>
         <p:txBody>
-          <a:bodyPr wrap="square" lIns="36576" rIns="36576" tIns="18288" bIns="18288" anchor="t">
+          <a:bodyPr wrap="square" lIns="36576" rIns="36576" tIns="18288" bIns="18288" anchor="ctr">
             <a:spAutoFit/>
           </a:bodyPr>
           <a:lstStyle/>
@@ -11591,77 +11116,35 @@
               </a:spcAft>
             </a:pPr>
             <a:r>
-              <a:rPr sz="1200" b="1" i="0">
+              <a:rPr sz="1600" b="1" i="0">
                 <a:solidFill>
                   <a:srgbClr val="0F8F85"/>
                 </a:solidFill>
                 <a:latin typeface="Calibri"/>
               </a:rPr>
-              <a:t>LIGHT SOURCES</a:t>
-            </a:r>
-          </a:p>
-        </p:txBody>
-      </p:sp>
-      <p:sp>
-        <p:nvSpPr>
-          <p:cNvPr id="35" name="TextBox 34"/>
-          <p:cNvSpPr txBox="1"/>
-          <p:nvPr/>
-        </p:nvSpPr>
-        <p:spPr>
-          <a:xfrm>
-            <a:off x="7452360" y="2697480"/>
-            <a:ext cx="4114800" cy="365760"/>
-          </a:xfrm>
-          <a:prstGeom prst="rect">
-            <a:avLst/>
-          </a:prstGeom>
-          <a:noFill/>
-        </p:spPr>
-        <p:txBody>
-          <a:bodyPr wrap="square" lIns="36576" rIns="36576" tIns="18288" bIns="18288" anchor="t">
-            <a:spAutoFit/>
-          </a:bodyPr>
-          <a:lstStyle/>
-          <a:p>
-            <a:pPr algn="l">
-              <a:lnSpc>
-                <a:spcPct val="100000"/>
-              </a:lnSpc>
-              <a:spcAft>
-                <a:spcPts val="400"/>
-              </a:spcAft>
-            </a:pPr>
-            <a:r>
-              <a:rPr sz="1300" b="0" i="0">
-                <a:solidFill>
-                  <a:srgbClr val="64748B"/>
-                </a:solidFill>
-                <a:latin typeface="Calibri"/>
-              </a:rPr>
-              <a:t>Directional · Point · Spot · Area (4×4 samples)</a:t>
+              <a:t>Lambert</a:t>
             </a:r>
           </a:p>
         </p:txBody>
       </p:sp>
       <p:pic>
         <p:nvPicPr>
-          <p:cNvPr id="36" name="Picture 35" descr="att.png"/>
+          <p:cNvPr id="20" name="Picture 19" descr="lambert.png"/>
           <p:cNvPicPr>
             <a:picLocks noChangeAspect="1"/>
           </p:cNvPicPr>
           <p:nvPr/>
         </p:nvPicPr>
         <p:blipFill>
-          <a:blip r:embed="rId11"/>
+          <a:blip r:embed="rId5"/>
           <a:stretch>
             <a:fillRect/>
           </a:stretch>
         </p:blipFill>
         <p:spPr>
           <a:xfrm>
-            <a:off x="7976516" y="3017520"/>
-            <a:ext cx="2975046" cy="868680"/>
+            <a:off x="2606040" y="2441448"/>
+            <a:ext cx="725484" cy="481523"/>
           </a:xfrm>
           <a:prstGeom prst="rect">
             <a:avLst/>
@@ -11670,14 +11153,564 @@
       </p:pic>
       <p:sp>
         <p:nvSpPr>
-          <p:cNvPr id="37" name="Rounded Rectangle 36"/>
+          <p:cNvPr id="21" name="Rectangle 20"/>
           <p:cNvSpPr/>
           <p:nvPr/>
         </p:nvSpPr>
         <p:spPr>
           <a:xfrm>
-            <a:off x="7223760" y="4069080"/>
-            <a:ext cx="4480560" cy="2286000"/>
+            <a:off x="777240" y="3026664"/>
+            <a:ext cx="5943600" cy="10972"/>
+          </a:xfrm>
+          <a:prstGeom prst="rect">
+            <a:avLst/>
+          </a:prstGeom>
+          <a:solidFill>
+            <a:srgbClr val="DDE5EE"/>
+          </a:solidFill>
+          <a:ln>
+            <a:noFill/>
+          </a:ln>
+          <a:effectLst/>
+        </p:spPr>
+        <p:style>
+          <a:lnRef idx="1">
+            <a:schemeClr val="accent1"/>
+          </a:lnRef>
+          <a:fillRef idx="3">
+            <a:schemeClr val="accent1"/>
+          </a:fillRef>
+          <a:effectRef idx="2">
+            <a:schemeClr val="accent1"/>
+          </a:effectRef>
+          <a:fontRef idx="minor">
+            <a:schemeClr val="lt1"/>
+          </a:fontRef>
+        </p:style>
+        <p:txBody>
+          <a:bodyPr rtlCol="0" anchor="ctr"/>
+          <a:lstStyle/>
+          <a:p>
+            <a:pPr algn="ctr"/>
+          </a:p>
+        </p:txBody>
+      </p:sp>
+      <p:sp>
+        <p:nvSpPr>
+          <p:cNvPr id="22" name="TextBox 21"/>
+          <p:cNvSpPr txBox="1"/>
+          <p:nvPr/>
+        </p:nvSpPr>
+        <p:spPr>
+          <a:xfrm>
+            <a:off x="777240" y="3099816"/>
+            <a:ext cx="1828800" cy="502920"/>
+          </a:xfrm>
+          <a:prstGeom prst="rect">
+            <a:avLst/>
+          </a:prstGeom>
+          <a:noFill/>
+        </p:spPr>
+        <p:txBody>
+          <a:bodyPr wrap="square" lIns="36576" rIns="36576" tIns="18288" bIns="18288" anchor="ctr">
+            <a:spAutoFit/>
+          </a:bodyPr>
+          <a:lstStyle/>
+          <a:p>
+            <a:pPr algn="l">
+              <a:lnSpc>
+                <a:spcPct val="100000"/>
+              </a:lnSpc>
+              <a:spcAft>
+                <a:spcPts val="400"/>
+              </a:spcAft>
+            </a:pPr>
+            <a:r>
+              <a:rPr sz="1600" b="1" i="0">
+                <a:solidFill>
+                  <a:srgbClr val="0F8F85"/>
+                </a:solidFill>
+                <a:latin typeface="Calibri"/>
+              </a:rPr>
+              <a:t>Phong</a:t>
+            </a:r>
+          </a:p>
+        </p:txBody>
+      </p:sp>
+      <p:pic>
+        <p:nvPicPr>
+          <p:cNvPr id="23" name="Picture 22" descr="phong.png"/>
+          <p:cNvPicPr>
+            <a:picLocks noChangeAspect="1"/>
+          </p:cNvPicPr>
+          <p:nvPr/>
+        </p:nvPicPr>
+        <p:blipFill>
+          <a:blip r:embed="rId6"/>
+          <a:stretch>
+            <a:fillRect/>
+          </a:stretch>
+        </p:blipFill>
+        <p:spPr>
+          <a:xfrm>
+            <a:off x="2606040" y="3090672"/>
+            <a:ext cx="3630989" cy="548640"/>
+          </a:xfrm>
+          <a:prstGeom prst="rect">
+            <a:avLst/>
+          </a:prstGeom>
+        </p:spPr>
+      </p:pic>
+      <p:sp>
+        <p:nvSpPr>
+          <p:cNvPr id="24" name="Rectangle 23"/>
+          <p:cNvSpPr/>
+          <p:nvPr/>
+        </p:nvSpPr>
+        <p:spPr>
+          <a:xfrm>
+            <a:off x="777240" y="3675887"/>
+            <a:ext cx="5943600" cy="10972"/>
+          </a:xfrm>
+          <a:prstGeom prst="rect">
+            <a:avLst/>
+          </a:prstGeom>
+          <a:solidFill>
+            <a:srgbClr val="DDE5EE"/>
+          </a:solidFill>
+          <a:ln>
+            <a:noFill/>
+          </a:ln>
+          <a:effectLst/>
+        </p:spPr>
+        <p:style>
+          <a:lnRef idx="1">
+            <a:schemeClr val="accent1"/>
+          </a:lnRef>
+          <a:fillRef idx="3">
+            <a:schemeClr val="accent1"/>
+          </a:fillRef>
+          <a:effectRef idx="2">
+            <a:schemeClr val="accent1"/>
+          </a:effectRef>
+          <a:fontRef idx="minor">
+            <a:schemeClr val="lt1"/>
+          </a:fontRef>
+        </p:style>
+        <p:txBody>
+          <a:bodyPr rtlCol="0" anchor="ctr"/>
+          <a:lstStyle/>
+          <a:p>
+            <a:pPr algn="ctr"/>
+          </a:p>
+        </p:txBody>
+      </p:sp>
+      <p:sp>
+        <p:nvSpPr>
+          <p:cNvPr id="25" name="TextBox 24"/>
+          <p:cNvSpPr txBox="1"/>
+          <p:nvPr/>
+        </p:nvSpPr>
+        <p:spPr>
+          <a:xfrm>
+            <a:off x="777240" y="3749039"/>
+            <a:ext cx="1828800" cy="502920"/>
+          </a:xfrm>
+          <a:prstGeom prst="rect">
+            <a:avLst/>
+          </a:prstGeom>
+          <a:noFill/>
+        </p:spPr>
+        <p:txBody>
+          <a:bodyPr wrap="square" lIns="36576" rIns="36576" tIns="18288" bIns="18288" anchor="ctr">
+            <a:spAutoFit/>
+          </a:bodyPr>
+          <a:lstStyle/>
+          <a:p>
+            <a:pPr algn="l">
+              <a:lnSpc>
+                <a:spcPct val="100000"/>
+              </a:lnSpc>
+              <a:spcAft>
+                <a:spcPts val="400"/>
+              </a:spcAft>
+            </a:pPr>
+            <a:r>
+              <a:rPr sz="1600" b="1" i="0">
+                <a:solidFill>
+                  <a:srgbClr val="0F8F85"/>
+                </a:solidFill>
+                <a:latin typeface="Calibri"/>
+              </a:rPr>
+              <a:t>Blinn–Phong</a:t>
+            </a:r>
+          </a:p>
+        </p:txBody>
+      </p:sp>
+      <p:pic>
+        <p:nvPicPr>
+          <p:cNvPr id="26" name="Picture 25" descr="blinn.png"/>
+          <p:cNvPicPr>
+            <a:picLocks noChangeAspect="1"/>
+          </p:cNvPicPr>
+          <p:nvPr/>
+        </p:nvPicPr>
+        <p:blipFill>
+          <a:blip r:embed="rId7"/>
+          <a:stretch>
+            <a:fillRect/>
+          </a:stretch>
+        </p:blipFill>
+        <p:spPr>
+          <a:xfrm>
+            <a:off x="2606040" y="3739896"/>
+            <a:ext cx="3676451" cy="548640"/>
+          </a:xfrm>
+          <a:prstGeom prst="rect">
+            <a:avLst/>
+          </a:prstGeom>
+        </p:spPr>
+      </p:pic>
+      <p:sp>
+        <p:nvSpPr>
+          <p:cNvPr id="27" name="Rectangle 26"/>
+          <p:cNvSpPr/>
+          <p:nvPr/>
+        </p:nvSpPr>
+        <p:spPr>
+          <a:xfrm>
+            <a:off x="777240" y="4325112"/>
+            <a:ext cx="5943600" cy="10972"/>
+          </a:xfrm>
+          <a:prstGeom prst="rect">
+            <a:avLst/>
+          </a:prstGeom>
+          <a:solidFill>
+            <a:srgbClr val="DDE5EE"/>
+          </a:solidFill>
+          <a:ln>
+            <a:noFill/>
+          </a:ln>
+          <a:effectLst/>
+        </p:spPr>
+        <p:style>
+          <a:lnRef idx="1">
+            <a:schemeClr val="accent1"/>
+          </a:lnRef>
+          <a:fillRef idx="3">
+            <a:schemeClr val="accent1"/>
+          </a:fillRef>
+          <a:effectRef idx="2">
+            <a:schemeClr val="accent1"/>
+          </a:effectRef>
+          <a:fontRef idx="minor">
+            <a:schemeClr val="lt1"/>
+          </a:fontRef>
+        </p:style>
+        <p:txBody>
+          <a:bodyPr rtlCol="0" anchor="ctr"/>
+          <a:lstStyle/>
+          <a:p>
+            <a:pPr algn="ctr"/>
+          </a:p>
+        </p:txBody>
+      </p:sp>
+      <p:sp>
+        <p:nvSpPr>
+          <p:cNvPr id="28" name="TextBox 27"/>
+          <p:cNvSpPr txBox="1"/>
+          <p:nvPr/>
+        </p:nvSpPr>
+        <p:spPr>
+          <a:xfrm>
+            <a:off x="777240" y="4398264"/>
+            <a:ext cx="1828800" cy="502920"/>
+          </a:xfrm>
+          <a:prstGeom prst="rect">
+            <a:avLst/>
+          </a:prstGeom>
+          <a:noFill/>
+        </p:spPr>
+        <p:txBody>
+          <a:bodyPr wrap="square" lIns="36576" rIns="36576" tIns="18288" bIns="18288" anchor="ctr">
+            <a:spAutoFit/>
+          </a:bodyPr>
+          <a:lstStyle/>
+          <a:p>
+            <a:pPr algn="l">
+              <a:lnSpc>
+                <a:spcPct val="100000"/>
+              </a:lnSpc>
+              <a:spcAft>
+                <a:spcPts val="400"/>
+              </a:spcAft>
+            </a:pPr>
+            <a:r>
+              <a:rPr sz="1600" b="1" i="0">
+                <a:solidFill>
+                  <a:srgbClr val="0F8F85"/>
+                </a:solidFill>
+                <a:latin typeface="Calibri"/>
+              </a:rPr>
+              <a:t>Oren–Nayar</a:t>
+            </a:r>
+          </a:p>
+        </p:txBody>
+      </p:sp>
+      <p:pic>
+        <p:nvPicPr>
+          <p:cNvPr id="29" name="Picture 28" descr="oren.png"/>
+          <p:cNvPicPr>
+            <a:picLocks noChangeAspect="1"/>
+          </p:cNvPicPr>
+          <p:nvPr/>
+        </p:nvPicPr>
+        <p:blipFill>
+          <a:blip r:embed="rId8"/>
+          <a:stretch>
+            <a:fillRect/>
+          </a:stretch>
+        </p:blipFill>
+        <p:spPr>
+          <a:xfrm>
+            <a:off x="2606040" y="4389120"/>
+            <a:ext cx="4206240" cy="463060"/>
+          </a:xfrm>
+          <a:prstGeom prst="rect">
+            <a:avLst/>
+          </a:prstGeom>
+        </p:spPr>
+      </p:pic>
+      <p:sp>
+        <p:nvSpPr>
+          <p:cNvPr id="30" name="Rectangle 29"/>
+          <p:cNvSpPr/>
+          <p:nvPr/>
+        </p:nvSpPr>
+        <p:spPr>
+          <a:xfrm>
+            <a:off x="777240" y="4974336"/>
+            <a:ext cx="5943600" cy="10972"/>
+          </a:xfrm>
+          <a:prstGeom prst="rect">
+            <a:avLst/>
+          </a:prstGeom>
+          <a:solidFill>
+            <a:srgbClr val="DDE5EE"/>
+          </a:solidFill>
+          <a:ln>
+            <a:noFill/>
+          </a:ln>
+          <a:effectLst/>
+        </p:spPr>
+        <p:style>
+          <a:lnRef idx="1">
+            <a:schemeClr val="accent1"/>
+          </a:lnRef>
+          <a:fillRef idx="3">
+            <a:schemeClr val="accent1"/>
+          </a:fillRef>
+          <a:effectRef idx="2">
+            <a:schemeClr val="accent1"/>
+          </a:effectRef>
+          <a:fontRef idx="minor">
+            <a:schemeClr val="lt1"/>
+          </a:fontRef>
+        </p:style>
+        <p:txBody>
+          <a:bodyPr rtlCol="0" anchor="ctr"/>
+          <a:lstStyle/>
+          <a:p>
+            <a:pPr algn="ctr"/>
+          </a:p>
+        </p:txBody>
+      </p:sp>
+      <p:sp>
+        <p:nvSpPr>
+          <p:cNvPr id="31" name="TextBox 30"/>
+          <p:cNvSpPr txBox="1"/>
+          <p:nvPr/>
+        </p:nvSpPr>
+        <p:spPr>
+          <a:xfrm>
+            <a:off x="777240" y="5047488"/>
+            <a:ext cx="1828800" cy="502920"/>
+          </a:xfrm>
+          <a:prstGeom prst="rect">
+            <a:avLst/>
+          </a:prstGeom>
+          <a:noFill/>
+        </p:spPr>
+        <p:txBody>
+          <a:bodyPr wrap="square" lIns="36576" rIns="36576" tIns="18288" bIns="18288" anchor="ctr">
+            <a:spAutoFit/>
+          </a:bodyPr>
+          <a:lstStyle/>
+          <a:p>
+            <a:pPr algn="l">
+              <a:lnSpc>
+                <a:spcPct val="100000"/>
+              </a:lnSpc>
+              <a:spcAft>
+                <a:spcPts val="400"/>
+              </a:spcAft>
+            </a:pPr>
+            <a:r>
+              <a:rPr sz="1600" b="1" i="0">
+                <a:solidFill>
+                  <a:srgbClr val="0F8F85"/>
+                </a:solidFill>
+                <a:latin typeface="Calibri"/>
+              </a:rPr>
+              <a:t>Cook–Torrance</a:t>
+            </a:r>
+          </a:p>
+        </p:txBody>
+      </p:sp>
+      <p:pic>
+        <p:nvPicPr>
+          <p:cNvPr id="32" name="Picture 31" descr="ct2.png"/>
+          <p:cNvPicPr>
+            <a:picLocks noChangeAspect="1"/>
+          </p:cNvPicPr>
+          <p:nvPr/>
+        </p:nvPicPr>
+        <p:blipFill>
+          <a:blip r:embed="rId9"/>
+          <a:stretch>
+            <a:fillRect/>
+          </a:stretch>
+        </p:blipFill>
+        <p:spPr>
+          <a:xfrm>
+            <a:off x="2606040" y="5038344"/>
+            <a:ext cx="3255106" cy="548640"/>
+          </a:xfrm>
+          <a:prstGeom prst="rect">
+            <a:avLst/>
+          </a:prstGeom>
+        </p:spPr>
+      </p:pic>
+      <p:sp>
+        <p:nvSpPr>
+          <p:cNvPr id="33" name="Rectangle 32"/>
+          <p:cNvSpPr/>
+          <p:nvPr/>
+        </p:nvSpPr>
+        <p:spPr>
+          <a:xfrm>
+            <a:off x="777240" y="5623560"/>
+            <a:ext cx="5943600" cy="10972"/>
+          </a:xfrm>
+          <a:prstGeom prst="rect">
+            <a:avLst/>
+          </a:prstGeom>
+          <a:solidFill>
+            <a:srgbClr val="DDE5EE"/>
+          </a:solidFill>
+          <a:ln>
+            <a:noFill/>
+          </a:ln>
+          <a:effectLst/>
+        </p:spPr>
+        <p:style>
+          <a:lnRef idx="1">
+            <a:schemeClr val="accent1"/>
+          </a:lnRef>
+          <a:fillRef idx="3">
+            <a:schemeClr val="accent1"/>
+          </a:fillRef>
+          <a:effectRef idx="2">
+            <a:schemeClr val="accent1"/>
+          </a:effectRef>
+          <a:fontRef idx="minor">
+            <a:schemeClr val="lt1"/>
+          </a:fontRef>
+        </p:style>
+        <p:txBody>
+          <a:bodyPr rtlCol="0" anchor="ctr"/>
+          <a:lstStyle/>
+          <a:p>
+            <a:pPr algn="ctr"/>
+          </a:p>
+        </p:txBody>
+      </p:sp>
+      <p:sp>
+        <p:nvSpPr>
+          <p:cNvPr id="34" name="TextBox 33"/>
+          <p:cNvSpPr txBox="1"/>
+          <p:nvPr/>
+        </p:nvSpPr>
+        <p:spPr>
+          <a:xfrm>
+            <a:off x="777240" y="5696712"/>
+            <a:ext cx="1828800" cy="502920"/>
+          </a:xfrm>
+          <a:prstGeom prst="rect">
+            <a:avLst/>
+          </a:prstGeom>
+          <a:noFill/>
+        </p:spPr>
+        <p:txBody>
+          <a:bodyPr wrap="square" lIns="36576" rIns="36576" tIns="18288" bIns="18288" anchor="ctr">
+            <a:spAutoFit/>
+          </a:bodyPr>
+          <a:lstStyle/>
+          <a:p>
+            <a:pPr algn="l">
+              <a:lnSpc>
+                <a:spcPct val="100000"/>
+              </a:lnSpc>
+              <a:spcAft>
+                <a:spcPts val="400"/>
+              </a:spcAft>
+            </a:pPr>
+            <a:r>
+              <a:rPr sz="1600" b="1" i="0">
+                <a:solidFill>
+                  <a:srgbClr val="0F8F85"/>
+                </a:solidFill>
+                <a:latin typeface="Calibri"/>
+              </a:rPr>
+              <a:t>Subsurface</a:t>
+            </a:r>
+          </a:p>
+        </p:txBody>
+      </p:sp>
+      <p:pic>
+        <p:nvPicPr>
+          <p:cNvPr id="35" name="Picture 34" descr="sss.png"/>
+          <p:cNvPicPr>
+            <a:picLocks noChangeAspect="1"/>
+          </p:cNvPicPr>
+          <p:nvPr/>
+        </p:nvPicPr>
+        <p:blipFill>
+          <a:blip r:embed="rId10"/>
+          <a:stretch>
+            <a:fillRect/>
+          </a:stretch>
+        </p:blipFill>
+        <p:spPr>
+          <a:xfrm>
+            <a:off x="2606040" y="5687568"/>
+            <a:ext cx="3843144" cy="548640"/>
+          </a:xfrm>
+          <a:prstGeom prst="rect">
+            <a:avLst/>
+          </a:prstGeom>
+        </p:spPr>
+      </p:pic>
+      <p:sp>
+        <p:nvSpPr>
+          <p:cNvPr id="36" name="Rounded Rectangle 35"/>
+          <p:cNvSpPr/>
+          <p:nvPr/>
+        </p:nvSpPr>
+        <p:spPr>
+          <a:xfrm>
+            <a:off x="7223760" y="2331720"/>
+            <a:ext cx="4480560" cy="1600200"/>
           </a:xfrm>
           <a:prstGeom prst="roundRect">
             <a:avLst>
@@ -11724,14 +11757,14 @@
       </p:sp>
       <p:sp>
         <p:nvSpPr>
-          <p:cNvPr id="38" name="Rectangle 37"/>
+          <p:cNvPr id="37" name="Rectangle 36"/>
           <p:cNvSpPr/>
           <p:nvPr/>
         </p:nvSpPr>
         <p:spPr>
           <a:xfrm>
-            <a:off x="7223760" y="4178808"/>
-            <a:ext cx="64008" cy="2066543"/>
+            <a:off x="7223760" y="2441448"/>
+            <a:ext cx="64008" cy="1380744"/>
           </a:xfrm>
           <a:prstGeom prst="rect">
             <a:avLst/>
@@ -11768,13 +11801,13 @@
       </p:sp>
       <p:sp>
         <p:nvSpPr>
-          <p:cNvPr id="39" name="TextBox 38"/>
+          <p:cNvPr id="38" name="TextBox 37"/>
           <p:cNvSpPr txBox="1"/>
           <p:nvPr/>
         </p:nvSpPr>
         <p:spPr>
           <a:xfrm>
-            <a:off x="7452360" y="4160520"/>
+            <a:off x="7452360" y="2423160"/>
             <a:ext cx="4114800" cy="347472"/>
           </a:xfrm>
           <a:prstGeom prst="rect">
@@ -11803,14 +11836,220 @@
                 </a:solidFill>
                 <a:latin typeface="Calibri"/>
               </a:rPr>
-              <a:t>DEFINITIONS USED ABOVE</a:t>
+              <a:t>LIGHT SOURCES</a:t>
+            </a:r>
+          </a:p>
+        </p:txBody>
+      </p:sp>
+      <p:sp>
+        <p:nvSpPr>
+          <p:cNvPr id="39" name="TextBox 38"/>
+          <p:cNvSpPr txBox="1"/>
+          <p:nvPr/>
+        </p:nvSpPr>
+        <p:spPr>
+          <a:xfrm>
+            <a:off x="7452360" y="2697480"/>
+            <a:ext cx="4114800" cy="365760"/>
+          </a:xfrm>
+          <a:prstGeom prst="rect">
+            <a:avLst/>
+          </a:prstGeom>
+          <a:noFill/>
+        </p:spPr>
+        <p:txBody>
+          <a:bodyPr wrap="square" lIns="36576" rIns="36576" tIns="18288" bIns="18288" anchor="t">
+            <a:spAutoFit/>
+          </a:bodyPr>
+          <a:lstStyle/>
+          <a:p>
+            <a:pPr algn="l">
+              <a:lnSpc>
+                <a:spcPct val="100000"/>
+              </a:lnSpc>
+              <a:spcAft>
+                <a:spcPts val="400"/>
+              </a:spcAft>
+            </a:pPr>
+            <a:r>
+              <a:rPr sz="1300" b="0" i="0">
+                <a:solidFill>
+                  <a:srgbClr val="64748B"/>
+                </a:solidFill>
+                <a:latin typeface="Calibri"/>
+              </a:rPr>
+              <a:t>Directional · Point · Spot · Area (4×4 samples)</a:t>
             </a:r>
           </a:p>
         </p:txBody>
       </p:sp>
       <p:pic>
         <p:nvPicPr>
-          <p:cNvPr id="40" name="Picture 39" descr="defs.png"/>
+          <p:cNvPr id="40" name="Picture 39" descr="att.png"/>
+          <p:cNvPicPr>
+            <a:picLocks noChangeAspect="1"/>
+          </p:cNvPicPr>
+          <p:nvPr/>
+        </p:nvPicPr>
+        <p:blipFill>
+          <a:blip r:embed="rId11"/>
+          <a:stretch>
+            <a:fillRect/>
+          </a:stretch>
+        </p:blipFill>
+        <p:spPr>
+          <a:xfrm>
+            <a:off x="7976516" y="3017520"/>
+            <a:ext cx="2975046" cy="868680"/>
+          </a:xfrm>
+          <a:prstGeom prst="rect">
+            <a:avLst/>
+          </a:prstGeom>
+        </p:spPr>
+      </p:pic>
+      <p:sp>
+        <p:nvSpPr>
+          <p:cNvPr id="41" name="Rounded Rectangle 40"/>
+          <p:cNvSpPr/>
+          <p:nvPr/>
+        </p:nvSpPr>
+        <p:spPr>
+          <a:xfrm>
+            <a:off x="7223760" y="4069080"/>
+            <a:ext cx="4480560" cy="2286000"/>
+          </a:xfrm>
+          <a:prstGeom prst="roundRect">
+            <a:avLst>
+              <a:gd name="adj" fmla="val 4000"/>
+            </a:avLst>
+          </a:prstGeom>
+          <a:solidFill>
+            <a:srgbClr val="FFFFFF"/>
+          </a:solidFill>
+          <a:ln w="9525">
+            <a:solidFill>
+              <a:srgbClr val="DDE5EE"/>
+            </a:solidFill>
+          </a:ln>
+          <a:effectLst>
+            <a:outerShdw blurRad="114300" dist="25400" dir="5400000" algn="t" rotWithShape="0">
+              <a:srgbClr val="0B1220">
+                <a:alpha val="16000"/>
+              </a:srgbClr>
+            </a:outerShdw>
+          </a:effectLst>
+        </p:spPr>
+        <p:style>
+          <a:lnRef idx="1">
+            <a:schemeClr val="accent1"/>
+          </a:lnRef>
+          <a:fillRef idx="3">
+            <a:schemeClr val="accent1"/>
+          </a:fillRef>
+          <a:effectRef idx="2">
+            <a:schemeClr val="accent1"/>
+          </a:effectRef>
+          <a:fontRef idx="minor">
+            <a:schemeClr val="lt1"/>
+          </a:fontRef>
+        </p:style>
+        <p:txBody>
+          <a:bodyPr rtlCol="0" anchor="ctr"/>
+          <a:lstStyle/>
+          <a:p>
+            <a:pPr algn="ctr"/>
+          </a:p>
+        </p:txBody>
+      </p:sp>
+      <p:sp>
+        <p:nvSpPr>
+          <p:cNvPr id="42" name="Rectangle 41"/>
+          <p:cNvSpPr/>
+          <p:nvPr/>
+        </p:nvSpPr>
+        <p:spPr>
+          <a:xfrm>
+            <a:off x="7223760" y="4178808"/>
+            <a:ext cx="64008" cy="2066543"/>
+          </a:xfrm>
+          <a:prstGeom prst="rect">
+            <a:avLst/>
+          </a:prstGeom>
+          <a:solidFill>
+            <a:srgbClr val="0F8F85"/>
+          </a:solidFill>
+          <a:ln>
+            <a:noFill/>
+          </a:ln>
+          <a:effectLst/>
+        </p:spPr>
+        <p:style>
+          <a:lnRef idx="1">
+            <a:schemeClr val="accent1"/>
+          </a:lnRef>
+          <a:fillRef idx="3">
+            <a:schemeClr val="accent1"/>
+          </a:fillRef>
+          <a:effectRef idx="2">
+            <a:schemeClr val="accent1"/>
+          </a:effectRef>
+          <a:fontRef idx="minor">
+            <a:schemeClr val="lt1"/>
+          </a:fontRef>
+        </p:style>
+        <p:txBody>
+          <a:bodyPr rtlCol="0" anchor="ctr"/>
+          <a:lstStyle/>
+          <a:p>
+            <a:pPr algn="ctr"/>
+          </a:p>
+        </p:txBody>
+      </p:sp>
+      <p:sp>
+        <p:nvSpPr>
+          <p:cNvPr id="43" name="TextBox 42"/>
+          <p:cNvSpPr txBox="1"/>
+          <p:nvPr/>
+        </p:nvSpPr>
+        <p:spPr>
+          <a:xfrm>
+            <a:off x="7452360" y="4160520"/>
+            <a:ext cx="4114800" cy="347472"/>
+          </a:xfrm>
+          <a:prstGeom prst="rect">
+            <a:avLst/>
+          </a:prstGeom>
+          <a:noFill/>
+        </p:spPr>
+        <p:txBody>
+          <a:bodyPr wrap="square" lIns="36576" rIns="36576" tIns="18288" bIns="18288" anchor="t">
+            <a:spAutoFit/>
+          </a:bodyPr>
+          <a:lstStyle/>
+          <a:p>
+            <a:pPr algn="l">
+              <a:lnSpc>
+                <a:spcPct val="100000"/>
+              </a:lnSpc>
+              <a:spcAft>
+                <a:spcPts val="400"/>
+              </a:spcAft>
+            </a:pPr>
+            <a:r>
+              <a:rPr sz="1200" b="1" i="0">
+                <a:solidFill>
+                  <a:srgbClr val="0F8F85"/>
+                </a:solidFill>
+                <a:latin typeface="Calibri"/>
+              </a:rPr>
+              <a:t>DEFINITIONS USED ABOVE</a:t>
+            </a:r>
+          </a:p>
+        </p:txBody>
+      </p:sp>
+      <p:pic>
+        <p:nvPicPr>
+          <p:cNvPr id="44" name="Picture 43" descr="defs.png"/>
           <p:cNvPicPr>
             <a:picLocks noChangeAspect="1"/>
           </p:cNvPicPr>
@@ -11824,7 +12063,7 @@
         </p:blipFill>
         <p:spPr>
           <a:xfrm>
-            <a:off x="7543800" y="4740606"/>
+            <a:off x="7543800" y="4717746"/>
             <a:ext cx="3840480" cy="831154"/>
           </a:xfrm>
           <a:prstGeom prst="rect">
@@ -11834,7 +12073,7 @@
       </p:pic>
       <p:pic>
         <p:nvPicPr>
-          <p:cNvPr id="41" name="Picture 40" descr="ctdefs.png"/>
+          <p:cNvPr id="45" name="Picture 44" descr="ctdefs.png"/>
           <p:cNvPicPr>
             <a:picLocks noChangeAspect="1"/>
           </p:cNvPicPr>
@@ -11848,7 +12087,7 @@
         </p:blipFill>
         <p:spPr>
           <a:xfrm>
-            <a:off x="7543800" y="5681488"/>
+            <a:off x="7543800" y="5658628"/>
             <a:ext cx="3840480" cy="349536"/>
           </a:xfrm>
           <a:prstGeom prst="rect">
@@ -13108,7 +13347,7 @@
                 </a:solidFill>
                 <a:latin typeface="Calibri"/>
               </a:rPr>
-              <a:t>CASCADED SHADOW MAPS  (Λ = 0.75, N = 3, N = 0.1 M, R = 100 M)</a:t>
+              <a:t>CASCADED SHADOW MAPS</a:t>
             </a:r>
           </a:p>
         </p:txBody>
@@ -13129,7 +13368,7 @@
         </p:blipFill>
         <p:spPr>
           <a:xfrm>
-            <a:off x="868680" y="3358920"/>
+            <a:off x="868680" y="3345204"/>
             <a:ext cx="5669280" cy="597359"/>
           </a:xfrm>
           <a:prstGeom prst="rect">
@@ -13145,8 +13384,8 @@
         </p:nvSpPr>
         <p:spPr>
           <a:xfrm>
-            <a:off x="777240" y="4014215"/>
-            <a:ext cx="5943600" cy="566928"/>
+            <a:off x="777240" y="4105656"/>
+            <a:ext cx="5943600" cy="493776"/>
           </a:xfrm>
           <a:prstGeom prst="rect">
             <a:avLst/>
@@ -13154,7 +13393,7 @@
           <a:noFill/>
         </p:spPr>
         <p:txBody>
-          <a:bodyPr wrap="square" lIns="36576" rIns="36576" tIns="18288" bIns="18288" anchor="ctr">
+          <a:bodyPr wrap="square" lIns="36576" rIns="36576" tIns="18288" bIns="18288" anchor="b">
             <a:spAutoFit/>
           </a:bodyPr>
           <a:lstStyle/>
@@ -13164,17 +13403,36 @@
                 <a:spcPct val="100000"/>
               </a:lnSpc>
               <a:spcAft>
-                <a:spcPts val="100"/>
-              </a:spcAft>
-            </a:pPr>
-            <a:r>
-              <a:rPr sz="1300" b="0" i="0">
+                <a:spcPts val="0"/>
+              </a:spcAft>
+            </a:pPr>
+            <a:r>
+              <a:rPr sz="1200" b="0" i="0">
                 <a:solidFill>
                   <a:srgbClr val="64748B"/>
                 </a:solidFill>
                 <a:latin typeface="Calibri"/>
               </a:rPr>
-              <a:t>Cuts at 9.1, 24.2, 100 m · normal-offset lookup · 8 rotated PCF taps</a:t>
+              <a:t>λ = 0.75, N = 3, n = 0.1 m, r = 100 m  →  cuts at 9.1, 24.2, 100 m</a:t>
+            </a:r>
+          </a:p>
+          <a:p>
+            <a:pPr algn="l">
+              <a:lnSpc>
+                <a:spcPct val="100000"/>
+              </a:lnSpc>
+              <a:spcAft>
+                <a:spcPts val="0"/>
+              </a:spcAft>
+            </a:pPr>
+            <a:r>
+              <a:rPr sz="1200" b="0" i="0">
+                <a:solidFill>
+                  <a:srgbClr val="64748B"/>
+                </a:solidFill>
+                <a:latin typeface="Calibri"/>
+              </a:rPr>
+              <a:t>normal-offset lookup · 8 rotated percentage-closer taps</a:t>
             </a:r>
           </a:p>
         </p:txBody>
@@ -13335,7 +13593,7 @@
         </p:blipFill>
         <p:spPr>
           <a:xfrm>
-            <a:off x="918171" y="5217858"/>
+            <a:off x="918171" y="5194998"/>
             <a:ext cx="5570296" cy="384733"/>
           </a:xfrm>
           <a:prstGeom prst="rect">
@@ -13359,7 +13617,7 @@
         </p:blipFill>
         <p:spPr>
           <a:xfrm>
-            <a:off x="868680" y="5694032"/>
+            <a:off x="868680" y="5671172"/>
             <a:ext cx="5669280" cy="545541"/>
           </a:xfrm>
           <a:prstGeom prst="rect">

--- a/Docs/Deliverables/Slides/Sentinel_Presentation.pptx
+++ b/Docs/Deliverables/Slides/Sentinel_Presentation.pptx
@@ -14420,7 +14420,7 @@
                           </a:solidFill>
                           <a:latin typeface="Calibri"/>
                         </a:rPr>
-                        <a:t>GpuCheck</a:t>
+                        <a:t>Gpu, Window, Audio checks</a:t>
                       </a:r>
                     </a:p>
                   </a:txBody>
@@ -14443,7 +14443,7 @@
                           </a:solidFill>
                           <a:latin typeface="Calibri"/>
                         </a:rPr>
-                        <a:t>30</a:t>
+                        <a:t>30, 141, 79</a:t>
                       </a:r>
                     </a:p>
                   </a:txBody>

--- a/Docs/Deliverables/Slides/Sentinel_Presentation.pptx
+++ b/Docs/Deliverables/Slides/Sentinel_Presentation.pptx
@@ -200,19 +200,19 @@
                   <c:v>0.02</c:v>
                 </c:pt>
                 <c:pt idx="1">
-                  <c:v>1.21</c:v>
+                  <c:v>1.28</c:v>
                 </c:pt>
                 <c:pt idx="2">
-                  <c:v>1.2</c:v>
+                  <c:v>1.23</c:v>
                 </c:pt>
                 <c:pt idx="3">
-                  <c:v>1.58</c:v>
+                  <c:v>1.56</c:v>
                 </c:pt>
                 <c:pt idx="4">
-                  <c:v>2.79</c:v>
+                  <c:v>2.76</c:v>
                 </c:pt>
                 <c:pt idx="5">
-                  <c:v>4.11</c:v>
+                  <c:v>4.43</c:v>
                 </c:pt>
               </c:numCache>
             </c:numRef>
@@ -14178,7 +14178,7 @@
                 </a:solidFill>
                 <a:latin typeface="Calibri"/>
               </a:rPr>
-              <a:t>10.9 ms</a:t>
+              <a:t>11.3 ms</a:t>
             </a:r>
             <a:r>
               <a:rPr sz="1900" b="0" i="0">
